--- a/downloads/presentations/modules/lesson-57-user-acceptance-testing-for-ai-supported-workflows.pptx
+++ b/downloads/presentations/modules/lesson-57-user-acceptance-testing-for-ai-supported-workflows.pptx
@@ -24,9 +24,11 @@
     <p:sldId id="272" r:id="rId18"/>
     <p:sldId id="273" r:id="rId19"/>
     <p:sldId id="274" r:id="rId20"/>
+    <p:sldId id="275" r:id="rId21"/>
+    <p:sldId id="276" r:id="rId22"/>
   </p:sldIdLst>
   <p:notesMasterIdLst>
-    <p:notesMasterId r:id="rId21"/>
+    <p:notesMasterId r:id="rId23"/>
   </p:notesMasterIdLst>
   <p:sldSz cx="12192000" cy="6858000"/>
   <p:notesSz cx="6858000" cy="12192000"/>
@@ -610,9 +612,9 @@
             <a:r>
               <a:rPr lang="en-US" dirty="0"/>
               <a:t>Risks, Failure Modes, and Guardrails
-Recommended guardrails include the following:
-Develop role-based UAT scripts before launch.
-Include routine, edge, failure, and equity-sensitive cases.</a:t>
+Risks and failure modes include the following:
+Testing only ideal scenarios and missing high-risk workflow failures.
+Excluding real end users from testing.</a:t>
             </a:r>
             <a:endParaRPr lang="en-US" dirty="0"/>
           </a:p>
@@ -701,9 +703,9 @@
             <a:r>
               <a:rPr lang="en-US" dirty="0"/>
               <a:t>Risks, Failure Modes, and Guardrails
-Define acceptance criteria before testing.
-Track issues by severity, owner, and resolution status.
-Require documented sign-off or remediation before deployment.</a:t>
+Launching despite unresolved issues that affect safety, equity, or documentation.
+Treating model validation as a substitute for workflow acceptance testing.
+Failing to test override, escalation, fallback, and accessibility requirements.</a:t>
             </a:r>
             <a:endParaRPr lang="en-US" dirty="0"/>
           </a:p>
@@ -791,10 +793,10 @@
           <a:p>
             <a:r>
               <a:rPr lang="en-US" dirty="0"/>
-              <a:t>Reflection Questions
-Where does this topic appear in your agency, program, or workflow?
-Which staff roles would need to understand or apply this concept before AI use is approved?
-What could go wrong if this topic is not addressed before implementation?</a:t>
+              <a:t>Risks, Failure Modes, and Guardrails
+Recommended guardrails include the following:
+Develop role-based UAT scripts before launch.
+Include routine, edge, failure, and equity-sensitive cases.</a:t>
             </a:r>
             <a:endParaRPr lang="en-US" dirty="0"/>
           </a:p>
@@ -882,9 +884,10 @@
           <a:p>
             <a:r>
               <a:rPr lang="en-US" dirty="0"/>
-              <a:t>Reflection Questions
-What evidence would governance, leadership, or operations staff need before moving forward?
-Which policy, data, equity, privacy, security, or workflow questions remain unresolved?</a:t>
+              <a:t>Risks, Failure Modes, and Guardrails
+Define acceptance criteria before testing.
+Track issues by severity, owner, and resolution status.
+Require documented sign-off or remediation before deployment.</a:t>
             </a:r>
             <a:endParaRPr lang="en-US" dirty="0"/>
           </a:p>
@@ -972,8 +975,10 @@
           <a:p>
             <a:r>
               <a:rPr lang="en-US" dirty="0"/>
-              <a:t>Practical Exercise
-Create a UAT plan for one AI-supported workflow. Include user roles, test scenarios, edge cases, acceptance criteria, tester instructions, issue log fields, severity categories, sign-off criteria, and launch recommendation.</a:t>
+              <a:t>Reflection Questions
+Where does this topic appear in your agency, program, or workflow?
+Which staff roles would need to understand or apply this concept before AI use is approved?
+What could go wrong if this topic is not addressed before implementation?</a:t>
             </a:r>
             <a:endParaRPr lang="en-US" dirty="0"/>
           </a:p>
@@ -1061,10 +1066,9 @@
           <a:p>
             <a:r>
               <a:rPr lang="en-US" dirty="0"/>
-              <a:t>Expected Artifact or Evidence
-UAT plan
-Role-based test scripts
-Acceptance criteria</a:t>
+              <a:t>Reflection Questions
+What evidence would governance, leadership, or operations staff need before moving forward?
+Which policy, data, equity, privacy, security, or workflow questions remain unresolved?</a:t>
             </a:r>
             <a:endParaRPr lang="en-US" dirty="0"/>
           </a:p>
@@ -1152,9 +1156,8 @@
           <a:p>
             <a:r>
               <a:rPr lang="en-US" dirty="0"/>
-              <a:t>Expected Artifact or Evidence
-Issue log template
-Sign-off recommendation</a:t>
+              <a:t>Practical Exercise
+Create a UAT plan for one AI-supported workflow. Include user roles, test scenarios, edge cases, acceptance criteria, tester instructions, issue log fields, severity categories, sign-off criteria, and launch recommendation.</a:t>
             </a:r>
             <a:endParaRPr lang="en-US" dirty="0"/>
           </a:p>
@@ -1242,12 +1245,10 @@
           <a:p>
             <a:r>
               <a:rPr lang="en-US" dirty="0"/>
-              <a:t>Expected Assignment
+              <a:t>Expected Artifact or Evidence
 UAT plan
 Role-based test scripts
-Acceptance criteria
-Issue log template
-Sign-off recommendation</a:t>
+Acceptance criteria</a:t>
             </a:r>
             <a:endParaRPr lang="en-US" dirty="0"/>
           </a:p>
@@ -1335,12 +1336,9 @@
           <a:p>
             <a:r>
               <a:rPr lang="en-US" dirty="0"/>
-              <a:t>Knowledge Check
-1. What is the purpose of UAT for AI-supported workflows?
-2. Who should participate in UAT?
-3. Which scenario should be included in AI UAT?
-4. What should happen to UAT issues?
-5. What is strong completion evidence?</a:t>
+              <a:t>Expected Artifact or Evidence
+Issue log template
+Sign-off recommendation</a:t>
             </a:r>
             <a:endParaRPr lang="en-US" dirty="0"/>
           </a:p>
@@ -1428,12 +1426,12 @@
           <a:p>
             <a:r>
               <a:rPr lang="en-US" dirty="0"/>
-              <a:t>References and Resources
-CDC Evaluation Framework: https://www.cdc.gov/evaluation/
-NIST Artificial Intelligence Risk Management Framework: https://www.nist.gov/itl/ai-risk-management-framework
-NIST AI RMF Generative AI Profile: https://www.nist.gov/publications/artificial-intelligence-risk-management-framework-generative-artificial-intelligence
-CDC Public Health Data Strategy: https://www.cdc.gov/public-health-data-strategy/php/about/index.html
-Agency user acceptance testing, quality assurance, accessibility, and implementation policies</a:t>
+              <a:t>Expected Assignment
+UAT plan
+Role-based test scripts
+Acceptance criteria
+Issue log template
+Sign-off recommendation</a:t>
             </a:r>
             <a:endParaRPr lang="en-US" dirty="0"/>
           </a:p>
@@ -1567,6 +1565,192 @@
 </p:notes>
 </file>
 
+<file path=ppt/notesSlides/notesSlide20.xml><?xml version="1.0" encoding="utf-8"?>
+<p:notes xmlns:a="http://schemas.openxmlformats.org/drawingml/2006/main" xmlns:r="http://schemas.openxmlformats.org/officeDocument/2006/relationships" xmlns:p="http://schemas.openxmlformats.org/presentationml/2006/main">
+  <p:cSld>
+    <p:spTree>
+      <p:nvGrpSpPr>
+        <p:cNvPr id="1" name=""/>
+        <p:cNvGrpSpPr/>
+        <p:nvPr/>
+      </p:nvGrpSpPr>
+      <p:grpSpPr>
+        <a:xfrm>
+          <a:off x="0" y="0"/>
+          <a:ext cx="0" cy="0"/>
+          <a:chOff x="0" y="0"/>
+          <a:chExt cx="0" cy="0"/>
+        </a:xfrm>
+      </p:grpSpPr>
+      <p:sp>
+        <p:nvSpPr>
+          <p:cNvPr id="2" name="Slide Image Placeholder 1"/>
+          <p:cNvSpPr>
+            <a:spLocks noGrp="1" noRot="1" noChangeAspect="1"/>
+          </p:cNvSpPr>
+          <p:nvPr>
+            <p:ph type="sldImg"/>
+          </p:nvPr>
+        </p:nvSpPr>
+        <p:spPr/>
+      </p:sp>
+      <p:sp>
+        <p:nvSpPr>
+          <p:cNvPr id="3" name="Notes Placeholder 2"/>
+          <p:cNvSpPr>
+            <a:spLocks noGrp="1"/>
+          </p:cNvSpPr>
+          <p:nvPr>
+            <p:ph type="body" idx="1"/>
+          </p:nvPr>
+        </p:nvSpPr>
+        <p:spPr/>
+        <p:txBody>
+          <a:bodyPr/>
+          <a:lstStyle/>
+          <a:p>
+            <a:r>
+              <a:rPr lang="en-US" dirty="0"/>
+              <a:t>Knowledge Check
+1. What is the purpose of UAT for AI-supported workflows?
+2. Who should participate in UAT?
+3. Which scenario should be included in AI UAT?
+4. What should happen to UAT issues?
+5. What is strong completion evidence?</a:t>
+            </a:r>
+            <a:endParaRPr lang="en-US" dirty="0"/>
+          </a:p>
+        </p:txBody>
+      </p:sp>
+      <p:sp>
+        <p:nvSpPr>
+          <p:cNvPr id="4" name="Slide Number Placeholder 3"/>
+          <p:cNvSpPr>
+            <a:spLocks noGrp="1"/>
+          </p:cNvSpPr>
+          <p:nvPr>
+            <p:ph type="sldNum" sz="quarter" idx="10"/>
+          </p:nvPr>
+        </p:nvSpPr>
+        <p:spPr/>
+        <p:txBody>
+          <a:bodyPr/>
+          <a:lstStyle/>
+          <a:p>
+            <a:fld id="{F7021451-1387-4CA6-816F-3879F97B5CBC}" type="slidenum">
+              <a:rPr lang="en-US"/>
+              <a:t>20</a:t>
+            </a:fld>
+            <a:endParaRPr lang="en-US"/>
+          </a:p>
+        </p:txBody>
+      </p:sp>
+    </p:spTree>
+    <p:extLst>
+      <p:ext uri="{BB962C8B-B14F-4D97-AF65-F5344CB8AC3E}">
+        <p14:creationId xmlns:p14="http://schemas.microsoft.com/office/powerpoint/2010/main" val="1024086991"/>
+      </p:ext>
+    </p:extLst>
+  </p:cSld>
+  <p:clrMapOvr>
+    <a:masterClrMapping/>
+  </p:clrMapOvr>
+</p:notes>
+</file>
+
+<file path=ppt/notesSlides/notesSlide21.xml><?xml version="1.0" encoding="utf-8"?>
+<p:notes xmlns:a="http://schemas.openxmlformats.org/drawingml/2006/main" xmlns:r="http://schemas.openxmlformats.org/officeDocument/2006/relationships" xmlns:p="http://schemas.openxmlformats.org/presentationml/2006/main">
+  <p:cSld>
+    <p:spTree>
+      <p:nvGrpSpPr>
+        <p:cNvPr id="1" name=""/>
+        <p:cNvGrpSpPr/>
+        <p:nvPr/>
+      </p:nvGrpSpPr>
+      <p:grpSpPr>
+        <a:xfrm>
+          <a:off x="0" y="0"/>
+          <a:ext cx="0" cy="0"/>
+          <a:chOff x="0" y="0"/>
+          <a:chExt cx="0" cy="0"/>
+        </a:xfrm>
+      </p:grpSpPr>
+      <p:sp>
+        <p:nvSpPr>
+          <p:cNvPr id="2" name="Slide Image Placeholder 1"/>
+          <p:cNvSpPr>
+            <a:spLocks noGrp="1" noRot="1" noChangeAspect="1"/>
+          </p:cNvSpPr>
+          <p:nvPr>
+            <p:ph type="sldImg"/>
+          </p:nvPr>
+        </p:nvSpPr>
+        <p:spPr/>
+      </p:sp>
+      <p:sp>
+        <p:nvSpPr>
+          <p:cNvPr id="3" name="Notes Placeholder 2"/>
+          <p:cNvSpPr>
+            <a:spLocks noGrp="1"/>
+          </p:cNvSpPr>
+          <p:nvPr>
+            <p:ph type="body" idx="1"/>
+          </p:nvPr>
+        </p:nvSpPr>
+        <p:spPr/>
+        <p:txBody>
+          <a:bodyPr/>
+          <a:lstStyle/>
+          <a:p>
+            <a:r>
+              <a:rPr lang="en-US" dirty="0"/>
+              <a:t>References and Resources
+CDC Evaluation Framework: https://www.cdc.gov/evaluation/
+NIST Artificial Intelligence Risk Management Framework: https://www.nist.gov/itl/ai-risk-management-framework
+NIST AI RMF Generative AI Profile: https://www.nist.gov/publications/artificial-intelligence-risk-management-framework-generative-artificial-intelligence
+CDC Public Health Data Strategy: https://www.cdc.gov/public-health-data-strategy/php/about/index.html
+Agency user acceptance testing, quality assurance, accessibility, and implementation policies</a:t>
+            </a:r>
+            <a:endParaRPr lang="en-US" dirty="0"/>
+          </a:p>
+        </p:txBody>
+      </p:sp>
+      <p:sp>
+        <p:nvSpPr>
+          <p:cNvPr id="4" name="Slide Number Placeholder 3"/>
+          <p:cNvSpPr>
+            <a:spLocks noGrp="1"/>
+          </p:cNvSpPr>
+          <p:nvPr>
+            <p:ph type="sldNum" sz="quarter" idx="10"/>
+          </p:nvPr>
+        </p:nvSpPr>
+        <p:spPr/>
+        <p:txBody>
+          <a:bodyPr/>
+          <a:lstStyle/>
+          <a:p>
+            <a:fld id="{F7021451-1387-4CA6-816F-3879F97B5CBC}" type="slidenum">
+              <a:rPr lang="en-US"/>
+              <a:t>21</a:t>
+            </a:fld>
+            <a:endParaRPr lang="en-US"/>
+          </a:p>
+        </p:txBody>
+      </p:sp>
+    </p:spTree>
+    <p:extLst>
+      <p:ext uri="{BB962C8B-B14F-4D97-AF65-F5344CB8AC3E}">
+        <p14:creationId xmlns:p14="http://schemas.microsoft.com/office/powerpoint/2010/main" val="1024086991"/>
+      </p:ext>
+    </p:extLst>
+  </p:cSld>
+  <p:clrMapOvr>
+    <a:masterClrMapping/>
+  </p:clrMapOvr>
+</p:notes>
+</file>
+
 <file path=ppt/notesSlides/notesSlide3.xml><?xml version="1.0" encoding="utf-8"?>
 <p:notes xmlns:a="http://schemas.openxmlformats.org/drawingml/2006/main" xmlns:r="http://schemas.openxmlformats.org/officeDocument/2006/relationships" xmlns:p="http://schemas.openxmlformats.org/presentationml/2006/main">
   <p:cSld>
@@ -1613,12 +1797,11 @@
           <a:p>
             <a:r>
               <a:rPr lang="en-US" dirty="0"/>
-              <a:t>Learning Objectives
-Explain the purpose of UAT for AI-supported workflows.
-Develop role-based UAT scenarios and test scripts.
-Include routine cases, edge cases, failure cases, and equity-sensitive scenarios in UAT.
-Define acceptance criteria for usability, safety, documentation, human review, and workflow fit.
-Produce a UAT plan and sign-off recommendation for an AI-supported workflow.</a:t>
+              <a:t>Related Playbook Plays
+Play 11: Build and Deploy AI Solutions - This lesson informs Play 11 by helping learners connect the lesson topic to build and deploy ai solutions work in the AI Playbook.
+Play 2: Readiness Assessment - This lesson informs Play 2 by helping learners connect the lesson topic to readiness assessment work in the AI Playbook sequence.
+Play 1: Vision &amp; Guardrails - This lesson informs Play 1 by helping learners connect the lesson topic to vision &amp; guardrails work in the AI Playbook sequence.
+Play 7: Prioritize Use Cases - This lesson informs Play 7 by helping learners connect the lesson topic to prioritize use cases work in the AI Playbook sequence.</a:t>
             </a:r>
             <a:endParaRPr lang="en-US" dirty="0"/>
           </a:p>
@@ -1706,10 +1889,13 @@
           <a:p>
             <a:r>
               <a:rPr lang="en-US" dirty="0"/>
-              <a:t>Module Overview
-User acceptance testing is the process of determining whether an AI-supported workflow is usable, understandable, safe, and ready for real users in the intended operational context. Technical testing may show that a tool runs, and model validation may show acceptable performance, but neither proves that staff can use the workflow correctly under real public health conditions. UAT fills that gap.
-This module teaches learners how to design and conduct user acceptance testing for AI-supported workflows. It focuses on role-based test scripts, realistic scenarios, edge cases, human review, documentation, override behavior, accessibility, usability, and sign-off criteria.
-UAT is a critical safety step before launch. It reveals whether staff understand the output, can find source evidence, know when to override, can escalate concerns, and can complete the workflow without unacceptable burden or confusion.</a:t>
+              <a:t>Related Toolkit Resources
+Tool 4: AI Policy Landscape Scan (Worksheet) - Use AI Policy Landscape Scan to translate this lesson into a documented public health AI planning, governance, implementation,.
+Tool 5: AI Environmental and Resource Impact Review (Checklist) - Use AI Environmental and Resource Impact Review to translate this lesson into a documented public health AI planning,.
+Tool 6: Human-Centered AI Decision Rule Checklist (Checklist) - Use Human-Centered AI Decision Rule Checklist to translate this lesson into a documented public health AI planning, governance,.
+Tool 8: AI Project Charter (Planning) - Use AI Project Charter to translate this lesson into a documented public health AI planning, governance, implementation, or.
+Tool 9: Data Quality Assessment Checklist (Checklist) - Use this tool to complete or strengthen the practical exercise for the module using fictional, de-identified, or generalized.
+Tool 10: Tiered Data Classification for AI Use (Worksheet) - Use this tool to complete or strengthen the practical exercise for the module using fictional, de-identified, or generalized.</a:t>
             </a:r>
             <a:endParaRPr lang="en-US" dirty="0"/>
           </a:p>
@@ -1797,8 +1983,12 @@
           <a:p>
             <a:r>
               <a:rPr lang="en-US" dirty="0"/>
-              <a:t>Public Health Example
-Before launching an AI tool that summarizes case investigation notes, investigators complete UAT scenarios using routine cases, incomplete records, conflicting notes, language access needs, and cases with sensitive information. Testers verify whether the summary is understandable, source information is visible, errors can be corrected, outputs can be documented properly, and escalation steps are clear. The tool does not launch until high-priority issues are resolved.</a:t>
+              <a:t>Learning Objectives
+Explain the purpose of UAT for AI-supported workflows.
+Develop role-based UAT scenarios and test scripts.
+Include routine cases, edge cases, failure cases, and equity-sensitive scenarios in UAT.
+Define acceptance criteria for usability, safety, documentation, human review, and workflow fit.
+Produce a UAT plan and sign-off recommendation for an AI-supported workflow.</a:t>
             </a:r>
             <a:endParaRPr lang="en-US" dirty="0"/>
           </a:p>
@@ -1886,10 +2076,10 @@
           <a:p>
             <a:r>
               <a:rPr lang="en-US" dirty="0"/>
-              <a:t>Technical and Operational Deep Dive
-UAT should be designed around real users and real work. Testers should include the roles that will actually use or supervise the AI-supported workflow, such as epidemiologists, investigators, program staff, supervisors, data quality staff, communications staff, or support staff. If only technical staff test the tool, usability and workflow problems may be missed.
-Test scenarios should include more than ideal cases. AI-supported workflows should be tested with incomplete data, conflicting information, duplicate records, unusual cases, sensitive data, ambiguous outputs, language access issues, accessibility needs, high-volume periods, system downtime, and outputs that should be overridden. Edge cases reveal whether the workflow is safe when conditions are imperfect.
-Acceptance criteria should be defined before testing begins. Criteria may include whether users can complete the workflow, understand the AI output, inspect source information, identify unsupported statements, correct errors, document decisions, override outputs, and escalate concerns. Criteria should also address workflow burden, accessibility, performance, and user confidence.</a:t>
+              <a:t>Module Overview
+User acceptance testing is the process of determining whether an AI-supported workflow is usable, understandable, safe, and ready for real users in the intended operational context. Technical testing may show that a tool runs, and model validation may show acceptable performance, but neither proves that staff can use the workflow correctly under real public health conditions. UAT fills that gap.
+This module teaches learners how to design and conduct user acceptance testing for AI-supported workflows. It focuses on role-based test scripts, realistic scenarios, edge cases, human review, documentation, override behavior, accessibility, usability, and sign-off criteria.
+UAT is a critical safety step before launch. It reveals whether staff understand the output, can find source evidence, know when to override, can escalate concerns, and can complete the workflow without unacceptable burden or confusion.</a:t>
             </a:r>
             <a:endParaRPr lang="en-US" dirty="0"/>
           </a:p>
@@ -1977,8 +2167,8 @@
           <a:p>
             <a:r>
               <a:rPr lang="en-US" dirty="0"/>
-              <a:t>Technical and Operational Deep Dive
-UAT results should lead to a launch decision. Issues should be categorized by severity, assigned to owners, and resolved or accepted with documented rationale. A launch should not proceed simply because testing occurred. It should proceed only if acceptance criteria are met and unresolved issues do not create unacceptable risk.</a:t>
+              <a:t>Public Health Example
+Before launching an AI tool that summarizes case investigation notes, investigators complete UAT scenarios using routine cases, incomplete records, conflicting notes, language access needs, and cases with sensitive information. Testers verify whether the summary is understandable, source information is visible, errors can be corrected, outputs can be documented properly, and escalation steps are clear. The tool does not launch until high-priority issues are resolved.</a:t>
             </a:r>
             <a:endParaRPr lang="en-US" dirty="0"/>
           </a:p>
@@ -2066,10 +2256,10 @@
           <a:p>
             <a:r>
               <a:rPr lang="en-US" dirty="0"/>
-              <a:t>Risks, Failure Modes, and Guardrails
-Risks and failure modes include the following:
-Testing only ideal scenarios and missing high-risk workflow failures.
-Excluding real end users from testing.</a:t>
+              <a:t>Technical and Operational Deep Dive
+UAT should be designed around real users and real work. Testers should include the roles that will actually use or supervise the AI-supported workflow, such as epidemiologists, investigators, program staff, supervisors, data quality staff, communications staff, or support staff. If only technical staff test the tool, usability and workflow problems may be missed.
+Test scenarios should include more than ideal cases. AI-supported workflows should be tested with incomplete data, conflicting information, duplicate records, unusual cases, sensitive data, ambiguous outputs, language access issues, accessibility needs, high-volume periods, system downtime, and outputs that should be overridden. Edge cases reveal whether the workflow is safe when conditions are imperfect.
+Acceptance criteria should be defined before testing begins. Criteria may include whether users can complete the workflow, understand the AI output, inspect source information, identify unsupported statements, correct errors, document decisions, override outputs, and escalate concerns. Criteria should also address workflow burden, accessibility, performance, and user confidence.</a:t>
             </a:r>
             <a:endParaRPr lang="en-US" dirty="0"/>
           </a:p>
@@ -2157,10 +2347,8 @@
           <a:p>
             <a:r>
               <a:rPr lang="en-US" dirty="0"/>
-              <a:t>Risks, Failure Modes, and Guardrails
-Launching despite unresolved issues that affect safety, equity, or documentation.
-Treating model validation as a substitute for workflow acceptance testing.
-Failing to test override, escalation, fallback, and accessibility requirements.</a:t>
+              <a:t>Technical and Operational Deep Dive
+UAT results should lead to a launch decision. Issues should be categorized by severity, assigned to owners, and resolved or accepted with documented rationale. A launch should not proceed simply because testing occurred. It should proceed only if acceptance criteria are met and unresolved issues do not create unacceptable risk.</a:t>
             </a:r>
             <a:endParaRPr lang="en-US" dirty="0"/>
           </a:p>
@@ -2783,7 +2971,32 @@
       </p:sp>
       <p:sp>
         <p:nvSpPr>
-          <p:cNvPr id="3" name="Text 1"/>
+          <p:cNvPr id="3" name="Shape 1"/>
+          <p:cNvSpPr/>
+          <p:nvPr/>
+        </p:nvSpPr>
+        <p:spPr>
+          <a:xfrm>
+            <a:off x="0" y="164592"/>
+            <a:ext cx="146304" cy="6693408"/>
+          </a:xfrm>
+          <a:prstGeom prst="rect">
+            <a:avLst/>
+          </a:prstGeom>
+          <a:solidFill>
+            <a:srgbClr val="2F8A28"/>
+          </a:solidFill>
+          <a:ln w="12700">
+            <a:solidFill>
+              <a:srgbClr val="2F8A28"/>
+            </a:solidFill>
+            <a:prstDash val="solid"/>
+          </a:ln>
+        </p:spPr>
+      </p:sp>
+      <p:sp>
+        <p:nvSpPr>
+          <p:cNvPr id="4" name="Text 2"/>
           <p:cNvSpPr/>
           <p:nvPr/>
         </p:nvSpPr>
@@ -2822,7 +3035,7 @@
       </p:sp>
       <p:sp>
         <p:nvSpPr>
-          <p:cNvPr id="4" name="Text 2"/>
+          <p:cNvPr id="5" name="Text 3"/>
           <p:cNvSpPr/>
           <p:nvPr/>
         </p:nvSpPr>
@@ -2861,7 +3074,7 @@
       </p:sp>
       <p:sp>
         <p:nvSpPr>
-          <p:cNvPr id="5" name="Text 3"/>
+          <p:cNvPr id="6" name="Text 4"/>
           <p:cNvSpPr/>
           <p:nvPr/>
         </p:nvSpPr>
@@ -2900,13 +3113,77 @@
       </p:sp>
       <p:sp>
         <p:nvSpPr>
-          <p:cNvPr id="6" name="Text 4"/>
+          <p:cNvPr id="7" name="Shape 5"/>
           <p:cNvSpPr/>
           <p:nvPr/>
         </p:nvSpPr>
         <p:spPr>
           <a:xfrm>
             <a:off x="640080" y="658368"/>
+            <a:ext cx="420624" cy="420624"/>
+          </a:xfrm>
+          <a:prstGeom prst="ellipse">
+            <a:avLst/>
+          </a:prstGeom>
+          <a:solidFill>
+            <a:srgbClr val="0068B7"/>
+          </a:solidFill>
+          <a:ln w="12700">
+            <a:solidFill>
+              <a:srgbClr val="0068B7"/>
+            </a:solidFill>
+            <a:prstDash val="solid"/>
+          </a:ln>
+        </p:spPr>
+      </p:sp>
+      <p:sp>
+        <p:nvSpPr>
+          <p:cNvPr id="8" name="Text 6"/>
+          <p:cNvSpPr/>
+          <p:nvPr/>
+        </p:nvSpPr>
+        <p:spPr>
+          <a:xfrm>
+            <a:off x="640080" y="731520"/>
+            <a:ext cx="420624" cy="164592"/>
+          </a:xfrm>
+          <a:prstGeom prst="rect">
+            <a:avLst/>
+          </a:prstGeom>
+          <a:noFill/>
+          <a:ln/>
+        </p:spPr>
+        <p:txBody>
+          <a:bodyPr wrap="square" lIns="0" tIns="0" rIns="0" bIns="0" rtlCol="0" anchor="ctr"/>
+          <a:lstStyle/>
+          <a:p>
+            <a:pPr algn="ctr" indent="0" marL="0">
+              <a:buNone/>
+            </a:pPr>
+            <a:r>
+              <a:rPr lang="en-US" sz="1100" b="1" dirty="0">
+                <a:solidFill>
+                  <a:srgbClr val="FFFFFF"/>
+                </a:solidFill>
+                <a:latin typeface="Aptos" pitchFamily="34" charset="0"/>
+                <a:ea typeface="Aptos" pitchFamily="34" charset="-122"/>
+                <a:cs typeface="Aptos" pitchFamily="34" charset="-120"/>
+              </a:rPr>
+              <a:t>5</a:t>
+            </a:r>
+            <a:endParaRPr lang="en-US" sz="1100" dirty="0"/>
+          </a:p>
+        </p:txBody>
+      </p:sp>
+      <p:sp>
+        <p:nvSpPr>
+          <p:cNvPr id="9" name="Text 7"/>
+          <p:cNvSpPr/>
+          <p:nvPr/>
+        </p:nvSpPr>
+        <p:spPr>
+          <a:xfrm>
+            <a:off x="640080" y="621792"/>
             <a:ext cx="10881360" cy="566928"/>
           </a:xfrm>
           <a:prstGeom prst="rect">
@@ -2933,7 +3210,7 @@
                 <a:ea typeface="Aptos Display" pitchFamily="34" charset="-122"/>
                 <a:cs typeface="Aptos Display" pitchFamily="34" charset="-120"/>
               </a:rPr>
-              <a:t>Risks, Failure Modes, and Guardrails Continued</a:t>
+              <a:t>Risks, Failure Modes, and Guardrails</a:t>
             </a:r>
             <a:endParaRPr lang="en-US" sz="2700" dirty="0"/>
           </a:p>
@@ -2941,32 +3218,164 @@
       </p:sp>
       <p:sp>
         <p:nvSpPr>
-          <p:cNvPr id="7" name="Text 5"/>
-          <p:cNvSpPr/>
-          <p:nvPr/>
-        </p:nvSpPr>
-        <p:spPr>
-          <a:xfrm>
-            <a:off x="822960" y="1325880"/>
-            <a:ext cx="10378440" cy="4800600"/>
-          </a:xfrm>
-          <a:prstGeom prst="rect">
-            <a:avLst/>
-          </a:prstGeom>
-          <a:noFill/>
-          <a:ln/>
-        </p:spPr>
-        <p:txBody>
-          <a:bodyPr wrap="square" lIns="1016" tIns="1016" rIns="1016" bIns="1016" rtlCol="0" anchor="t">
+          <p:cNvPr id="10" name="Text 8"/>
+          <p:cNvSpPr/>
+          <p:nvPr/>
+        </p:nvSpPr>
+        <p:spPr>
+          <a:xfrm>
+            <a:off x="868680" y="1417320"/>
+            <a:ext cx="6675120" cy="4434840"/>
+          </a:xfrm>
+          <a:prstGeom prst="rect">
+            <a:avLst/>
+          </a:prstGeom>
+          <a:noFill/>
+          <a:ln/>
+        </p:spPr>
+        <p:txBody>
+          <a:bodyPr wrap="square" lIns="635" tIns="635" rIns="635" bIns="635" rtlCol="0" anchor="t">
             <a:normAutofit/>
           </a:bodyPr>
           <a:lstStyle/>
           <a:p>
+            <a:r>
+              <a:rPr lang="en-US" sz="1700" dirty="0">
+                <a:solidFill>
+                  <a:srgbClr val="17364A"/>
+                </a:solidFill>
+                <a:latin typeface="Aptos" pitchFamily="34" charset="0"/>
+                <a:ea typeface="Aptos" pitchFamily="34" charset="-122"/>
+                <a:cs typeface="Aptos" pitchFamily="34" charset="-120"/>
+              </a:rPr>
+              <a:t>Risks and failure modes include the following:</a:t>
+            </a:r>
+            <a:endParaRPr lang="en-US" sz="1700" dirty="0"/>
+          </a:p>
+          <a:p>
+            <a:r>
+              <a:rPr lang="en-US" sz="1700" dirty="0">
+                <a:solidFill>
+                  <a:srgbClr val="17364A"/>
+                </a:solidFill>
+                <a:latin typeface="Aptos" pitchFamily="34" charset="0"/>
+                <a:ea typeface="Aptos" pitchFamily="34" charset="-122"/>
+                <a:cs typeface="Aptos" pitchFamily="34" charset="-120"/>
+              </a:rPr>
+              <a:t>Testing only ideal scenarios and missing high-risk workflow failures.</a:t>
+            </a:r>
+            <a:endParaRPr lang="en-US" sz="1700" dirty="0"/>
+          </a:p>
+          <a:p>
+            <a:r>
+              <a:rPr lang="en-US" sz="1700" dirty="0">
+                <a:solidFill>
+                  <a:srgbClr val="17364A"/>
+                </a:solidFill>
+                <a:latin typeface="Aptos" pitchFamily="34" charset="0"/>
+                <a:ea typeface="Aptos" pitchFamily="34" charset="-122"/>
+                <a:cs typeface="Aptos" pitchFamily="34" charset="-120"/>
+              </a:rPr>
+              <a:t>Excluding real end users from testing.</a:t>
+            </a:r>
+            <a:endParaRPr lang="en-US" sz="1700" dirty="0"/>
+          </a:p>
+        </p:txBody>
+      </p:sp>
+      <p:sp>
+        <p:nvSpPr>
+          <p:cNvPr id="11" name="Shape 9"/>
+          <p:cNvSpPr/>
+          <p:nvPr/>
+        </p:nvSpPr>
+        <p:spPr>
+          <a:xfrm>
+            <a:off x="7909560" y="1417320"/>
+            <a:ext cx="3154680" cy="1828800"/>
+          </a:xfrm>
+          <a:prstGeom prst="roundRect">
+            <a:avLst>
+              <a:gd name="adj" fmla="val 6000"/>
+            </a:avLst>
+          </a:prstGeom>
+          <a:solidFill>
+            <a:srgbClr val="EEF8ED"/>
+          </a:solidFill>
+          <a:ln w="12700">
+            <a:solidFill>
+              <a:srgbClr val="B9D7E6"/>
+            </a:solidFill>
+            <a:prstDash val="solid"/>
+          </a:ln>
+        </p:spPr>
+      </p:sp>
+      <p:sp>
+        <p:nvSpPr>
+          <p:cNvPr id="12" name="Text 10"/>
+          <p:cNvSpPr/>
+          <p:nvPr/>
+        </p:nvSpPr>
+        <p:spPr>
+          <a:xfrm>
+            <a:off x="8074152" y="1563624"/>
+            <a:ext cx="2825496" cy="201168"/>
+          </a:xfrm>
+          <a:prstGeom prst="rect">
+            <a:avLst/>
+          </a:prstGeom>
+          <a:noFill/>
+          <a:ln/>
+        </p:spPr>
+        <p:txBody>
+          <a:bodyPr wrap="square" lIns="0" tIns="0" rIns="0" bIns="0" rtlCol="0" anchor="ctr"/>
+          <a:lstStyle/>
+          <a:p>
             <a:pPr indent="0" marL="0">
               <a:buNone/>
             </a:pPr>
             <a:r>
-              <a:rPr lang="en-US" sz="1420" dirty="0">
+              <a:rPr lang="en-US" sz="950" b="1" dirty="0">
+                <a:solidFill>
+                  <a:srgbClr val="0068B7"/>
+                </a:solidFill>
+                <a:latin typeface="Aptos" pitchFamily="34" charset="0"/>
+                <a:ea typeface="Aptos" pitchFamily="34" charset="-122"/>
+                <a:cs typeface="Aptos" pitchFamily="34" charset="-120"/>
+              </a:rPr>
+              <a:t>Key idea</a:t>
+            </a:r>
+            <a:endParaRPr lang="en-US" sz="950" dirty="0"/>
+          </a:p>
+        </p:txBody>
+      </p:sp>
+      <p:sp>
+        <p:nvSpPr>
+          <p:cNvPr id="13" name="Text 11"/>
+          <p:cNvSpPr/>
+          <p:nvPr/>
+        </p:nvSpPr>
+        <p:spPr>
+          <a:xfrm>
+            <a:off x="8074152" y="1856232"/>
+            <a:ext cx="2825496" cy="1261872"/>
+          </a:xfrm>
+          <a:prstGeom prst="rect">
+            <a:avLst/>
+          </a:prstGeom>
+          <a:noFill/>
+          <a:ln/>
+        </p:spPr>
+        <p:txBody>
+          <a:bodyPr wrap="square" lIns="0" tIns="0" rIns="0" bIns="0" rtlCol="0" anchor="t">
+            <a:normAutofit/>
+          </a:bodyPr>
+          <a:lstStyle/>
+          <a:p>
+            <a:pPr indent="0" marL="0">
+              <a:buNone/>
+            </a:pPr>
+            <a:r>
+              <a:rPr lang="en-US" sz="1250" dirty="0">
                 <a:solidFill>
                   <a:srgbClr val="17364A"/>
                 </a:solidFill>
@@ -2974,9 +3383,116 @@
                 <a:ea typeface="Aptos" pitchFamily="34" charset="-122"/>
                 <a:cs typeface="Aptos" pitchFamily="34" charset="-120"/>
               </a:rPr>
-              <a:t>Recommended guardrails include the following: Develop role-based UAT scripts before launch. Include routine, edge, failure, and equity-sensitive cases.</a:t>
-            </a:r>
-            <a:endParaRPr lang="en-US" sz="1420" dirty="0"/>
+              <a:t>Risks and failure modes include the following:</a:t>
+            </a:r>
+            <a:endParaRPr lang="en-US" sz="1250" dirty="0"/>
+          </a:p>
+        </p:txBody>
+      </p:sp>
+      <p:sp>
+        <p:nvSpPr>
+          <p:cNvPr id="14" name="Shape 12"/>
+          <p:cNvSpPr/>
+          <p:nvPr/>
+        </p:nvSpPr>
+        <p:spPr>
+          <a:xfrm>
+            <a:off x="7909560" y="3520440"/>
+            <a:ext cx="3154680" cy="1737360"/>
+          </a:xfrm>
+          <a:prstGeom prst="roundRect">
+            <a:avLst>
+              <a:gd name="adj" fmla="val 6316"/>
+            </a:avLst>
+          </a:prstGeom>
+          <a:solidFill>
+            <a:srgbClr val="EAF6F8"/>
+          </a:solidFill>
+          <a:ln w="12700">
+            <a:solidFill>
+              <a:srgbClr val="B9D7E6"/>
+            </a:solidFill>
+            <a:prstDash val="solid"/>
+          </a:ln>
+        </p:spPr>
+      </p:sp>
+      <p:sp>
+        <p:nvSpPr>
+          <p:cNvPr id="15" name="Text 13"/>
+          <p:cNvSpPr/>
+          <p:nvPr/>
+        </p:nvSpPr>
+        <p:spPr>
+          <a:xfrm>
+            <a:off x="8074152" y="3666744"/>
+            <a:ext cx="2825496" cy="201168"/>
+          </a:xfrm>
+          <a:prstGeom prst="rect">
+            <a:avLst/>
+          </a:prstGeom>
+          <a:noFill/>
+          <a:ln/>
+        </p:spPr>
+        <p:txBody>
+          <a:bodyPr wrap="square" lIns="0" tIns="0" rIns="0" bIns="0" rtlCol="0" anchor="ctr"/>
+          <a:lstStyle/>
+          <a:p>
+            <a:pPr indent="0" marL="0">
+              <a:buNone/>
+            </a:pPr>
+            <a:r>
+              <a:rPr lang="en-US" sz="950" b="1" dirty="0">
+                <a:solidFill>
+                  <a:srgbClr val="0068B7"/>
+                </a:solidFill>
+                <a:latin typeface="Aptos" pitchFamily="34" charset="0"/>
+                <a:ea typeface="Aptos" pitchFamily="34" charset="-122"/>
+                <a:cs typeface="Aptos" pitchFamily="34" charset="-120"/>
+              </a:rPr>
+              <a:t>Use this for</a:t>
+            </a:r>
+            <a:endParaRPr lang="en-US" sz="950" dirty="0"/>
+          </a:p>
+        </p:txBody>
+      </p:sp>
+      <p:sp>
+        <p:nvSpPr>
+          <p:cNvPr id="16" name="Text 14"/>
+          <p:cNvSpPr/>
+          <p:nvPr/>
+        </p:nvSpPr>
+        <p:spPr>
+          <a:xfrm>
+            <a:off x="8074152" y="3959352"/>
+            <a:ext cx="2825496" cy="1170432"/>
+          </a:xfrm>
+          <a:prstGeom prst="rect">
+            <a:avLst/>
+          </a:prstGeom>
+          <a:noFill/>
+          <a:ln/>
+        </p:spPr>
+        <p:txBody>
+          <a:bodyPr wrap="square" lIns="0" tIns="0" rIns="0" bIns="0" rtlCol="0" anchor="t">
+            <a:normAutofit/>
+          </a:bodyPr>
+          <a:lstStyle/>
+          <a:p>
+            <a:pPr indent="0" marL="0">
+              <a:buNone/>
+            </a:pPr>
+            <a:r>
+              <a:rPr lang="en-US" sz="1250" dirty="0">
+                <a:solidFill>
+                  <a:srgbClr val="17364A"/>
+                </a:solidFill>
+                <a:latin typeface="Aptos" pitchFamily="34" charset="0"/>
+                <a:ea typeface="Aptos" pitchFamily="34" charset="-122"/>
+                <a:cs typeface="Aptos" pitchFamily="34" charset="-120"/>
+              </a:rPr>
+              <a:t>Connect the concept to public health decisions, safeguards, documentation, or implementation work.</a:t>
+            </a:r>
+            <a:endParaRPr lang="en-US" sz="1250" dirty="0"/>
           </a:p>
         </p:txBody>
       </p:sp>
@@ -3039,7 +3555,32 @@
       </p:sp>
       <p:sp>
         <p:nvSpPr>
-          <p:cNvPr id="3" name="Text 1"/>
+          <p:cNvPr id="3" name="Shape 1"/>
+          <p:cNvSpPr/>
+          <p:nvPr/>
+        </p:nvSpPr>
+        <p:spPr>
+          <a:xfrm>
+            <a:off x="0" y="164592"/>
+            <a:ext cx="146304" cy="6693408"/>
+          </a:xfrm>
+          <a:prstGeom prst="rect">
+            <a:avLst/>
+          </a:prstGeom>
+          <a:solidFill>
+            <a:srgbClr val="2F8A28"/>
+          </a:solidFill>
+          <a:ln w="12700">
+            <a:solidFill>
+              <a:srgbClr val="2F8A28"/>
+            </a:solidFill>
+            <a:prstDash val="solid"/>
+          </a:ln>
+        </p:spPr>
+      </p:sp>
+      <p:sp>
+        <p:nvSpPr>
+          <p:cNvPr id="4" name="Text 2"/>
           <p:cNvSpPr/>
           <p:nvPr/>
         </p:nvSpPr>
@@ -3078,7 +3619,7 @@
       </p:sp>
       <p:sp>
         <p:nvSpPr>
-          <p:cNvPr id="4" name="Text 2"/>
+          <p:cNvPr id="5" name="Text 3"/>
           <p:cNvSpPr/>
           <p:nvPr/>
         </p:nvSpPr>
@@ -3117,7 +3658,7 @@
       </p:sp>
       <p:sp>
         <p:nvSpPr>
-          <p:cNvPr id="5" name="Text 3"/>
+          <p:cNvPr id="6" name="Text 4"/>
           <p:cNvSpPr/>
           <p:nvPr/>
         </p:nvSpPr>
@@ -3156,7 +3697,7 @@
       </p:sp>
       <p:sp>
         <p:nvSpPr>
-          <p:cNvPr id="6" name="Text 4"/>
+          <p:cNvPr id="7" name="Text 5"/>
           <p:cNvSpPr/>
           <p:nvPr/>
         </p:nvSpPr>
@@ -3197,32 +3738,164 @@
       </p:sp>
       <p:sp>
         <p:nvSpPr>
-          <p:cNvPr id="7" name="Text 5"/>
-          <p:cNvSpPr/>
-          <p:nvPr/>
-        </p:nvSpPr>
-        <p:spPr>
-          <a:xfrm>
-            <a:off x="822960" y="1325880"/>
-            <a:ext cx="10378440" cy="4800600"/>
-          </a:xfrm>
-          <a:prstGeom prst="rect">
-            <a:avLst/>
-          </a:prstGeom>
-          <a:noFill/>
-          <a:ln/>
-        </p:spPr>
-        <p:txBody>
-          <a:bodyPr wrap="square" lIns="1016" tIns="1016" rIns="1016" bIns="1016" rtlCol="0" anchor="t">
+          <p:cNvPr id="8" name="Text 6"/>
+          <p:cNvSpPr/>
+          <p:nvPr/>
+        </p:nvSpPr>
+        <p:spPr>
+          <a:xfrm>
+            <a:off x="868680" y="1417320"/>
+            <a:ext cx="6675120" cy="4434840"/>
+          </a:xfrm>
+          <a:prstGeom prst="rect">
+            <a:avLst/>
+          </a:prstGeom>
+          <a:noFill/>
+          <a:ln/>
+        </p:spPr>
+        <p:txBody>
+          <a:bodyPr wrap="square" lIns="635" tIns="635" rIns="635" bIns="635" rtlCol="0" anchor="t">
             <a:normAutofit/>
           </a:bodyPr>
           <a:lstStyle/>
           <a:p>
+            <a:r>
+              <a:rPr lang="en-US" sz="1700" dirty="0">
+                <a:solidFill>
+                  <a:srgbClr val="17364A"/>
+                </a:solidFill>
+                <a:latin typeface="Aptos" pitchFamily="34" charset="0"/>
+                <a:ea typeface="Aptos" pitchFamily="34" charset="-122"/>
+                <a:cs typeface="Aptos" pitchFamily="34" charset="-120"/>
+              </a:rPr>
+              <a:t>Launching despite unresolved issues that affect safety, equity, or documentation.</a:t>
+            </a:r>
+            <a:endParaRPr lang="en-US" sz="1700" dirty="0"/>
+          </a:p>
+          <a:p>
+            <a:r>
+              <a:rPr lang="en-US" sz="1700" dirty="0">
+                <a:solidFill>
+                  <a:srgbClr val="17364A"/>
+                </a:solidFill>
+                <a:latin typeface="Aptos" pitchFamily="34" charset="0"/>
+                <a:ea typeface="Aptos" pitchFamily="34" charset="-122"/>
+                <a:cs typeface="Aptos" pitchFamily="34" charset="-120"/>
+              </a:rPr>
+              <a:t>Treating model validation as a substitute for workflow acceptance testing.</a:t>
+            </a:r>
+            <a:endParaRPr lang="en-US" sz="1700" dirty="0"/>
+          </a:p>
+          <a:p>
+            <a:r>
+              <a:rPr lang="en-US" sz="1700" dirty="0">
+                <a:solidFill>
+                  <a:srgbClr val="17364A"/>
+                </a:solidFill>
+                <a:latin typeface="Aptos" pitchFamily="34" charset="0"/>
+                <a:ea typeface="Aptos" pitchFamily="34" charset="-122"/>
+                <a:cs typeface="Aptos" pitchFamily="34" charset="-120"/>
+              </a:rPr>
+              <a:t>Failing to test override, escalation, fallback, and accessibility requirements.</a:t>
+            </a:r>
+            <a:endParaRPr lang="en-US" sz="1700" dirty="0"/>
+          </a:p>
+        </p:txBody>
+      </p:sp>
+      <p:sp>
+        <p:nvSpPr>
+          <p:cNvPr id="9" name="Shape 7"/>
+          <p:cNvSpPr/>
+          <p:nvPr/>
+        </p:nvSpPr>
+        <p:spPr>
+          <a:xfrm>
+            <a:off x="7909560" y="1417320"/>
+            <a:ext cx="3154680" cy="1828800"/>
+          </a:xfrm>
+          <a:prstGeom prst="roundRect">
+            <a:avLst>
+              <a:gd name="adj" fmla="val 6000"/>
+            </a:avLst>
+          </a:prstGeom>
+          <a:solidFill>
+            <a:srgbClr val="EEF8ED"/>
+          </a:solidFill>
+          <a:ln w="12700">
+            <a:solidFill>
+              <a:srgbClr val="B9D7E6"/>
+            </a:solidFill>
+            <a:prstDash val="solid"/>
+          </a:ln>
+        </p:spPr>
+      </p:sp>
+      <p:sp>
+        <p:nvSpPr>
+          <p:cNvPr id="10" name="Text 8"/>
+          <p:cNvSpPr/>
+          <p:nvPr/>
+        </p:nvSpPr>
+        <p:spPr>
+          <a:xfrm>
+            <a:off x="8074152" y="1563624"/>
+            <a:ext cx="2825496" cy="201168"/>
+          </a:xfrm>
+          <a:prstGeom prst="rect">
+            <a:avLst/>
+          </a:prstGeom>
+          <a:noFill/>
+          <a:ln/>
+        </p:spPr>
+        <p:txBody>
+          <a:bodyPr wrap="square" lIns="0" tIns="0" rIns="0" bIns="0" rtlCol="0" anchor="ctr"/>
+          <a:lstStyle/>
+          <a:p>
             <a:pPr indent="0" marL="0">
               <a:buNone/>
             </a:pPr>
             <a:r>
-              <a:rPr lang="en-US" sz="1420" dirty="0">
+              <a:rPr lang="en-US" sz="950" b="1" dirty="0">
+                <a:solidFill>
+                  <a:srgbClr val="0068B7"/>
+                </a:solidFill>
+                <a:latin typeface="Aptos" pitchFamily="34" charset="0"/>
+                <a:ea typeface="Aptos" pitchFamily="34" charset="-122"/>
+                <a:cs typeface="Aptos" pitchFamily="34" charset="-120"/>
+              </a:rPr>
+              <a:t>Key idea</a:t>
+            </a:r>
+            <a:endParaRPr lang="en-US" sz="950" dirty="0"/>
+          </a:p>
+        </p:txBody>
+      </p:sp>
+      <p:sp>
+        <p:nvSpPr>
+          <p:cNvPr id="11" name="Text 9"/>
+          <p:cNvSpPr/>
+          <p:nvPr/>
+        </p:nvSpPr>
+        <p:spPr>
+          <a:xfrm>
+            <a:off x="8074152" y="1856232"/>
+            <a:ext cx="2825496" cy="1261872"/>
+          </a:xfrm>
+          <a:prstGeom prst="rect">
+            <a:avLst/>
+          </a:prstGeom>
+          <a:noFill/>
+          <a:ln/>
+        </p:spPr>
+        <p:txBody>
+          <a:bodyPr wrap="square" lIns="0" tIns="0" rIns="0" bIns="0" rtlCol="0" anchor="t">
+            <a:normAutofit/>
+          </a:bodyPr>
+          <a:lstStyle/>
+          <a:p>
+            <a:pPr indent="0" marL="0">
+              <a:buNone/>
+            </a:pPr>
+            <a:r>
+              <a:rPr lang="en-US" sz="1250" dirty="0">
                 <a:solidFill>
                   <a:srgbClr val="17364A"/>
                 </a:solidFill>
@@ -3230,9 +3903,116 @@
                 <a:ea typeface="Aptos" pitchFamily="34" charset="-122"/>
                 <a:cs typeface="Aptos" pitchFamily="34" charset="-120"/>
               </a:rPr>
-              <a:t>Define acceptance criteria before testing. Track issues by severity, owner, and resolution status. Require documented sign-off or remediation before deployment.</a:t>
-            </a:r>
-            <a:endParaRPr lang="en-US" sz="1420" dirty="0"/>
+              <a:t>Launching despite unresolved issues that affect safety, equity, or documentation.</a:t>
+            </a:r>
+            <a:endParaRPr lang="en-US" sz="1250" dirty="0"/>
+          </a:p>
+        </p:txBody>
+      </p:sp>
+      <p:sp>
+        <p:nvSpPr>
+          <p:cNvPr id="12" name="Shape 10"/>
+          <p:cNvSpPr/>
+          <p:nvPr/>
+        </p:nvSpPr>
+        <p:spPr>
+          <a:xfrm>
+            <a:off x="7909560" y="3520440"/>
+            <a:ext cx="3154680" cy="1737360"/>
+          </a:xfrm>
+          <a:prstGeom prst="roundRect">
+            <a:avLst>
+              <a:gd name="adj" fmla="val 6316"/>
+            </a:avLst>
+          </a:prstGeom>
+          <a:solidFill>
+            <a:srgbClr val="EAF6F8"/>
+          </a:solidFill>
+          <a:ln w="12700">
+            <a:solidFill>
+              <a:srgbClr val="B9D7E6"/>
+            </a:solidFill>
+            <a:prstDash val="solid"/>
+          </a:ln>
+        </p:spPr>
+      </p:sp>
+      <p:sp>
+        <p:nvSpPr>
+          <p:cNvPr id="13" name="Text 11"/>
+          <p:cNvSpPr/>
+          <p:nvPr/>
+        </p:nvSpPr>
+        <p:spPr>
+          <a:xfrm>
+            <a:off x="8074152" y="3666744"/>
+            <a:ext cx="2825496" cy="201168"/>
+          </a:xfrm>
+          <a:prstGeom prst="rect">
+            <a:avLst/>
+          </a:prstGeom>
+          <a:noFill/>
+          <a:ln/>
+        </p:spPr>
+        <p:txBody>
+          <a:bodyPr wrap="square" lIns="0" tIns="0" rIns="0" bIns="0" rtlCol="0" anchor="ctr"/>
+          <a:lstStyle/>
+          <a:p>
+            <a:pPr indent="0" marL="0">
+              <a:buNone/>
+            </a:pPr>
+            <a:r>
+              <a:rPr lang="en-US" sz="950" b="1" dirty="0">
+                <a:solidFill>
+                  <a:srgbClr val="0068B7"/>
+                </a:solidFill>
+                <a:latin typeface="Aptos" pitchFamily="34" charset="0"/>
+                <a:ea typeface="Aptos" pitchFamily="34" charset="-122"/>
+                <a:cs typeface="Aptos" pitchFamily="34" charset="-120"/>
+              </a:rPr>
+              <a:t>Use this for</a:t>
+            </a:r>
+            <a:endParaRPr lang="en-US" sz="950" dirty="0"/>
+          </a:p>
+        </p:txBody>
+      </p:sp>
+      <p:sp>
+        <p:nvSpPr>
+          <p:cNvPr id="14" name="Text 12"/>
+          <p:cNvSpPr/>
+          <p:nvPr/>
+        </p:nvSpPr>
+        <p:spPr>
+          <a:xfrm>
+            <a:off x="8074152" y="3959352"/>
+            <a:ext cx="2825496" cy="1170432"/>
+          </a:xfrm>
+          <a:prstGeom prst="rect">
+            <a:avLst/>
+          </a:prstGeom>
+          <a:noFill/>
+          <a:ln/>
+        </p:spPr>
+        <p:txBody>
+          <a:bodyPr wrap="square" lIns="0" tIns="0" rIns="0" bIns="0" rtlCol="0" anchor="t">
+            <a:normAutofit/>
+          </a:bodyPr>
+          <a:lstStyle/>
+          <a:p>
+            <a:pPr indent="0" marL="0">
+              <a:buNone/>
+            </a:pPr>
+            <a:r>
+              <a:rPr lang="en-US" sz="1250" dirty="0">
+                <a:solidFill>
+                  <a:srgbClr val="17364A"/>
+                </a:solidFill>
+                <a:latin typeface="Aptos" pitchFamily="34" charset="0"/>
+                <a:ea typeface="Aptos" pitchFamily="34" charset="-122"/>
+                <a:cs typeface="Aptos" pitchFamily="34" charset="-120"/>
+              </a:rPr>
+              <a:t>Connect the concept to public health decisions, safeguards, documentation, or implementation work.</a:t>
+            </a:r>
+            <a:endParaRPr lang="en-US" sz="1250" dirty="0"/>
           </a:p>
         </p:txBody>
       </p:sp>
@@ -3295,7 +4075,32 @@
       </p:sp>
       <p:sp>
         <p:nvSpPr>
-          <p:cNvPr id="3" name="Text 1"/>
+          <p:cNvPr id="3" name="Shape 1"/>
+          <p:cNvSpPr/>
+          <p:nvPr/>
+        </p:nvSpPr>
+        <p:spPr>
+          <a:xfrm>
+            <a:off x="0" y="164592"/>
+            <a:ext cx="146304" cy="6693408"/>
+          </a:xfrm>
+          <a:prstGeom prst="rect">
+            <a:avLst/>
+          </a:prstGeom>
+          <a:solidFill>
+            <a:srgbClr val="2F8A28"/>
+          </a:solidFill>
+          <a:ln w="12700">
+            <a:solidFill>
+              <a:srgbClr val="2F8A28"/>
+            </a:solidFill>
+            <a:prstDash val="solid"/>
+          </a:ln>
+        </p:spPr>
+      </p:sp>
+      <p:sp>
+        <p:nvSpPr>
+          <p:cNvPr id="4" name="Text 2"/>
           <p:cNvSpPr/>
           <p:nvPr/>
         </p:nvSpPr>
@@ -3334,7 +4139,7 @@
       </p:sp>
       <p:sp>
         <p:nvSpPr>
-          <p:cNvPr id="4" name="Text 2"/>
+          <p:cNvPr id="5" name="Text 3"/>
           <p:cNvSpPr/>
           <p:nvPr/>
         </p:nvSpPr>
@@ -3373,7 +4178,7 @@
       </p:sp>
       <p:sp>
         <p:nvSpPr>
-          <p:cNvPr id="5" name="Text 3"/>
+          <p:cNvPr id="6" name="Text 4"/>
           <p:cNvSpPr/>
           <p:nvPr/>
         </p:nvSpPr>
@@ -3412,7 +4217,7 @@
       </p:sp>
       <p:sp>
         <p:nvSpPr>
-          <p:cNvPr id="6" name="Text 4"/>
+          <p:cNvPr id="7" name="Text 5"/>
           <p:cNvSpPr/>
           <p:nvPr/>
         </p:nvSpPr>
@@ -3445,7 +4250,7 @@
                 <a:ea typeface="Aptos Display" pitchFamily="34" charset="-122"/>
                 <a:cs typeface="Aptos Display" pitchFamily="34" charset="-120"/>
               </a:rPr>
-              <a:t>Reflection Questions</a:t>
+              <a:t>Risks, Failure Modes, and Guardrails Continued</a:t>
             </a:r>
             <a:endParaRPr lang="en-US" sz="2700" dirty="0"/>
           </a:p>
@@ -3453,32 +4258,164 @@
       </p:sp>
       <p:sp>
         <p:nvSpPr>
-          <p:cNvPr id="7" name="Text 5"/>
-          <p:cNvSpPr/>
-          <p:nvPr/>
-        </p:nvSpPr>
-        <p:spPr>
-          <a:xfrm>
-            <a:off x="822960" y="1325880"/>
-            <a:ext cx="10378440" cy="4800600"/>
-          </a:xfrm>
-          <a:prstGeom prst="rect">
-            <a:avLst/>
-          </a:prstGeom>
-          <a:noFill/>
-          <a:ln/>
-        </p:spPr>
-        <p:txBody>
-          <a:bodyPr wrap="square" lIns="1016" tIns="1016" rIns="1016" bIns="1016" rtlCol="0" anchor="t">
+          <p:cNvPr id="8" name="Text 6"/>
+          <p:cNvSpPr/>
+          <p:nvPr/>
+        </p:nvSpPr>
+        <p:spPr>
+          <a:xfrm>
+            <a:off x="868680" y="1417320"/>
+            <a:ext cx="6675120" cy="4434840"/>
+          </a:xfrm>
+          <a:prstGeom prst="rect">
+            <a:avLst/>
+          </a:prstGeom>
+          <a:noFill/>
+          <a:ln/>
+        </p:spPr>
+        <p:txBody>
+          <a:bodyPr wrap="square" lIns="635" tIns="635" rIns="635" bIns="635" rtlCol="0" anchor="t">
             <a:normAutofit/>
           </a:bodyPr>
           <a:lstStyle/>
           <a:p>
+            <a:r>
+              <a:rPr lang="en-US" sz="1700" dirty="0">
+                <a:solidFill>
+                  <a:srgbClr val="17364A"/>
+                </a:solidFill>
+                <a:latin typeface="Aptos" pitchFamily="34" charset="0"/>
+                <a:ea typeface="Aptos" pitchFamily="34" charset="-122"/>
+                <a:cs typeface="Aptos" pitchFamily="34" charset="-120"/>
+              </a:rPr>
+              <a:t>Recommended guardrails include the following:</a:t>
+            </a:r>
+            <a:endParaRPr lang="en-US" sz="1700" dirty="0"/>
+          </a:p>
+          <a:p>
+            <a:r>
+              <a:rPr lang="en-US" sz="1700" dirty="0">
+                <a:solidFill>
+                  <a:srgbClr val="17364A"/>
+                </a:solidFill>
+                <a:latin typeface="Aptos" pitchFamily="34" charset="0"/>
+                <a:ea typeface="Aptos" pitchFamily="34" charset="-122"/>
+                <a:cs typeface="Aptos" pitchFamily="34" charset="-120"/>
+              </a:rPr>
+              <a:t>Develop role-based UAT scripts before launch.</a:t>
+            </a:r>
+            <a:endParaRPr lang="en-US" sz="1700" dirty="0"/>
+          </a:p>
+          <a:p>
+            <a:r>
+              <a:rPr lang="en-US" sz="1700" dirty="0">
+                <a:solidFill>
+                  <a:srgbClr val="17364A"/>
+                </a:solidFill>
+                <a:latin typeface="Aptos" pitchFamily="34" charset="0"/>
+                <a:ea typeface="Aptos" pitchFamily="34" charset="-122"/>
+                <a:cs typeface="Aptos" pitchFamily="34" charset="-120"/>
+              </a:rPr>
+              <a:t>Include routine, edge, failure, and equity-sensitive cases.</a:t>
+            </a:r>
+            <a:endParaRPr lang="en-US" sz="1700" dirty="0"/>
+          </a:p>
+        </p:txBody>
+      </p:sp>
+      <p:sp>
+        <p:nvSpPr>
+          <p:cNvPr id="9" name="Shape 7"/>
+          <p:cNvSpPr/>
+          <p:nvPr/>
+        </p:nvSpPr>
+        <p:spPr>
+          <a:xfrm>
+            <a:off x="7909560" y="1417320"/>
+            <a:ext cx="3154680" cy="1828800"/>
+          </a:xfrm>
+          <a:prstGeom prst="roundRect">
+            <a:avLst>
+              <a:gd name="adj" fmla="val 6000"/>
+            </a:avLst>
+          </a:prstGeom>
+          <a:solidFill>
+            <a:srgbClr val="EEF8ED"/>
+          </a:solidFill>
+          <a:ln w="12700">
+            <a:solidFill>
+              <a:srgbClr val="B9D7E6"/>
+            </a:solidFill>
+            <a:prstDash val="solid"/>
+          </a:ln>
+        </p:spPr>
+      </p:sp>
+      <p:sp>
+        <p:nvSpPr>
+          <p:cNvPr id="10" name="Text 8"/>
+          <p:cNvSpPr/>
+          <p:nvPr/>
+        </p:nvSpPr>
+        <p:spPr>
+          <a:xfrm>
+            <a:off x="8074152" y="1563624"/>
+            <a:ext cx="2825496" cy="201168"/>
+          </a:xfrm>
+          <a:prstGeom prst="rect">
+            <a:avLst/>
+          </a:prstGeom>
+          <a:noFill/>
+          <a:ln/>
+        </p:spPr>
+        <p:txBody>
+          <a:bodyPr wrap="square" lIns="0" tIns="0" rIns="0" bIns="0" rtlCol="0" anchor="ctr"/>
+          <a:lstStyle/>
+          <a:p>
             <a:pPr indent="0" marL="0">
               <a:buNone/>
             </a:pPr>
             <a:r>
-              <a:rPr lang="en-US" sz="1420" dirty="0">
+              <a:rPr lang="en-US" sz="950" b="1" dirty="0">
+                <a:solidFill>
+                  <a:srgbClr val="0068B7"/>
+                </a:solidFill>
+                <a:latin typeface="Aptos" pitchFamily="34" charset="0"/>
+                <a:ea typeface="Aptos" pitchFamily="34" charset="-122"/>
+                <a:cs typeface="Aptos" pitchFamily="34" charset="-120"/>
+              </a:rPr>
+              <a:t>Key idea</a:t>
+            </a:r>
+            <a:endParaRPr lang="en-US" sz="950" dirty="0"/>
+          </a:p>
+        </p:txBody>
+      </p:sp>
+      <p:sp>
+        <p:nvSpPr>
+          <p:cNvPr id="11" name="Text 9"/>
+          <p:cNvSpPr/>
+          <p:nvPr/>
+        </p:nvSpPr>
+        <p:spPr>
+          <a:xfrm>
+            <a:off x="8074152" y="1856232"/>
+            <a:ext cx="2825496" cy="1261872"/>
+          </a:xfrm>
+          <a:prstGeom prst="rect">
+            <a:avLst/>
+          </a:prstGeom>
+          <a:noFill/>
+          <a:ln/>
+        </p:spPr>
+        <p:txBody>
+          <a:bodyPr wrap="square" lIns="0" tIns="0" rIns="0" bIns="0" rtlCol="0" anchor="t">
+            <a:normAutofit/>
+          </a:bodyPr>
+          <a:lstStyle/>
+          <a:p>
+            <a:pPr indent="0" marL="0">
+              <a:buNone/>
+            </a:pPr>
+            <a:r>
+              <a:rPr lang="en-US" sz="1250" dirty="0">
                 <a:solidFill>
                   <a:srgbClr val="17364A"/>
                 </a:solidFill>
@@ -3486,9 +4423,116 @@
                 <a:ea typeface="Aptos" pitchFamily="34" charset="-122"/>
                 <a:cs typeface="Aptos" pitchFamily="34" charset="-120"/>
               </a:rPr>
-              <a:t>Where does this topic appear in your agency, program, or workflow? Which staff roles would need to understand or apply this concept before AI use is approved? What could go wrong if this topic is not addressed before implementation?</a:t>
-            </a:r>
-            <a:endParaRPr lang="en-US" sz="1420" dirty="0"/>
+              <a:t>Recommended guardrails include the following:</a:t>
+            </a:r>
+            <a:endParaRPr lang="en-US" sz="1250" dirty="0"/>
+          </a:p>
+        </p:txBody>
+      </p:sp>
+      <p:sp>
+        <p:nvSpPr>
+          <p:cNvPr id="12" name="Shape 10"/>
+          <p:cNvSpPr/>
+          <p:nvPr/>
+        </p:nvSpPr>
+        <p:spPr>
+          <a:xfrm>
+            <a:off x="7909560" y="3520440"/>
+            <a:ext cx="3154680" cy="1737360"/>
+          </a:xfrm>
+          <a:prstGeom prst="roundRect">
+            <a:avLst>
+              <a:gd name="adj" fmla="val 6316"/>
+            </a:avLst>
+          </a:prstGeom>
+          <a:solidFill>
+            <a:srgbClr val="EAF6F8"/>
+          </a:solidFill>
+          <a:ln w="12700">
+            <a:solidFill>
+              <a:srgbClr val="B9D7E6"/>
+            </a:solidFill>
+            <a:prstDash val="solid"/>
+          </a:ln>
+        </p:spPr>
+      </p:sp>
+      <p:sp>
+        <p:nvSpPr>
+          <p:cNvPr id="13" name="Text 11"/>
+          <p:cNvSpPr/>
+          <p:nvPr/>
+        </p:nvSpPr>
+        <p:spPr>
+          <a:xfrm>
+            <a:off x="8074152" y="3666744"/>
+            <a:ext cx="2825496" cy="201168"/>
+          </a:xfrm>
+          <a:prstGeom prst="rect">
+            <a:avLst/>
+          </a:prstGeom>
+          <a:noFill/>
+          <a:ln/>
+        </p:spPr>
+        <p:txBody>
+          <a:bodyPr wrap="square" lIns="0" tIns="0" rIns="0" bIns="0" rtlCol="0" anchor="ctr"/>
+          <a:lstStyle/>
+          <a:p>
+            <a:pPr indent="0" marL="0">
+              <a:buNone/>
+            </a:pPr>
+            <a:r>
+              <a:rPr lang="en-US" sz="950" b="1" dirty="0">
+                <a:solidFill>
+                  <a:srgbClr val="0068B7"/>
+                </a:solidFill>
+                <a:latin typeface="Aptos" pitchFamily="34" charset="0"/>
+                <a:ea typeface="Aptos" pitchFamily="34" charset="-122"/>
+                <a:cs typeface="Aptos" pitchFamily="34" charset="-120"/>
+              </a:rPr>
+              <a:t>Use this for</a:t>
+            </a:r>
+            <a:endParaRPr lang="en-US" sz="950" dirty="0"/>
+          </a:p>
+        </p:txBody>
+      </p:sp>
+      <p:sp>
+        <p:nvSpPr>
+          <p:cNvPr id="14" name="Text 12"/>
+          <p:cNvSpPr/>
+          <p:nvPr/>
+        </p:nvSpPr>
+        <p:spPr>
+          <a:xfrm>
+            <a:off x="8074152" y="3959352"/>
+            <a:ext cx="2825496" cy="1170432"/>
+          </a:xfrm>
+          <a:prstGeom prst="rect">
+            <a:avLst/>
+          </a:prstGeom>
+          <a:noFill/>
+          <a:ln/>
+        </p:spPr>
+        <p:txBody>
+          <a:bodyPr wrap="square" lIns="0" tIns="0" rIns="0" bIns="0" rtlCol="0" anchor="t">
+            <a:normAutofit/>
+          </a:bodyPr>
+          <a:lstStyle/>
+          <a:p>
+            <a:pPr indent="0" marL="0">
+              <a:buNone/>
+            </a:pPr>
+            <a:r>
+              <a:rPr lang="en-US" sz="1250" dirty="0">
+                <a:solidFill>
+                  <a:srgbClr val="17364A"/>
+                </a:solidFill>
+                <a:latin typeface="Aptos" pitchFamily="34" charset="0"/>
+                <a:ea typeface="Aptos" pitchFamily="34" charset="-122"/>
+                <a:cs typeface="Aptos" pitchFamily="34" charset="-120"/>
+              </a:rPr>
+              <a:t>Connect the concept to public health decisions, safeguards, documentation, or implementation work.</a:t>
+            </a:r>
+            <a:endParaRPr lang="en-US" sz="1250" dirty="0"/>
           </a:p>
         </p:txBody>
       </p:sp>
@@ -3551,7 +4595,32 @@
       </p:sp>
       <p:sp>
         <p:nvSpPr>
-          <p:cNvPr id="3" name="Text 1"/>
+          <p:cNvPr id="3" name="Shape 1"/>
+          <p:cNvSpPr/>
+          <p:nvPr/>
+        </p:nvSpPr>
+        <p:spPr>
+          <a:xfrm>
+            <a:off x="0" y="164592"/>
+            <a:ext cx="146304" cy="6693408"/>
+          </a:xfrm>
+          <a:prstGeom prst="rect">
+            <a:avLst/>
+          </a:prstGeom>
+          <a:solidFill>
+            <a:srgbClr val="2F8A28"/>
+          </a:solidFill>
+          <a:ln w="12700">
+            <a:solidFill>
+              <a:srgbClr val="2F8A28"/>
+            </a:solidFill>
+            <a:prstDash val="solid"/>
+          </a:ln>
+        </p:spPr>
+      </p:sp>
+      <p:sp>
+        <p:nvSpPr>
+          <p:cNvPr id="4" name="Text 2"/>
           <p:cNvSpPr/>
           <p:nvPr/>
         </p:nvSpPr>
@@ -3590,7 +4659,7 @@
       </p:sp>
       <p:sp>
         <p:nvSpPr>
-          <p:cNvPr id="4" name="Text 2"/>
+          <p:cNvPr id="5" name="Text 3"/>
           <p:cNvSpPr/>
           <p:nvPr/>
         </p:nvSpPr>
@@ -3629,7 +4698,7 @@
       </p:sp>
       <p:sp>
         <p:nvSpPr>
-          <p:cNvPr id="5" name="Text 3"/>
+          <p:cNvPr id="6" name="Text 4"/>
           <p:cNvSpPr/>
           <p:nvPr/>
         </p:nvSpPr>
@@ -3668,7 +4737,7 @@
       </p:sp>
       <p:sp>
         <p:nvSpPr>
-          <p:cNvPr id="6" name="Text 4"/>
+          <p:cNvPr id="7" name="Text 5"/>
           <p:cNvSpPr/>
           <p:nvPr/>
         </p:nvSpPr>
@@ -3701,7 +4770,7 @@
                 <a:ea typeface="Aptos Display" pitchFamily="34" charset="-122"/>
                 <a:cs typeface="Aptos Display" pitchFamily="34" charset="-120"/>
               </a:rPr>
-              <a:t>Reflection Questions Continued</a:t>
+              <a:t>Risks, Failure Modes, and Guardrails Continued</a:t>
             </a:r>
             <a:endParaRPr lang="en-US" sz="2700" dirty="0"/>
           </a:p>
@@ -3709,32 +4778,164 @@
       </p:sp>
       <p:sp>
         <p:nvSpPr>
-          <p:cNvPr id="7" name="Text 5"/>
-          <p:cNvSpPr/>
-          <p:nvPr/>
-        </p:nvSpPr>
-        <p:spPr>
-          <a:xfrm>
-            <a:off x="822960" y="1325880"/>
-            <a:ext cx="10378440" cy="4800600"/>
-          </a:xfrm>
-          <a:prstGeom prst="rect">
-            <a:avLst/>
-          </a:prstGeom>
-          <a:noFill/>
-          <a:ln/>
-        </p:spPr>
-        <p:txBody>
-          <a:bodyPr wrap="square" lIns="1016" tIns="1016" rIns="1016" bIns="1016" rtlCol="0" anchor="t">
+          <p:cNvPr id="8" name="Text 6"/>
+          <p:cNvSpPr/>
+          <p:nvPr/>
+        </p:nvSpPr>
+        <p:spPr>
+          <a:xfrm>
+            <a:off x="868680" y="1417320"/>
+            <a:ext cx="6675120" cy="4434840"/>
+          </a:xfrm>
+          <a:prstGeom prst="rect">
+            <a:avLst/>
+          </a:prstGeom>
+          <a:noFill/>
+          <a:ln/>
+        </p:spPr>
+        <p:txBody>
+          <a:bodyPr wrap="square" lIns="635" tIns="635" rIns="635" bIns="635" rtlCol="0" anchor="t">
             <a:normAutofit/>
           </a:bodyPr>
           <a:lstStyle/>
           <a:p>
+            <a:r>
+              <a:rPr lang="en-US" sz="1700" dirty="0">
+                <a:solidFill>
+                  <a:srgbClr val="17364A"/>
+                </a:solidFill>
+                <a:latin typeface="Aptos" pitchFamily="34" charset="0"/>
+                <a:ea typeface="Aptos" pitchFamily="34" charset="-122"/>
+                <a:cs typeface="Aptos" pitchFamily="34" charset="-120"/>
+              </a:rPr>
+              <a:t>Define acceptance criteria before testing.</a:t>
+            </a:r>
+            <a:endParaRPr lang="en-US" sz="1700" dirty="0"/>
+          </a:p>
+          <a:p>
+            <a:r>
+              <a:rPr lang="en-US" sz="1700" dirty="0">
+                <a:solidFill>
+                  <a:srgbClr val="17364A"/>
+                </a:solidFill>
+                <a:latin typeface="Aptos" pitchFamily="34" charset="0"/>
+                <a:ea typeface="Aptos" pitchFamily="34" charset="-122"/>
+                <a:cs typeface="Aptos" pitchFamily="34" charset="-120"/>
+              </a:rPr>
+              <a:t>Track issues by severity, owner, and resolution status.</a:t>
+            </a:r>
+            <a:endParaRPr lang="en-US" sz="1700" dirty="0"/>
+          </a:p>
+          <a:p>
+            <a:r>
+              <a:rPr lang="en-US" sz="1700" dirty="0">
+                <a:solidFill>
+                  <a:srgbClr val="17364A"/>
+                </a:solidFill>
+                <a:latin typeface="Aptos" pitchFamily="34" charset="0"/>
+                <a:ea typeface="Aptos" pitchFamily="34" charset="-122"/>
+                <a:cs typeface="Aptos" pitchFamily="34" charset="-120"/>
+              </a:rPr>
+              <a:t>Require documented sign-off or remediation before deployment.</a:t>
+            </a:r>
+            <a:endParaRPr lang="en-US" sz="1700" dirty="0"/>
+          </a:p>
+        </p:txBody>
+      </p:sp>
+      <p:sp>
+        <p:nvSpPr>
+          <p:cNvPr id="9" name="Shape 7"/>
+          <p:cNvSpPr/>
+          <p:nvPr/>
+        </p:nvSpPr>
+        <p:spPr>
+          <a:xfrm>
+            <a:off x="7909560" y="1417320"/>
+            <a:ext cx="3154680" cy="1828800"/>
+          </a:xfrm>
+          <a:prstGeom prst="roundRect">
+            <a:avLst>
+              <a:gd name="adj" fmla="val 6000"/>
+            </a:avLst>
+          </a:prstGeom>
+          <a:solidFill>
+            <a:srgbClr val="EEF8ED"/>
+          </a:solidFill>
+          <a:ln w="12700">
+            <a:solidFill>
+              <a:srgbClr val="B9D7E6"/>
+            </a:solidFill>
+            <a:prstDash val="solid"/>
+          </a:ln>
+        </p:spPr>
+      </p:sp>
+      <p:sp>
+        <p:nvSpPr>
+          <p:cNvPr id="10" name="Text 8"/>
+          <p:cNvSpPr/>
+          <p:nvPr/>
+        </p:nvSpPr>
+        <p:spPr>
+          <a:xfrm>
+            <a:off x="8074152" y="1563624"/>
+            <a:ext cx="2825496" cy="201168"/>
+          </a:xfrm>
+          <a:prstGeom prst="rect">
+            <a:avLst/>
+          </a:prstGeom>
+          <a:noFill/>
+          <a:ln/>
+        </p:spPr>
+        <p:txBody>
+          <a:bodyPr wrap="square" lIns="0" tIns="0" rIns="0" bIns="0" rtlCol="0" anchor="ctr"/>
+          <a:lstStyle/>
+          <a:p>
             <a:pPr indent="0" marL="0">
               <a:buNone/>
             </a:pPr>
             <a:r>
-              <a:rPr lang="en-US" sz="1420" dirty="0">
+              <a:rPr lang="en-US" sz="950" b="1" dirty="0">
+                <a:solidFill>
+                  <a:srgbClr val="0068B7"/>
+                </a:solidFill>
+                <a:latin typeface="Aptos" pitchFamily="34" charset="0"/>
+                <a:ea typeface="Aptos" pitchFamily="34" charset="-122"/>
+                <a:cs typeface="Aptos" pitchFamily="34" charset="-120"/>
+              </a:rPr>
+              <a:t>Key idea</a:t>
+            </a:r>
+            <a:endParaRPr lang="en-US" sz="950" dirty="0"/>
+          </a:p>
+        </p:txBody>
+      </p:sp>
+      <p:sp>
+        <p:nvSpPr>
+          <p:cNvPr id="11" name="Text 9"/>
+          <p:cNvSpPr/>
+          <p:nvPr/>
+        </p:nvSpPr>
+        <p:spPr>
+          <a:xfrm>
+            <a:off x="8074152" y="1856232"/>
+            <a:ext cx="2825496" cy="1261872"/>
+          </a:xfrm>
+          <a:prstGeom prst="rect">
+            <a:avLst/>
+          </a:prstGeom>
+          <a:noFill/>
+          <a:ln/>
+        </p:spPr>
+        <p:txBody>
+          <a:bodyPr wrap="square" lIns="0" tIns="0" rIns="0" bIns="0" rtlCol="0" anchor="t">
+            <a:normAutofit/>
+          </a:bodyPr>
+          <a:lstStyle/>
+          <a:p>
+            <a:pPr indent="0" marL="0">
+              <a:buNone/>
+            </a:pPr>
+            <a:r>
+              <a:rPr lang="en-US" sz="1250" dirty="0">
                 <a:solidFill>
                   <a:srgbClr val="17364A"/>
                 </a:solidFill>
@@ -3742,9 +4943,116 @@
                 <a:ea typeface="Aptos" pitchFamily="34" charset="-122"/>
                 <a:cs typeface="Aptos" pitchFamily="34" charset="-120"/>
               </a:rPr>
-              <a:t>What evidence would governance, leadership, or operations staff need before moving forward? Which policy, data, equity, privacy, security, or workflow questions remain unresolved?</a:t>
-            </a:r>
-            <a:endParaRPr lang="en-US" sz="1420" dirty="0"/>
+              <a:t>Define acceptance criteria before testing.</a:t>
+            </a:r>
+            <a:endParaRPr lang="en-US" sz="1250" dirty="0"/>
+          </a:p>
+        </p:txBody>
+      </p:sp>
+      <p:sp>
+        <p:nvSpPr>
+          <p:cNvPr id="12" name="Shape 10"/>
+          <p:cNvSpPr/>
+          <p:nvPr/>
+        </p:nvSpPr>
+        <p:spPr>
+          <a:xfrm>
+            <a:off x="7909560" y="3520440"/>
+            <a:ext cx="3154680" cy="1737360"/>
+          </a:xfrm>
+          <a:prstGeom prst="roundRect">
+            <a:avLst>
+              <a:gd name="adj" fmla="val 6316"/>
+            </a:avLst>
+          </a:prstGeom>
+          <a:solidFill>
+            <a:srgbClr val="EAF6F8"/>
+          </a:solidFill>
+          <a:ln w="12700">
+            <a:solidFill>
+              <a:srgbClr val="B9D7E6"/>
+            </a:solidFill>
+            <a:prstDash val="solid"/>
+          </a:ln>
+        </p:spPr>
+      </p:sp>
+      <p:sp>
+        <p:nvSpPr>
+          <p:cNvPr id="13" name="Text 11"/>
+          <p:cNvSpPr/>
+          <p:nvPr/>
+        </p:nvSpPr>
+        <p:spPr>
+          <a:xfrm>
+            <a:off x="8074152" y="3666744"/>
+            <a:ext cx="2825496" cy="201168"/>
+          </a:xfrm>
+          <a:prstGeom prst="rect">
+            <a:avLst/>
+          </a:prstGeom>
+          <a:noFill/>
+          <a:ln/>
+        </p:spPr>
+        <p:txBody>
+          <a:bodyPr wrap="square" lIns="0" tIns="0" rIns="0" bIns="0" rtlCol="0" anchor="ctr"/>
+          <a:lstStyle/>
+          <a:p>
+            <a:pPr indent="0" marL="0">
+              <a:buNone/>
+            </a:pPr>
+            <a:r>
+              <a:rPr lang="en-US" sz="950" b="1" dirty="0">
+                <a:solidFill>
+                  <a:srgbClr val="0068B7"/>
+                </a:solidFill>
+                <a:latin typeface="Aptos" pitchFamily="34" charset="0"/>
+                <a:ea typeface="Aptos" pitchFamily="34" charset="-122"/>
+                <a:cs typeface="Aptos" pitchFamily="34" charset="-120"/>
+              </a:rPr>
+              <a:t>Use this for</a:t>
+            </a:r>
+            <a:endParaRPr lang="en-US" sz="950" dirty="0"/>
+          </a:p>
+        </p:txBody>
+      </p:sp>
+      <p:sp>
+        <p:nvSpPr>
+          <p:cNvPr id="14" name="Text 12"/>
+          <p:cNvSpPr/>
+          <p:nvPr/>
+        </p:nvSpPr>
+        <p:spPr>
+          <a:xfrm>
+            <a:off x="8074152" y="3959352"/>
+            <a:ext cx="2825496" cy="1170432"/>
+          </a:xfrm>
+          <a:prstGeom prst="rect">
+            <a:avLst/>
+          </a:prstGeom>
+          <a:noFill/>
+          <a:ln/>
+        </p:spPr>
+        <p:txBody>
+          <a:bodyPr wrap="square" lIns="0" tIns="0" rIns="0" bIns="0" rtlCol="0" anchor="t">
+            <a:normAutofit/>
+          </a:bodyPr>
+          <a:lstStyle/>
+          <a:p>
+            <a:pPr indent="0" marL="0">
+              <a:buNone/>
+            </a:pPr>
+            <a:r>
+              <a:rPr lang="en-US" sz="1250" dirty="0">
+                <a:solidFill>
+                  <a:srgbClr val="17364A"/>
+                </a:solidFill>
+                <a:latin typeface="Aptos" pitchFamily="34" charset="0"/>
+                <a:ea typeface="Aptos" pitchFamily="34" charset="-122"/>
+                <a:cs typeface="Aptos" pitchFamily="34" charset="-120"/>
+              </a:rPr>
+              <a:t>Connect the concept to public health decisions, safeguards, documentation, or implementation work.</a:t>
+            </a:r>
+            <a:endParaRPr lang="en-US" sz="1250" dirty="0"/>
           </a:p>
         </p:txBody>
       </p:sp>
@@ -3807,7 +5115,32 @@
       </p:sp>
       <p:sp>
         <p:nvSpPr>
-          <p:cNvPr id="3" name="Text 1"/>
+          <p:cNvPr id="3" name="Shape 1"/>
+          <p:cNvSpPr/>
+          <p:nvPr/>
+        </p:nvSpPr>
+        <p:spPr>
+          <a:xfrm>
+            <a:off x="0" y="164592"/>
+            <a:ext cx="146304" cy="6693408"/>
+          </a:xfrm>
+          <a:prstGeom prst="rect">
+            <a:avLst/>
+          </a:prstGeom>
+          <a:solidFill>
+            <a:srgbClr val="2F8A28"/>
+          </a:solidFill>
+          <a:ln w="12700">
+            <a:solidFill>
+              <a:srgbClr val="2F8A28"/>
+            </a:solidFill>
+            <a:prstDash val="solid"/>
+          </a:ln>
+        </p:spPr>
+      </p:sp>
+      <p:sp>
+        <p:nvSpPr>
+          <p:cNvPr id="4" name="Text 2"/>
           <p:cNvSpPr/>
           <p:nvPr/>
         </p:nvSpPr>
@@ -3846,7 +5179,7 @@
       </p:sp>
       <p:sp>
         <p:nvSpPr>
-          <p:cNvPr id="4" name="Text 2"/>
+          <p:cNvPr id="5" name="Text 3"/>
           <p:cNvSpPr/>
           <p:nvPr/>
         </p:nvSpPr>
@@ -3885,7 +5218,7 @@
       </p:sp>
       <p:sp>
         <p:nvSpPr>
-          <p:cNvPr id="5" name="Text 3"/>
+          <p:cNvPr id="6" name="Text 4"/>
           <p:cNvSpPr/>
           <p:nvPr/>
         </p:nvSpPr>
@@ -3924,13 +5257,77 @@
       </p:sp>
       <p:sp>
         <p:nvSpPr>
-          <p:cNvPr id="6" name="Text 4"/>
+          <p:cNvPr id="7" name="Shape 5"/>
           <p:cNvSpPr/>
           <p:nvPr/>
         </p:nvSpPr>
         <p:spPr>
           <a:xfrm>
             <a:off x="640080" y="658368"/>
+            <a:ext cx="420624" cy="420624"/>
+          </a:xfrm>
+          <a:prstGeom prst="ellipse">
+            <a:avLst/>
+          </a:prstGeom>
+          <a:solidFill>
+            <a:srgbClr val="0068B7"/>
+          </a:solidFill>
+          <a:ln w="12700">
+            <a:solidFill>
+              <a:srgbClr val="0068B7"/>
+            </a:solidFill>
+            <a:prstDash val="solid"/>
+          </a:ln>
+        </p:spPr>
+      </p:sp>
+      <p:sp>
+        <p:nvSpPr>
+          <p:cNvPr id="8" name="Text 6"/>
+          <p:cNvSpPr/>
+          <p:nvPr/>
+        </p:nvSpPr>
+        <p:spPr>
+          <a:xfrm>
+            <a:off x="640080" y="731520"/>
+            <a:ext cx="420624" cy="164592"/>
+          </a:xfrm>
+          <a:prstGeom prst="rect">
+            <a:avLst/>
+          </a:prstGeom>
+          <a:noFill/>
+          <a:ln/>
+        </p:spPr>
+        <p:txBody>
+          <a:bodyPr wrap="square" lIns="0" tIns="0" rIns="0" bIns="0" rtlCol="0" anchor="ctr"/>
+          <a:lstStyle/>
+          <a:p>
+            <a:pPr algn="ctr" indent="0" marL="0">
+              <a:buNone/>
+            </a:pPr>
+            <a:r>
+              <a:rPr lang="en-US" sz="1100" b="1" dirty="0">
+                <a:solidFill>
+                  <a:srgbClr val="FFFFFF"/>
+                </a:solidFill>
+                <a:latin typeface="Aptos" pitchFamily="34" charset="0"/>
+                <a:ea typeface="Aptos" pitchFamily="34" charset="-122"/>
+                <a:cs typeface="Aptos" pitchFamily="34" charset="-120"/>
+              </a:rPr>
+              <a:t>6</a:t>
+            </a:r>
+            <a:endParaRPr lang="en-US" sz="1100" dirty="0"/>
+          </a:p>
+        </p:txBody>
+      </p:sp>
+      <p:sp>
+        <p:nvSpPr>
+          <p:cNvPr id="9" name="Text 7"/>
+          <p:cNvSpPr/>
+          <p:nvPr/>
+        </p:nvSpPr>
+        <p:spPr>
+          <a:xfrm>
+            <a:off x="640080" y="621792"/>
             <a:ext cx="10881360" cy="566928"/>
           </a:xfrm>
           <a:prstGeom prst="rect">
@@ -3957,7 +5354,7 @@
                 <a:ea typeface="Aptos Display" pitchFamily="34" charset="-122"/>
                 <a:cs typeface="Aptos Display" pitchFamily="34" charset="-120"/>
               </a:rPr>
-              <a:t>Practical Exercise</a:t>
+              <a:t>Reflection Questions</a:t>
             </a:r>
             <a:endParaRPr lang="en-US" sz="2700" dirty="0"/>
           </a:p>
@@ -3965,32 +5362,164 @@
       </p:sp>
       <p:sp>
         <p:nvSpPr>
-          <p:cNvPr id="7" name="Text 5"/>
-          <p:cNvSpPr/>
-          <p:nvPr/>
-        </p:nvSpPr>
-        <p:spPr>
-          <a:xfrm>
-            <a:off x="822960" y="1325880"/>
-            <a:ext cx="10378440" cy="4800600"/>
-          </a:xfrm>
-          <a:prstGeom prst="rect">
-            <a:avLst/>
-          </a:prstGeom>
-          <a:noFill/>
-          <a:ln/>
-        </p:spPr>
-        <p:txBody>
-          <a:bodyPr wrap="square" lIns="1016" tIns="1016" rIns="1016" bIns="1016" rtlCol="0" anchor="t">
+          <p:cNvPr id="10" name="Text 8"/>
+          <p:cNvSpPr/>
+          <p:nvPr/>
+        </p:nvSpPr>
+        <p:spPr>
+          <a:xfrm>
+            <a:off x="868680" y="1417320"/>
+            <a:ext cx="6675120" cy="4434840"/>
+          </a:xfrm>
+          <a:prstGeom prst="rect">
+            <a:avLst/>
+          </a:prstGeom>
+          <a:noFill/>
+          <a:ln/>
+        </p:spPr>
+        <p:txBody>
+          <a:bodyPr wrap="square" lIns="635" tIns="635" rIns="635" bIns="635" rtlCol="0" anchor="t">
             <a:normAutofit/>
           </a:bodyPr>
           <a:lstStyle/>
           <a:p>
+            <a:r>
+              <a:rPr lang="en-US" sz="1700" dirty="0">
+                <a:solidFill>
+                  <a:srgbClr val="17364A"/>
+                </a:solidFill>
+                <a:latin typeface="Aptos" pitchFamily="34" charset="0"/>
+                <a:ea typeface="Aptos" pitchFamily="34" charset="-122"/>
+                <a:cs typeface="Aptos" pitchFamily="34" charset="-120"/>
+              </a:rPr>
+              <a:t>Where does this topic appear in your agency, program, or workflow?</a:t>
+            </a:r>
+            <a:endParaRPr lang="en-US" sz="1700" dirty="0"/>
+          </a:p>
+          <a:p>
+            <a:r>
+              <a:rPr lang="en-US" sz="1700" dirty="0">
+                <a:solidFill>
+                  <a:srgbClr val="17364A"/>
+                </a:solidFill>
+                <a:latin typeface="Aptos" pitchFamily="34" charset="0"/>
+                <a:ea typeface="Aptos" pitchFamily="34" charset="-122"/>
+                <a:cs typeface="Aptos" pitchFamily="34" charset="-120"/>
+              </a:rPr>
+              <a:t>Which staff roles would need to understand or apply this concept before AI use is approved?</a:t>
+            </a:r>
+            <a:endParaRPr lang="en-US" sz="1700" dirty="0"/>
+          </a:p>
+          <a:p>
+            <a:r>
+              <a:rPr lang="en-US" sz="1700" dirty="0">
+                <a:solidFill>
+                  <a:srgbClr val="17364A"/>
+                </a:solidFill>
+                <a:latin typeface="Aptos" pitchFamily="34" charset="0"/>
+                <a:ea typeface="Aptos" pitchFamily="34" charset="-122"/>
+                <a:cs typeface="Aptos" pitchFamily="34" charset="-120"/>
+              </a:rPr>
+              <a:t>What could go wrong if this topic is not addressed before implementation?</a:t>
+            </a:r>
+            <a:endParaRPr lang="en-US" sz="1700" dirty="0"/>
+          </a:p>
+        </p:txBody>
+      </p:sp>
+      <p:sp>
+        <p:nvSpPr>
+          <p:cNvPr id="11" name="Shape 9"/>
+          <p:cNvSpPr/>
+          <p:nvPr/>
+        </p:nvSpPr>
+        <p:spPr>
+          <a:xfrm>
+            <a:off x="7909560" y="1417320"/>
+            <a:ext cx="3154680" cy="1828800"/>
+          </a:xfrm>
+          <a:prstGeom prst="roundRect">
+            <a:avLst>
+              <a:gd name="adj" fmla="val 6000"/>
+            </a:avLst>
+          </a:prstGeom>
+          <a:solidFill>
+            <a:srgbClr val="EEF8ED"/>
+          </a:solidFill>
+          <a:ln w="12700">
+            <a:solidFill>
+              <a:srgbClr val="B9D7E6"/>
+            </a:solidFill>
+            <a:prstDash val="solid"/>
+          </a:ln>
+        </p:spPr>
+      </p:sp>
+      <p:sp>
+        <p:nvSpPr>
+          <p:cNvPr id="12" name="Text 10"/>
+          <p:cNvSpPr/>
+          <p:nvPr/>
+        </p:nvSpPr>
+        <p:spPr>
+          <a:xfrm>
+            <a:off x="8074152" y="1563624"/>
+            <a:ext cx="2825496" cy="201168"/>
+          </a:xfrm>
+          <a:prstGeom prst="rect">
+            <a:avLst/>
+          </a:prstGeom>
+          <a:noFill/>
+          <a:ln/>
+        </p:spPr>
+        <p:txBody>
+          <a:bodyPr wrap="square" lIns="0" tIns="0" rIns="0" bIns="0" rtlCol="0" anchor="ctr"/>
+          <a:lstStyle/>
+          <a:p>
             <a:pPr indent="0" marL="0">
               <a:buNone/>
             </a:pPr>
             <a:r>
-              <a:rPr lang="en-US" sz="1420" dirty="0">
+              <a:rPr lang="en-US" sz="950" b="1" dirty="0">
+                <a:solidFill>
+                  <a:srgbClr val="0068B7"/>
+                </a:solidFill>
+                <a:latin typeface="Aptos" pitchFamily="34" charset="0"/>
+                <a:ea typeface="Aptos" pitchFamily="34" charset="-122"/>
+                <a:cs typeface="Aptos" pitchFamily="34" charset="-120"/>
+              </a:rPr>
+              <a:t>Key idea</a:t>
+            </a:r>
+            <a:endParaRPr lang="en-US" sz="950" dirty="0"/>
+          </a:p>
+        </p:txBody>
+      </p:sp>
+      <p:sp>
+        <p:nvSpPr>
+          <p:cNvPr id="13" name="Text 11"/>
+          <p:cNvSpPr/>
+          <p:nvPr/>
+        </p:nvSpPr>
+        <p:spPr>
+          <a:xfrm>
+            <a:off x="8074152" y="1856232"/>
+            <a:ext cx="2825496" cy="1261872"/>
+          </a:xfrm>
+          <a:prstGeom prst="rect">
+            <a:avLst/>
+          </a:prstGeom>
+          <a:noFill/>
+          <a:ln/>
+        </p:spPr>
+        <p:txBody>
+          <a:bodyPr wrap="square" lIns="0" tIns="0" rIns="0" bIns="0" rtlCol="0" anchor="t">
+            <a:normAutofit/>
+          </a:bodyPr>
+          <a:lstStyle/>
+          <a:p>
+            <a:pPr indent="0" marL="0">
+              <a:buNone/>
+            </a:pPr>
+            <a:r>
+              <a:rPr lang="en-US" sz="1250" dirty="0">
                 <a:solidFill>
                   <a:srgbClr val="17364A"/>
                 </a:solidFill>
@@ -3998,9 +5527,116 @@
                 <a:ea typeface="Aptos" pitchFamily="34" charset="-122"/>
                 <a:cs typeface="Aptos" pitchFamily="34" charset="-120"/>
               </a:rPr>
-              <a:t>Create a UAT plan for one AI-supported workflow. Include user roles, test scenarios, edge cases, acceptance criteria, tester instructions, issue log fields, severity categories, sign-off criteria, and launch recommendation.</a:t>
-            </a:r>
-            <a:endParaRPr lang="en-US" sz="1420" dirty="0"/>
+              <a:t>Where does this topic appear in your agency, program, or workflow?</a:t>
+            </a:r>
+            <a:endParaRPr lang="en-US" sz="1250" dirty="0"/>
+          </a:p>
+        </p:txBody>
+      </p:sp>
+      <p:sp>
+        <p:nvSpPr>
+          <p:cNvPr id="14" name="Shape 12"/>
+          <p:cNvSpPr/>
+          <p:nvPr/>
+        </p:nvSpPr>
+        <p:spPr>
+          <a:xfrm>
+            <a:off x="7909560" y="3520440"/>
+            <a:ext cx="3154680" cy="1737360"/>
+          </a:xfrm>
+          <a:prstGeom prst="roundRect">
+            <a:avLst>
+              <a:gd name="adj" fmla="val 6316"/>
+            </a:avLst>
+          </a:prstGeom>
+          <a:solidFill>
+            <a:srgbClr val="EAF6F8"/>
+          </a:solidFill>
+          <a:ln w="12700">
+            <a:solidFill>
+              <a:srgbClr val="B9D7E6"/>
+            </a:solidFill>
+            <a:prstDash val="solid"/>
+          </a:ln>
+        </p:spPr>
+      </p:sp>
+      <p:sp>
+        <p:nvSpPr>
+          <p:cNvPr id="15" name="Text 13"/>
+          <p:cNvSpPr/>
+          <p:nvPr/>
+        </p:nvSpPr>
+        <p:spPr>
+          <a:xfrm>
+            <a:off x="8074152" y="3666744"/>
+            <a:ext cx="2825496" cy="201168"/>
+          </a:xfrm>
+          <a:prstGeom prst="rect">
+            <a:avLst/>
+          </a:prstGeom>
+          <a:noFill/>
+          <a:ln/>
+        </p:spPr>
+        <p:txBody>
+          <a:bodyPr wrap="square" lIns="0" tIns="0" rIns="0" bIns="0" rtlCol="0" anchor="ctr"/>
+          <a:lstStyle/>
+          <a:p>
+            <a:pPr indent="0" marL="0">
+              <a:buNone/>
+            </a:pPr>
+            <a:r>
+              <a:rPr lang="en-US" sz="950" b="1" dirty="0">
+                <a:solidFill>
+                  <a:srgbClr val="0068B7"/>
+                </a:solidFill>
+                <a:latin typeface="Aptos" pitchFamily="34" charset="0"/>
+                <a:ea typeface="Aptos" pitchFamily="34" charset="-122"/>
+                <a:cs typeface="Aptos" pitchFamily="34" charset="-120"/>
+              </a:rPr>
+              <a:t>Use this for</a:t>
+            </a:r>
+            <a:endParaRPr lang="en-US" sz="950" dirty="0"/>
+          </a:p>
+        </p:txBody>
+      </p:sp>
+      <p:sp>
+        <p:nvSpPr>
+          <p:cNvPr id="16" name="Text 14"/>
+          <p:cNvSpPr/>
+          <p:nvPr/>
+        </p:nvSpPr>
+        <p:spPr>
+          <a:xfrm>
+            <a:off x="8074152" y="3959352"/>
+            <a:ext cx="2825496" cy="1170432"/>
+          </a:xfrm>
+          <a:prstGeom prst="rect">
+            <a:avLst/>
+          </a:prstGeom>
+          <a:noFill/>
+          <a:ln/>
+        </p:spPr>
+        <p:txBody>
+          <a:bodyPr wrap="square" lIns="0" tIns="0" rIns="0" bIns="0" rtlCol="0" anchor="t">
+            <a:normAutofit/>
+          </a:bodyPr>
+          <a:lstStyle/>
+          <a:p>
+            <a:pPr indent="0" marL="0">
+              <a:buNone/>
+            </a:pPr>
+            <a:r>
+              <a:rPr lang="en-US" sz="1250" dirty="0">
+                <a:solidFill>
+                  <a:srgbClr val="17364A"/>
+                </a:solidFill>
+                <a:latin typeface="Aptos" pitchFamily="34" charset="0"/>
+                <a:ea typeface="Aptos" pitchFamily="34" charset="-122"/>
+                <a:cs typeface="Aptos" pitchFamily="34" charset="-120"/>
+              </a:rPr>
+              <a:t>Connect the concept to public health decisions, safeguards, documentation, or implementation work.</a:t>
+            </a:r>
+            <a:endParaRPr lang="en-US" sz="1250" dirty="0"/>
           </a:p>
         </p:txBody>
       </p:sp>
@@ -4063,7 +5699,32 @@
       </p:sp>
       <p:sp>
         <p:nvSpPr>
-          <p:cNvPr id="3" name="Text 1"/>
+          <p:cNvPr id="3" name="Shape 1"/>
+          <p:cNvSpPr/>
+          <p:nvPr/>
+        </p:nvSpPr>
+        <p:spPr>
+          <a:xfrm>
+            <a:off x="0" y="164592"/>
+            <a:ext cx="146304" cy="6693408"/>
+          </a:xfrm>
+          <a:prstGeom prst="rect">
+            <a:avLst/>
+          </a:prstGeom>
+          <a:solidFill>
+            <a:srgbClr val="2F8A28"/>
+          </a:solidFill>
+          <a:ln w="12700">
+            <a:solidFill>
+              <a:srgbClr val="2F8A28"/>
+            </a:solidFill>
+            <a:prstDash val="solid"/>
+          </a:ln>
+        </p:spPr>
+      </p:sp>
+      <p:sp>
+        <p:nvSpPr>
+          <p:cNvPr id="4" name="Text 2"/>
           <p:cNvSpPr/>
           <p:nvPr/>
         </p:nvSpPr>
@@ -4102,7 +5763,7 @@
       </p:sp>
       <p:sp>
         <p:nvSpPr>
-          <p:cNvPr id="4" name="Text 2"/>
+          <p:cNvPr id="5" name="Text 3"/>
           <p:cNvSpPr/>
           <p:nvPr/>
         </p:nvSpPr>
@@ -4141,7 +5802,7 @@
       </p:sp>
       <p:sp>
         <p:nvSpPr>
-          <p:cNvPr id="5" name="Text 3"/>
+          <p:cNvPr id="6" name="Text 4"/>
           <p:cNvSpPr/>
           <p:nvPr/>
         </p:nvSpPr>
@@ -4180,7 +5841,7 @@
       </p:sp>
       <p:sp>
         <p:nvSpPr>
-          <p:cNvPr id="6" name="Text 4"/>
+          <p:cNvPr id="7" name="Text 5"/>
           <p:cNvSpPr/>
           <p:nvPr/>
         </p:nvSpPr>
@@ -4213,7 +5874,7 @@
                 <a:ea typeface="Aptos Display" pitchFamily="34" charset="-122"/>
                 <a:cs typeface="Aptos Display" pitchFamily="34" charset="-120"/>
               </a:rPr>
-              <a:t>Expected Artifact or Evidence</a:t>
+              <a:t>Reflection Questions Continued</a:t>
             </a:r>
             <a:endParaRPr lang="en-US" sz="2700" dirty="0"/>
           </a:p>
@@ -4221,32 +5882,150 @@
       </p:sp>
       <p:sp>
         <p:nvSpPr>
-          <p:cNvPr id="7" name="Text 5"/>
-          <p:cNvSpPr/>
-          <p:nvPr/>
-        </p:nvSpPr>
-        <p:spPr>
-          <a:xfrm>
-            <a:off x="822960" y="1325880"/>
-            <a:ext cx="10378440" cy="4800600"/>
-          </a:xfrm>
-          <a:prstGeom prst="rect">
-            <a:avLst/>
-          </a:prstGeom>
-          <a:noFill/>
-          <a:ln/>
-        </p:spPr>
-        <p:txBody>
-          <a:bodyPr wrap="square" lIns="1016" tIns="1016" rIns="1016" bIns="1016" rtlCol="0" anchor="t">
+          <p:cNvPr id="8" name="Text 6"/>
+          <p:cNvSpPr/>
+          <p:nvPr/>
+        </p:nvSpPr>
+        <p:spPr>
+          <a:xfrm>
+            <a:off x="868680" y="1417320"/>
+            <a:ext cx="6675120" cy="4434840"/>
+          </a:xfrm>
+          <a:prstGeom prst="rect">
+            <a:avLst/>
+          </a:prstGeom>
+          <a:noFill/>
+          <a:ln/>
+        </p:spPr>
+        <p:txBody>
+          <a:bodyPr wrap="square" lIns="635" tIns="635" rIns="635" bIns="635" rtlCol="0" anchor="t">
             <a:normAutofit/>
           </a:bodyPr>
           <a:lstStyle/>
           <a:p>
+            <a:r>
+              <a:rPr lang="en-US" sz="1700" dirty="0">
+                <a:solidFill>
+                  <a:srgbClr val="17364A"/>
+                </a:solidFill>
+                <a:latin typeface="Aptos" pitchFamily="34" charset="0"/>
+                <a:ea typeface="Aptos" pitchFamily="34" charset="-122"/>
+                <a:cs typeface="Aptos" pitchFamily="34" charset="-120"/>
+              </a:rPr>
+              <a:t>What evidence would governance, leadership, or operations staff need before moving forward?</a:t>
+            </a:r>
+            <a:endParaRPr lang="en-US" sz="1700" dirty="0"/>
+          </a:p>
+          <a:p>
+            <a:r>
+              <a:rPr lang="en-US" sz="1700" dirty="0">
+                <a:solidFill>
+                  <a:srgbClr val="17364A"/>
+                </a:solidFill>
+                <a:latin typeface="Aptos" pitchFamily="34" charset="0"/>
+                <a:ea typeface="Aptos" pitchFamily="34" charset="-122"/>
+                <a:cs typeface="Aptos" pitchFamily="34" charset="-120"/>
+              </a:rPr>
+              <a:t>Which policy, data, equity, privacy, security, or workflow questions remain unresolved?</a:t>
+            </a:r>
+            <a:endParaRPr lang="en-US" sz="1700" dirty="0"/>
+          </a:p>
+        </p:txBody>
+      </p:sp>
+      <p:sp>
+        <p:nvSpPr>
+          <p:cNvPr id="9" name="Shape 7"/>
+          <p:cNvSpPr/>
+          <p:nvPr/>
+        </p:nvSpPr>
+        <p:spPr>
+          <a:xfrm>
+            <a:off x="7909560" y="1417320"/>
+            <a:ext cx="3154680" cy="1828800"/>
+          </a:xfrm>
+          <a:prstGeom prst="roundRect">
+            <a:avLst>
+              <a:gd name="adj" fmla="val 6000"/>
+            </a:avLst>
+          </a:prstGeom>
+          <a:solidFill>
+            <a:srgbClr val="EEF8ED"/>
+          </a:solidFill>
+          <a:ln w="12700">
+            <a:solidFill>
+              <a:srgbClr val="B9D7E6"/>
+            </a:solidFill>
+            <a:prstDash val="solid"/>
+          </a:ln>
+        </p:spPr>
+      </p:sp>
+      <p:sp>
+        <p:nvSpPr>
+          <p:cNvPr id="10" name="Text 8"/>
+          <p:cNvSpPr/>
+          <p:nvPr/>
+        </p:nvSpPr>
+        <p:spPr>
+          <a:xfrm>
+            <a:off x="8074152" y="1563624"/>
+            <a:ext cx="2825496" cy="201168"/>
+          </a:xfrm>
+          <a:prstGeom prst="rect">
+            <a:avLst/>
+          </a:prstGeom>
+          <a:noFill/>
+          <a:ln/>
+        </p:spPr>
+        <p:txBody>
+          <a:bodyPr wrap="square" lIns="0" tIns="0" rIns="0" bIns="0" rtlCol="0" anchor="ctr"/>
+          <a:lstStyle/>
+          <a:p>
             <a:pPr indent="0" marL="0">
               <a:buNone/>
             </a:pPr>
             <a:r>
-              <a:rPr lang="en-US" sz="1420" dirty="0">
+              <a:rPr lang="en-US" sz="950" b="1" dirty="0">
+                <a:solidFill>
+                  <a:srgbClr val="0068B7"/>
+                </a:solidFill>
+                <a:latin typeface="Aptos" pitchFamily="34" charset="0"/>
+                <a:ea typeface="Aptos" pitchFamily="34" charset="-122"/>
+                <a:cs typeface="Aptos" pitchFamily="34" charset="-120"/>
+              </a:rPr>
+              <a:t>Key idea</a:t>
+            </a:r>
+            <a:endParaRPr lang="en-US" sz="950" dirty="0"/>
+          </a:p>
+        </p:txBody>
+      </p:sp>
+      <p:sp>
+        <p:nvSpPr>
+          <p:cNvPr id="11" name="Text 9"/>
+          <p:cNvSpPr/>
+          <p:nvPr/>
+        </p:nvSpPr>
+        <p:spPr>
+          <a:xfrm>
+            <a:off x="8074152" y="1856232"/>
+            <a:ext cx="2825496" cy="1261872"/>
+          </a:xfrm>
+          <a:prstGeom prst="rect">
+            <a:avLst/>
+          </a:prstGeom>
+          <a:noFill/>
+          <a:ln/>
+        </p:spPr>
+        <p:txBody>
+          <a:bodyPr wrap="square" lIns="0" tIns="0" rIns="0" bIns="0" rtlCol="0" anchor="t">
+            <a:normAutofit/>
+          </a:bodyPr>
+          <a:lstStyle/>
+          <a:p>
+            <a:pPr indent="0" marL="0">
+              <a:buNone/>
+            </a:pPr>
+            <a:r>
+              <a:rPr lang="en-US" sz="1250" dirty="0">
                 <a:solidFill>
                   <a:srgbClr val="17364A"/>
                 </a:solidFill>
@@ -4254,9 +6033,116 @@
                 <a:ea typeface="Aptos" pitchFamily="34" charset="-122"/>
                 <a:cs typeface="Aptos" pitchFamily="34" charset="-120"/>
               </a:rPr>
-              <a:t>UAT plan Role-based test scripts Acceptance criteria</a:t>
-            </a:r>
-            <a:endParaRPr lang="en-US" sz="1420" dirty="0"/>
+              <a:t>What evidence would governance, leadership, or operations staff need before moving forward?</a:t>
+            </a:r>
+            <a:endParaRPr lang="en-US" sz="1250" dirty="0"/>
+          </a:p>
+        </p:txBody>
+      </p:sp>
+      <p:sp>
+        <p:nvSpPr>
+          <p:cNvPr id="12" name="Shape 10"/>
+          <p:cNvSpPr/>
+          <p:nvPr/>
+        </p:nvSpPr>
+        <p:spPr>
+          <a:xfrm>
+            <a:off x="7909560" y="3520440"/>
+            <a:ext cx="3154680" cy="1737360"/>
+          </a:xfrm>
+          <a:prstGeom prst="roundRect">
+            <a:avLst>
+              <a:gd name="adj" fmla="val 6316"/>
+            </a:avLst>
+          </a:prstGeom>
+          <a:solidFill>
+            <a:srgbClr val="EAF6F8"/>
+          </a:solidFill>
+          <a:ln w="12700">
+            <a:solidFill>
+              <a:srgbClr val="B9D7E6"/>
+            </a:solidFill>
+            <a:prstDash val="solid"/>
+          </a:ln>
+        </p:spPr>
+      </p:sp>
+      <p:sp>
+        <p:nvSpPr>
+          <p:cNvPr id="13" name="Text 11"/>
+          <p:cNvSpPr/>
+          <p:nvPr/>
+        </p:nvSpPr>
+        <p:spPr>
+          <a:xfrm>
+            <a:off x="8074152" y="3666744"/>
+            <a:ext cx="2825496" cy="201168"/>
+          </a:xfrm>
+          <a:prstGeom prst="rect">
+            <a:avLst/>
+          </a:prstGeom>
+          <a:noFill/>
+          <a:ln/>
+        </p:spPr>
+        <p:txBody>
+          <a:bodyPr wrap="square" lIns="0" tIns="0" rIns="0" bIns="0" rtlCol="0" anchor="ctr"/>
+          <a:lstStyle/>
+          <a:p>
+            <a:pPr indent="0" marL="0">
+              <a:buNone/>
+            </a:pPr>
+            <a:r>
+              <a:rPr lang="en-US" sz="950" b="1" dirty="0">
+                <a:solidFill>
+                  <a:srgbClr val="0068B7"/>
+                </a:solidFill>
+                <a:latin typeface="Aptos" pitchFamily="34" charset="0"/>
+                <a:ea typeface="Aptos" pitchFamily="34" charset="-122"/>
+                <a:cs typeface="Aptos" pitchFamily="34" charset="-120"/>
+              </a:rPr>
+              <a:t>Use this for</a:t>
+            </a:r>
+            <a:endParaRPr lang="en-US" sz="950" dirty="0"/>
+          </a:p>
+        </p:txBody>
+      </p:sp>
+      <p:sp>
+        <p:nvSpPr>
+          <p:cNvPr id="14" name="Text 12"/>
+          <p:cNvSpPr/>
+          <p:nvPr/>
+        </p:nvSpPr>
+        <p:spPr>
+          <a:xfrm>
+            <a:off x="8074152" y="3959352"/>
+            <a:ext cx="2825496" cy="1170432"/>
+          </a:xfrm>
+          <a:prstGeom prst="rect">
+            <a:avLst/>
+          </a:prstGeom>
+          <a:noFill/>
+          <a:ln/>
+        </p:spPr>
+        <p:txBody>
+          <a:bodyPr wrap="square" lIns="0" tIns="0" rIns="0" bIns="0" rtlCol="0" anchor="t">
+            <a:normAutofit/>
+          </a:bodyPr>
+          <a:lstStyle/>
+          <a:p>
+            <a:pPr indent="0" marL="0">
+              <a:buNone/>
+            </a:pPr>
+            <a:r>
+              <a:rPr lang="en-US" sz="1250" dirty="0">
+                <a:solidFill>
+                  <a:srgbClr val="17364A"/>
+                </a:solidFill>
+                <a:latin typeface="Aptos" pitchFamily="34" charset="0"/>
+                <a:ea typeface="Aptos" pitchFamily="34" charset="-122"/>
+                <a:cs typeface="Aptos" pitchFamily="34" charset="-120"/>
+              </a:rPr>
+              <a:t>Connect the concept to public health decisions, safeguards, documentation, or implementation work.</a:t>
+            </a:r>
+            <a:endParaRPr lang="en-US" sz="1250" dirty="0"/>
           </a:p>
         </p:txBody>
       </p:sp>
@@ -4319,7 +6205,32 @@
       </p:sp>
       <p:sp>
         <p:nvSpPr>
-          <p:cNvPr id="3" name="Text 1"/>
+          <p:cNvPr id="3" name="Shape 1"/>
+          <p:cNvSpPr/>
+          <p:nvPr/>
+        </p:nvSpPr>
+        <p:spPr>
+          <a:xfrm>
+            <a:off x="0" y="164592"/>
+            <a:ext cx="146304" cy="6693408"/>
+          </a:xfrm>
+          <a:prstGeom prst="rect">
+            <a:avLst/>
+          </a:prstGeom>
+          <a:solidFill>
+            <a:srgbClr val="2F8A28"/>
+          </a:solidFill>
+          <a:ln w="12700">
+            <a:solidFill>
+              <a:srgbClr val="2F8A28"/>
+            </a:solidFill>
+            <a:prstDash val="solid"/>
+          </a:ln>
+        </p:spPr>
+      </p:sp>
+      <p:sp>
+        <p:nvSpPr>
+          <p:cNvPr id="4" name="Text 2"/>
           <p:cNvSpPr/>
           <p:nvPr/>
         </p:nvSpPr>
@@ -4358,7 +6269,7 @@
       </p:sp>
       <p:sp>
         <p:nvSpPr>
-          <p:cNvPr id="4" name="Text 2"/>
+          <p:cNvPr id="5" name="Text 3"/>
           <p:cNvSpPr/>
           <p:nvPr/>
         </p:nvSpPr>
@@ -4397,7 +6308,7 @@
       </p:sp>
       <p:sp>
         <p:nvSpPr>
-          <p:cNvPr id="5" name="Text 3"/>
+          <p:cNvPr id="6" name="Text 4"/>
           <p:cNvSpPr/>
           <p:nvPr/>
         </p:nvSpPr>
@@ -4436,13 +6347,77 @@
       </p:sp>
       <p:sp>
         <p:nvSpPr>
-          <p:cNvPr id="6" name="Text 4"/>
+          <p:cNvPr id="7" name="Shape 5"/>
           <p:cNvSpPr/>
           <p:nvPr/>
         </p:nvSpPr>
         <p:spPr>
           <a:xfrm>
             <a:off x="640080" y="658368"/>
+            <a:ext cx="420624" cy="420624"/>
+          </a:xfrm>
+          <a:prstGeom prst="ellipse">
+            <a:avLst/>
+          </a:prstGeom>
+          <a:solidFill>
+            <a:srgbClr val="0068B7"/>
+          </a:solidFill>
+          <a:ln w="12700">
+            <a:solidFill>
+              <a:srgbClr val="0068B7"/>
+            </a:solidFill>
+            <a:prstDash val="solid"/>
+          </a:ln>
+        </p:spPr>
+      </p:sp>
+      <p:sp>
+        <p:nvSpPr>
+          <p:cNvPr id="8" name="Text 6"/>
+          <p:cNvSpPr/>
+          <p:nvPr/>
+        </p:nvSpPr>
+        <p:spPr>
+          <a:xfrm>
+            <a:off x="640080" y="731520"/>
+            <a:ext cx="420624" cy="164592"/>
+          </a:xfrm>
+          <a:prstGeom prst="rect">
+            <a:avLst/>
+          </a:prstGeom>
+          <a:noFill/>
+          <a:ln/>
+        </p:spPr>
+        <p:txBody>
+          <a:bodyPr wrap="square" lIns="0" tIns="0" rIns="0" bIns="0" rtlCol="0" anchor="ctr"/>
+          <a:lstStyle/>
+          <a:p>
+            <a:pPr algn="ctr" indent="0" marL="0">
+              <a:buNone/>
+            </a:pPr>
+            <a:r>
+              <a:rPr lang="en-US" sz="1100" b="1" dirty="0">
+                <a:solidFill>
+                  <a:srgbClr val="FFFFFF"/>
+                </a:solidFill>
+                <a:latin typeface="Aptos" pitchFamily="34" charset="0"/>
+                <a:ea typeface="Aptos" pitchFamily="34" charset="-122"/>
+                <a:cs typeface="Aptos" pitchFamily="34" charset="-120"/>
+              </a:rPr>
+              <a:t>7</a:t>
+            </a:r>
+            <a:endParaRPr lang="en-US" sz="1100" dirty="0"/>
+          </a:p>
+        </p:txBody>
+      </p:sp>
+      <p:sp>
+        <p:nvSpPr>
+          <p:cNvPr id="9" name="Text 7"/>
+          <p:cNvSpPr/>
+          <p:nvPr/>
+        </p:nvSpPr>
+        <p:spPr>
+          <a:xfrm>
+            <a:off x="640080" y="621792"/>
             <a:ext cx="10881360" cy="566928"/>
           </a:xfrm>
           <a:prstGeom prst="rect">
@@ -4469,7 +6444,7 @@
                 <a:ea typeface="Aptos Display" pitchFamily="34" charset="-122"/>
                 <a:cs typeface="Aptos Display" pitchFamily="34" charset="-120"/>
               </a:rPr>
-              <a:t>Expected Artifact or Evidence Continued</a:t>
+              <a:t>Practical Exercise</a:t>
             </a:r>
             <a:endParaRPr lang="en-US" sz="2700" dirty="0"/>
           </a:p>
@@ -4477,32 +6452,150 @@
       </p:sp>
       <p:sp>
         <p:nvSpPr>
-          <p:cNvPr id="7" name="Text 5"/>
-          <p:cNvSpPr/>
-          <p:nvPr/>
-        </p:nvSpPr>
-        <p:spPr>
-          <a:xfrm>
-            <a:off x="822960" y="1325880"/>
-            <a:ext cx="10378440" cy="4800600"/>
-          </a:xfrm>
-          <a:prstGeom prst="rect">
-            <a:avLst/>
-          </a:prstGeom>
-          <a:noFill/>
-          <a:ln/>
-        </p:spPr>
-        <p:txBody>
-          <a:bodyPr wrap="square" lIns="1016" tIns="1016" rIns="1016" bIns="1016" rtlCol="0" anchor="t">
+          <p:cNvPr id="10" name="Text 8"/>
+          <p:cNvSpPr/>
+          <p:nvPr/>
+        </p:nvSpPr>
+        <p:spPr>
+          <a:xfrm>
+            <a:off x="868680" y="1417320"/>
+            <a:ext cx="6675120" cy="4434840"/>
+          </a:xfrm>
+          <a:prstGeom prst="rect">
+            <a:avLst/>
+          </a:prstGeom>
+          <a:noFill/>
+          <a:ln/>
+        </p:spPr>
+        <p:txBody>
+          <a:bodyPr wrap="square" lIns="635" tIns="635" rIns="635" bIns="635" rtlCol="0" anchor="t">
             <a:normAutofit/>
           </a:bodyPr>
           <a:lstStyle/>
           <a:p>
+            <a:r>
+              <a:rPr lang="en-US" sz="1700" dirty="0">
+                <a:solidFill>
+                  <a:srgbClr val="17364A"/>
+                </a:solidFill>
+                <a:latin typeface="Aptos" pitchFamily="34" charset="0"/>
+                <a:ea typeface="Aptos" pitchFamily="34" charset="-122"/>
+                <a:cs typeface="Aptos" pitchFamily="34" charset="-120"/>
+              </a:rPr>
+              <a:t>Create a UAT plan for one AI-supported workflow.</a:t>
+            </a:r>
+            <a:endParaRPr lang="en-US" sz="1700" dirty="0"/>
+          </a:p>
+          <a:p>
+            <a:r>
+              <a:rPr lang="en-US" sz="1700" dirty="0">
+                <a:solidFill>
+                  <a:srgbClr val="17364A"/>
+                </a:solidFill>
+                <a:latin typeface="Aptos" pitchFamily="34" charset="0"/>
+                <a:ea typeface="Aptos" pitchFamily="34" charset="-122"/>
+                <a:cs typeface="Aptos" pitchFamily="34" charset="-120"/>
+              </a:rPr>
+              <a:t>Include user roles, test scenarios, edge cases, acceptance criteria, tester instructions, issue log fields, severity.</a:t>
+            </a:r>
+            <a:endParaRPr lang="en-US" sz="1700" dirty="0"/>
+          </a:p>
+        </p:txBody>
+      </p:sp>
+      <p:sp>
+        <p:nvSpPr>
+          <p:cNvPr id="11" name="Shape 9"/>
+          <p:cNvSpPr/>
+          <p:nvPr/>
+        </p:nvSpPr>
+        <p:spPr>
+          <a:xfrm>
+            <a:off x="7909560" y="1417320"/>
+            <a:ext cx="3154680" cy="1828800"/>
+          </a:xfrm>
+          <a:prstGeom prst="roundRect">
+            <a:avLst>
+              <a:gd name="adj" fmla="val 6000"/>
+            </a:avLst>
+          </a:prstGeom>
+          <a:solidFill>
+            <a:srgbClr val="EEF8ED"/>
+          </a:solidFill>
+          <a:ln w="12700">
+            <a:solidFill>
+              <a:srgbClr val="B9D7E6"/>
+            </a:solidFill>
+            <a:prstDash val="solid"/>
+          </a:ln>
+        </p:spPr>
+      </p:sp>
+      <p:sp>
+        <p:nvSpPr>
+          <p:cNvPr id="12" name="Text 10"/>
+          <p:cNvSpPr/>
+          <p:nvPr/>
+        </p:nvSpPr>
+        <p:spPr>
+          <a:xfrm>
+            <a:off x="8074152" y="1563624"/>
+            <a:ext cx="2825496" cy="201168"/>
+          </a:xfrm>
+          <a:prstGeom prst="rect">
+            <a:avLst/>
+          </a:prstGeom>
+          <a:noFill/>
+          <a:ln/>
+        </p:spPr>
+        <p:txBody>
+          <a:bodyPr wrap="square" lIns="0" tIns="0" rIns="0" bIns="0" rtlCol="0" anchor="ctr"/>
+          <a:lstStyle/>
+          <a:p>
             <a:pPr indent="0" marL="0">
               <a:buNone/>
             </a:pPr>
             <a:r>
-              <a:rPr lang="en-US" sz="1420" dirty="0">
+              <a:rPr lang="en-US" sz="950" b="1" dirty="0">
+                <a:solidFill>
+                  <a:srgbClr val="0068B7"/>
+                </a:solidFill>
+                <a:latin typeface="Aptos" pitchFamily="34" charset="0"/>
+                <a:ea typeface="Aptos" pitchFamily="34" charset="-122"/>
+                <a:cs typeface="Aptos" pitchFamily="34" charset="-120"/>
+              </a:rPr>
+              <a:t>Key idea</a:t>
+            </a:r>
+            <a:endParaRPr lang="en-US" sz="950" dirty="0"/>
+          </a:p>
+        </p:txBody>
+      </p:sp>
+      <p:sp>
+        <p:nvSpPr>
+          <p:cNvPr id="13" name="Text 11"/>
+          <p:cNvSpPr/>
+          <p:nvPr/>
+        </p:nvSpPr>
+        <p:spPr>
+          <a:xfrm>
+            <a:off x="8074152" y="1856232"/>
+            <a:ext cx="2825496" cy="1261872"/>
+          </a:xfrm>
+          <a:prstGeom prst="rect">
+            <a:avLst/>
+          </a:prstGeom>
+          <a:noFill/>
+          <a:ln/>
+        </p:spPr>
+        <p:txBody>
+          <a:bodyPr wrap="square" lIns="0" tIns="0" rIns="0" bIns="0" rtlCol="0" anchor="t">
+            <a:normAutofit/>
+          </a:bodyPr>
+          <a:lstStyle/>
+          <a:p>
+            <a:pPr indent="0" marL="0">
+              <a:buNone/>
+            </a:pPr>
+            <a:r>
+              <a:rPr lang="en-US" sz="1250" dirty="0">
                 <a:solidFill>
                   <a:srgbClr val="17364A"/>
                 </a:solidFill>
@@ -4510,9 +6603,116 @@
                 <a:ea typeface="Aptos" pitchFamily="34" charset="-122"/>
                 <a:cs typeface="Aptos" pitchFamily="34" charset="-120"/>
               </a:rPr>
-              <a:t>Issue log template Sign-off recommendation</a:t>
-            </a:r>
-            <a:endParaRPr lang="en-US" sz="1420" dirty="0"/>
+              <a:t>Create a UAT plan for one AI-supported workflow.</a:t>
+            </a:r>
+            <a:endParaRPr lang="en-US" sz="1250" dirty="0"/>
+          </a:p>
+        </p:txBody>
+      </p:sp>
+      <p:sp>
+        <p:nvSpPr>
+          <p:cNvPr id="14" name="Shape 12"/>
+          <p:cNvSpPr/>
+          <p:nvPr/>
+        </p:nvSpPr>
+        <p:spPr>
+          <a:xfrm>
+            <a:off x="7909560" y="3520440"/>
+            <a:ext cx="3154680" cy="1737360"/>
+          </a:xfrm>
+          <a:prstGeom prst="roundRect">
+            <a:avLst>
+              <a:gd name="adj" fmla="val 6316"/>
+            </a:avLst>
+          </a:prstGeom>
+          <a:solidFill>
+            <a:srgbClr val="EAF6F8"/>
+          </a:solidFill>
+          <a:ln w="12700">
+            <a:solidFill>
+              <a:srgbClr val="B9D7E6"/>
+            </a:solidFill>
+            <a:prstDash val="solid"/>
+          </a:ln>
+        </p:spPr>
+      </p:sp>
+      <p:sp>
+        <p:nvSpPr>
+          <p:cNvPr id="15" name="Text 13"/>
+          <p:cNvSpPr/>
+          <p:nvPr/>
+        </p:nvSpPr>
+        <p:spPr>
+          <a:xfrm>
+            <a:off x="8074152" y="3666744"/>
+            <a:ext cx="2825496" cy="201168"/>
+          </a:xfrm>
+          <a:prstGeom prst="rect">
+            <a:avLst/>
+          </a:prstGeom>
+          <a:noFill/>
+          <a:ln/>
+        </p:spPr>
+        <p:txBody>
+          <a:bodyPr wrap="square" lIns="0" tIns="0" rIns="0" bIns="0" rtlCol="0" anchor="ctr"/>
+          <a:lstStyle/>
+          <a:p>
+            <a:pPr indent="0" marL="0">
+              <a:buNone/>
+            </a:pPr>
+            <a:r>
+              <a:rPr lang="en-US" sz="950" b="1" dirty="0">
+                <a:solidFill>
+                  <a:srgbClr val="0068B7"/>
+                </a:solidFill>
+                <a:latin typeface="Aptos" pitchFamily="34" charset="0"/>
+                <a:ea typeface="Aptos" pitchFamily="34" charset="-122"/>
+                <a:cs typeface="Aptos" pitchFamily="34" charset="-120"/>
+              </a:rPr>
+              <a:t>Use this for</a:t>
+            </a:r>
+            <a:endParaRPr lang="en-US" sz="950" dirty="0"/>
+          </a:p>
+        </p:txBody>
+      </p:sp>
+      <p:sp>
+        <p:nvSpPr>
+          <p:cNvPr id="16" name="Text 14"/>
+          <p:cNvSpPr/>
+          <p:nvPr/>
+        </p:nvSpPr>
+        <p:spPr>
+          <a:xfrm>
+            <a:off x="8074152" y="3959352"/>
+            <a:ext cx="2825496" cy="1170432"/>
+          </a:xfrm>
+          <a:prstGeom prst="rect">
+            <a:avLst/>
+          </a:prstGeom>
+          <a:noFill/>
+          <a:ln/>
+        </p:spPr>
+        <p:txBody>
+          <a:bodyPr wrap="square" lIns="0" tIns="0" rIns="0" bIns="0" rtlCol="0" anchor="t">
+            <a:normAutofit/>
+          </a:bodyPr>
+          <a:lstStyle/>
+          <a:p>
+            <a:pPr indent="0" marL="0">
+              <a:buNone/>
+            </a:pPr>
+            <a:r>
+              <a:rPr lang="en-US" sz="1250" dirty="0">
+                <a:solidFill>
+                  <a:srgbClr val="17364A"/>
+                </a:solidFill>
+                <a:latin typeface="Aptos" pitchFamily="34" charset="0"/>
+                <a:ea typeface="Aptos" pitchFamily="34" charset="-122"/>
+                <a:cs typeface="Aptos" pitchFamily="34" charset="-120"/>
+              </a:rPr>
+              <a:t>Connect the concept to public health decisions, safeguards, documentation, or implementation work.</a:t>
+            </a:r>
+            <a:endParaRPr lang="en-US" sz="1250" dirty="0"/>
           </a:p>
         </p:txBody>
       </p:sp>
@@ -4575,7 +6775,32 @@
       </p:sp>
       <p:sp>
         <p:nvSpPr>
-          <p:cNvPr id="3" name="Text 1"/>
+          <p:cNvPr id="3" name="Shape 1"/>
+          <p:cNvSpPr/>
+          <p:nvPr/>
+        </p:nvSpPr>
+        <p:spPr>
+          <a:xfrm>
+            <a:off x="0" y="164592"/>
+            <a:ext cx="146304" cy="6693408"/>
+          </a:xfrm>
+          <a:prstGeom prst="rect">
+            <a:avLst/>
+          </a:prstGeom>
+          <a:solidFill>
+            <a:srgbClr val="2F8A28"/>
+          </a:solidFill>
+          <a:ln w="12700">
+            <a:solidFill>
+              <a:srgbClr val="2F8A28"/>
+            </a:solidFill>
+            <a:prstDash val="solid"/>
+          </a:ln>
+        </p:spPr>
+      </p:sp>
+      <p:sp>
+        <p:nvSpPr>
+          <p:cNvPr id="4" name="Text 2"/>
           <p:cNvSpPr/>
           <p:nvPr/>
         </p:nvSpPr>
@@ -4614,7 +6839,7 @@
       </p:sp>
       <p:sp>
         <p:nvSpPr>
-          <p:cNvPr id="4" name="Text 2"/>
+          <p:cNvPr id="5" name="Text 3"/>
           <p:cNvSpPr/>
           <p:nvPr/>
         </p:nvSpPr>
@@ -4653,7 +6878,7 @@
       </p:sp>
       <p:sp>
         <p:nvSpPr>
-          <p:cNvPr id="5" name="Text 3"/>
+          <p:cNvPr id="6" name="Text 4"/>
           <p:cNvSpPr/>
           <p:nvPr/>
         </p:nvSpPr>
@@ -4692,13 +6917,77 @@
       </p:sp>
       <p:sp>
         <p:nvSpPr>
-          <p:cNvPr id="6" name="Text 4"/>
+          <p:cNvPr id="7" name="Shape 5"/>
           <p:cNvSpPr/>
           <p:nvPr/>
         </p:nvSpPr>
         <p:spPr>
           <a:xfrm>
             <a:off x="640080" y="658368"/>
+            <a:ext cx="420624" cy="420624"/>
+          </a:xfrm>
+          <a:prstGeom prst="ellipse">
+            <a:avLst/>
+          </a:prstGeom>
+          <a:solidFill>
+            <a:srgbClr val="0068B7"/>
+          </a:solidFill>
+          <a:ln w="12700">
+            <a:solidFill>
+              <a:srgbClr val="0068B7"/>
+            </a:solidFill>
+            <a:prstDash val="solid"/>
+          </a:ln>
+        </p:spPr>
+      </p:sp>
+      <p:sp>
+        <p:nvSpPr>
+          <p:cNvPr id="8" name="Text 6"/>
+          <p:cNvSpPr/>
+          <p:nvPr/>
+        </p:nvSpPr>
+        <p:spPr>
+          <a:xfrm>
+            <a:off x="640080" y="731520"/>
+            <a:ext cx="420624" cy="164592"/>
+          </a:xfrm>
+          <a:prstGeom prst="rect">
+            <a:avLst/>
+          </a:prstGeom>
+          <a:noFill/>
+          <a:ln/>
+        </p:spPr>
+        <p:txBody>
+          <a:bodyPr wrap="square" lIns="0" tIns="0" rIns="0" bIns="0" rtlCol="0" anchor="ctr"/>
+          <a:lstStyle/>
+          <a:p>
+            <a:pPr algn="ctr" indent="0" marL="0">
+              <a:buNone/>
+            </a:pPr>
+            <a:r>
+              <a:rPr lang="en-US" sz="1100" b="1" dirty="0">
+                <a:solidFill>
+                  <a:srgbClr val="FFFFFF"/>
+                </a:solidFill>
+                <a:latin typeface="Aptos" pitchFamily="34" charset="0"/>
+                <a:ea typeface="Aptos" pitchFamily="34" charset="-122"/>
+                <a:cs typeface="Aptos" pitchFamily="34" charset="-120"/>
+              </a:rPr>
+              <a:t>8</a:t>
+            </a:r>
+            <a:endParaRPr lang="en-US" sz="1100" dirty="0"/>
+          </a:p>
+        </p:txBody>
+      </p:sp>
+      <p:sp>
+        <p:nvSpPr>
+          <p:cNvPr id="9" name="Text 7"/>
+          <p:cNvSpPr/>
+          <p:nvPr/>
+        </p:nvSpPr>
+        <p:spPr>
+          <a:xfrm>
+            <a:off x="640080" y="621792"/>
             <a:ext cx="10881360" cy="566928"/>
           </a:xfrm>
           <a:prstGeom prst="rect">
@@ -4725,7 +7014,7 @@
                 <a:ea typeface="Aptos Display" pitchFamily="34" charset="-122"/>
                 <a:cs typeface="Aptos Display" pitchFamily="34" charset="-120"/>
               </a:rPr>
-              <a:t>Expected Assignment</a:t>
+              <a:t>Expected Artifact or Evidence</a:t>
             </a:r>
             <a:endParaRPr lang="en-US" sz="2700" dirty="0"/>
           </a:p>
@@ -4733,14 +7022,14 @@
       </p:sp>
       <p:sp>
         <p:nvSpPr>
-          <p:cNvPr id="7" name="Text 5"/>
-          <p:cNvSpPr/>
-          <p:nvPr/>
-        </p:nvSpPr>
-        <p:spPr>
-          <a:xfrm>
-            <a:off x="822960" y="1325880"/>
-            <a:ext cx="10378440" cy="4800600"/>
+          <p:cNvPr id="10" name="Text 8"/>
+          <p:cNvSpPr/>
+          <p:nvPr/>
+        </p:nvSpPr>
+        <p:spPr>
+          <a:xfrm>
+            <a:off x="868680" y="1417320"/>
+            <a:ext cx="6675120" cy="4434840"/>
           </a:xfrm>
           <a:prstGeom prst="rect">
             <a:avLst/>
@@ -4755,7 +7044,7 @@
           <a:lstStyle/>
           <a:p>
             <a:r>
-              <a:rPr lang="en-US" sz="1450" dirty="0">
+              <a:rPr lang="en-US" sz="1700" dirty="0">
                 <a:solidFill>
                   <a:srgbClr val="17364A"/>
                 </a:solidFill>
@@ -4765,11 +7054,11 @@
               </a:rPr>
               <a:t>UAT plan</a:t>
             </a:r>
-            <a:endParaRPr lang="en-US" sz="1450" dirty="0"/>
-          </a:p>
-          <a:p>
-            <a:r>
-              <a:rPr lang="en-US" sz="1450" dirty="0">
+            <a:endParaRPr lang="en-US" sz="1700" dirty="0"/>
+          </a:p>
+          <a:p>
+            <a:r>
+              <a:rPr lang="en-US" sz="1700" dirty="0">
                 <a:solidFill>
                   <a:srgbClr val="17364A"/>
                 </a:solidFill>
@@ -4779,11 +7068,11 @@
               </a:rPr>
               <a:t>Role-based test scripts</a:t>
             </a:r>
-            <a:endParaRPr lang="en-US" sz="1450" dirty="0"/>
-          </a:p>
-          <a:p>
-            <a:r>
-              <a:rPr lang="en-US" sz="1450" dirty="0">
+            <a:endParaRPr lang="en-US" sz="1700" dirty="0"/>
+          </a:p>
+          <a:p>
+            <a:r>
+              <a:rPr lang="en-US" sz="1700" dirty="0">
                 <a:solidFill>
                   <a:srgbClr val="17364A"/>
                 </a:solidFill>
@@ -4793,11 +7082,104 @@
               </a:rPr>
               <a:t>Acceptance criteria</a:t>
             </a:r>
-            <a:endParaRPr lang="en-US" sz="1450" dirty="0"/>
-          </a:p>
-          <a:p>
-            <a:r>
-              <a:rPr lang="en-US" sz="1450" dirty="0">
+            <a:endParaRPr lang="en-US" sz="1700" dirty="0"/>
+          </a:p>
+        </p:txBody>
+      </p:sp>
+      <p:sp>
+        <p:nvSpPr>
+          <p:cNvPr id="11" name="Shape 9"/>
+          <p:cNvSpPr/>
+          <p:nvPr/>
+        </p:nvSpPr>
+        <p:spPr>
+          <a:xfrm>
+            <a:off x="7909560" y="1417320"/>
+            <a:ext cx="3154680" cy="1828800"/>
+          </a:xfrm>
+          <a:prstGeom prst="roundRect">
+            <a:avLst>
+              <a:gd name="adj" fmla="val 6000"/>
+            </a:avLst>
+          </a:prstGeom>
+          <a:solidFill>
+            <a:srgbClr val="EEF8ED"/>
+          </a:solidFill>
+          <a:ln w="12700">
+            <a:solidFill>
+              <a:srgbClr val="B9D7E6"/>
+            </a:solidFill>
+            <a:prstDash val="solid"/>
+          </a:ln>
+        </p:spPr>
+      </p:sp>
+      <p:sp>
+        <p:nvSpPr>
+          <p:cNvPr id="12" name="Text 10"/>
+          <p:cNvSpPr/>
+          <p:nvPr/>
+        </p:nvSpPr>
+        <p:spPr>
+          <a:xfrm>
+            <a:off x="8074152" y="1563624"/>
+            <a:ext cx="2825496" cy="201168"/>
+          </a:xfrm>
+          <a:prstGeom prst="rect">
+            <a:avLst/>
+          </a:prstGeom>
+          <a:noFill/>
+          <a:ln/>
+        </p:spPr>
+        <p:txBody>
+          <a:bodyPr wrap="square" lIns="0" tIns="0" rIns="0" bIns="0" rtlCol="0" anchor="ctr"/>
+          <a:lstStyle/>
+          <a:p>
+            <a:pPr indent="0" marL="0">
+              <a:buNone/>
+            </a:pPr>
+            <a:r>
+              <a:rPr lang="en-US" sz="950" b="1" dirty="0">
+                <a:solidFill>
+                  <a:srgbClr val="0068B7"/>
+                </a:solidFill>
+                <a:latin typeface="Aptos" pitchFamily="34" charset="0"/>
+                <a:ea typeface="Aptos" pitchFamily="34" charset="-122"/>
+                <a:cs typeface="Aptos" pitchFamily="34" charset="-120"/>
+              </a:rPr>
+              <a:t>Key idea</a:t>
+            </a:r>
+            <a:endParaRPr lang="en-US" sz="950" dirty="0"/>
+          </a:p>
+        </p:txBody>
+      </p:sp>
+      <p:sp>
+        <p:nvSpPr>
+          <p:cNvPr id="13" name="Text 11"/>
+          <p:cNvSpPr/>
+          <p:nvPr/>
+        </p:nvSpPr>
+        <p:spPr>
+          <a:xfrm>
+            <a:off x="8074152" y="1856232"/>
+            <a:ext cx="2825496" cy="1261872"/>
+          </a:xfrm>
+          <a:prstGeom prst="rect">
+            <a:avLst/>
+          </a:prstGeom>
+          <a:noFill/>
+          <a:ln/>
+        </p:spPr>
+        <p:txBody>
+          <a:bodyPr wrap="square" lIns="0" tIns="0" rIns="0" bIns="0" rtlCol="0" anchor="t">
+            <a:normAutofit/>
+          </a:bodyPr>
+          <a:lstStyle/>
+          <a:p>
+            <a:pPr indent="0" marL="0">
+              <a:buNone/>
+            </a:pPr>
+            <a:r>
+              <a:rPr lang="en-US" sz="1250" dirty="0">
                 <a:solidFill>
                   <a:srgbClr val="17364A"/>
                 </a:solidFill>
@@ -4805,13 +7187,106 @@
                 <a:ea typeface="Aptos" pitchFamily="34" charset="-122"/>
                 <a:cs typeface="Aptos" pitchFamily="34" charset="-120"/>
               </a:rPr>
-              <a:t>Issue log template</a:t>
-            </a:r>
-            <a:endParaRPr lang="en-US" sz="1450" dirty="0"/>
-          </a:p>
-          <a:p>
-            <a:r>
-              <a:rPr lang="en-US" sz="1450" dirty="0">
+              <a:t>UAT plan</a:t>
+            </a:r>
+            <a:endParaRPr lang="en-US" sz="1250" dirty="0"/>
+          </a:p>
+        </p:txBody>
+      </p:sp>
+      <p:sp>
+        <p:nvSpPr>
+          <p:cNvPr id="14" name="Shape 12"/>
+          <p:cNvSpPr/>
+          <p:nvPr/>
+        </p:nvSpPr>
+        <p:spPr>
+          <a:xfrm>
+            <a:off x="7909560" y="3520440"/>
+            <a:ext cx="3154680" cy="1737360"/>
+          </a:xfrm>
+          <a:prstGeom prst="roundRect">
+            <a:avLst>
+              <a:gd name="adj" fmla="val 6316"/>
+            </a:avLst>
+          </a:prstGeom>
+          <a:solidFill>
+            <a:srgbClr val="EAF6F8"/>
+          </a:solidFill>
+          <a:ln w="12700">
+            <a:solidFill>
+              <a:srgbClr val="B9D7E6"/>
+            </a:solidFill>
+            <a:prstDash val="solid"/>
+          </a:ln>
+        </p:spPr>
+      </p:sp>
+      <p:sp>
+        <p:nvSpPr>
+          <p:cNvPr id="15" name="Text 13"/>
+          <p:cNvSpPr/>
+          <p:nvPr/>
+        </p:nvSpPr>
+        <p:spPr>
+          <a:xfrm>
+            <a:off x="8074152" y="3666744"/>
+            <a:ext cx="2825496" cy="201168"/>
+          </a:xfrm>
+          <a:prstGeom prst="rect">
+            <a:avLst/>
+          </a:prstGeom>
+          <a:noFill/>
+          <a:ln/>
+        </p:spPr>
+        <p:txBody>
+          <a:bodyPr wrap="square" lIns="0" tIns="0" rIns="0" bIns="0" rtlCol="0" anchor="ctr"/>
+          <a:lstStyle/>
+          <a:p>
+            <a:pPr indent="0" marL="0">
+              <a:buNone/>
+            </a:pPr>
+            <a:r>
+              <a:rPr lang="en-US" sz="950" b="1" dirty="0">
+                <a:solidFill>
+                  <a:srgbClr val="0068B7"/>
+                </a:solidFill>
+                <a:latin typeface="Aptos" pitchFamily="34" charset="0"/>
+                <a:ea typeface="Aptos" pitchFamily="34" charset="-122"/>
+                <a:cs typeface="Aptos" pitchFamily="34" charset="-120"/>
+              </a:rPr>
+              <a:t>Use this for</a:t>
+            </a:r>
+            <a:endParaRPr lang="en-US" sz="950" dirty="0"/>
+          </a:p>
+        </p:txBody>
+      </p:sp>
+      <p:sp>
+        <p:nvSpPr>
+          <p:cNvPr id="16" name="Text 14"/>
+          <p:cNvSpPr/>
+          <p:nvPr/>
+        </p:nvSpPr>
+        <p:spPr>
+          <a:xfrm>
+            <a:off x="8074152" y="3959352"/>
+            <a:ext cx="2825496" cy="1170432"/>
+          </a:xfrm>
+          <a:prstGeom prst="rect">
+            <a:avLst/>
+          </a:prstGeom>
+          <a:noFill/>
+          <a:ln/>
+        </p:spPr>
+        <p:txBody>
+          <a:bodyPr wrap="square" lIns="0" tIns="0" rIns="0" bIns="0" rtlCol="0" anchor="t">
+            <a:normAutofit/>
+          </a:bodyPr>
+          <a:lstStyle/>
+          <a:p>
+            <a:pPr indent="0" marL="0">
+              <a:buNone/>
+            </a:pPr>
+            <a:r>
+              <a:rPr lang="en-US" sz="1250" dirty="0">
                 <a:solidFill>
                   <a:srgbClr val="17364A"/>
                 </a:solidFill>
@@ -4819,9 +7294,9 @@
                 <a:ea typeface="Aptos" pitchFamily="34" charset="-122"/>
                 <a:cs typeface="Aptos" pitchFamily="34" charset="-120"/>
               </a:rPr>
-              <a:t>Sign-off recommendation</a:t>
-            </a:r>
-            <a:endParaRPr lang="en-US" sz="1450" dirty="0"/>
+              <a:t>Connect the concept to public health decisions, safeguards, documentation, or implementation work.</a:t>
+            </a:r>
+            <a:endParaRPr lang="en-US" sz="1250" dirty="0"/>
           </a:p>
         </p:txBody>
       </p:sp>
@@ -4884,7 +7359,32 @@
       </p:sp>
       <p:sp>
         <p:nvSpPr>
-          <p:cNvPr id="3" name="Text 1"/>
+          <p:cNvPr id="3" name="Shape 1"/>
+          <p:cNvSpPr/>
+          <p:nvPr/>
+        </p:nvSpPr>
+        <p:spPr>
+          <a:xfrm>
+            <a:off x="0" y="164592"/>
+            <a:ext cx="146304" cy="6693408"/>
+          </a:xfrm>
+          <a:prstGeom prst="rect">
+            <a:avLst/>
+          </a:prstGeom>
+          <a:solidFill>
+            <a:srgbClr val="2F8A28"/>
+          </a:solidFill>
+          <a:ln w="12700">
+            <a:solidFill>
+              <a:srgbClr val="2F8A28"/>
+            </a:solidFill>
+            <a:prstDash val="solid"/>
+          </a:ln>
+        </p:spPr>
+      </p:sp>
+      <p:sp>
+        <p:nvSpPr>
+          <p:cNvPr id="4" name="Text 2"/>
           <p:cNvSpPr/>
           <p:nvPr/>
         </p:nvSpPr>
@@ -4923,7 +7423,7 @@
       </p:sp>
       <p:sp>
         <p:nvSpPr>
-          <p:cNvPr id="4" name="Text 2"/>
+          <p:cNvPr id="5" name="Text 3"/>
           <p:cNvSpPr/>
           <p:nvPr/>
         </p:nvSpPr>
@@ -4962,7 +7462,7 @@
       </p:sp>
       <p:sp>
         <p:nvSpPr>
-          <p:cNvPr id="5" name="Text 3"/>
+          <p:cNvPr id="6" name="Text 4"/>
           <p:cNvSpPr/>
           <p:nvPr/>
         </p:nvSpPr>
@@ -5001,7 +7501,7 @@
       </p:sp>
       <p:sp>
         <p:nvSpPr>
-          <p:cNvPr id="6" name="Text 4"/>
+          <p:cNvPr id="7" name="Text 5"/>
           <p:cNvSpPr/>
           <p:nvPr/>
         </p:nvSpPr>
@@ -5034,7 +7534,7 @@
                 <a:ea typeface="Aptos Display" pitchFamily="34" charset="-122"/>
                 <a:cs typeface="Aptos Display" pitchFamily="34" charset="-120"/>
               </a:rPr>
-              <a:t>Knowledge Check</a:t>
+              <a:t>Expected Artifact or Evidence Continued</a:t>
             </a:r>
             <a:endParaRPr lang="en-US" sz="2700" dirty="0"/>
           </a:p>
@@ -5042,14 +7542,14 @@
       </p:sp>
       <p:sp>
         <p:nvSpPr>
-          <p:cNvPr id="7" name="Text 5"/>
-          <p:cNvSpPr/>
-          <p:nvPr/>
-        </p:nvSpPr>
-        <p:spPr>
-          <a:xfrm>
-            <a:off x="822960" y="1325880"/>
-            <a:ext cx="10378440" cy="4800600"/>
+          <p:cNvPr id="8" name="Text 6"/>
+          <p:cNvSpPr/>
+          <p:nvPr/>
+        </p:nvSpPr>
+        <p:spPr>
+          <a:xfrm>
+            <a:off x="868680" y="1417320"/>
+            <a:ext cx="6675120" cy="4434840"/>
           </a:xfrm>
           <a:prstGeom prst="rect">
             <a:avLst/>
@@ -5064,7 +7564,7 @@
           <a:lstStyle/>
           <a:p>
             <a:r>
-              <a:rPr lang="en-US" sz="1450" dirty="0">
+              <a:rPr lang="en-US" sz="1700" dirty="0">
                 <a:solidFill>
                   <a:srgbClr val="17364A"/>
                 </a:solidFill>
@@ -5072,13 +7572,13 @@
                 <a:ea typeface="Aptos" pitchFamily="34" charset="-122"/>
                 <a:cs typeface="Aptos" pitchFamily="34" charset="-120"/>
               </a:rPr>
-              <a:t>1. What is the purpose of UAT for AI-supported workflows?</a:t>
-            </a:r>
-            <a:endParaRPr lang="en-US" sz="1450" dirty="0"/>
-          </a:p>
-          <a:p>
-            <a:r>
-              <a:rPr lang="en-US" sz="1450" dirty="0">
+              <a:t>Issue log template</a:t>
+            </a:r>
+            <a:endParaRPr lang="en-US" sz="1700" dirty="0"/>
+          </a:p>
+          <a:p>
+            <a:r>
+              <a:rPr lang="en-US" sz="1700" dirty="0">
                 <a:solidFill>
                   <a:srgbClr val="17364A"/>
                 </a:solidFill>
@@ -5086,13 +7586,106 @@
                 <a:ea typeface="Aptos" pitchFamily="34" charset="-122"/>
                 <a:cs typeface="Aptos" pitchFamily="34" charset="-120"/>
               </a:rPr>
-              <a:t>2. Who should participate in UAT?</a:t>
-            </a:r>
-            <a:endParaRPr lang="en-US" sz="1450" dirty="0"/>
-          </a:p>
-          <a:p>
-            <a:r>
-              <a:rPr lang="en-US" sz="1450" dirty="0">
+              <a:t>Sign-off recommendation</a:t>
+            </a:r>
+            <a:endParaRPr lang="en-US" sz="1700" dirty="0"/>
+          </a:p>
+        </p:txBody>
+      </p:sp>
+      <p:sp>
+        <p:nvSpPr>
+          <p:cNvPr id="9" name="Shape 7"/>
+          <p:cNvSpPr/>
+          <p:nvPr/>
+        </p:nvSpPr>
+        <p:spPr>
+          <a:xfrm>
+            <a:off x="7909560" y="1417320"/>
+            <a:ext cx="3154680" cy="1828800"/>
+          </a:xfrm>
+          <a:prstGeom prst="roundRect">
+            <a:avLst>
+              <a:gd name="adj" fmla="val 6000"/>
+            </a:avLst>
+          </a:prstGeom>
+          <a:solidFill>
+            <a:srgbClr val="EEF8ED"/>
+          </a:solidFill>
+          <a:ln w="12700">
+            <a:solidFill>
+              <a:srgbClr val="B9D7E6"/>
+            </a:solidFill>
+            <a:prstDash val="solid"/>
+          </a:ln>
+        </p:spPr>
+      </p:sp>
+      <p:sp>
+        <p:nvSpPr>
+          <p:cNvPr id="10" name="Text 8"/>
+          <p:cNvSpPr/>
+          <p:nvPr/>
+        </p:nvSpPr>
+        <p:spPr>
+          <a:xfrm>
+            <a:off x="8074152" y="1563624"/>
+            <a:ext cx="2825496" cy="201168"/>
+          </a:xfrm>
+          <a:prstGeom prst="rect">
+            <a:avLst/>
+          </a:prstGeom>
+          <a:noFill/>
+          <a:ln/>
+        </p:spPr>
+        <p:txBody>
+          <a:bodyPr wrap="square" lIns="0" tIns="0" rIns="0" bIns="0" rtlCol="0" anchor="ctr"/>
+          <a:lstStyle/>
+          <a:p>
+            <a:pPr indent="0" marL="0">
+              <a:buNone/>
+            </a:pPr>
+            <a:r>
+              <a:rPr lang="en-US" sz="950" b="1" dirty="0">
+                <a:solidFill>
+                  <a:srgbClr val="0068B7"/>
+                </a:solidFill>
+                <a:latin typeface="Aptos" pitchFamily="34" charset="0"/>
+                <a:ea typeface="Aptos" pitchFamily="34" charset="-122"/>
+                <a:cs typeface="Aptos" pitchFamily="34" charset="-120"/>
+              </a:rPr>
+              <a:t>Key idea</a:t>
+            </a:r>
+            <a:endParaRPr lang="en-US" sz="950" dirty="0"/>
+          </a:p>
+        </p:txBody>
+      </p:sp>
+      <p:sp>
+        <p:nvSpPr>
+          <p:cNvPr id="11" name="Text 9"/>
+          <p:cNvSpPr/>
+          <p:nvPr/>
+        </p:nvSpPr>
+        <p:spPr>
+          <a:xfrm>
+            <a:off x="8074152" y="1856232"/>
+            <a:ext cx="2825496" cy="1261872"/>
+          </a:xfrm>
+          <a:prstGeom prst="rect">
+            <a:avLst/>
+          </a:prstGeom>
+          <a:noFill/>
+          <a:ln/>
+        </p:spPr>
+        <p:txBody>
+          <a:bodyPr wrap="square" lIns="0" tIns="0" rIns="0" bIns="0" rtlCol="0" anchor="t">
+            <a:normAutofit/>
+          </a:bodyPr>
+          <a:lstStyle/>
+          <a:p>
+            <a:pPr indent="0" marL="0">
+              <a:buNone/>
+            </a:pPr>
+            <a:r>
+              <a:rPr lang="en-US" sz="1250" dirty="0">
                 <a:solidFill>
                   <a:srgbClr val="17364A"/>
                 </a:solidFill>
@@ -5100,13 +7693,106 @@
                 <a:ea typeface="Aptos" pitchFamily="34" charset="-122"/>
                 <a:cs typeface="Aptos" pitchFamily="34" charset="-120"/>
               </a:rPr>
-              <a:t>3. Which scenario should be included in AI UAT?</a:t>
-            </a:r>
-            <a:endParaRPr lang="en-US" sz="1450" dirty="0"/>
-          </a:p>
-          <a:p>
-            <a:r>
-              <a:rPr lang="en-US" sz="1450" dirty="0">
+              <a:t>Issue log template</a:t>
+            </a:r>
+            <a:endParaRPr lang="en-US" sz="1250" dirty="0"/>
+          </a:p>
+        </p:txBody>
+      </p:sp>
+      <p:sp>
+        <p:nvSpPr>
+          <p:cNvPr id="12" name="Shape 10"/>
+          <p:cNvSpPr/>
+          <p:nvPr/>
+        </p:nvSpPr>
+        <p:spPr>
+          <a:xfrm>
+            <a:off x="7909560" y="3520440"/>
+            <a:ext cx="3154680" cy="1737360"/>
+          </a:xfrm>
+          <a:prstGeom prst="roundRect">
+            <a:avLst>
+              <a:gd name="adj" fmla="val 6316"/>
+            </a:avLst>
+          </a:prstGeom>
+          <a:solidFill>
+            <a:srgbClr val="EAF6F8"/>
+          </a:solidFill>
+          <a:ln w="12700">
+            <a:solidFill>
+              <a:srgbClr val="B9D7E6"/>
+            </a:solidFill>
+            <a:prstDash val="solid"/>
+          </a:ln>
+        </p:spPr>
+      </p:sp>
+      <p:sp>
+        <p:nvSpPr>
+          <p:cNvPr id="13" name="Text 11"/>
+          <p:cNvSpPr/>
+          <p:nvPr/>
+        </p:nvSpPr>
+        <p:spPr>
+          <a:xfrm>
+            <a:off x="8074152" y="3666744"/>
+            <a:ext cx="2825496" cy="201168"/>
+          </a:xfrm>
+          <a:prstGeom prst="rect">
+            <a:avLst/>
+          </a:prstGeom>
+          <a:noFill/>
+          <a:ln/>
+        </p:spPr>
+        <p:txBody>
+          <a:bodyPr wrap="square" lIns="0" tIns="0" rIns="0" bIns="0" rtlCol="0" anchor="ctr"/>
+          <a:lstStyle/>
+          <a:p>
+            <a:pPr indent="0" marL="0">
+              <a:buNone/>
+            </a:pPr>
+            <a:r>
+              <a:rPr lang="en-US" sz="950" b="1" dirty="0">
+                <a:solidFill>
+                  <a:srgbClr val="0068B7"/>
+                </a:solidFill>
+                <a:latin typeface="Aptos" pitchFamily="34" charset="0"/>
+                <a:ea typeface="Aptos" pitchFamily="34" charset="-122"/>
+                <a:cs typeface="Aptos" pitchFamily="34" charset="-120"/>
+              </a:rPr>
+              <a:t>Use this for</a:t>
+            </a:r>
+            <a:endParaRPr lang="en-US" sz="950" dirty="0"/>
+          </a:p>
+        </p:txBody>
+      </p:sp>
+      <p:sp>
+        <p:nvSpPr>
+          <p:cNvPr id="14" name="Text 12"/>
+          <p:cNvSpPr/>
+          <p:nvPr/>
+        </p:nvSpPr>
+        <p:spPr>
+          <a:xfrm>
+            <a:off x="8074152" y="3959352"/>
+            <a:ext cx="2825496" cy="1170432"/>
+          </a:xfrm>
+          <a:prstGeom prst="rect">
+            <a:avLst/>
+          </a:prstGeom>
+          <a:noFill/>
+          <a:ln/>
+        </p:spPr>
+        <p:txBody>
+          <a:bodyPr wrap="square" lIns="0" tIns="0" rIns="0" bIns="0" rtlCol="0" anchor="t">
+            <a:normAutofit/>
+          </a:bodyPr>
+          <a:lstStyle/>
+          <a:p>
+            <a:pPr indent="0" marL="0">
+              <a:buNone/>
+            </a:pPr>
+            <a:r>
+              <a:rPr lang="en-US" sz="1250" dirty="0">
                 <a:solidFill>
                   <a:srgbClr val="17364A"/>
                 </a:solidFill>
@@ -5114,23 +7800,9 @@
                 <a:ea typeface="Aptos" pitchFamily="34" charset="-122"/>
                 <a:cs typeface="Aptos" pitchFamily="34" charset="-120"/>
               </a:rPr>
-              <a:t>4. What should happen to UAT issues?</a:t>
-            </a:r>
-            <a:endParaRPr lang="en-US" sz="1450" dirty="0"/>
-          </a:p>
-          <a:p>
-            <a:r>
-              <a:rPr lang="en-US" sz="1450" dirty="0">
-                <a:solidFill>
-                  <a:srgbClr val="17364A"/>
-                </a:solidFill>
-                <a:latin typeface="Aptos" pitchFamily="34" charset="0"/>
-                <a:ea typeface="Aptos" pitchFamily="34" charset="-122"/>
-                <a:cs typeface="Aptos" pitchFamily="34" charset="-120"/>
-              </a:rPr>
-              <a:t>5. What is strong completion evidence?</a:t>
-            </a:r>
-            <a:endParaRPr lang="en-US" sz="1450" dirty="0"/>
+              <a:t>Connect the concept to public health decisions, safeguards, documentation, or implementation work.</a:t>
+            </a:r>
+            <a:endParaRPr lang="en-US" sz="1250" dirty="0"/>
           </a:p>
         </p:txBody>
       </p:sp>
@@ -5193,7 +7865,32 @@
       </p:sp>
       <p:sp>
         <p:nvSpPr>
-          <p:cNvPr id="3" name="Text 1"/>
+          <p:cNvPr id="3" name="Shape 1"/>
+          <p:cNvSpPr/>
+          <p:nvPr/>
+        </p:nvSpPr>
+        <p:spPr>
+          <a:xfrm>
+            <a:off x="0" y="164592"/>
+            <a:ext cx="146304" cy="6693408"/>
+          </a:xfrm>
+          <a:prstGeom prst="rect">
+            <a:avLst/>
+          </a:prstGeom>
+          <a:solidFill>
+            <a:srgbClr val="2F8A28"/>
+          </a:solidFill>
+          <a:ln w="12700">
+            <a:solidFill>
+              <a:srgbClr val="2F8A28"/>
+            </a:solidFill>
+            <a:prstDash val="solid"/>
+          </a:ln>
+        </p:spPr>
+      </p:sp>
+      <p:sp>
+        <p:nvSpPr>
+          <p:cNvPr id="4" name="Text 2"/>
           <p:cNvSpPr/>
           <p:nvPr/>
         </p:nvSpPr>
@@ -5232,7 +7929,7 @@
       </p:sp>
       <p:sp>
         <p:nvSpPr>
-          <p:cNvPr id="4" name="Text 2"/>
+          <p:cNvPr id="5" name="Text 3"/>
           <p:cNvSpPr/>
           <p:nvPr/>
         </p:nvSpPr>
@@ -5271,7 +7968,7 @@
       </p:sp>
       <p:sp>
         <p:nvSpPr>
-          <p:cNvPr id="5" name="Text 3"/>
+          <p:cNvPr id="6" name="Text 4"/>
           <p:cNvSpPr/>
           <p:nvPr/>
         </p:nvSpPr>
@@ -5310,13 +8007,77 @@
       </p:sp>
       <p:sp>
         <p:nvSpPr>
-          <p:cNvPr id="6" name="Text 4"/>
+          <p:cNvPr id="7" name="Shape 5"/>
           <p:cNvSpPr/>
           <p:nvPr/>
         </p:nvSpPr>
         <p:spPr>
           <a:xfrm>
             <a:off x="640080" y="658368"/>
+            <a:ext cx="420624" cy="420624"/>
+          </a:xfrm>
+          <a:prstGeom prst="ellipse">
+            <a:avLst/>
+          </a:prstGeom>
+          <a:solidFill>
+            <a:srgbClr val="0068B7"/>
+          </a:solidFill>
+          <a:ln w="12700">
+            <a:solidFill>
+              <a:srgbClr val="0068B7"/>
+            </a:solidFill>
+            <a:prstDash val="solid"/>
+          </a:ln>
+        </p:spPr>
+      </p:sp>
+      <p:sp>
+        <p:nvSpPr>
+          <p:cNvPr id="8" name="Text 6"/>
+          <p:cNvSpPr/>
+          <p:nvPr/>
+        </p:nvSpPr>
+        <p:spPr>
+          <a:xfrm>
+            <a:off x="640080" y="731520"/>
+            <a:ext cx="420624" cy="164592"/>
+          </a:xfrm>
+          <a:prstGeom prst="rect">
+            <a:avLst/>
+          </a:prstGeom>
+          <a:noFill/>
+          <a:ln/>
+        </p:spPr>
+        <p:txBody>
+          <a:bodyPr wrap="square" lIns="0" tIns="0" rIns="0" bIns="0" rtlCol="0" anchor="ctr"/>
+          <a:lstStyle/>
+          <a:p>
+            <a:pPr algn="ctr" indent="0" marL="0">
+              <a:buNone/>
+            </a:pPr>
+            <a:r>
+              <a:rPr lang="en-US" sz="1100" b="1" dirty="0">
+                <a:solidFill>
+                  <a:srgbClr val="FFFFFF"/>
+                </a:solidFill>
+                <a:latin typeface="Aptos" pitchFamily="34" charset="0"/>
+                <a:ea typeface="Aptos" pitchFamily="34" charset="-122"/>
+                <a:cs typeface="Aptos" pitchFamily="34" charset="-120"/>
+              </a:rPr>
+              <a:t>9</a:t>
+            </a:r>
+            <a:endParaRPr lang="en-US" sz="1100" dirty="0"/>
+          </a:p>
+        </p:txBody>
+      </p:sp>
+      <p:sp>
+        <p:nvSpPr>
+          <p:cNvPr id="9" name="Text 7"/>
+          <p:cNvSpPr/>
+          <p:nvPr/>
+        </p:nvSpPr>
+        <p:spPr>
+          <a:xfrm>
+            <a:off x="640080" y="621792"/>
             <a:ext cx="10881360" cy="566928"/>
           </a:xfrm>
           <a:prstGeom prst="rect">
@@ -5343,7 +8104,7 @@
                 <a:ea typeface="Aptos Display" pitchFamily="34" charset="-122"/>
                 <a:cs typeface="Aptos Display" pitchFamily="34" charset="-120"/>
               </a:rPr>
-              <a:t>References and Resources</a:t>
+              <a:t>Expected Assignment</a:t>
             </a:r>
             <a:endParaRPr lang="en-US" sz="2700" dirty="0"/>
           </a:p>
@@ -5351,14 +8112,14 @@
       </p:sp>
       <p:sp>
         <p:nvSpPr>
-          <p:cNvPr id="7" name="Text 5"/>
-          <p:cNvSpPr/>
-          <p:nvPr/>
-        </p:nvSpPr>
-        <p:spPr>
-          <a:xfrm>
-            <a:off x="822960" y="1325880"/>
-            <a:ext cx="10378440" cy="4800600"/>
+          <p:cNvPr id="10" name="Text 8"/>
+          <p:cNvSpPr/>
+          <p:nvPr/>
+        </p:nvSpPr>
+        <p:spPr>
+          <a:xfrm>
+            <a:off x="868680" y="1417320"/>
+            <a:ext cx="6675120" cy="4434840"/>
           </a:xfrm>
           <a:prstGeom prst="rect">
             <a:avLst/>
@@ -5373,7 +8134,7 @@
           <a:lstStyle/>
           <a:p>
             <a:r>
-              <a:rPr lang="en-US" sz="1450" dirty="0">
+              <a:rPr lang="en-US" sz="1700" dirty="0">
                 <a:solidFill>
                   <a:srgbClr val="17364A"/>
                 </a:solidFill>
@@ -5381,13 +8142,13 @@
                 <a:ea typeface="Aptos" pitchFamily="34" charset="-122"/>
                 <a:cs typeface="Aptos" pitchFamily="34" charset="-120"/>
               </a:rPr>
-              <a:t>CDC Evaluation Framework: https://www.cdc.gov/evaluation/</a:t>
-            </a:r>
-            <a:endParaRPr lang="en-US" sz="1450" dirty="0"/>
-          </a:p>
-          <a:p>
-            <a:r>
-              <a:rPr lang="en-US" sz="1450" dirty="0">
+              <a:t>UAT plan</a:t>
+            </a:r>
+            <a:endParaRPr lang="en-US" sz="1700" dirty="0"/>
+          </a:p>
+          <a:p>
+            <a:r>
+              <a:rPr lang="en-US" sz="1700" dirty="0">
                 <a:solidFill>
                   <a:srgbClr val="17364A"/>
                 </a:solidFill>
@@ -5395,13 +8156,13 @@
                 <a:ea typeface="Aptos" pitchFamily="34" charset="-122"/>
                 <a:cs typeface="Aptos" pitchFamily="34" charset="-120"/>
               </a:rPr>
-              <a:t>NIST Artificial Intelligence Risk Management Framework: https://www.nist.gov/itl/ai-risk-management-framework</a:t>
-            </a:r>
-            <a:endParaRPr lang="en-US" sz="1450" dirty="0"/>
-          </a:p>
-          <a:p>
-            <a:r>
-              <a:rPr lang="en-US" sz="1450" dirty="0">
+              <a:t>Role-based test scripts</a:t>
+            </a:r>
+            <a:endParaRPr lang="en-US" sz="1700" dirty="0"/>
+          </a:p>
+          <a:p>
+            <a:r>
+              <a:rPr lang="en-US" sz="1700" dirty="0">
                 <a:solidFill>
                   <a:srgbClr val="17364A"/>
                 </a:solidFill>
@@ -5409,13 +8170,13 @@
                 <a:ea typeface="Aptos" pitchFamily="34" charset="-122"/>
                 <a:cs typeface="Aptos" pitchFamily="34" charset="-120"/>
               </a:rPr>
-              <a:t>NIST AI RMF Generative AI Profile: https://www.nist.gov/publications/artificial-intelligence-risk-management-framework-generative-artificial-intelligence</a:t>
-            </a:r>
-            <a:endParaRPr lang="en-US" sz="1450" dirty="0"/>
-          </a:p>
-          <a:p>
-            <a:r>
-              <a:rPr lang="en-US" sz="1450" dirty="0">
+              <a:t>Acceptance criteria</a:t>
+            </a:r>
+            <a:endParaRPr lang="en-US" sz="1700" dirty="0"/>
+          </a:p>
+          <a:p>
+            <a:r>
+              <a:rPr lang="en-US" sz="1700" dirty="0">
                 <a:solidFill>
                   <a:srgbClr val="17364A"/>
                 </a:solidFill>
@@ -5423,13 +8184,106 @@
                 <a:ea typeface="Aptos" pitchFamily="34" charset="-122"/>
                 <a:cs typeface="Aptos" pitchFamily="34" charset="-120"/>
               </a:rPr>
-              <a:t>CDC Public Health Data Strategy: https://www.cdc.gov/public-health-data-strategy/php/about/index.html</a:t>
-            </a:r>
-            <a:endParaRPr lang="en-US" sz="1450" dirty="0"/>
-          </a:p>
-          <a:p>
-            <a:r>
-              <a:rPr lang="en-US" sz="1450" dirty="0">
+              <a:t>Issue log template</a:t>
+            </a:r>
+            <a:endParaRPr lang="en-US" sz="1700" dirty="0"/>
+          </a:p>
+        </p:txBody>
+      </p:sp>
+      <p:sp>
+        <p:nvSpPr>
+          <p:cNvPr id="11" name="Shape 9"/>
+          <p:cNvSpPr/>
+          <p:nvPr/>
+        </p:nvSpPr>
+        <p:spPr>
+          <a:xfrm>
+            <a:off x="7909560" y="1417320"/>
+            <a:ext cx="3154680" cy="1828800"/>
+          </a:xfrm>
+          <a:prstGeom prst="roundRect">
+            <a:avLst>
+              <a:gd name="adj" fmla="val 6000"/>
+            </a:avLst>
+          </a:prstGeom>
+          <a:solidFill>
+            <a:srgbClr val="EEF8ED"/>
+          </a:solidFill>
+          <a:ln w="12700">
+            <a:solidFill>
+              <a:srgbClr val="B9D7E6"/>
+            </a:solidFill>
+            <a:prstDash val="solid"/>
+          </a:ln>
+        </p:spPr>
+      </p:sp>
+      <p:sp>
+        <p:nvSpPr>
+          <p:cNvPr id="12" name="Text 10"/>
+          <p:cNvSpPr/>
+          <p:nvPr/>
+        </p:nvSpPr>
+        <p:spPr>
+          <a:xfrm>
+            <a:off x="8074152" y="1563624"/>
+            <a:ext cx="2825496" cy="201168"/>
+          </a:xfrm>
+          <a:prstGeom prst="rect">
+            <a:avLst/>
+          </a:prstGeom>
+          <a:noFill/>
+          <a:ln/>
+        </p:spPr>
+        <p:txBody>
+          <a:bodyPr wrap="square" lIns="0" tIns="0" rIns="0" bIns="0" rtlCol="0" anchor="ctr"/>
+          <a:lstStyle/>
+          <a:p>
+            <a:pPr indent="0" marL="0">
+              <a:buNone/>
+            </a:pPr>
+            <a:r>
+              <a:rPr lang="en-US" sz="950" b="1" dirty="0">
+                <a:solidFill>
+                  <a:srgbClr val="0068B7"/>
+                </a:solidFill>
+                <a:latin typeface="Aptos" pitchFamily="34" charset="0"/>
+                <a:ea typeface="Aptos" pitchFamily="34" charset="-122"/>
+                <a:cs typeface="Aptos" pitchFamily="34" charset="-120"/>
+              </a:rPr>
+              <a:t>Key idea</a:t>
+            </a:r>
+            <a:endParaRPr lang="en-US" sz="950" dirty="0"/>
+          </a:p>
+        </p:txBody>
+      </p:sp>
+      <p:sp>
+        <p:nvSpPr>
+          <p:cNvPr id="13" name="Text 11"/>
+          <p:cNvSpPr/>
+          <p:nvPr/>
+        </p:nvSpPr>
+        <p:spPr>
+          <a:xfrm>
+            <a:off x="8074152" y="1856232"/>
+            <a:ext cx="2825496" cy="1261872"/>
+          </a:xfrm>
+          <a:prstGeom prst="rect">
+            <a:avLst/>
+          </a:prstGeom>
+          <a:noFill/>
+          <a:ln/>
+        </p:spPr>
+        <p:txBody>
+          <a:bodyPr wrap="square" lIns="0" tIns="0" rIns="0" bIns="0" rtlCol="0" anchor="t">
+            <a:normAutofit/>
+          </a:bodyPr>
+          <a:lstStyle/>
+          <a:p>
+            <a:pPr indent="0" marL="0">
+              <a:buNone/>
+            </a:pPr>
+            <a:r>
+              <a:rPr lang="en-US" sz="1250" dirty="0">
                 <a:solidFill>
                   <a:srgbClr val="17364A"/>
                 </a:solidFill>
@@ -5437,9 +8291,116 @@
                 <a:ea typeface="Aptos" pitchFamily="34" charset="-122"/>
                 <a:cs typeface="Aptos" pitchFamily="34" charset="-120"/>
               </a:rPr>
-              <a:t>Agency user acceptance testing, quality assurance, accessibility, and implementation policies</a:t>
-            </a:r>
-            <a:endParaRPr lang="en-US" sz="1450" dirty="0"/>
+              <a:t>UAT plan</a:t>
+            </a:r>
+            <a:endParaRPr lang="en-US" sz="1250" dirty="0"/>
+          </a:p>
+        </p:txBody>
+      </p:sp>
+      <p:sp>
+        <p:nvSpPr>
+          <p:cNvPr id="14" name="Shape 12"/>
+          <p:cNvSpPr/>
+          <p:nvPr/>
+        </p:nvSpPr>
+        <p:spPr>
+          <a:xfrm>
+            <a:off x="7909560" y="3520440"/>
+            <a:ext cx="3154680" cy="1737360"/>
+          </a:xfrm>
+          <a:prstGeom prst="roundRect">
+            <a:avLst>
+              <a:gd name="adj" fmla="val 6316"/>
+            </a:avLst>
+          </a:prstGeom>
+          <a:solidFill>
+            <a:srgbClr val="EAF6F8"/>
+          </a:solidFill>
+          <a:ln w="12700">
+            <a:solidFill>
+              <a:srgbClr val="B9D7E6"/>
+            </a:solidFill>
+            <a:prstDash val="solid"/>
+          </a:ln>
+        </p:spPr>
+      </p:sp>
+      <p:sp>
+        <p:nvSpPr>
+          <p:cNvPr id="15" name="Text 13"/>
+          <p:cNvSpPr/>
+          <p:nvPr/>
+        </p:nvSpPr>
+        <p:spPr>
+          <a:xfrm>
+            <a:off x="8074152" y="3666744"/>
+            <a:ext cx="2825496" cy="201168"/>
+          </a:xfrm>
+          <a:prstGeom prst="rect">
+            <a:avLst/>
+          </a:prstGeom>
+          <a:noFill/>
+          <a:ln/>
+        </p:spPr>
+        <p:txBody>
+          <a:bodyPr wrap="square" lIns="0" tIns="0" rIns="0" bIns="0" rtlCol="0" anchor="ctr"/>
+          <a:lstStyle/>
+          <a:p>
+            <a:pPr indent="0" marL="0">
+              <a:buNone/>
+            </a:pPr>
+            <a:r>
+              <a:rPr lang="en-US" sz="950" b="1" dirty="0">
+                <a:solidFill>
+                  <a:srgbClr val="0068B7"/>
+                </a:solidFill>
+                <a:latin typeface="Aptos" pitchFamily="34" charset="0"/>
+                <a:ea typeface="Aptos" pitchFamily="34" charset="-122"/>
+                <a:cs typeface="Aptos" pitchFamily="34" charset="-120"/>
+              </a:rPr>
+              <a:t>Use this for</a:t>
+            </a:r>
+            <a:endParaRPr lang="en-US" sz="950" dirty="0"/>
+          </a:p>
+        </p:txBody>
+      </p:sp>
+      <p:sp>
+        <p:nvSpPr>
+          <p:cNvPr id="16" name="Text 14"/>
+          <p:cNvSpPr/>
+          <p:nvPr/>
+        </p:nvSpPr>
+        <p:spPr>
+          <a:xfrm>
+            <a:off x="8074152" y="3959352"/>
+            <a:ext cx="2825496" cy="1170432"/>
+          </a:xfrm>
+          <a:prstGeom prst="rect">
+            <a:avLst/>
+          </a:prstGeom>
+          <a:noFill/>
+          <a:ln/>
+        </p:spPr>
+        <p:txBody>
+          <a:bodyPr wrap="square" lIns="0" tIns="0" rIns="0" bIns="0" rtlCol="0" anchor="t">
+            <a:normAutofit/>
+          </a:bodyPr>
+          <a:lstStyle/>
+          <a:p>
+            <a:pPr indent="0" marL="0">
+              <a:buNone/>
+            </a:pPr>
+            <a:r>
+              <a:rPr lang="en-US" sz="1250" dirty="0">
+                <a:solidFill>
+                  <a:srgbClr val="17364A"/>
+                </a:solidFill>
+                <a:latin typeface="Aptos" pitchFamily="34" charset="0"/>
+                <a:ea typeface="Aptos" pitchFamily="34" charset="-122"/>
+                <a:cs typeface="Aptos" pitchFamily="34" charset="-120"/>
+              </a:rPr>
+              <a:t>Connect the concept to public health decisions, safeguards, documentation, or implementation work.</a:t>
+            </a:r>
+            <a:endParaRPr lang="en-US" sz="1250" dirty="0"/>
           </a:p>
         </p:txBody>
       </p:sp>
@@ -5502,7 +8463,32 @@
       </p:sp>
       <p:sp>
         <p:nvSpPr>
-          <p:cNvPr id="3" name="Text 1"/>
+          <p:cNvPr id="3" name="Shape 1"/>
+          <p:cNvSpPr/>
+          <p:nvPr/>
+        </p:nvSpPr>
+        <p:spPr>
+          <a:xfrm>
+            <a:off x="0" y="164592"/>
+            <a:ext cx="146304" cy="6693408"/>
+          </a:xfrm>
+          <a:prstGeom prst="rect">
+            <a:avLst/>
+          </a:prstGeom>
+          <a:solidFill>
+            <a:srgbClr val="2F8A28"/>
+          </a:solidFill>
+          <a:ln w="12700">
+            <a:solidFill>
+              <a:srgbClr val="2F8A28"/>
+            </a:solidFill>
+            <a:prstDash val="solid"/>
+          </a:ln>
+        </p:spPr>
+      </p:sp>
+      <p:sp>
+        <p:nvSpPr>
+          <p:cNvPr id="4" name="Text 2"/>
           <p:cNvSpPr/>
           <p:nvPr/>
         </p:nvSpPr>
@@ -5541,7 +8527,7 @@
       </p:sp>
       <p:sp>
         <p:nvSpPr>
-          <p:cNvPr id="4" name="Text 2"/>
+          <p:cNvPr id="5" name="Text 3"/>
           <p:cNvSpPr/>
           <p:nvPr/>
         </p:nvSpPr>
@@ -5580,7 +8566,7 @@
       </p:sp>
       <p:sp>
         <p:nvSpPr>
-          <p:cNvPr id="5" name="Text 3"/>
+          <p:cNvPr id="6" name="Text 4"/>
           <p:cNvSpPr/>
           <p:nvPr/>
         </p:nvSpPr>
@@ -5619,7 +8605,7 @@
       </p:sp>
       <p:sp>
         <p:nvSpPr>
-          <p:cNvPr id="6" name="Text 4"/>
+          <p:cNvPr id="7" name="Text 5"/>
           <p:cNvSpPr/>
           <p:nvPr/>
         </p:nvSpPr>
@@ -5652,7 +8638,7 @@
                 <a:ea typeface="Aptos Display" pitchFamily="34" charset="-122"/>
                 <a:cs typeface="Aptos Display" pitchFamily="34" charset="-120"/>
               </a:rPr>
-              <a:t>Module Context</a:t>
+              <a:t>What this module helps you do</a:t>
             </a:r>
             <a:endParaRPr lang="en-US" sz="2700" dirty="0"/>
           </a:p>
@@ -5660,14 +8646,14 @@
       </p:sp>
       <p:sp>
         <p:nvSpPr>
-          <p:cNvPr id="7" name="Text 5"/>
-          <p:cNvSpPr/>
-          <p:nvPr/>
-        </p:nvSpPr>
-        <p:spPr>
-          <a:xfrm>
-            <a:off x="822960" y="1325880"/>
-            <a:ext cx="10378440" cy="1371600"/>
+          <p:cNvPr id="8" name="Text 6"/>
+          <p:cNvSpPr/>
+          <p:nvPr/>
+        </p:nvSpPr>
+        <p:spPr>
+          <a:xfrm>
+            <a:off x="868680" y="1417320"/>
+            <a:ext cx="6675120" cy="3291840"/>
           </a:xfrm>
           <a:prstGeom prst="rect">
             <a:avLst/>
@@ -5682,7 +8668,7 @@
           <a:lstStyle/>
           <a:p>
             <a:r>
-              <a:rPr lang="en-US" sz="1600" dirty="0">
+              <a:rPr lang="en-US" sz="1700" dirty="0">
                 <a:solidFill>
                   <a:srgbClr val="17364A"/>
                 </a:solidFill>
@@ -5690,13 +8676,13 @@
                 <a:ea typeface="Aptos" pitchFamily="34" charset="-122"/>
                 <a:cs typeface="Aptos" pitchFamily="34" charset="-120"/>
               </a:rPr>
-              <a:t>Level: applied/foundational</a:t>
-            </a:r>
-            <a:endParaRPr lang="en-US" sz="1600" dirty="0"/>
-          </a:p>
-          <a:p>
-            <a:r>
-              <a:rPr lang="en-US" sz="1600" dirty="0">
+              <a:t>User acceptance testing is the process of determining whether an AI-supported workflow is usable, understandable, safe, and ready for real users in.</a:t>
+            </a:r>
+            <a:endParaRPr lang="en-US" sz="1700" dirty="0"/>
+          </a:p>
+          <a:p>
+            <a:r>
+              <a:rPr lang="en-US" sz="1700" dirty="0">
                 <a:solidFill>
                   <a:srgbClr val="17364A"/>
                 </a:solidFill>
@@ -5704,13 +8690,13 @@
                 <a:ea typeface="Aptos" pitchFamily="34" charset="-122"/>
                 <a:cs typeface="Aptos" pitchFamily="34" charset="-120"/>
               </a:rPr>
-              <a:t>Primary track: Operations and Data Quality Track</a:t>
-            </a:r>
-            <a:endParaRPr lang="en-US" sz="1600" dirty="0"/>
-          </a:p>
-          <a:p>
-            <a:r>
-              <a:rPr lang="en-US" sz="1600" dirty="0">
+              <a:t>Technical testing may show that a tool runs, and model validation may show acceptable performance, but neither proves that staff can use the.</a:t>
+            </a:r>
+            <a:endParaRPr lang="en-US" sz="1700" dirty="0"/>
+          </a:p>
+          <a:p>
+            <a:r>
+              <a:rPr lang="en-US" sz="1700" dirty="0">
                 <a:solidFill>
                   <a:srgbClr val="17364A"/>
                 </a:solidFill>
@@ -5718,31 +8704,111 @@
                 <a:ea typeface="Aptos" pitchFamily="34" charset="-122"/>
                 <a:cs typeface="Aptos" pitchFamily="34" charset="-120"/>
               </a:rPr>
-              <a:t>Appears in tracks: operations-and-data-quality, program-management, technical-architecture, analytics-and-modeling</a:t>
-            </a:r>
-            <a:endParaRPr lang="en-US" sz="1600" dirty="0"/>
-          </a:p>
-        </p:txBody>
-      </p:sp>
-      <p:sp>
-        <p:nvSpPr>
-          <p:cNvPr id="8" name="Text 6"/>
-          <p:cNvSpPr/>
-          <p:nvPr/>
-        </p:nvSpPr>
-        <p:spPr>
-          <a:xfrm>
-            <a:off x="822960" y="2743200"/>
-            <a:ext cx="10378440" cy="2834640"/>
-          </a:xfrm>
-          <a:prstGeom prst="rect">
-            <a:avLst/>
-          </a:prstGeom>
-          <a:noFill/>
-          <a:ln/>
-        </p:spPr>
-        <p:txBody>
-          <a:bodyPr wrap="square" lIns="1016" tIns="1016" rIns="1016" bIns="1016" rtlCol="0" anchor="t">
+              <a:t>UAT fills that gap.</a:t>
+            </a:r>
+            <a:endParaRPr lang="en-US" sz="1700" dirty="0"/>
+          </a:p>
+          <a:p>
+            <a:r>
+              <a:rPr lang="en-US" sz="1700" dirty="0">
+                <a:solidFill>
+                  <a:srgbClr val="17364A"/>
+                </a:solidFill>
+                <a:latin typeface="Aptos" pitchFamily="34" charset="0"/>
+                <a:ea typeface="Aptos" pitchFamily="34" charset="-122"/>
+                <a:cs typeface="Aptos" pitchFamily="34" charset="-120"/>
+              </a:rPr>
+              <a:t>This module teaches learners how to design and conduct user acceptance testing for AI-supported workflows.</a:t>
+            </a:r>
+            <a:endParaRPr lang="en-US" sz="1700" dirty="0"/>
+          </a:p>
+        </p:txBody>
+      </p:sp>
+      <p:sp>
+        <p:nvSpPr>
+          <p:cNvPr id="9" name="Shape 7"/>
+          <p:cNvSpPr/>
+          <p:nvPr/>
+        </p:nvSpPr>
+        <p:spPr>
+          <a:xfrm>
+            <a:off x="7909560" y="1417320"/>
+            <a:ext cx="3154680" cy="1920240"/>
+          </a:xfrm>
+          <a:prstGeom prst="roundRect">
+            <a:avLst>
+              <a:gd name="adj" fmla="val 5714"/>
+            </a:avLst>
+          </a:prstGeom>
+          <a:solidFill>
+            <a:srgbClr val="EAF6F8"/>
+          </a:solidFill>
+          <a:ln w="12700">
+            <a:solidFill>
+              <a:srgbClr val="B9D7E6"/>
+            </a:solidFill>
+            <a:prstDash val="solid"/>
+          </a:ln>
+        </p:spPr>
+      </p:sp>
+      <p:sp>
+        <p:nvSpPr>
+          <p:cNvPr id="10" name="Text 8"/>
+          <p:cNvSpPr/>
+          <p:nvPr/>
+        </p:nvSpPr>
+        <p:spPr>
+          <a:xfrm>
+            <a:off x="8074152" y="1563624"/>
+            <a:ext cx="2825496" cy="201168"/>
+          </a:xfrm>
+          <a:prstGeom prst="rect">
+            <a:avLst/>
+          </a:prstGeom>
+          <a:noFill/>
+          <a:ln/>
+        </p:spPr>
+        <p:txBody>
+          <a:bodyPr wrap="square" lIns="0" tIns="0" rIns="0" bIns="0" rtlCol="0" anchor="ctr"/>
+          <a:lstStyle/>
+          <a:p>
+            <a:pPr indent="0" marL="0">
+              <a:buNone/>
+            </a:pPr>
+            <a:r>
+              <a:rPr lang="en-US" sz="950" b="1" dirty="0">
+                <a:solidFill>
+                  <a:srgbClr val="0068B7"/>
+                </a:solidFill>
+                <a:latin typeface="Aptos" pitchFamily="34" charset="0"/>
+                <a:ea typeface="Aptos" pitchFamily="34" charset="-122"/>
+                <a:cs typeface="Aptos" pitchFamily="34" charset="-120"/>
+              </a:rPr>
+              <a:t>Module details</a:t>
+            </a:r>
+            <a:endParaRPr lang="en-US" sz="950" dirty="0"/>
+          </a:p>
+        </p:txBody>
+      </p:sp>
+      <p:sp>
+        <p:nvSpPr>
+          <p:cNvPr id="11" name="Text 9"/>
+          <p:cNvSpPr/>
+          <p:nvPr/>
+        </p:nvSpPr>
+        <p:spPr>
+          <a:xfrm>
+            <a:off x="8074152" y="1856232"/>
+            <a:ext cx="2825496" cy="1353312"/>
+          </a:xfrm>
+          <a:prstGeom prst="rect">
+            <a:avLst/>
+          </a:prstGeom>
+          <a:noFill/>
+          <a:ln/>
+        </p:spPr>
+        <p:txBody>
+          <a:bodyPr wrap="square" lIns="0" tIns="0" rIns="0" bIns="0" rtlCol="0" anchor="t">
             <a:normAutofit/>
           </a:bodyPr>
           <a:lstStyle/>
@@ -5751,7 +8817,7 @@
               <a:buNone/>
             </a:pPr>
             <a:r>
-              <a:rPr lang="en-US" sz="1400" dirty="0">
+              <a:rPr lang="en-US" sz="1250" dirty="0">
                 <a:solidFill>
                   <a:srgbClr val="17364A"/>
                 </a:solidFill>
@@ -5759,9 +8825,1346 @@
                 <a:ea typeface="Aptos" pitchFamily="34" charset="-122"/>
                 <a:cs typeface="Aptos" pitchFamily="34" charset="-120"/>
               </a:rPr>
-              <a:t>User acceptance testing is the process of determining whether an AI-supported workflow is usable, understandable, safe, and ready for real users in the intended operational context. Technical testing may show that a tool runs, and model validation may show acceptable performance, but neither proves that staff can use the workflow correctly under real public health conditions. UAT fills that gap. This module teaches learners how to design and conduct user acceptance testing for AI-supported workflows. It focuses on role-based test scripts, realistic scenarios, edge cases, human review, documentation, override behavior, accessibility, usability, and sign-off criteria. UAT is a critical safety step before launch. It reveals whether staff understand the output, can find source evidence, know when to override, can escalate concerns, and can complete the workflow without unacceptable burden or confusion.</a:t>
-            </a:r>
-            <a:endParaRPr lang="en-US" sz="1400" dirty="0"/>
+              <a:t>Level: applied/foundational</a:t>
+            </a:r>
+            <a:endParaRPr lang="en-US" sz="1250" dirty="0"/>
+          </a:p>
+          <a:p>
+            <a:pPr indent="0" marL="0">
+              <a:buNone/>
+            </a:pPr>
+            <a:r>
+              <a:rPr lang="en-US" sz="1250" dirty="0">
+                <a:solidFill>
+                  <a:srgbClr val="17364A"/>
+                </a:solidFill>
+                <a:latin typeface="Aptos" pitchFamily="34" charset="0"/>
+                <a:ea typeface="Aptos" pitchFamily="34" charset="-122"/>
+                <a:cs typeface="Aptos" pitchFamily="34" charset="-120"/>
+              </a:rPr>
+              <a:t>Primary track: Operations and Data Quality Track</a:t>
+            </a:r>
+            <a:endParaRPr lang="en-US" sz="1250" dirty="0"/>
+          </a:p>
+          <a:p>
+            <a:pPr indent="0" marL="0">
+              <a:buNone/>
+            </a:pPr>
+            <a:r>
+              <a:rPr lang="en-US" sz="1250" dirty="0">
+                <a:solidFill>
+                  <a:srgbClr val="17364A"/>
+                </a:solidFill>
+                <a:latin typeface="Aptos" pitchFamily="34" charset="0"/>
+                <a:ea typeface="Aptos" pitchFamily="34" charset="-122"/>
+                <a:cs typeface="Aptos" pitchFamily="34" charset="-120"/>
+              </a:rPr>
+              <a:t>Appears in tracks: operations-and-data-quality, program-management, technical-architecture, analytics-and-modeling</a:t>
+            </a:r>
+            <a:endParaRPr lang="en-US" sz="1250" dirty="0"/>
+          </a:p>
+        </p:txBody>
+      </p:sp>
+      <p:sp>
+        <p:nvSpPr>
+          <p:cNvPr id="12" name="Shape 10"/>
+          <p:cNvSpPr/>
+          <p:nvPr/>
+        </p:nvSpPr>
+        <p:spPr>
+          <a:xfrm>
+            <a:off x="7909560" y="3611880"/>
+            <a:ext cx="3154680" cy="1783080"/>
+          </a:xfrm>
+          <a:prstGeom prst="roundRect">
+            <a:avLst>
+              <a:gd name="adj" fmla="val 6154"/>
+            </a:avLst>
+          </a:prstGeom>
+          <a:solidFill>
+            <a:srgbClr val="EEF8ED"/>
+          </a:solidFill>
+          <a:ln w="12700">
+            <a:solidFill>
+              <a:srgbClr val="B9D7E6"/>
+            </a:solidFill>
+            <a:prstDash val="solid"/>
+          </a:ln>
+        </p:spPr>
+      </p:sp>
+      <p:sp>
+        <p:nvSpPr>
+          <p:cNvPr id="13" name="Text 11"/>
+          <p:cNvSpPr/>
+          <p:nvPr/>
+        </p:nvSpPr>
+        <p:spPr>
+          <a:xfrm>
+            <a:off x="8074152" y="3758184"/>
+            <a:ext cx="2825496" cy="201168"/>
+          </a:xfrm>
+          <a:prstGeom prst="rect">
+            <a:avLst/>
+          </a:prstGeom>
+          <a:noFill/>
+          <a:ln/>
+        </p:spPr>
+        <p:txBody>
+          <a:bodyPr wrap="square" lIns="0" tIns="0" rIns="0" bIns="0" rtlCol="0" anchor="ctr"/>
+          <a:lstStyle/>
+          <a:p>
+            <a:pPr indent="0" marL="0">
+              <a:buNone/>
+            </a:pPr>
+            <a:r>
+              <a:rPr lang="en-US" sz="950" b="1" dirty="0">
+                <a:solidFill>
+                  <a:srgbClr val="0068B7"/>
+                </a:solidFill>
+                <a:latin typeface="Aptos" pitchFamily="34" charset="0"/>
+                <a:ea typeface="Aptos" pitchFamily="34" charset="-122"/>
+                <a:cs typeface="Aptos" pitchFamily="34" charset="-120"/>
+              </a:rPr>
+              <a:t>Learning approach</a:t>
+            </a:r>
+            <a:endParaRPr lang="en-US" sz="950" dirty="0"/>
+          </a:p>
+        </p:txBody>
+      </p:sp>
+      <p:sp>
+        <p:nvSpPr>
+          <p:cNvPr id="14" name="Text 12"/>
+          <p:cNvSpPr/>
+          <p:nvPr/>
+        </p:nvSpPr>
+        <p:spPr>
+          <a:xfrm>
+            <a:off x="8074152" y="4050792"/>
+            <a:ext cx="2825496" cy="1216152"/>
+          </a:xfrm>
+          <a:prstGeom prst="rect">
+            <a:avLst/>
+          </a:prstGeom>
+          <a:noFill/>
+          <a:ln/>
+        </p:spPr>
+        <p:txBody>
+          <a:bodyPr wrap="square" lIns="0" tIns="0" rIns="0" bIns="0" rtlCol="0" anchor="t">
+            <a:normAutofit/>
+          </a:bodyPr>
+          <a:lstStyle/>
+          <a:p>
+            <a:pPr indent="0" marL="0">
+              <a:buNone/>
+            </a:pPr>
+            <a:r>
+              <a:rPr lang="en-US" sz="1250" dirty="0">
+                <a:solidFill>
+                  <a:srgbClr val="17364A"/>
+                </a:solidFill>
+                <a:latin typeface="Aptos" pitchFamily="34" charset="0"/>
+                <a:ea typeface="Aptos" pitchFamily="34" charset="-122"/>
+                <a:cs typeface="Aptos" pitchFamily="34" charset="-120"/>
+              </a:rPr>
+              <a:t>Review the core ideas, complete the practical exercise, check your understanding, and use the related plays and tools to apply the lesson.</a:t>
+            </a:r>
+            <a:endParaRPr lang="en-US" sz="1250" dirty="0"/>
+          </a:p>
+        </p:txBody>
+      </p:sp>
+    </p:spTree>
+  </p:cSld>
+  <p:clrMapOvr>
+    <a:masterClrMapping/>
+  </p:clrMapOvr>
+</p:sld>
+</file>
+
+<file path=ppt/slides/slide20.xml><?xml version="1.0" encoding="utf-8"?>
+<p:sld xmlns:a="http://schemas.openxmlformats.org/drawingml/2006/main" xmlns:r="http://schemas.openxmlformats.org/officeDocument/2006/relationships" xmlns:p="http://schemas.openxmlformats.org/presentationml/2006/main">
+  <p:cSld name="Slide 20">
+    <p:bg>
+      <p:bgPr>
+        <a:solidFill>
+          <a:srgbClr val="F7FBFD"/>
+        </a:solidFill>
+      </p:bgPr>
+    </p:bg>
+    <p:spTree>
+      <p:nvGrpSpPr>
+        <p:cNvPr id="1" name=""/>
+        <p:cNvGrpSpPr/>
+        <p:nvPr/>
+      </p:nvGrpSpPr>
+      <p:grpSpPr>
+        <a:xfrm>
+          <a:off x="0" y="0"/>
+          <a:ext cx="0" cy="0"/>
+          <a:chOff x="0" y="0"/>
+          <a:chExt cx="0" cy="0"/>
+        </a:xfrm>
+      </p:grpSpPr>
+      <p:sp>
+        <p:nvSpPr>
+          <p:cNvPr id="2" name="Shape 0"/>
+          <p:cNvSpPr/>
+          <p:nvPr/>
+        </p:nvSpPr>
+        <p:spPr>
+          <a:xfrm>
+            <a:off x="0" y="0"/>
+            <a:ext cx="12191695" cy="164592"/>
+          </a:xfrm>
+          <a:prstGeom prst="rect">
+            <a:avLst/>
+          </a:prstGeom>
+          <a:solidFill>
+            <a:srgbClr val="0068B7"/>
+          </a:solidFill>
+          <a:ln w="12700">
+            <a:solidFill>
+              <a:srgbClr val="0068B7"/>
+            </a:solidFill>
+            <a:prstDash val="solid"/>
+          </a:ln>
+        </p:spPr>
+      </p:sp>
+      <p:sp>
+        <p:nvSpPr>
+          <p:cNvPr id="3" name="Shape 1"/>
+          <p:cNvSpPr/>
+          <p:nvPr/>
+        </p:nvSpPr>
+        <p:spPr>
+          <a:xfrm>
+            <a:off x="0" y="164592"/>
+            <a:ext cx="146304" cy="6693408"/>
+          </a:xfrm>
+          <a:prstGeom prst="rect">
+            <a:avLst/>
+          </a:prstGeom>
+          <a:solidFill>
+            <a:srgbClr val="2F8A28"/>
+          </a:solidFill>
+          <a:ln w="12700">
+            <a:solidFill>
+              <a:srgbClr val="2F8A28"/>
+            </a:solidFill>
+            <a:prstDash val="solid"/>
+          </a:ln>
+        </p:spPr>
+      </p:sp>
+      <p:sp>
+        <p:nvSpPr>
+          <p:cNvPr id="4" name="Text 2"/>
+          <p:cNvSpPr/>
+          <p:nvPr/>
+        </p:nvSpPr>
+        <p:spPr>
+          <a:xfrm>
+            <a:off x="502920" y="292608"/>
+            <a:ext cx="10149840" cy="256032"/>
+          </a:xfrm>
+          <a:prstGeom prst="rect">
+            <a:avLst/>
+          </a:prstGeom>
+          <a:noFill/>
+          <a:ln/>
+        </p:spPr>
+        <p:txBody>
+          <a:bodyPr wrap="square" lIns="0" tIns="0" rIns="0" bIns="0" rtlCol="0" anchor="ctr"/>
+          <a:lstStyle/>
+          <a:p>
+            <a:pPr indent="0" marL="0">
+              <a:buNone/>
+            </a:pPr>
+            <a:r>
+              <a:rPr lang="en-US" sz="900" b="1" dirty="0">
+                <a:solidFill>
+                  <a:srgbClr val="5F7181"/>
+                </a:solidFill>
+                <a:latin typeface="Aptos" pitchFamily="34" charset="0"/>
+                <a:ea typeface="Aptos" pitchFamily="34" charset="-122"/>
+                <a:cs typeface="Aptos" pitchFamily="34" charset="-120"/>
+              </a:rPr>
+              <a:t>User Acceptance Testing for AI-Supported Workflows</a:t>
+            </a:r>
+            <a:endParaRPr lang="en-US" sz="900" dirty="0"/>
+          </a:p>
+        </p:txBody>
+      </p:sp>
+      <p:sp>
+        <p:nvSpPr>
+          <p:cNvPr id="5" name="Text 3"/>
+          <p:cNvSpPr/>
+          <p:nvPr/>
+        </p:nvSpPr>
+        <p:spPr>
+          <a:xfrm>
+            <a:off x="502920" y="6537960"/>
+            <a:ext cx="7772400" cy="201168"/>
+          </a:xfrm>
+          <a:prstGeom prst="rect">
+            <a:avLst/>
+          </a:prstGeom>
+          <a:noFill/>
+          <a:ln/>
+        </p:spPr>
+        <p:txBody>
+          <a:bodyPr wrap="square" lIns="0" tIns="0" rIns="0" bIns="0" rtlCol="0" anchor="ctr"/>
+          <a:lstStyle/>
+          <a:p>
+            <a:pPr indent="0" marL="0">
+              <a:buNone/>
+            </a:pPr>
+            <a:r>
+              <a:rPr lang="en-US" sz="800" dirty="0">
+                <a:solidFill>
+                  <a:srgbClr val="5F7181"/>
+                </a:solidFill>
+                <a:latin typeface="Aptos" pitchFamily="34" charset="0"/>
+                <a:ea typeface="Aptos" pitchFamily="34" charset="-122"/>
+                <a:cs typeface="Aptos" pitchFamily="34" charset="-120"/>
+              </a:rPr>
+              <a:t>AI Playbook and Toolkit for Public Health Departments</a:t>
+            </a:r>
+            <a:endParaRPr lang="en-US" sz="800" dirty="0"/>
+          </a:p>
+        </p:txBody>
+      </p:sp>
+      <p:sp>
+        <p:nvSpPr>
+          <p:cNvPr id="6" name="Text 4"/>
+          <p:cNvSpPr/>
+          <p:nvPr/>
+        </p:nvSpPr>
+        <p:spPr>
+          <a:xfrm>
+            <a:off x="9966960" y="6537960"/>
+            <a:ext cx="1645920" cy="201168"/>
+          </a:xfrm>
+          <a:prstGeom prst="rect">
+            <a:avLst/>
+          </a:prstGeom>
+          <a:noFill/>
+          <a:ln/>
+        </p:spPr>
+        <p:txBody>
+          <a:bodyPr wrap="square" lIns="0" tIns="0" rIns="0" bIns="0" rtlCol="0" anchor="ctr"/>
+          <a:lstStyle/>
+          <a:p>
+            <a:pPr algn="r" indent="0" marL="0">
+              <a:buNone/>
+            </a:pPr>
+            <a:r>
+              <a:rPr lang="en-US" sz="800" dirty="0">
+                <a:solidFill>
+                  <a:srgbClr val="5F7181"/>
+                </a:solidFill>
+                <a:latin typeface="Aptos" pitchFamily="34" charset="0"/>
+                <a:ea typeface="Aptos" pitchFamily="34" charset="-122"/>
+                <a:cs typeface="Aptos" pitchFamily="34" charset="-120"/>
+              </a:rPr>
+              <a:t>© Paula Soper</a:t>
+            </a:r>
+            <a:endParaRPr lang="en-US" sz="800" dirty="0"/>
+          </a:p>
+        </p:txBody>
+      </p:sp>
+      <p:sp>
+        <p:nvSpPr>
+          <p:cNvPr id="7" name="Shape 5"/>
+          <p:cNvSpPr/>
+          <p:nvPr/>
+        </p:nvSpPr>
+        <p:spPr>
+          <a:xfrm>
+            <a:off x="640080" y="658368"/>
+            <a:ext cx="420624" cy="420624"/>
+          </a:xfrm>
+          <a:prstGeom prst="ellipse">
+            <a:avLst/>
+          </a:prstGeom>
+          <a:solidFill>
+            <a:srgbClr val="0068B7"/>
+          </a:solidFill>
+          <a:ln w="12700">
+            <a:solidFill>
+              <a:srgbClr val="0068B7"/>
+            </a:solidFill>
+            <a:prstDash val="solid"/>
+          </a:ln>
+        </p:spPr>
+      </p:sp>
+      <p:sp>
+        <p:nvSpPr>
+          <p:cNvPr id="8" name="Text 6"/>
+          <p:cNvSpPr/>
+          <p:nvPr/>
+        </p:nvSpPr>
+        <p:spPr>
+          <a:xfrm>
+            <a:off x="640080" y="731520"/>
+            <a:ext cx="420624" cy="164592"/>
+          </a:xfrm>
+          <a:prstGeom prst="rect">
+            <a:avLst/>
+          </a:prstGeom>
+          <a:noFill/>
+          <a:ln/>
+        </p:spPr>
+        <p:txBody>
+          <a:bodyPr wrap="square" lIns="0" tIns="0" rIns="0" bIns="0" rtlCol="0" anchor="ctr"/>
+          <a:lstStyle/>
+          <a:p>
+            <a:pPr algn="ctr" indent="0" marL="0">
+              <a:buNone/>
+            </a:pPr>
+            <a:r>
+              <a:rPr lang="en-US" sz="1100" b="1" dirty="0">
+                <a:solidFill>
+                  <a:srgbClr val="FFFFFF"/>
+                </a:solidFill>
+                <a:latin typeface="Aptos" pitchFamily="34" charset="0"/>
+                <a:ea typeface="Aptos" pitchFamily="34" charset="-122"/>
+                <a:cs typeface="Aptos" pitchFamily="34" charset="-120"/>
+              </a:rPr>
+              <a:t>10</a:t>
+            </a:r>
+            <a:endParaRPr lang="en-US" sz="1100" dirty="0"/>
+          </a:p>
+        </p:txBody>
+      </p:sp>
+      <p:sp>
+        <p:nvSpPr>
+          <p:cNvPr id="9" name="Text 7"/>
+          <p:cNvSpPr/>
+          <p:nvPr/>
+        </p:nvSpPr>
+        <p:spPr>
+          <a:xfrm>
+            <a:off x="640080" y="621792"/>
+            <a:ext cx="10881360" cy="566928"/>
+          </a:xfrm>
+          <a:prstGeom prst="rect">
+            <a:avLst/>
+          </a:prstGeom>
+          <a:noFill/>
+          <a:ln/>
+        </p:spPr>
+        <p:txBody>
+          <a:bodyPr wrap="square" lIns="0" tIns="0" rIns="0" bIns="0" rtlCol="0" anchor="ctr">
+            <a:normAutofit/>
+          </a:bodyPr>
+          <a:lstStyle/>
+          <a:p>
+            <a:pPr indent="0" marL="0">
+              <a:buNone/>
+            </a:pPr>
+            <a:r>
+              <a:rPr lang="en-US" sz="2700" b="1" dirty="0">
+                <a:solidFill>
+                  <a:srgbClr val="003A63"/>
+                </a:solidFill>
+                <a:latin typeface="Aptos Display" pitchFamily="34" charset="0"/>
+                <a:ea typeface="Aptos Display" pitchFamily="34" charset="-122"/>
+                <a:cs typeface="Aptos Display" pitchFamily="34" charset="-120"/>
+              </a:rPr>
+              <a:t>Knowledge Check</a:t>
+            </a:r>
+            <a:endParaRPr lang="en-US" sz="2700" dirty="0"/>
+          </a:p>
+        </p:txBody>
+      </p:sp>
+      <p:sp>
+        <p:nvSpPr>
+          <p:cNvPr id="10" name="Text 8"/>
+          <p:cNvSpPr/>
+          <p:nvPr/>
+        </p:nvSpPr>
+        <p:spPr>
+          <a:xfrm>
+            <a:off x="868680" y="1417320"/>
+            <a:ext cx="6675120" cy="4434840"/>
+          </a:xfrm>
+          <a:prstGeom prst="rect">
+            <a:avLst/>
+          </a:prstGeom>
+          <a:noFill/>
+          <a:ln/>
+        </p:spPr>
+        <p:txBody>
+          <a:bodyPr wrap="square" lIns="635" tIns="635" rIns="635" bIns="635" rtlCol="0" anchor="t">
+            <a:normAutofit/>
+          </a:bodyPr>
+          <a:lstStyle/>
+          <a:p>
+            <a:r>
+              <a:rPr lang="en-US" sz="1700" dirty="0">
+                <a:solidFill>
+                  <a:srgbClr val="17364A"/>
+                </a:solidFill>
+                <a:latin typeface="Aptos" pitchFamily="34" charset="0"/>
+                <a:ea typeface="Aptos" pitchFamily="34" charset="-122"/>
+                <a:cs typeface="Aptos" pitchFamily="34" charset="-120"/>
+              </a:rPr>
+              <a:t>1. What is the purpose of UAT for AI-supported workflows?</a:t>
+            </a:r>
+            <a:endParaRPr lang="en-US" sz="1700" dirty="0"/>
+          </a:p>
+          <a:p>
+            <a:r>
+              <a:rPr lang="en-US" sz="1700" dirty="0">
+                <a:solidFill>
+                  <a:srgbClr val="17364A"/>
+                </a:solidFill>
+                <a:latin typeface="Aptos" pitchFamily="34" charset="0"/>
+                <a:ea typeface="Aptos" pitchFamily="34" charset="-122"/>
+                <a:cs typeface="Aptos" pitchFamily="34" charset="-120"/>
+              </a:rPr>
+              <a:t>2. Who should participate in UAT?</a:t>
+            </a:r>
+            <a:endParaRPr lang="en-US" sz="1700" dirty="0"/>
+          </a:p>
+          <a:p>
+            <a:r>
+              <a:rPr lang="en-US" sz="1700" dirty="0">
+                <a:solidFill>
+                  <a:srgbClr val="17364A"/>
+                </a:solidFill>
+                <a:latin typeface="Aptos" pitchFamily="34" charset="0"/>
+                <a:ea typeface="Aptos" pitchFamily="34" charset="-122"/>
+                <a:cs typeface="Aptos" pitchFamily="34" charset="-120"/>
+              </a:rPr>
+              <a:t>3. Which scenario should be included in AI UAT?</a:t>
+            </a:r>
+            <a:endParaRPr lang="en-US" sz="1700" dirty="0"/>
+          </a:p>
+          <a:p>
+            <a:r>
+              <a:rPr lang="en-US" sz="1700" dirty="0">
+                <a:solidFill>
+                  <a:srgbClr val="17364A"/>
+                </a:solidFill>
+                <a:latin typeface="Aptos" pitchFamily="34" charset="0"/>
+                <a:ea typeface="Aptos" pitchFamily="34" charset="-122"/>
+                <a:cs typeface="Aptos" pitchFamily="34" charset="-120"/>
+              </a:rPr>
+              <a:t>4. What should happen to UAT issues?</a:t>
+            </a:r>
+            <a:endParaRPr lang="en-US" sz="1700" dirty="0"/>
+          </a:p>
+        </p:txBody>
+      </p:sp>
+      <p:sp>
+        <p:nvSpPr>
+          <p:cNvPr id="11" name="Shape 9"/>
+          <p:cNvSpPr/>
+          <p:nvPr/>
+        </p:nvSpPr>
+        <p:spPr>
+          <a:xfrm>
+            <a:off x="7909560" y="1417320"/>
+            <a:ext cx="3154680" cy="1828800"/>
+          </a:xfrm>
+          <a:prstGeom prst="roundRect">
+            <a:avLst>
+              <a:gd name="adj" fmla="val 6000"/>
+            </a:avLst>
+          </a:prstGeom>
+          <a:solidFill>
+            <a:srgbClr val="EEF8ED"/>
+          </a:solidFill>
+          <a:ln w="12700">
+            <a:solidFill>
+              <a:srgbClr val="B9D7E6"/>
+            </a:solidFill>
+            <a:prstDash val="solid"/>
+          </a:ln>
+        </p:spPr>
+      </p:sp>
+      <p:sp>
+        <p:nvSpPr>
+          <p:cNvPr id="12" name="Text 10"/>
+          <p:cNvSpPr/>
+          <p:nvPr/>
+        </p:nvSpPr>
+        <p:spPr>
+          <a:xfrm>
+            <a:off x="8074152" y="1563624"/>
+            <a:ext cx="2825496" cy="201168"/>
+          </a:xfrm>
+          <a:prstGeom prst="rect">
+            <a:avLst/>
+          </a:prstGeom>
+          <a:noFill/>
+          <a:ln/>
+        </p:spPr>
+        <p:txBody>
+          <a:bodyPr wrap="square" lIns="0" tIns="0" rIns="0" bIns="0" rtlCol="0" anchor="ctr"/>
+          <a:lstStyle/>
+          <a:p>
+            <a:pPr indent="0" marL="0">
+              <a:buNone/>
+            </a:pPr>
+            <a:r>
+              <a:rPr lang="en-US" sz="950" b="1" dirty="0">
+                <a:solidFill>
+                  <a:srgbClr val="0068B7"/>
+                </a:solidFill>
+                <a:latin typeface="Aptos" pitchFamily="34" charset="0"/>
+                <a:ea typeface="Aptos" pitchFamily="34" charset="-122"/>
+                <a:cs typeface="Aptos" pitchFamily="34" charset="-120"/>
+              </a:rPr>
+              <a:t>Key idea</a:t>
+            </a:r>
+            <a:endParaRPr lang="en-US" sz="950" dirty="0"/>
+          </a:p>
+        </p:txBody>
+      </p:sp>
+      <p:sp>
+        <p:nvSpPr>
+          <p:cNvPr id="13" name="Text 11"/>
+          <p:cNvSpPr/>
+          <p:nvPr/>
+        </p:nvSpPr>
+        <p:spPr>
+          <a:xfrm>
+            <a:off x="8074152" y="1856232"/>
+            <a:ext cx="2825496" cy="1261872"/>
+          </a:xfrm>
+          <a:prstGeom prst="rect">
+            <a:avLst/>
+          </a:prstGeom>
+          <a:noFill/>
+          <a:ln/>
+        </p:spPr>
+        <p:txBody>
+          <a:bodyPr wrap="square" lIns="0" tIns="0" rIns="0" bIns="0" rtlCol="0" anchor="t">
+            <a:normAutofit/>
+          </a:bodyPr>
+          <a:lstStyle/>
+          <a:p>
+            <a:pPr indent="0" marL="0">
+              <a:buNone/>
+            </a:pPr>
+            <a:r>
+              <a:rPr lang="en-US" sz="1250" dirty="0">
+                <a:solidFill>
+                  <a:srgbClr val="17364A"/>
+                </a:solidFill>
+                <a:latin typeface="Aptos" pitchFamily="34" charset="0"/>
+                <a:ea typeface="Aptos" pitchFamily="34" charset="-122"/>
+                <a:cs typeface="Aptos" pitchFamily="34" charset="-120"/>
+              </a:rPr>
+              <a:t>1. What is the purpose of UAT for AI-supported workflows?</a:t>
+            </a:r>
+            <a:endParaRPr lang="en-US" sz="1250" dirty="0"/>
+          </a:p>
+        </p:txBody>
+      </p:sp>
+      <p:sp>
+        <p:nvSpPr>
+          <p:cNvPr id="14" name="Shape 12"/>
+          <p:cNvSpPr/>
+          <p:nvPr/>
+        </p:nvSpPr>
+        <p:spPr>
+          <a:xfrm>
+            <a:off x="7909560" y="3520440"/>
+            <a:ext cx="3154680" cy="1737360"/>
+          </a:xfrm>
+          <a:prstGeom prst="roundRect">
+            <a:avLst>
+              <a:gd name="adj" fmla="val 6316"/>
+            </a:avLst>
+          </a:prstGeom>
+          <a:solidFill>
+            <a:srgbClr val="EAF6F8"/>
+          </a:solidFill>
+          <a:ln w="12700">
+            <a:solidFill>
+              <a:srgbClr val="B9D7E6"/>
+            </a:solidFill>
+            <a:prstDash val="solid"/>
+          </a:ln>
+        </p:spPr>
+      </p:sp>
+      <p:sp>
+        <p:nvSpPr>
+          <p:cNvPr id="15" name="Text 13"/>
+          <p:cNvSpPr/>
+          <p:nvPr/>
+        </p:nvSpPr>
+        <p:spPr>
+          <a:xfrm>
+            <a:off x="8074152" y="3666744"/>
+            <a:ext cx="2825496" cy="201168"/>
+          </a:xfrm>
+          <a:prstGeom prst="rect">
+            <a:avLst/>
+          </a:prstGeom>
+          <a:noFill/>
+          <a:ln/>
+        </p:spPr>
+        <p:txBody>
+          <a:bodyPr wrap="square" lIns="0" tIns="0" rIns="0" bIns="0" rtlCol="0" anchor="ctr"/>
+          <a:lstStyle/>
+          <a:p>
+            <a:pPr indent="0" marL="0">
+              <a:buNone/>
+            </a:pPr>
+            <a:r>
+              <a:rPr lang="en-US" sz="950" b="1" dirty="0">
+                <a:solidFill>
+                  <a:srgbClr val="0068B7"/>
+                </a:solidFill>
+                <a:latin typeface="Aptos" pitchFamily="34" charset="0"/>
+                <a:ea typeface="Aptos" pitchFamily="34" charset="-122"/>
+                <a:cs typeface="Aptos" pitchFamily="34" charset="-120"/>
+              </a:rPr>
+              <a:t>Use this for</a:t>
+            </a:r>
+            <a:endParaRPr lang="en-US" sz="950" dirty="0"/>
+          </a:p>
+        </p:txBody>
+      </p:sp>
+      <p:sp>
+        <p:nvSpPr>
+          <p:cNvPr id="16" name="Text 14"/>
+          <p:cNvSpPr/>
+          <p:nvPr/>
+        </p:nvSpPr>
+        <p:spPr>
+          <a:xfrm>
+            <a:off x="8074152" y="3959352"/>
+            <a:ext cx="2825496" cy="1170432"/>
+          </a:xfrm>
+          <a:prstGeom prst="rect">
+            <a:avLst/>
+          </a:prstGeom>
+          <a:noFill/>
+          <a:ln/>
+        </p:spPr>
+        <p:txBody>
+          <a:bodyPr wrap="square" lIns="0" tIns="0" rIns="0" bIns="0" rtlCol="0" anchor="t">
+            <a:normAutofit/>
+          </a:bodyPr>
+          <a:lstStyle/>
+          <a:p>
+            <a:pPr indent="0" marL="0">
+              <a:buNone/>
+            </a:pPr>
+            <a:r>
+              <a:rPr lang="en-US" sz="1250" dirty="0">
+                <a:solidFill>
+                  <a:srgbClr val="17364A"/>
+                </a:solidFill>
+                <a:latin typeface="Aptos" pitchFamily="34" charset="0"/>
+                <a:ea typeface="Aptos" pitchFamily="34" charset="-122"/>
+                <a:cs typeface="Aptos" pitchFamily="34" charset="-120"/>
+              </a:rPr>
+              <a:t>Connect the concept to public health decisions, safeguards, documentation, or implementation work.</a:t>
+            </a:r>
+            <a:endParaRPr lang="en-US" sz="1250" dirty="0"/>
+          </a:p>
+        </p:txBody>
+      </p:sp>
+    </p:spTree>
+  </p:cSld>
+  <p:clrMapOvr>
+    <a:masterClrMapping/>
+  </p:clrMapOvr>
+</p:sld>
+</file>
+
+<file path=ppt/slides/slide21.xml><?xml version="1.0" encoding="utf-8"?>
+<p:sld xmlns:a="http://schemas.openxmlformats.org/drawingml/2006/main" xmlns:r="http://schemas.openxmlformats.org/officeDocument/2006/relationships" xmlns:p="http://schemas.openxmlformats.org/presentationml/2006/main">
+  <p:cSld name="Slide 21">
+    <p:bg>
+      <p:bgPr>
+        <a:solidFill>
+          <a:srgbClr val="F7FBFD"/>
+        </a:solidFill>
+      </p:bgPr>
+    </p:bg>
+    <p:spTree>
+      <p:nvGrpSpPr>
+        <p:cNvPr id="1" name=""/>
+        <p:cNvGrpSpPr/>
+        <p:nvPr/>
+      </p:nvGrpSpPr>
+      <p:grpSpPr>
+        <a:xfrm>
+          <a:off x="0" y="0"/>
+          <a:ext cx="0" cy="0"/>
+          <a:chOff x="0" y="0"/>
+          <a:chExt cx="0" cy="0"/>
+        </a:xfrm>
+      </p:grpSpPr>
+      <p:sp>
+        <p:nvSpPr>
+          <p:cNvPr id="2" name="Shape 0"/>
+          <p:cNvSpPr/>
+          <p:nvPr/>
+        </p:nvSpPr>
+        <p:spPr>
+          <a:xfrm>
+            <a:off x="0" y="0"/>
+            <a:ext cx="12191695" cy="164592"/>
+          </a:xfrm>
+          <a:prstGeom prst="rect">
+            <a:avLst/>
+          </a:prstGeom>
+          <a:solidFill>
+            <a:srgbClr val="0068B7"/>
+          </a:solidFill>
+          <a:ln w="12700">
+            <a:solidFill>
+              <a:srgbClr val="0068B7"/>
+            </a:solidFill>
+            <a:prstDash val="solid"/>
+          </a:ln>
+        </p:spPr>
+      </p:sp>
+      <p:sp>
+        <p:nvSpPr>
+          <p:cNvPr id="3" name="Shape 1"/>
+          <p:cNvSpPr/>
+          <p:nvPr/>
+        </p:nvSpPr>
+        <p:spPr>
+          <a:xfrm>
+            <a:off x="0" y="164592"/>
+            <a:ext cx="146304" cy="6693408"/>
+          </a:xfrm>
+          <a:prstGeom prst="rect">
+            <a:avLst/>
+          </a:prstGeom>
+          <a:solidFill>
+            <a:srgbClr val="2F8A28"/>
+          </a:solidFill>
+          <a:ln w="12700">
+            <a:solidFill>
+              <a:srgbClr val="2F8A28"/>
+            </a:solidFill>
+            <a:prstDash val="solid"/>
+          </a:ln>
+        </p:spPr>
+      </p:sp>
+      <p:sp>
+        <p:nvSpPr>
+          <p:cNvPr id="4" name="Text 2"/>
+          <p:cNvSpPr/>
+          <p:nvPr/>
+        </p:nvSpPr>
+        <p:spPr>
+          <a:xfrm>
+            <a:off x="502920" y="292608"/>
+            <a:ext cx="10149840" cy="256032"/>
+          </a:xfrm>
+          <a:prstGeom prst="rect">
+            <a:avLst/>
+          </a:prstGeom>
+          <a:noFill/>
+          <a:ln/>
+        </p:spPr>
+        <p:txBody>
+          <a:bodyPr wrap="square" lIns="0" tIns="0" rIns="0" bIns="0" rtlCol="0" anchor="ctr"/>
+          <a:lstStyle/>
+          <a:p>
+            <a:pPr indent="0" marL="0">
+              <a:buNone/>
+            </a:pPr>
+            <a:r>
+              <a:rPr lang="en-US" sz="900" b="1" dirty="0">
+                <a:solidFill>
+                  <a:srgbClr val="5F7181"/>
+                </a:solidFill>
+                <a:latin typeface="Aptos" pitchFamily="34" charset="0"/>
+                <a:ea typeface="Aptos" pitchFamily="34" charset="-122"/>
+                <a:cs typeface="Aptos" pitchFamily="34" charset="-120"/>
+              </a:rPr>
+              <a:t>User Acceptance Testing for AI-Supported Workflows</a:t>
+            </a:r>
+            <a:endParaRPr lang="en-US" sz="900" dirty="0"/>
+          </a:p>
+        </p:txBody>
+      </p:sp>
+      <p:sp>
+        <p:nvSpPr>
+          <p:cNvPr id="5" name="Text 3"/>
+          <p:cNvSpPr/>
+          <p:nvPr/>
+        </p:nvSpPr>
+        <p:spPr>
+          <a:xfrm>
+            <a:off x="502920" y="6537960"/>
+            <a:ext cx="7772400" cy="201168"/>
+          </a:xfrm>
+          <a:prstGeom prst="rect">
+            <a:avLst/>
+          </a:prstGeom>
+          <a:noFill/>
+          <a:ln/>
+        </p:spPr>
+        <p:txBody>
+          <a:bodyPr wrap="square" lIns="0" tIns="0" rIns="0" bIns="0" rtlCol="0" anchor="ctr"/>
+          <a:lstStyle/>
+          <a:p>
+            <a:pPr indent="0" marL="0">
+              <a:buNone/>
+            </a:pPr>
+            <a:r>
+              <a:rPr lang="en-US" sz="800" dirty="0">
+                <a:solidFill>
+                  <a:srgbClr val="5F7181"/>
+                </a:solidFill>
+                <a:latin typeface="Aptos" pitchFamily="34" charset="0"/>
+                <a:ea typeface="Aptos" pitchFamily="34" charset="-122"/>
+                <a:cs typeface="Aptos" pitchFamily="34" charset="-120"/>
+              </a:rPr>
+              <a:t>AI Playbook and Toolkit for Public Health Departments</a:t>
+            </a:r>
+            <a:endParaRPr lang="en-US" sz="800" dirty="0"/>
+          </a:p>
+        </p:txBody>
+      </p:sp>
+      <p:sp>
+        <p:nvSpPr>
+          <p:cNvPr id="6" name="Text 4"/>
+          <p:cNvSpPr/>
+          <p:nvPr/>
+        </p:nvSpPr>
+        <p:spPr>
+          <a:xfrm>
+            <a:off x="9966960" y="6537960"/>
+            <a:ext cx="1645920" cy="201168"/>
+          </a:xfrm>
+          <a:prstGeom prst="rect">
+            <a:avLst/>
+          </a:prstGeom>
+          <a:noFill/>
+          <a:ln/>
+        </p:spPr>
+        <p:txBody>
+          <a:bodyPr wrap="square" lIns="0" tIns="0" rIns="0" bIns="0" rtlCol="0" anchor="ctr"/>
+          <a:lstStyle/>
+          <a:p>
+            <a:pPr algn="r" indent="0" marL="0">
+              <a:buNone/>
+            </a:pPr>
+            <a:r>
+              <a:rPr lang="en-US" sz="800" dirty="0">
+                <a:solidFill>
+                  <a:srgbClr val="5F7181"/>
+                </a:solidFill>
+                <a:latin typeface="Aptos" pitchFamily="34" charset="0"/>
+                <a:ea typeface="Aptos" pitchFamily="34" charset="-122"/>
+                <a:cs typeface="Aptos" pitchFamily="34" charset="-120"/>
+              </a:rPr>
+              <a:t>© Paula Soper</a:t>
+            </a:r>
+            <a:endParaRPr lang="en-US" sz="800" dirty="0"/>
+          </a:p>
+        </p:txBody>
+      </p:sp>
+      <p:sp>
+        <p:nvSpPr>
+          <p:cNvPr id="7" name="Shape 5"/>
+          <p:cNvSpPr/>
+          <p:nvPr/>
+        </p:nvSpPr>
+        <p:spPr>
+          <a:xfrm>
+            <a:off x="640080" y="658368"/>
+            <a:ext cx="420624" cy="420624"/>
+          </a:xfrm>
+          <a:prstGeom prst="ellipse">
+            <a:avLst/>
+          </a:prstGeom>
+          <a:solidFill>
+            <a:srgbClr val="0068B7"/>
+          </a:solidFill>
+          <a:ln w="12700">
+            <a:solidFill>
+              <a:srgbClr val="0068B7"/>
+            </a:solidFill>
+            <a:prstDash val="solid"/>
+          </a:ln>
+        </p:spPr>
+      </p:sp>
+      <p:sp>
+        <p:nvSpPr>
+          <p:cNvPr id="8" name="Text 6"/>
+          <p:cNvSpPr/>
+          <p:nvPr/>
+        </p:nvSpPr>
+        <p:spPr>
+          <a:xfrm>
+            <a:off x="640080" y="731520"/>
+            <a:ext cx="420624" cy="164592"/>
+          </a:xfrm>
+          <a:prstGeom prst="rect">
+            <a:avLst/>
+          </a:prstGeom>
+          <a:noFill/>
+          <a:ln/>
+        </p:spPr>
+        <p:txBody>
+          <a:bodyPr wrap="square" lIns="0" tIns="0" rIns="0" bIns="0" rtlCol="0" anchor="ctr"/>
+          <a:lstStyle/>
+          <a:p>
+            <a:pPr algn="ctr" indent="0" marL="0">
+              <a:buNone/>
+            </a:pPr>
+            <a:r>
+              <a:rPr lang="en-US" sz="1100" b="1" dirty="0">
+                <a:solidFill>
+                  <a:srgbClr val="FFFFFF"/>
+                </a:solidFill>
+                <a:latin typeface="Aptos" pitchFamily="34" charset="0"/>
+                <a:ea typeface="Aptos" pitchFamily="34" charset="-122"/>
+                <a:cs typeface="Aptos" pitchFamily="34" charset="-120"/>
+              </a:rPr>
+              <a:t>11</a:t>
+            </a:r>
+            <a:endParaRPr lang="en-US" sz="1100" dirty="0"/>
+          </a:p>
+        </p:txBody>
+      </p:sp>
+      <p:sp>
+        <p:nvSpPr>
+          <p:cNvPr id="9" name="Text 7"/>
+          <p:cNvSpPr/>
+          <p:nvPr/>
+        </p:nvSpPr>
+        <p:spPr>
+          <a:xfrm>
+            <a:off x="640080" y="621792"/>
+            <a:ext cx="10881360" cy="566928"/>
+          </a:xfrm>
+          <a:prstGeom prst="rect">
+            <a:avLst/>
+          </a:prstGeom>
+          <a:noFill/>
+          <a:ln/>
+        </p:spPr>
+        <p:txBody>
+          <a:bodyPr wrap="square" lIns="0" tIns="0" rIns="0" bIns="0" rtlCol="0" anchor="ctr">
+            <a:normAutofit/>
+          </a:bodyPr>
+          <a:lstStyle/>
+          <a:p>
+            <a:pPr indent="0" marL="0">
+              <a:buNone/>
+            </a:pPr>
+            <a:r>
+              <a:rPr lang="en-US" sz="2700" b="1" dirty="0">
+                <a:solidFill>
+                  <a:srgbClr val="003A63"/>
+                </a:solidFill>
+                <a:latin typeface="Aptos Display" pitchFamily="34" charset="0"/>
+                <a:ea typeface="Aptos Display" pitchFamily="34" charset="-122"/>
+                <a:cs typeface="Aptos Display" pitchFamily="34" charset="-120"/>
+              </a:rPr>
+              <a:t>References and Resources</a:t>
+            </a:r>
+            <a:endParaRPr lang="en-US" sz="2700" dirty="0"/>
+          </a:p>
+        </p:txBody>
+      </p:sp>
+      <p:sp>
+        <p:nvSpPr>
+          <p:cNvPr id="10" name="Text 8"/>
+          <p:cNvSpPr/>
+          <p:nvPr/>
+        </p:nvSpPr>
+        <p:spPr>
+          <a:xfrm>
+            <a:off x="868680" y="1417320"/>
+            <a:ext cx="6675120" cy="4434840"/>
+          </a:xfrm>
+          <a:prstGeom prst="rect">
+            <a:avLst/>
+          </a:prstGeom>
+          <a:noFill/>
+          <a:ln/>
+        </p:spPr>
+        <p:txBody>
+          <a:bodyPr wrap="square" lIns="635" tIns="635" rIns="635" bIns="635" rtlCol="0" anchor="t">
+            <a:normAutofit/>
+          </a:bodyPr>
+          <a:lstStyle/>
+          <a:p>
+            <a:r>
+              <a:rPr lang="en-US" sz="1700" dirty="0">
+                <a:solidFill>
+                  <a:srgbClr val="17364A"/>
+                </a:solidFill>
+                <a:latin typeface="Aptos" pitchFamily="34" charset="0"/>
+                <a:ea typeface="Aptos" pitchFamily="34" charset="-122"/>
+                <a:cs typeface="Aptos" pitchFamily="34" charset="-120"/>
+              </a:rPr>
+              <a:t>CDC Evaluation Framework: https://www.cdc.gov/evaluation/</a:t>
+            </a:r>
+            <a:endParaRPr lang="en-US" sz="1700" dirty="0"/>
+          </a:p>
+          <a:p>
+            <a:r>
+              <a:rPr lang="en-US" sz="1700" dirty="0">
+                <a:solidFill>
+                  <a:srgbClr val="17364A"/>
+                </a:solidFill>
+                <a:latin typeface="Aptos" pitchFamily="34" charset="0"/>
+                <a:ea typeface="Aptos" pitchFamily="34" charset="-122"/>
+                <a:cs typeface="Aptos" pitchFamily="34" charset="-120"/>
+              </a:rPr>
+              <a:t>NIST Artificial Intelligence Risk Management Framework: https://www.nist.gov/itl/ai-risk-management-framework</a:t>
+            </a:r>
+            <a:endParaRPr lang="en-US" sz="1700" dirty="0"/>
+          </a:p>
+          <a:p>
+            <a:r>
+              <a:rPr lang="en-US" sz="1700" dirty="0">
+                <a:solidFill>
+                  <a:srgbClr val="17364A"/>
+                </a:solidFill>
+                <a:latin typeface="Aptos" pitchFamily="34" charset="0"/>
+                <a:ea typeface="Aptos" pitchFamily="34" charset="-122"/>
+                <a:cs typeface="Aptos" pitchFamily="34" charset="-120"/>
+              </a:rPr>
+              <a:t>NIST AI RMF Generative AI Profile:.</a:t>
+            </a:r>
+            <a:endParaRPr lang="en-US" sz="1700" dirty="0"/>
+          </a:p>
+          <a:p>
+            <a:r>
+              <a:rPr lang="en-US" sz="1700" dirty="0">
+                <a:solidFill>
+                  <a:srgbClr val="17364A"/>
+                </a:solidFill>
+                <a:latin typeface="Aptos" pitchFamily="34" charset="0"/>
+                <a:ea typeface="Aptos" pitchFamily="34" charset="-122"/>
+                <a:cs typeface="Aptos" pitchFamily="34" charset="-120"/>
+              </a:rPr>
+              <a:t>CDC Public Health Data Strategy: https://www.cdc.gov/public-health-data-strategy/php/about/index.html</a:t>
+            </a:r>
+            <a:endParaRPr lang="en-US" sz="1700" dirty="0"/>
+          </a:p>
+        </p:txBody>
+      </p:sp>
+      <p:sp>
+        <p:nvSpPr>
+          <p:cNvPr id="11" name="Shape 9"/>
+          <p:cNvSpPr/>
+          <p:nvPr/>
+        </p:nvSpPr>
+        <p:spPr>
+          <a:xfrm>
+            <a:off x="7909560" y="1417320"/>
+            <a:ext cx="3154680" cy="1828800"/>
+          </a:xfrm>
+          <a:prstGeom prst="roundRect">
+            <a:avLst>
+              <a:gd name="adj" fmla="val 6000"/>
+            </a:avLst>
+          </a:prstGeom>
+          <a:solidFill>
+            <a:srgbClr val="EEF8ED"/>
+          </a:solidFill>
+          <a:ln w="12700">
+            <a:solidFill>
+              <a:srgbClr val="B9D7E6"/>
+            </a:solidFill>
+            <a:prstDash val="solid"/>
+          </a:ln>
+        </p:spPr>
+      </p:sp>
+      <p:sp>
+        <p:nvSpPr>
+          <p:cNvPr id="12" name="Text 10"/>
+          <p:cNvSpPr/>
+          <p:nvPr/>
+        </p:nvSpPr>
+        <p:spPr>
+          <a:xfrm>
+            <a:off x="8074152" y="1563624"/>
+            <a:ext cx="2825496" cy="201168"/>
+          </a:xfrm>
+          <a:prstGeom prst="rect">
+            <a:avLst/>
+          </a:prstGeom>
+          <a:noFill/>
+          <a:ln/>
+        </p:spPr>
+        <p:txBody>
+          <a:bodyPr wrap="square" lIns="0" tIns="0" rIns="0" bIns="0" rtlCol="0" anchor="ctr"/>
+          <a:lstStyle/>
+          <a:p>
+            <a:pPr indent="0" marL="0">
+              <a:buNone/>
+            </a:pPr>
+            <a:r>
+              <a:rPr lang="en-US" sz="950" b="1" dirty="0">
+                <a:solidFill>
+                  <a:srgbClr val="0068B7"/>
+                </a:solidFill>
+                <a:latin typeface="Aptos" pitchFamily="34" charset="0"/>
+                <a:ea typeface="Aptos" pitchFamily="34" charset="-122"/>
+                <a:cs typeface="Aptos" pitchFamily="34" charset="-120"/>
+              </a:rPr>
+              <a:t>Key idea</a:t>
+            </a:r>
+            <a:endParaRPr lang="en-US" sz="950" dirty="0"/>
+          </a:p>
+        </p:txBody>
+      </p:sp>
+      <p:sp>
+        <p:nvSpPr>
+          <p:cNvPr id="13" name="Text 11"/>
+          <p:cNvSpPr/>
+          <p:nvPr/>
+        </p:nvSpPr>
+        <p:spPr>
+          <a:xfrm>
+            <a:off x="8074152" y="1856232"/>
+            <a:ext cx="2825496" cy="1261872"/>
+          </a:xfrm>
+          <a:prstGeom prst="rect">
+            <a:avLst/>
+          </a:prstGeom>
+          <a:noFill/>
+          <a:ln/>
+        </p:spPr>
+        <p:txBody>
+          <a:bodyPr wrap="square" lIns="0" tIns="0" rIns="0" bIns="0" rtlCol="0" anchor="t">
+            <a:normAutofit/>
+          </a:bodyPr>
+          <a:lstStyle/>
+          <a:p>
+            <a:pPr indent="0" marL="0">
+              <a:buNone/>
+            </a:pPr>
+            <a:r>
+              <a:rPr lang="en-US" sz="1250" dirty="0">
+                <a:solidFill>
+                  <a:srgbClr val="17364A"/>
+                </a:solidFill>
+                <a:latin typeface="Aptos" pitchFamily="34" charset="0"/>
+                <a:ea typeface="Aptos" pitchFamily="34" charset="-122"/>
+                <a:cs typeface="Aptos" pitchFamily="34" charset="-120"/>
+              </a:rPr>
+              <a:t>CDC Evaluation Framework: https://www.cdc.gov/evaluation/</a:t>
+            </a:r>
+            <a:endParaRPr lang="en-US" sz="1250" dirty="0"/>
+          </a:p>
+        </p:txBody>
+      </p:sp>
+      <p:sp>
+        <p:nvSpPr>
+          <p:cNvPr id="14" name="Shape 12"/>
+          <p:cNvSpPr/>
+          <p:nvPr/>
+        </p:nvSpPr>
+        <p:spPr>
+          <a:xfrm>
+            <a:off x="7909560" y="3520440"/>
+            <a:ext cx="3154680" cy="1737360"/>
+          </a:xfrm>
+          <a:prstGeom prst="roundRect">
+            <a:avLst>
+              <a:gd name="adj" fmla="val 6316"/>
+            </a:avLst>
+          </a:prstGeom>
+          <a:solidFill>
+            <a:srgbClr val="EAF6F8"/>
+          </a:solidFill>
+          <a:ln w="12700">
+            <a:solidFill>
+              <a:srgbClr val="B9D7E6"/>
+            </a:solidFill>
+            <a:prstDash val="solid"/>
+          </a:ln>
+        </p:spPr>
+      </p:sp>
+      <p:sp>
+        <p:nvSpPr>
+          <p:cNvPr id="15" name="Text 13"/>
+          <p:cNvSpPr/>
+          <p:nvPr/>
+        </p:nvSpPr>
+        <p:spPr>
+          <a:xfrm>
+            <a:off x="8074152" y="3666744"/>
+            <a:ext cx="2825496" cy="201168"/>
+          </a:xfrm>
+          <a:prstGeom prst="rect">
+            <a:avLst/>
+          </a:prstGeom>
+          <a:noFill/>
+          <a:ln/>
+        </p:spPr>
+        <p:txBody>
+          <a:bodyPr wrap="square" lIns="0" tIns="0" rIns="0" bIns="0" rtlCol="0" anchor="ctr"/>
+          <a:lstStyle/>
+          <a:p>
+            <a:pPr indent="0" marL="0">
+              <a:buNone/>
+            </a:pPr>
+            <a:r>
+              <a:rPr lang="en-US" sz="950" b="1" dirty="0">
+                <a:solidFill>
+                  <a:srgbClr val="0068B7"/>
+                </a:solidFill>
+                <a:latin typeface="Aptos" pitchFamily="34" charset="0"/>
+                <a:ea typeface="Aptos" pitchFamily="34" charset="-122"/>
+                <a:cs typeface="Aptos" pitchFamily="34" charset="-120"/>
+              </a:rPr>
+              <a:t>Use this for</a:t>
+            </a:r>
+            <a:endParaRPr lang="en-US" sz="950" dirty="0"/>
+          </a:p>
+        </p:txBody>
+      </p:sp>
+      <p:sp>
+        <p:nvSpPr>
+          <p:cNvPr id="16" name="Text 14"/>
+          <p:cNvSpPr/>
+          <p:nvPr/>
+        </p:nvSpPr>
+        <p:spPr>
+          <a:xfrm>
+            <a:off x="8074152" y="3959352"/>
+            <a:ext cx="2825496" cy="1170432"/>
+          </a:xfrm>
+          <a:prstGeom prst="rect">
+            <a:avLst/>
+          </a:prstGeom>
+          <a:noFill/>
+          <a:ln/>
+        </p:spPr>
+        <p:txBody>
+          <a:bodyPr wrap="square" lIns="0" tIns="0" rIns="0" bIns="0" rtlCol="0" anchor="t">
+            <a:normAutofit/>
+          </a:bodyPr>
+          <a:lstStyle/>
+          <a:p>
+            <a:pPr indent="0" marL="0">
+              <a:buNone/>
+            </a:pPr>
+            <a:r>
+              <a:rPr lang="en-US" sz="1250" dirty="0">
+                <a:solidFill>
+                  <a:srgbClr val="17364A"/>
+                </a:solidFill>
+                <a:latin typeface="Aptos" pitchFamily="34" charset="0"/>
+                <a:ea typeface="Aptos" pitchFamily="34" charset="-122"/>
+                <a:cs typeface="Aptos" pitchFamily="34" charset="-120"/>
+              </a:rPr>
+              <a:t>Connect the concept to public health decisions, safeguards, documentation, or implementation work.</a:t>
+            </a:r>
+            <a:endParaRPr lang="en-US" sz="1250" dirty="0"/>
           </a:p>
         </p:txBody>
       </p:sp>
@@ -5824,7 +10227,32 @@
       </p:sp>
       <p:sp>
         <p:nvSpPr>
-          <p:cNvPr id="3" name="Text 1"/>
+          <p:cNvPr id="3" name="Shape 1"/>
+          <p:cNvSpPr/>
+          <p:nvPr/>
+        </p:nvSpPr>
+        <p:spPr>
+          <a:xfrm>
+            <a:off x="0" y="164592"/>
+            <a:ext cx="146304" cy="6693408"/>
+          </a:xfrm>
+          <a:prstGeom prst="rect">
+            <a:avLst/>
+          </a:prstGeom>
+          <a:solidFill>
+            <a:srgbClr val="2F8A28"/>
+          </a:solidFill>
+          <a:ln w="12700">
+            <a:solidFill>
+              <a:srgbClr val="2F8A28"/>
+            </a:solidFill>
+            <a:prstDash val="solid"/>
+          </a:ln>
+        </p:spPr>
+      </p:sp>
+      <p:sp>
+        <p:nvSpPr>
+          <p:cNvPr id="4" name="Text 2"/>
           <p:cNvSpPr/>
           <p:nvPr/>
         </p:nvSpPr>
@@ -5863,7 +10291,7 @@
       </p:sp>
       <p:sp>
         <p:nvSpPr>
-          <p:cNvPr id="4" name="Text 2"/>
+          <p:cNvPr id="5" name="Text 3"/>
           <p:cNvSpPr/>
           <p:nvPr/>
         </p:nvSpPr>
@@ -5902,7 +10330,7 @@
       </p:sp>
       <p:sp>
         <p:nvSpPr>
-          <p:cNvPr id="5" name="Text 3"/>
+          <p:cNvPr id="6" name="Text 4"/>
           <p:cNvSpPr/>
           <p:nvPr/>
         </p:nvSpPr>
@@ -5941,7 +10369,7 @@
       </p:sp>
       <p:sp>
         <p:nvSpPr>
-          <p:cNvPr id="6" name="Text 4"/>
+          <p:cNvPr id="7" name="Text 5"/>
           <p:cNvSpPr/>
           <p:nvPr/>
         </p:nvSpPr>
@@ -5974,7 +10402,7 @@
                 <a:ea typeface="Aptos Display" pitchFamily="34" charset="-122"/>
                 <a:cs typeface="Aptos Display" pitchFamily="34" charset="-120"/>
               </a:rPr>
-              <a:t>Learning Objectives</a:t>
+              <a:t>How this module connects to the playbook</a:t>
             </a:r>
             <a:endParaRPr lang="en-US" sz="2700" dirty="0"/>
           </a:p>
@@ -5982,14 +10410,14 @@
       </p:sp>
       <p:sp>
         <p:nvSpPr>
-          <p:cNvPr id="7" name="Text 5"/>
-          <p:cNvSpPr/>
-          <p:nvPr/>
-        </p:nvSpPr>
-        <p:spPr>
-          <a:xfrm>
-            <a:off x="822960" y="1325880"/>
-            <a:ext cx="10378440" cy="4800600"/>
+          <p:cNvPr id="8" name="Text 6"/>
+          <p:cNvSpPr/>
+          <p:nvPr/>
+        </p:nvSpPr>
+        <p:spPr>
+          <a:xfrm>
+            <a:off x="868680" y="1417320"/>
+            <a:ext cx="6903720" cy="4480560"/>
           </a:xfrm>
           <a:prstGeom prst="rect">
             <a:avLst/>
@@ -6004,7 +10432,7 @@
           <a:lstStyle/>
           <a:p>
             <a:r>
-              <a:rPr lang="en-US" sz="1450" dirty="0">
+              <a:rPr lang="en-US" sz="1540" dirty="0">
                 <a:solidFill>
                   <a:srgbClr val="17364A"/>
                 </a:solidFill>
@@ -6012,13 +10440,13 @@
                 <a:ea typeface="Aptos" pitchFamily="34" charset="-122"/>
                 <a:cs typeface="Aptos" pitchFamily="34" charset="-120"/>
               </a:rPr>
-              <a:t>Explain the purpose of UAT for AI-supported workflows.</a:t>
-            </a:r>
-            <a:endParaRPr lang="en-US" sz="1450" dirty="0"/>
-          </a:p>
-          <a:p>
-            <a:r>
-              <a:rPr lang="en-US" sz="1450" dirty="0">
+              <a:t>Play 11: Build and Deploy AI Solutions - This lesson informs Play 11 by helping learners connect the lesson topic to build and deploy.</a:t>
+            </a:r>
+            <a:endParaRPr lang="en-US" sz="1540" dirty="0"/>
+          </a:p>
+          <a:p>
+            <a:r>
+              <a:rPr lang="en-US" sz="1540" dirty="0">
                 <a:solidFill>
                   <a:srgbClr val="17364A"/>
                 </a:solidFill>
@@ -6026,13 +10454,13 @@
                 <a:ea typeface="Aptos" pitchFamily="34" charset="-122"/>
                 <a:cs typeface="Aptos" pitchFamily="34" charset="-120"/>
               </a:rPr>
-              <a:t>Develop role-based UAT scenarios and test scripts.</a:t>
-            </a:r>
-            <a:endParaRPr lang="en-US" sz="1450" dirty="0"/>
-          </a:p>
-          <a:p>
-            <a:r>
-              <a:rPr lang="en-US" sz="1450" dirty="0">
+              <a:t>Play 2: Readiness Assessment - This lesson informs Play 2 by helping learners connect the lesson topic to readiness assessment work.</a:t>
+            </a:r>
+            <a:endParaRPr lang="en-US" sz="1540" dirty="0"/>
+          </a:p>
+          <a:p>
+            <a:r>
+              <a:rPr lang="en-US" sz="1540" dirty="0">
                 <a:solidFill>
                   <a:srgbClr val="17364A"/>
                 </a:solidFill>
@@ -6040,13 +10468,13 @@
                 <a:ea typeface="Aptos" pitchFamily="34" charset="-122"/>
                 <a:cs typeface="Aptos" pitchFamily="34" charset="-120"/>
               </a:rPr>
-              <a:t>Include routine cases, edge cases, failure cases, and equity-sensitive scenarios in UAT.</a:t>
-            </a:r>
-            <a:endParaRPr lang="en-US" sz="1450" dirty="0"/>
-          </a:p>
-          <a:p>
-            <a:r>
-              <a:rPr lang="en-US" sz="1450" dirty="0">
+              <a:t>Play 1: Vision &amp; Guardrails - This lesson informs Play 1 by helping learners connect the lesson topic to vision &amp; guardrails work in.</a:t>
+            </a:r>
+            <a:endParaRPr lang="en-US" sz="1540" dirty="0"/>
+          </a:p>
+          <a:p>
+            <a:r>
+              <a:rPr lang="en-US" sz="1540" dirty="0">
                 <a:solidFill>
                   <a:srgbClr val="17364A"/>
                 </a:solidFill>
@@ -6054,13 +10482,106 @@
                 <a:ea typeface="Aptos" pitchFamily="34" charset="-122"/>
                 <a:cs typeface="Aptos" pitchFamily="34" charset="-120"/>
               </a:rPr>
-              <a:t>Define acceptance criteria for usability, safety, documentation, human review, and workflow fit.</a:t>
-            </a:r>
-            <a:endParaRPr lang="en-US" sz="1450" dirty="0"/>
-          </a:p>
-          <a:p>
-            <a:r>
-              <a:rPr lang="en-US" sz="1450" dirty="0">
+              <a:t>Play 7: Prioritize Use Cases - This lesson informs Play 7 by helping learners connect the lesson topic to prioritize use cases work.</a:t>
+            </a:r>
+            <a:endParaRPr lang="en-US" sz="1540" dirty="0"/>
+          </a:p>
+        </p:txBody>
+      </p:sp>
+      <p:sp>
+        <p:nvSpPr>
+          <p:cNvPr id="9" name="Shape 7"/>
+          <p:cNvSpPr/>
+          <p:nvPr/>
+        </p:nvSpPr>
+        <p:spPr>
+          <a:xfrm>
+            <a:off x="8046720" y="1417320"/>
+            <a:ext cx="3063240" cy="2103120"/>
+          </a:xfrm>
+          <a:prstGeom prst="roundRect">
+            <a:avLst>
+              <a:gd name="adj" fmla="val 5217"/>
+            </a:avLst>
+          </a:prstGeom>
+          <a:solidFill>
+            <a:srgbClr val="EEF8ED"/>
+          </a:solidFill>
+          <a:ln w="12700">
+            <a:solidFill>
+              <a:srgbClr val="B9D7E6"/>
+            </a:solidFill>
+            <a:prstDash val="solid"/>
+          </a:ln>
+        </p:spPr>
+      </p:sp>
+      <p:sp>
+        <p:nvSpPr>
+          <p:cNvPr id="10" name="Text 8"/>
+          <p:cNvSpPr/>
+          <p:nvPr/>
+        </p:nvSpPr>
+        <p:spPr>
+          <a:xfrm>
+            <a:off x="8211312" y="1563624"/>
+            <a:ext cx="2734056" cy="201168"/>
+          </a:xfrm>
+          <a:prstGeom prst="rect">
+            <a:avLst/>
+          </a:prstGeom>
+          <a:noFill/>
+          <a:ln/>
+        </p:spPr>
+        <p:txBody>
+          <a:bodyPr wrap="square" lIns="0" tIns="0" rIns="0" bIns="0" rtlCol="0" anchor="ctr"/>
+          <a:lstStyle/>
+          <a:p>
+            <a:pPr indent="0" marL="0">
+              <a:buNone/>
+            </a:pPr>
+            <a:r>
+              <a:rPr lang="en-US" sz="950" b="1" dirty="0">
+                <a:solidFill>
+                  <a:srgbClr val="0068B7"/>
+                </a:solidFill>
+                <a:latin typeface="Aptos" pitchFamily="34" charset="0"/>
+                <a:ea typeface="Aptos" pitchFamily="34" charset="-122"/>
+                <a:cs typeface="Aptos" pitchFamily="34" charset="-120"/>
+              </a:rPr>
+              <a:t>Apply the lesson</a:t>
+            </a:r>
+            <a:endParaRPr lang="en-US" sz="950" dirty="0"/>
+          </a:p>
+        </p:txBody>
+      </p:sp>
+      <p:sp>
+        <p:nvSpPr>
+          <p:cNvPr id="11" name="Text 9"/>
+          <p:cNvSpPr/>
+          <p:nvPr/>
+        </p:nvSpPr>
+        <p:spPr>
+          <a:xfrm>
+            <a:off x="8211312" y="1856232"/>
+            <a:ext cx="2734056" cy="1536192"/>
+          </a:xfrm>
+          <a:prstGeom prst="rect">
+            <a:avLst/>
+          </a:prstGeom>
+          <a:noFill/>
+          <a:ln/>
+        </p:spPr>
+        <p:txBody>
+          <a:bodyPr wrap="square" lIns="0" tIns="0" rIns="0" bIns="0" rtlCol="0" anchor="t">
+            <a:normAutofit/>
+          </a:bodyPr>
+          <a:lstStyle/>
+          <a:p>
+            <a:pPr indent="0" marL="0">
+              <a:buNone/>
+            </a:pPr>
+            <a:r>
+              <a:rPr lang="en-US" sz="1250" dirty="0">
                 <a:solidFill>
                   <a:srgbClr val="17364A"/>
                 </a:solidFill>
@@ -6068,9 +10589,116 @@
                 <a:ea typeface="Aptos" pitchFamily="34" charset="-122"/>
                 <a:cs typeface="Aptos" pitchFamily="34" charset="-120"/>
               </a:rPr>
-              <a:t>Produce a UAT plan and sign-off recommendation for an AI-supported workflow.</a:t>
-            </a:r>
-            <a:endParaRPr lang="en-US" sz="1450" dirty="0"/>
+              <a:t>Use the related plays to identify decisions, participants, timing, approvals, and documentation needed for responsible implementation.</a:t>
+            </a:r>
+            <a:endParaRPr lang="en-US" sz="1250" dirty="0"/>
+          </a:p>
+        </p:txBody>
+      </p:sp>
+      <p:sp>
+        <p:nvSpPr>
+          <p:cNvPr id="12" name="Shape 10"/>
+          <p:cNvSpPr/>
+          <p:nvPr/>
+        </p:nvSpPr>
+        <p:spPr>
+          <a:xfrm>
+            <a:off x="8046720" y="3794760"/>
+            <a:ext cx="3063240" cy="1508760"/>
+          </a:xfrm>
+          <a:prstGeom prst="roundRect">
+            <a:avLst>
+              <a:gd name="adj" fmla="val 7273"/>
+            </a:avLst>
+          </a:prstGeom>
+          <a:solidFill>
+            <a:srgbClr val="FFF4D9"/>
+          </a:solidFill>
+          <a:ln w="12700">
+            <a:solidFill>
+              <a:srgbClr val="B9D7E6"/>
+            </a:solidFill>
+            <a:prstDash val="solid"/>
+          </a:ln>
+        </p:spPr>
+      </p:sp>
+      <p:sp>
+        <p:nvSpPr>
+          <p:cNvPr id="13" name="Text 11"/>
+          <p:cNvSpPr/>
+          <p:nvPr/>
+        </p:nvSpPr>
+        <p:spPr>
+          <a:xfrm>
+            <a:off x="8211312" y="3941064"/>
+            <a:ext cx="2734056" cy="201168"/>
+          </a:xfrm>
+          <a:prstGeom prst="rect">
+            <a:avLst/>
+          </a:prstGeom>
+          <a:noFill/>
+          <a:ln/>
+        </p:spPr>
+        <p:txBody>
+          <a:bodyPr wrap="square" lIns="0" tIns="0" rIns="0" bIns="0" rtlCol="0" anchor="ctr"/>
+          <a:lstStyle/>
+          <a:p>
+            <a:pPr indent="0" marL="0">
+              <a:buNone/>
+            </a:pPr>
+            <a:r>
+              <a:rPr lang="en-US" sz="950" b="1" dirty="0">
+                <a:solidFill>
+                  <a:srgbClr val="0068B7"/>
+                </a:solidFill>
+                <a:latin typeface="Aptos" pitchFamily="34" charset="0"/>
+                <a:ea typeface="Aptos" pitchFamily="34" charset="-122"/>
+                <a:cs typeface="Aptos" pitchFamily="34" charset="-120"/>
+              </a:rPr>
+              <a:t>Keep in mind</a:t>
+            </a:r>
+            <a:endParaRPr lang="en-US" sz="950" dirty="0"/>
+          </a:p>
+        </p:txBody>
+      </p:sp>
+      <p:sp>
+        <p:nvSpPr>
+          <p:cNvPr id="14" name="Text 12"/>
+          <p:cNvSpPr/>
+          <p:nvPr/>
+        </p:nvSpPr>
+        <p:spPr>
+          <a:xfrm>
+            <a:off x="8211312" y="4233672"/>
+            <a:ext cx="2734056" cy="941832"/>
+          </a:xfrm>
+          <a:prstGeom prst="rect">
+            <a:avLst/>
+          </a:prstGeom>
+          <a:noFill/>
+          <a:ln/>
+        </p:spPr>
+        <p:txBody>
+          <a:bodyPr wrap="square" lIns="0" tIns="0" rIns="0" bIns="0" rtlCol="0" anchor="t">
+            <a:normAutofit/>
+          </a:bodyPr>
+          <a:lstStyle/>
+          <a:p>
+            <a:pPr indent="0" marL="0">
+              <a:buNone/>
+            </a:pPr>
+            <a:r>
+              <a:rPr lang="en-US" sz="1250" dirty="0">
+                <a:solidFill>
+                  <a:srgbClr val="17364A"/>
+                </a:solidFill>
+                <a:latin typeface="Aptos" pitchFamily="34" charset="0"/>
+                <a:ea typeface="Aptos" pitchFamily="34" charset="-122"/>
+                <a:cs typeface="Aptos" pitchFamily="34" charset="-120"/>
+              </a:rPr>
+              <a:t>The playbook connection helps turn training into agency work, not just individual knowledge.</a:t>
+            </a:r>
+            <a:endParaRPr lang="en-US" sz="1250" dirty="0"/>
           </a:p>
         </p:txBody>
       </p:sp>
@@ -6133,7 +10761,32 @@
       </p:sp>
       <p:sp>
         <p:nvSpPr>
-          <p:cNvPr id="3" name="Text 1"/>
+          <p:cNvPr id="3" name="Shape 1"/>
+          <p:cNvSpPr/>
+          <p:nvPr/>
+        </p:nvSpPr>
+        <p:spPr>
+          <a:xfrm>
+            <a:off x="0" y="164592"/>
+            <a:ext cx="146304" cy="6693408"/>
+          </a:xfrm>
+          <a:prstGeom prst="rect">
+            <a:avLst/>
+          </a:prstGeom>
+          <a:solidFill>
+            <a:srgbClr val="2F8A28"/>
+          </a:solidFill>
+          <a:ln w="12700">
+            <a:solidFill>
+              <a:srgbClr val="2F8A28"/>
+            </a:solidFill>
+            <a:prstDash val="solid"/>
+          </a:ln>
+        </p:spPr>
+      </p:sp>
+      <p:sp>
+        <p:nvSpPr>
+          <p:cNvPr id="4" name="Text 2"/>
           <p:cNvSpPr/>
           <p:nvPr/>
         </p:nvSpPr>
@@ -6172,7 +10825,7 @@
       </p:sp>
       <p:sp>
         <p:nvSpPr>
-          <p:cNvPr id="4" name="Text 2"/>
+          <p:cNvPr id="5" name="Text 3"/>
           <p:cNvSpPr/>
           <p:nvPr/>
         </p:nvSpPr>
@@ -6211,7 +10864,7 @@
       </p:sp>
       <p:sp>
         <p:nvSpPr>
-          <p:cNvPr id="5" name="Text 3"/>
+          <p:cNvPr id="6" name="Text 4"/>
           <p:cNvSpPr/>
           <p:nvPr/>
         </p:nvSpPr>
@@ -6250,7 +10903,7 @@
       </p:sp>
       <p:sp>
         <p:nvSpPr>
-          <p:cNvPr id="6" name="Text 4"/>
+          <p:cNvPr id="7" name="Text 5"/>
           <p:cNvSpPr/>
           <p:nvPr/>
         </p:nvSpPr>
@@ -6283,7 +10936,7 @@
                 <a:ea typeface="Aptos Display" pitchFamily="34" charset="-122"/>
                 <a:cs typeface="Aptos Display" pitchFamily="34" charset="-120"/>
               </a:rPr>
-              <a:t>Module Overview</a:t>
+              <a:t>Related toolkit resources</a:t>
             </a:r>
             <a:endParaRPr lang="en-US" sz="2700" dirty="0"/>
           </a:p>
@@ -6291,32 +10944,192 @@
       </p:sp>
       <p:sp>
         <p:nvSpPr>
-          <p:cNvPr id="7" name="Text 5"/>
-          <p:cNvSpPr/>
-          <p:nvPr/>
-        </p:nvSpPr>
-        <p:spPr>
-          <a:xfrm>
-            <a:off x="822960" y="1325880"/>
-            <a:ext cx="10378440" cy="4800600"/>
-          </a:xfrm>
-          <a:prstGeom prst="rect">
-            <a:avLst/>
-          </a:prstGeom>
-          <a:noFill/>
-          <a:ln/>
-        </p:spPr>
-        <p:txBody>
-          <a:bodyPr wrap="square" lIns="1016" tIns="1016" rIns="1016" bIns="1016" rtlCol="0" anchor="t">
+          <p:cNvPr id="8" name="Text 6"/>
+          <p:cNvSpPr/>
+          <p:nvPr/>
+        </p:nvSpPr>
+        <p:spPr>
+          <a:xfrm>
+            <a:off x="868680" y="1417320"/>
+            <a:ext cx="6903720" cy="4480560"/>
+          </a:xfrm>
+          <a:prstGeom prst="rect">
+            <a:avLst/>
+          </a:prstGeom>
+          <a:noFill/>
+          <a:ln/>
+        </p:spPr>
+        <p:txBody>
+          <a:bodyPr wrap="square" lIns="635" tIns="635" rIns="635" bIns="635" rtlCol="0" anchor="t">
             <a:normAutofit/>
           </a:bodyPr>
           <a:lstStyle/>
           <a:p>
+            <a:r>
+              <a:rPr lang="en-US" sz="1460" dirty="0">
+                <a:solidFill>
+                  <a:srgbClr val="17364A"/>
+                </a:solidFill>
+                <a:latin typeface="Aptos" pitchFamily="34" charset="0"/>
+                <a:ea typeface="Aptos" pitchFamily="34" charset="-122"/>
+                <a:cs typeface="Aptos" pitchFamily="34" charset="-120"/>
+              </a:rPr>
+              <a:t>Tool 4: AI Policy Landscape Scan (Worksheet) - Use AI Policy Landscape Scan to translate this lesson into a documented public health.</a:t>
+            </a:r>
+            <a:endParaRPr lang="en-US" sz="1460" dirty="0"/>
+          </a:p>
+          <a:p>
+            <a:r>
+              <a:rPr lang="en-US" sz="1460" dirty="0">
+                <a:solidFill>
+                  <a:srgbClr val="17364A"/>
+                </a:solidFill>
+                <a:latin typeface="Aptos" pitchFamily="34" charset="0"/>
+                <a:ea typeface="Aptos" pitchFamily="34" charset="-122"/>
+                <a:cs typeface="Aptos" pitchFamily="34" charset="-120"/>
+              </a:rPr>
+              <a:t>Tool 5: AI Environmental and Resource Impact Review (Checklist) - Use AI Environmental and Resource Impact Review to translate this.</a:t>
+            </a:r>
+            <a:endParaRPr lang="en-US" sz="1460" dirty="0"/>
+          </a:p>
+          <a:p>
+            <a:r>
+              <a:rPr lang="en-US" sz="1460" dirty="0">
+                <a:solidFill>
+                  <a:srgbClr val="17364A"/>
+                </a:solidFill>
+                <a:latin typeface="Aptos" pitchFamily="34" charset="0"/>
+                <a:ea typeface="Aptos" pitchFamily="34" charset="-122"/>
+                <a:cs typeface="Aptos" pitchFamily="34" charset="-120"/>
+              </a:rPr>
+              <a:t>Tool 6: Human-Centered AI Decision Rule Checklist (Checklist) - Use Human-Centered AI Decision Rule Checklist to translate this.</a:t>
+            </a:r>
+            <a:endParaRPr lang="en-US" sz="1460" dirty="0"/>
+          </a:p>
+          <a:p>
+            <a:r>
+              <a:rPr lang="en-US" sz="1460" dirty="0">
+                <a:solidFill>
+                  <a:srgbClr val="17364A"/>
+                </a:solidFill>
+                <a:latin typeface="Aptos" pitchFamily="34" charset="0"/>
+                <a:ea typeface="Aptos" pitchFamily="34" charset="-122"/>
+                <a:cs typeface="Aptos" pitchFamily="34" charset="-120"/>
+              </a:rPr>
+              <a:t>Tool 8: AI Project Charter (Planning) - Use AI Project Charter to translate this lesson into a documented public health AI planning,.</a:t>
+            </a:r>
+            <a:endParaRPr lang="en-US" sz="1460" dirty="0"/>
+          </a:p>
+          <a:p>
+            <a:r>
+              <a:rPr lang="en-US" sz="1460" dirty="0">
+                <a:solidFill>
+                  <a:srgbClr val="17364A"/>
+                </a:solidFill>
+                <a:latin typeface="Aptos" pitchFamily="34" charset="0"/>
+                <a:ea typeface="Aptos" pitchFamily="34" charset="-122"/>
+                <a:cs typeface="Aptos" pitchFamily="34" charset="-120"/>
+              </a:rPr>
+              <a:t>Tool 9: Data Quality Assessment Checklist (Checklist) - Use this tool to complete or strengthen the practical exercise for the module.</a:t>
+            </a:r>
+            <a:endParaRPr lang="en-US" sz="1460" dirty="0"/>
+          </a:p>
+        </p:txBody>
+      </p:sp>
+      <p:sp>
+        <p:nvSpPr>
+          <p:cNvPr id="9" name="Shape 7"/>
+          <p:cNvSpPr/>
+          <p:nvPr/>
+        </p:nvSpPr>
+        <p:spPr>
+          <a:xfrm>
+            <a:off x="8046720" y="1417320"/>
+            <a:ext cx="3063240" cy="2103120"/>
+          </a:xfrm>
+          <a:prstGeom prst="roundRect">
+            <a:avLst>
+              <a:gd name="adj" fmla="val 5217"/>
+            </a:avLst>
+          </a:prstGeom>
+          <a:solidFill>
+            <a:srgbClr val="EAF6F8"/>
+          </a:solidFill>
+          <a:ln w="12700">
+            <a:solidFill>
+              <a:srgbClr val="B9D7E6"/>
+            </a:solidFill>
+            <a:prstDash val="solid"/>
+          </a:ln>
+        </p:spPr>
+      </p:sp>
+      <p:sp>
+        <p:nvSpPr>
+          <p:cNvPr id="10" name="Text 8"/>
+          <p:cNvSpPr/>
+          <p:nvPr/>
+        </p:nvSpPr>
+        <p:spPr>
+          <a:xfrm>
+            <a:off x="8211312" y="1563624"/>
+            <a:ext cx="2734056" cy="201168"/>
+          </a:xfrm>
+          <a:prstGeom prst="rect">
+            <a:avLst/>
+          </a:prstGeom>
+          <a:noFill/>
+          <a:ln/>
+        </p:spPr>
+        <p:txBody>
+          <a:bodyPr wrap="square" lIns="0" tIns="0" rIns="0" bIns="0" rtlCol="0" anchor="ctr"/>
+          <a:lstStyle/>
+          <a:p>
             <a:pPr indent="0" marL="0">
               <a:buNone/>
             </a:pPr>
             <a:r>
-              <a:rPr lang="en-US" sz="1420" dirty="0">
+              <a:rPr lang="en-US" sz="950" b="1" dirty="0">
+                <a:solidFill>
+                  <a:srgbClr val="0068B7"/>
+                </a:solidFill>
+                <a:latin typeface="Aptos" pitchFamily="34" charset="0"/>
+                <a:ea typeface="Aptos" pitchFamily="34" charset="-122"/>
+                <a:cs typeface="Aptos" pitchFamily="34" charset="-120"/>
+              </a:rPr>
+              <a:t>Use the tools</a:t>
+            </a:r>
+            <a:endParaRPr lang="en-US" sz="950" dirty="0"/>
+          </a:p>
+        </p:txBody>
+      </p:sp>
+      <p:sp>
+        <p:nvSpPr>
+          <p:cNvPr id="11" name="Text 9"/>
+          <p:cNvSpPr/>
+          <p:nvPr/>
+        </p:nvSpPr>
+        <p:spPr>
+          <a:xfrm>
+            <a:off x="8211312" y="1856232"/>
+            <a:ext cx="2734056" cy="1536192"/>
+          </a:xfrm>
+          <a:prstGeom prst="rect">
+            <a:avLst/>
+          </a:prstGeom>
+          <a:noFill/>
+          <a:ln/>
+        </p:spPr>
+        <p:txBody>
+          <a:bodyPr wrap="square" lIns="0" tIns="0" rIns="0" bIns="0" rtlCol="0" anchor="t">
+            <a:normAutofit/>
+          </a:bodyPr>
+          <a:lstStyle/>
+          <a:p>
+            <a:pPr indent="0" marL="0">
+              <a:buNone/>
+            </a:pPr>
+            <a:r>
+              <a:rPr lang="en-US" sz="1250" dirty="0">
                 <a:solidFill>
                   <a:srgbClr val="17364A"/>
                 </a:solidFill>
@@ -6324,9 +11137,116 @@
                 <a:ea typeface="Aptos" pitchFamily="34" charset="-122"/>
                 <a:cs typeface="Aptos" pitchFamily="34" charset="-120"/>
               </a:rPr>
-              <a:t>User acceptance testing is the process of determining whether an AI-supported workflow is usable, understandable, safe, and ready for real users in the intended operational context. Technical testing may show that a tool runs, and model validation may show acceptable performance, but neither proves that staff can use the workflow correctly under real public health conditions. UAT fills that gap. This module teaches learners how to design and conduct user acceptance testing for AI-supported workflows. It focuses on role-based test scripts, realistic scenarios, edge cases, human review, documentation, override behavior, accessibility, usability, and sign-off criteria. UAT is a critical safety step before launch. It reveals whether staff understand the output, can find source evidence, know when to override, can escalate concerns, and can complete the workflow without unacceptable burden or confusion.</a:t>
-            </a:r>
-            <a:endParaRPr lang="en-US" sz="1420" dirty="0"/>
+              <a:t>Use linked tools when your department needs a structured worksheet, template, checklist, review process, or documentation artifact.</a:t>
+            </a:r>
+            <a:endParaRPr lang="en-US" sz="1250" dirty="0"/>
+          </a:p>
+        </p:txBody>
+      </p:sp>
+      <p:sp>
+        <p:nvSpPr>
+          <p:cNvPr id="12" name="Shape 10"/>
+          <p:cNvSpPr/>
+          <p:nvPr/>
+        </p:nvSpPr>
+        <p:spPr>
+          <a:xfrm>
+            <a:off x="8046720" y="3794760"/>
+            <a:ext cx="3063240" cy="1508760"/>
+          </a:xfrm>
+          <a:prstGeom prst="roundRect">
+            <a:avLst>
+              <a:gd name="adj" fmla="val 7273"/>
+            </a:avLst>
+          </a:prstGeom>
+          <a:solidFill>
+            <a:srgbClr val="EEF8ED"/>
+          </a:solidFill>
+          <a:ln w="12700">
+            <a:solidFill>
+              <a:srgbClr val="B9D7E6"/>
+            </a:solidFill>
+            <a:prstDash val="solid"/>
+          </a:ln>
+        </p:spPr>
+      </p:sp>
+      <p:sp>
+        <p:nvSpPr>
+          <p:cNvPr id="13" name="Text 11"/>
+          <p:cNvSpPr/>
+          <p:nvPr/>
+        </p:nvSpPr>
+        <p:spPr>
+          <a:xfrm>
+            <a:off x="8211312" y="3941064"/>
+            <a:ext cx="2734056" cy="201168"/>
+          </a:xfrm>
+          <a:prstGeom prst="rect">
+            <a:avLst/>
+          </a:prstGeom>
+          <a:noFill/>
+          <a:ln/>
+        </p:spPr>
+        <p:txBody>
+          <a:bodyPr wrap="square" lIns="0" tIns="0" rIns="0" bIns="0" rtlCol="0" anchor="ctr"/>
+          <a:lstStyle/>
+          <a:p>
+            <a:pPr indent="0" marL="0">
+              <a:buNone/>
+            </a:pPr>
+            <a:r>
+              <a:rPr lang="en-US" sz="950" b="1" dirty="0">
+                <a:solidFill>
+                  <a:srgbClr val="0068B7"/>
+                </a:solidFill>
+                <a:latin typeface="Aptos" pitchFamily="34" charset="0"/>
+                <a:ea typeface="Aptos" pitchFamily="34" charset="-122"/>
+                <a:cs typeface="Aptos" pitchFamily="34" charset="-120"/>
+              </a:rPr>
+              <a:t>Avoid duplication</a:t>
+            </a:r>
+            <a:endParaRPr lang="en-US" sz="950" dirty="0"/>
+          </a:p>
+        </p:txBody>
+      </p:sp>
+      <p:sp>
+        <p:nvSpPr>
+          <p:cNvPr id="14" name="Text 12"/>
+          <p:cNvSpPr/>
+          <p:nvPr/>
+        </p:nvSpPr>
+        <p:spPr>
+          <a:xfrm>
+            <a:off x="8211312" y="4233672"/>
+            <a:ext cx="2734056" cy="941832"/>
+          </a:xfrm>
+          <a:prstGeom prst="rect">
+            <a:avLst/>
+          </a:prstGeom>
+          <a:noFill/>
+          <a:ln/>
+        </p:spPr>
+        <p:txBody>
+          <a:bodyPr wrap="square" lIns="0" tIns="0" rIns="0" bIns="0" rtlCol="0" anchor="t">
+            <a:normAutofit/>
+          </a:bodyPr>
+          <a:lstStyle/>
+          <a:p>
+            <a:pPr indent="0" marL="0">
+              <a:buNone/>
+            </a:pPr>
+            <a:r>
+              <a:rPr lang="en-US" sz="1250" dirty="0">
+                <a:solidFill>
+                  <a:srgbClr val="17364A"/>
+                </a:solidFill>
+                <a:latin typeface="Aptos" pitchFamily="34" charset="0"/>
+                <a:ea typeface="Aptos" pitchFamily="34" charset="-122"/>
+                <a:cs typeface="Aptos" pitchFamily="34" charset="-120"/>
+              </a:rPr>
+              <a:t>If your department already has a strong equivalent tool, adapt or use the existing process instead of recreating it.</a:t>
+            </a:r>
+            <a:endParaRPr lang="en-US" sz="1250" dirty="0"/>
           </a:p>
         </p:txBody>
       </p:sp>
@@ -6389,7 +11309,32 @@
       </p:sp>
       <p:sp>
         <p:nvSpPr>
-          <p:cNvPr id="3" name="Text 1"/>
+          <p:cNvPr id="3" name="Shape 1"/>
+          <p:cNvSpPr/>
+          <p:nvPr/>
+        </p:nvSpPr>
+        <p:spPr>
+          <a:xfrm>
+            <a:off x="0" y="164592"/>
+            <a:ext cx="146304" cy="6693408"/>
+          </a:xfrm>
+          <a:prstGeom prst="rect">
+            <a:avLst/>
+          </a:prstGeom>
+          <a:solidFill>
+            <a:srgbClr val="2F8A28"/>
+          </a:solidFill>
+          <a:ln w="12700">
+            <a:solidFill>
+              <a:srgbClr val="2F8A28"/>
+            </a:solidFill>
+            <a:prstDash val="solid"/>
+          </a:ln>
+        </p:spPr>
+      </p:sp>
+      <p:sp>
+        <p:nvSpPr>
+          <p:cNvPr id="4" name="Text 2"/>
           <p:cNvSpPr/>
           <p:nvPr/>
         </p:nvSpPr>
@@ -6428,7 +11373,7 @@
       </p:sp>
       <p:sp>
         <p:nvSpPr>
-          <p:cNvPr id="4" name="Text 2"/>
+          <p:cNvPr id="5" name="Text 3"/>
           <p:cNvSpPr/>
           <p:nvPr/>
         </p:nvSpPr>
@@ -6467,7 +11412,7 @@
       </p:sp>
       <p:sp>
         <p:nvSpPr>
-          <p:cNvPr id="5" name="Text 3"/>
+          <p:cNvPr id="6" name="Text 4"/>
           <p:cNvSpPr/>
           <p:nvPr/>
         </p:nvSpPr>
@@ -6506,13 +11451,77 @@
       </p:sp>
       <p:sp>
         <p:nvSpPr>
-          <p:cNvPr id="6" name="Text 4"/>
+          <p:cNvPr id="7" name="Shape 5"/>
           <p:cNvSpPr/>
           <p:nvPr/>
         </p:nvSpPr>
         <p:spPr>
           <a:xfrm>
             <a:off x="640080" y="658368"/>
+            <a:ext cx="420624" cy="420624"/>
+          </a:xfrm>
+          <a:prstGeom prst="ellipse">
+            <a:avLst/>
+          </a:prstGeom>
+          <a:solidFill>
+            <a:srgbClr val="0068B7"/>
+          </a:solidFill>
+          <a:ln w="12700">
+            <a:solidFill>
+              <a:srgbClr val="0068B7"/>
+            </a:solidFill>
+            <a:prstDash val="solid"/>
+          </a:ln>
+        </p:spPr>
+      </p:sp>
+      <p:sp>
+        <p:nvSpPr>
+          <p:cNvPr id="8" name="Text 6"/>
+          <p:cNvSpPr/>
+          <p:nvPr/>
+        </p:nvSpPr>
+        <p:spPr>
+          <a:xfrm>
+            <a:off x="640080" y="731520"/>
+            <a:ext cx="420624" cy="164592"/>
+          </a:xfrm>
+          <a:prstGeom prst="rect">
+            <a:avLst/>
+          </a:prstGeom>
+          <a:noFill/>
+          <a:ln/>
+        </p:spPr>
+        <p:txBody>
+          <a:bodyPr wrap="square" lIns="0" tIns="0" rIns="0" bIns="0" rtlCol="0" anchor="ctr"/>
+          <a:lstStyle/>
+          <a:p>
+            <a:pPr algn="ctr" indent="0" marL="0">
+              <a:buNone/>
+            </a:pPr>
+            <a:r>
+              <a:rPr lang="en-US" sz="1100" b="1" dirty="0">
+                <a:solidFill>
+                  <a:srgbClr val="FFFFFF"/>
+                </a:solidFill>
+                <a:latin typeface="Aptos" pitchFamily="34" charset="0"/>
+                <a:ea typeface="Aptos" pitchFamily="34" charset="-122"/>
+                <a:cs typeface="Aptos" pitchFamily="34" charset="-120"/>
+              </a:rPr>
+              <a:t>1</a:t>
+            </a:r>
+            <a:endParaRPr lang="en-US" sz="1100" dirty="0"/>
+          </a:p>
+        </p:txBody>
+      </p:sp>
+      <p:sp>
+        <p:nvSpPr>
+          <p:cNvPr id="9" name="Text 7"/>
+          <p:cNvSpPr/>
+          <p:nvPr/>
+        </p:nvSpPr>
+        <p:spPr>
+          <a:xfrm>
+            <a:off x="640080" y="621792"/>
             <a:ext cx="10881360" cy="566928"/>
           </a:xfrm>
           <a:prstGeom prst="rect">
@@ -6539,7 +11548,7 @@
                 <a:ea typeface="Aptos Display" pitchFamily="34" charset="-122"/>
                 <a:cs typeface="Aptos Display" pitchFamily="34" charset="-120"/>
               </a:rPr>
-              <a:t>Public Health Example</a:t>
+              <a:t>Learning Objectives</a:t>
             </a:r>
             <a:endParaRPr lang="en-US" sz="2700" dirty="0"/>
           </a:p>
@@ -6547,32 +11556,178 @@
       </p:sp>
       <p:sp>
         <p:nvSpPr>
-          <p:cNvPr id="7" name="Text 5"/>
-          <p:cNvSpPr/>
-          <p:nvPr/>
-        </p:nvSpPr>
-        <p:spPr>
-          <a:xfrm>
-            <a:off x="822960" y="1325880"/>
-            <a:ext cx="10378440" cy="4800600"/>
-          </a:xfrm>
-          <a:prstGeom prst="rect">
-            <a:avLst/>
-          </a:prstGeom>
-          <a:noFill/>
-          <a:ln/>
-        </p:spPr>
-        <p:txBody>
-          <a:bodyPr wrap="square" lIns="1016" tIns="1016" rIns="1016" bIns="1016" rtlCol="0" anchor="t">
+          <p:cNvPr id="10" name="Text 8"/>
+          <p:cNvSpPr/>
+          <p:nvPr/>
+        </p:nvSpPr>
+        <p:spPr>
+          <a:xfrm>
+            <a:off x="868680" y="1417320"/>
+            <a:ext cx="6675120" cy="4434840"/>
+          </a:xfrm>
+          <a:prstGeom prst="rect">
+            <a:avLst/>
+          </a:prstGeom>
+          <a:noFill/>
+          <a:ln/>
+        </p:spPr>
+        <p:txBody>
+          <a:bodyPr wrap="square" lIns="635" tIns="635" rIns="635" bIns="635" rtlCol="0" anchor="t">
             <a:normAutofit/>
           </a:bodyPr>
           <a:lstStyle/>
           <a:p>
+            <a:r>
+              <a:rPr lang="en-US" sz="1700" dirty="0">
+                <a:solidFill>
+                  <a:srgbClr val="17364A"/>
+                </a:solidFill>
+                <a:latin typeface="Aptos" pitchFamily="34" charset="0"/>
+                <a:ea typeface="Aptos" pitchFamily="34" charset="-122"/>
+                <a:cs typeface="Aptos" pitchFamily="34" charset="-120"/>
+              </a:rPr>
+              <a:t>Explain the purpose of UAT for AI-supported workflows.</a:t>
+            </a:r>
+            <a:endParaRPr lang="en-US" sz="1700" dirty="0"/>
+          </a:p>
+          <a:p>
+            <a:r>
+              <a:rPr lang="en-US" sz="1700" dirty="0">
+                <a:solidFill>
+                  <a:srgbClr val="17364A"/>
+                </a:solidFill>
+                <a:latin typeface="Aptos" pitchFamily="34" charset="0"/>
+                <a:ea typeface="Aptos" pitchFamily="34" charset="-122"/>
+                <a:cs typeface="Aptos" pitchFamily="34" charset="-120"/>
+              </a:rPr>
+              <a:t>Develop role-based UAT scenarios and test scripts.</a:t>
+            </a:r>
+            <a:endParaRPr lang="en-US" sz="1700" dirty="0"/>
+          </a:p>
+          <a:p>
+            <a:r>
+              <a:rPr lang="en-US" sz="1700" dirty="0">
+                <a:solidFill>
+                  <a:srgbClr val="17364A"/>
+                </a:solidFill>
+                <a:latin typeface="Aptos" pitchFamily="34" charset="0"/>
+                <a:ea typeface="Aptos" pitchFamily="34" charset="-122"/>
+                <a:cs typeface="Aptos" pitchFamily="34" charset="-120"/>
+              </a:rPr>
+              <a:t>Include routine cases, edge cases, failure cases, and equity-sensitive scenarios in UAT.</a:t>
+            </a:r>
+            <a:endParaRPr lang="en-US" sz="1700" dirty="0"/>
+          </a:p>
+          <a:p>
+            <a:r>
+              <a:rPr lang="en-US" sz="1700" dirty="0">
+                <a:solidFill>
+                  <a:srgbClr val="17364A"/>
+                </a:solidFill>
+                <a:latin typeface="Aptos" pitchFamily="34" charset="0"/>
+                <a:ea typeface="Aptos" pitchFamily="34" charset="-122"/>
+                <a:cs typeface="Aptos" pitchFamily="34" charset="-120"/>
+              </a:rPr>
+              <a:t>Define acceptance criteria for usability, safety, documentation, human review, and workflow fit.</a:t>
+            </a:r>
+            <a:endParaRPr lang="en-US" sz="1700" dirty="0"/>
+          </a:p>
+        </p:txBody>
+      </p:sp>
+      <p:sp>
+        <p:nvSpPr>
+          <p:cNvPr id="11" name="Shape 9"/>
+          <p:cNvSpPr/>
+          <p:nvPr/>
+        </p:nvSpPr>
+        <p:spPr>
+          <a:xfrm>
+            <a:off x="7909560" y="1417320"/>
+            <a:ext cx="3154680" cy="1828800"/>
+          </a:xfrm>
+          <a:prstGeom prst="roundRect">
+            <a:avLst>
+              <a:gd name="adj" fmla="val 6000"/>
+            </a:avLst>
+          </a:prstGeom>
+          <a:solidFill>
+            <a:srgbClr val="EEF8ED"/>
+          </a:solidFill>
+          <a:ln w="12700">
+            <a:solidFill>
+              <a:srgbClr val="B9D7E6"/>
+            </a:solidFill>
+            <a:prstDash val="solid"/>
+          </a:ln>
+        </p:spPr>
+      </p:sp>
+      <p:sp>
+        <p:nvSpPr>
+          <p:cNvPr id="12" name="Text 10"/>
+          <p:cNvSpPr/>
+          <p:nvPr/>
+        </p:nvSpPr>
+        <p:spPr>
+          <a:xfrm>
+            <a:off x="8074152" y="1563624"/>
+            <a:ext cx="2825496" cy="201168"/>
+          </a:xfrm>
+          <a:prstGeom prst="rect">
+            <a:avLst/>
+          </a:prstGeom>
+          <a:noFill/>
+          <a:ln/>
+        </p:spPr>
+        <p:txBody>
+          <a:bodyPr wrap="square" lIns="0" tIns="0" rIns="0" bIns="0" rtlCol="0" anchor="ctr"/>
+          <a:lstStyle/>
+          <a:p>
             <a:pPr indent="0" marL="0">
               <a:buNone/>
             </a:pPr>
             <a:r>
-              <a:rPr lang="en-US" sz="1420" dirty="0">
+              <a:rPr lang="en-US" sz="950" b="1" dirty="0">
+                <a:solidFill>
+                  <a:srgbClr val="0068B7"/>
+                </a:solidFill>
+                <a:latin typeface="Aptos" pitchFamily="34" charset="0"/>
+                <a:ea typeface="Aptos" pitchFamily="34" charset="-122"/>
+                <a:cs typeface="Aptos" pitchFamily="34" charset="-120"/>
+              </a:rPr>
+              <a:t>Key idea</a:t>
+            </a:r>
+            <a:endParaRPr lang="en-US" sz="950" dirty="0"/>
+          </a:p>
+        </p:txBody>
+      </p:sp>
+      <p:sp>
+        <p:nvSpPr>
+          <p:cNvPr id="13" name="Text 11"/>
+          <p:cNvSpPr/>
+          <p:nvPr/>
+        </p:nvSpPr>
+        <p:spPr>
+          <a:xfrm>
+            <a:off x="8074152" y="1856232"/>
+            <a:ext cx="2825496" cy="1261872"/>
+          </a:xfrm>
+          <a:prstGeom prst="rect">
+            <a:avLst/>
+          </a:prstGeom>
+          <a:noFill/>
+          <a:ln/>
+        </p:spPr>
+        <p:txBody>
+          <a:bodyPr wrap="square" lIns="0" tIns="0" rIns="0" bIns="0" rtlCol="0" anchor="t">
+            <a:normAutofit/>
+          </a:bodyPr>
+          <a:lstStyle/>
+          <a:p>
+            <a:pPr indent="0" marL="0">
+              <a:buNone/>
+            </a:pPr>
+            <a:r>
+              <a:rPr lang="en-US" sz="1250" dirty="0">
                 <a:solidFill>
                   <a:srgbClr val="17364A"/>
                 </a:solidFill>
@@ -6580,9 +11735,116 @@
                 <a:ea typeface="Aptos" pitchFamily="34" charset="-122"/>
                 <a:cs typeface="Aptos" pitchFamily="34" charset="-120"/>
               </a:rPr>
-              <a:t>Before launching an AI tool that summarizes case investigation notes, investigators complete UAT scenarios using routine cases, incomplete records, conflicting notes, language access needs, and cases with sensitive information. Testers verify whether the summary is understandable, source information is visible, errors can be corrected, outputs can be documented properly, and escalation steps are clear. The tool does not launch until high-priority issues are resolved.</a:t>
-            </a:r>
-            <a:endParaRPr lang="en-US" sz="1420" dirty="0"/>
+              <a:t>Explain the purpose of UAT for AI-supported workflows.</a:t>
+            </a:r>
+            <a:endParaRPr lang="en-US" sz="1250" dirty="0"/>
+          </a:p>
+        </p:txBody>
+      </p:sp>
+      <p:sp>
+        <p:nvSpPr>
+          <p:cNvPr id="14" name="Shape 12"/>
+          <p:cNvSpPr/>
+          <p:nvPr/>
+        </p:nvSpPr>
+        <p:spPr>
+          <a:xfrm>
+            <a:off x="7909560" y="3520440"/>
+            <a:ext cx="3154680" cy="1737360"/>
+          </a:xfrm>
+          <a:prstGeom prst="roundRect">
+            <a:avLst>
+              <a:gd name="adj" fmla="val 6316"/>
+            </a:avLst>
+          </a:prstGeom>
+          <a:solidFill>
+            <a:srgbClr val="EAF6F8"/>
+          </a:solidFill>
+          <a:ln w="12700">
+            <a:solidFill>
+              <a:srgbClr val="B9D7E6"/>
+            </a:solidFill>
+            <a:prstDash val="solid"/>
+          </a:ln>
+        </p:spPr>
+      </p:sp>
+      <p:sp>
+        <p:nvSpPr>
+          <p:cNvPr id="15" name="Text 13"/>
+          <p:cNvSpPr/>
+          <p:nvPr/>
+        </p:nvSpPr>
+        <p:spPr>
+          <a:xfrm>
+            <a:off x="8074152" y="3666744"/>
+            <a:ext cx="2825496" cy="201168"/>
+          </a:xfrm>
+          <a:prstGeom prst="rect">
+            <a:avLst/>
+          </a:prstGeom>
+          <a:noFill/>
+          <a:ln/>
+        </p:spPr>
+        <p:txBody>
+          <a:bodyPr wrap="square" lIns="0" tIns="0" rIns="0" bIns="0" rtlCol="0" anchor="ctr"/>
+          <a:lstStyle/>
+          <a:p>
+            <a:pPr indent="0" marL="0">
+              <a:buNone/>
+            </a:pPr>
+            <a:r>
+              <a:rPr lang="en-US" sz="950" b="1" dirty="0">
+                <a:solidFill>
+                  <a:srgbClr val="0068B7"/>
+                </a:solidFill>
+                <a:latin typeface="Aptos" pitchFamily="34" charset="0"/>
+                <a:ea typeface="Aptos" pitchFamily="34" charset="-122"/>
+                <a:cs typeface="Aptos" pitchFamily="34" charset="-120"/>
+              </a:rPr>
+              <a:t>Use this for</a:t>
+            </a:r>
+            <a:endParaRPr lang="en-US" sz="950" dirty="0"/>
+          </a:p>
+        </p:txBody>
+      </p:sp>
+      <p:sp>
+        <p:nvSpPr>
+          <p:cNvPr id="16" name="Text 14"/>
+          <p:cNvSpPr/>
+          <p:nvPr/>
+        </p:nvSpPr>
+        <p:spPr>
+          <a:xfrm>
+            <a:off x="8074152" y="3959352"/>
+            <a:ext cx="2825496" cy="1170432"/>
+          </a:xfrm>
+          <a:prstGeom prst="rect">
+            <a:avLst/>
+          </a:prstGeom>
+          <a:noFill/>
+          <a:ln/>
+        </p:spPr>
+        <p:txBody>
+          <a:bodyPr wrap="square" lIns="0" tIns="0" rIns="0" bIns="0" rtlCol="0" anchor="t">
+            <a:normAutofit/>
+          </a:bodyPr>
+          <a:lstStyle/>
+          <a:p>
+            <a:pPr indent="0" marL="0">
+              <a:buNone/>
+            </a:pPr>
+            <a:r>
+              <a:rPr lang="en-US" sz="1250" dirty="0">
+                <a:solidFill>
+                  <a:srgbClr val="17364A"/>
+                </a:solidFill>
+                <a:latin typeface="Aptos" pitchFamily="34" charset="0"/>
+                <a:ea typeface="Aptos" pitchFamily="34" charset="-122"/>
+                <a:cs typeface="Aptos" pitchFamily="34" charset="-120"/>
+              </a:rPr>
+              <a:t>Connect the concept to public health decisions, safeguards, documentation, or implementation work.</a:t>
+            </a:r>
+            <a:endParaRPr lang="en-US" sz="1250" dirty="0"/>
           </a:p>
         </p:txBody>
       </p:sp>
@@ -6645,7 +11907,32 @@
       </p:sp>
       <p:sp>
         <p:nvSpPr>
-          <p:cNvPr id="3" name="Text 1"/>
+          <p:cNvPr id="3" name="Shape 1"/>
+          <p:cNvSpPr/>
+          <p:nvPr/>
+        </p:nvSpPr>
+        <p:spPr>
+          <a:xfrm>
+            <a:off x="0" y="164592"/>
+            <a:ext cx="146304" cy="6693408"/>
+          </a:xfrm>
+          <a:prstGeom prst="rect">
+            <a:avLst/>
+          </a:prstGeom>
+          <a:solidFill>
+            <a:srgbClr val="2F8A28"/>
+          </a:solidFill>
+          <a:ln w="12700">
+            <a:solidFill>
+              <a:srgbClr val="2F8A28"/>
+            </a:solidFill>
+            <a:prstDash val="solid"/>
+          </a:ln>
+        </p:spPr>
+      </p:sp>
+      <p:sp>
+        <p:nvSpPr>
+          <p:cNvPr id="4" name="Text 2"/>
           <p:cNvSpPr/>
           <p:nvPr/>
         </p:nvSpPr>
@@ -6684,7 +11971,7 @@
       </p:sp>
       <p:sp>
         <p:nvSpPr>
-          <p:cNvPr id="4" name="Text 2"/>
+          <p:cNvPr id="5" name="Text 3"/>
           <p:cNvSpPr/>
           <p:nvPr/>
         </p:nvSpPr>
@@ -6723,7 +12010,7 @@
       </p:sp>
       <p:sp>
         <p:nvSpPr>
-          <p:cNvPr id="5" name="Text 3"/>
+          <p:cNvPr id="6" name="Text 4"/>
           <p:cNvSpPr/>
           <p:nvPr/>
         </p:nvSpPr>
@@ -6762,13 +12049,77 @@
       </p:sp>
       <p:sp>
         <p:nvSpPr>
-          <p:cNvPr id="6" name="Text 4"/>
+          <p:cNvPr id="7" name="Shape 5"/>
           <p:cNvSpPr/>
           <p:nvPr/>
         </p:nvSpPr>
         <p:spPr>
           <a:xfrm>
             <a:off x="640080" y="658368"/>
+            <a:ext cx="420624" cy="420624"/>
+          </a:xfrm>
+          <a:prstGeom prst="ellipse">
+            <a:avLst/>
+          </a:prstGeom>
+          <a:solidFill>
+            <a:srgbClr val="0068B7"/>
+          </a:solidFill>
+          <a:ln w="12700">
+            <a:solidFill>
+              <a:srgbClr val="0068B7"/>
+            </a:solidFill>
+            <a:prstDash val="solid"/>
+          </a:ln>
+        </p:spPr>
+      </p:sp>
+      <p:sp>
+        <p:nvSpPr>
+          <p:cNvPr id="8" name="Text 6"/>
+          <p:cNvSpPr/>
+          <p:nvPr/>
+        </p:nvSpPr>
+        <p:spPr>
+          <a:xfrm>
+            <a:off x="640080" y="731520"/>
+            <a:ext cx="420624" cy="164592"/>
+          </a:xfrm>
+          <a:prstGeom prst="rect">
+            <a:avLst/>
+          </a:prstGeom>
+          <a:noFill/>
+          <a:ln/>
+        </p:spPr>
+        <p:txBody>
+          <a:bodyPr wrap="square" lIns="0" tIns="0" rIns="0" bIns="0" rtlCol="0" anchor="ctr"/>
+          <a:lstStyle/>
+          <a:p>
+            <a:pPr algn="ctr" indent="0" marL="0">
+              <a:buNone/>
+            </a:pPr>
+            <a:r>
+              <a:rPr lang="en-US" sz="1100" b="1" dirty="0">
+                <a:solidFill>
+                  <a:srgbClr val="FFFFFF"/>
+                </a:solidFill>
+                <a:latin typeface="Aptos" pitchFamily="34" charset="0"/>
+                <a:ea typeface="Aptos" pitchFamily="34" charset="-122"/>
+                <a:cs typeface="Aptos" pitchFamily="34" charset="-120"/>
+              </a:rPr>
+              <a:t>2</a:t>
+            </a:r>
+            <a:endParaRPr lang="en-US" sz="1100" dirty="0"/>
+          </a:p>
+        </p:txBody>
+      </p:sp>
+      <p:sp>
+        <p:nvSpPr>
+          <p:cNvPr id="9" name="Text 7"/>
+          <p:cNvSpPr/>
+          <p:nvPr/>
+        </p:nvSpPr>
+        <p:spPr>
+          <a:xfrm>
+            <a:off x="640080" y="621792"/>
             <a:ext cx="10881360" cy="566928"/>
           </a:xfrm>
           <a:prstGeom prst="rect">
@@ -6795,7 +12146,7 @@
                 <a:ea typeface="Aptos Display" pitchFamily="34" charset="-122"/>
                 <a:cs typeface="Aptos Display" pitchFamily="34" charset="-120"/>
               </a:rPr>
-              <a:t>Technical and Operational Deep Dive</a:t>
+              <a:t>Module Overview</a:t>
             </a:r>
             <a:endParaRPr lang="en-US" sz="2700" dirty="0"/>
           </a:p>
@@ -6803,32 +12154,178 @@
       </p:sp>
       <p:sp>
         <p:nvSpPr>
-          <p:cNvPr id="7" name="Text 5"/>
-          <p:cNvSpPr/>
-          <p:nvPr/>
-        </p:nvSpPr>
-        <p:spPr>
-          <a:xfrm>
-            <a:off x="822960" y="1325880"/>
-            <a:ext cx="10378440" cy="4800600"/>
-          </a:xfrm>
-          <a:prstGeom prst="rect">
-            <a:avLst/>
-          </a:prstGeom>
-          <a:noFill/>
-          <a:ln/>
-        </p:spPr>
-        <p:txBody>
-          <a:bodyPr wrap="square" lIns="1016" tIns="1016" rIns="1016" bIns="1016" rtlCol="0" anchor="t">
+          <p:cNvPr id="10" name="Text 8"/>
+          <p:cNvSpPr/>
+          <p:nvPr/>
+        </p:nvSpPr>
+        <p:spPr>
+          <a:xfrm>
+            <a:off x="868680" y="1417320"/>
+            <a:ext cx="6675120" cy="4434840"/>
+          </a:xfrm>
+          <a:prstGeom prst="rect">
+            <a:avLst/>
+          </a:prstGeom>
+          <a:noFill/>
+          <a:ln/>
+        </p:spPr>
+        <p:txBody>
+          <a:bodyPr wrap="square" lIns="635" tIns="635" rIns="635" bIns="635" rtlCol="0" anchor="t">
             <a:normAutofit/>
           </a:bodyPr>
           <a:lstStyle/>
           <a:p>
+            <a:r>
+              <a:rPr lang="en-US" sz="1700" dirty="0">
+                <a:solidFill>
+                  <a:srgbClr val="17364A"/>
+                </a:solidFill>
+                <a:latin typeface="Aptos" pitchFamily="34" charset="0"/>
+                <a:ea typeface="Aptos" pitchFamily="34" charset="-122"/>
+                <a:cs typeface="Aptos" pitchFamily="34" charset="-120"/>
+              </a:rPr>
+              <a:t>User acceptance testing is the process of determining whether an AI-supported workflow is usable, understandable, safe, and.</a:t>
+            </a:r>
+            <a:endParaRPr lang="en-US" sz="1700" dirty="0"/>
+          </a:p>
+          <a:p>
+            <a:r>
+              <a:rPr lang="en-US" sz="1700" dirty="0">
+                <a:solidFill>
+                  <a:srgbClr val="17364A"/>
+                </a:solidFill>
+                <a:latin typeface="Aptos" pitchFamily="34" charset="0"/>
+                <a:ea typeface="Aptos" pitchFamily="34" charset="-122"/>
+                <a:cs typeface="Aptos" pitchFamily="34" charset="-120"/>
+              </a:rPr>
+              <a:t>Technical testing may show that a tool runs, and model validation may show acceptable performance, but neither proves that.</a:t>
+            </a:r>
+            <a:endParaRPr lang="en-US" sz="1700" dirty="0"/>
+          </a:p>
+          <a:p>
+            <a:r>
+              <a:rPr lang="en-US" sz="1700" dirty="0">
+                <a:solidFill>
+                  <a:srgbClr val="17364A"/>
+                </a:solidFill>
+                <a:latin typeface="Aptos" pitchFamily="34" charset="0"/>
+                <a:ea typeface="Aptos" pitchFamily="34" charset="-122"/>
+                <a:cs typeface="Aptos" pitchFamily="34" charset="-120"/>
+              </a:rPr>
+              <a:t>UAT fills that gap.</a:t>
+            </a:r>
+            <a:endParaRPr lang="en-US" sz="1700" dirty="0"/>
+          </a:p>
+          <a:p>
+            <a:r>
+              <a:rPr lang="en-US" sz="1700" dirty="0">
+                <a:solidFill>
+                  <a:srgbClr val="17364A"/>
+                </a:solidFill>
+                <a:latin typeface="Aptos" pitchFamily="34" charset="0"/>
+                <a:ea typeface="Aptos" pitchFamily="34" charset="-122"/>
+                <a:cs typeface="Aptos" pitchFamily="34" charset="-120"/>
+              </a:rPr>
+              <a:t>This module teaches learners how to design and conduct user acceptance testing for AI-supported workflows.</a:t>
+            </a:r>
+            <a:endParaRPr lang="en-US" sz="1700" dirty="0"/>
+          </a:p>
+        </p:txBody>
+      </p:sp>
+      <p:sp>
+        <p:nvSpPr>
+          <p:cNvPr id="11" name="Shape 9"/>
+          <p:cNvSpPr/>
+          <p:nvPr/>
+        </p:nvSpPr>
+        <p:spPr>
+          <a:xfrm>
+            <a:off x="7909560" y="1417320"/>
+            <a:ext cx="3154680" cy="1828800"/>
+          </a:xfrm>
+          <a:prstGeom prst="roundRect">
+            <a:avLst>
+              <a:gd name="adj" fmla="val 6000"/>
+            </a:avLst>
+          </a:prstGeom>
+          <a:solidFill>
+            <a:srgbClr val="EEF8ED"/>
+          </a:solidFill>
+          <a:ln w="12700">
+            <a:solidFill>
+              <a:srgbClr val="B9D7E6"/>
+            </a:solidFill>
+            <a:prstDash val="solid"/>
+          </a:ln>
+        </p:spPr>
+      </p:sp>
+      <p:sp>
+        <p:nvSpPr>
+          <p:cNvPr id="12" name="Text 10"/>
+          <p:cNvSpPr/>
+          <p:nvPr/>
+        </p:nvSpPr>
+        <p:spPr>
+          <a:xfrm>
+            <a:off x="8074152" y="1563624"/>
+            <a:ext cx="2825496" cy="201168"/>
+          </a:xfrm>
+          <a:prstGeom prst="rect">
+            <a:avLst/>
+          </a:prstGeom>
+          <a:noFill/>
+          <a:ln/>
+        </p:spPr>
+        <p:txBody>
+          <a:bodyPr wrap="square" lIns="0" tIns="0" rIns="0" bIns="0" rtlCol="0" anchor="ctr"/>
+          <a:lstStyle/>
+          <a:p>
             <a:pPr indent="0" marL="0">
               <a:buNone/>
             </a:pPr>
             <a:r>
-              <a:rPr lang="en-US" sz="1420" dirty="0">
+              <a:rPr lang="en-US" sz="950" b="1" dirty="0">
+                <a:solidFill>
+                  <a:srgbClr val="0068B7"/>
+                </a:solidFill>
+                <a:latin typeface="Aptos" pitchFamily="34" charset="0"/>
+                <a:ea typeface="Aptos" pitchFamily="34" charset="-122"/>
+                <a:cs typeface="Aptos" pitchFamily="34" charset="-120"/>
+              </a:rPr>
+              <a:t>Key idea</a:t>
+            </a:r>
+            <a:endParaRPr lang="en-US" sz="950" dirty="0"/>
+          </a:p>
+        </p:txBody>
+      </p:sp>
+      <p:sp>
+        <p:nvSpPr>
+          <p:cNvPr id="13" name="Text 11"/>
+          <p:cNvSpPr/>
+          <p:nvPr/>
+        </p:nvSpPr>
+        <p:spPr>
+          <a:xfrm>
+            <a:off x="8074152" y="1856232"/>
+            <a:ext cx="2825496" cy="1261872"/>
+          </a:xfrm>
+          <a:prstGeom prst="rect">
+            <a:avLst/>
+          </a:prstGeom>
+          <a:noFill/>
+          <a:ln/>
+        </p:spPr>
+        <p:txBody>
+          <a:bodyPr wrap="square" lIns="0" tIns="0" rIns="0" bIns="0" rtlCol="0" anchor="t">
+            <a:normAutofit/>
+          </a:bodyPr>
+          <a:lstStyle/>
+          <a:p>
+            <a:pPr indent="0" marL="0">
+              <a:buNone/>
+            </a:pPr>
+            <a:r>
+              <a:rPr lang="en-US" sz="1250" dirty="0">
                 <a:solidFill>
                   <a:srgbClr val="17364A"/>
                 </a:solidFill>
@@ -6836,9 +12333,116 @@
                 <a:ea typeface="Aptos" pitchFamily="34" charset="-122"/>
                 <a:cs typeface="Aptos" pitchFamily="34" charset="-120"/>
               </a:rPr>
-              <a:t>UAT should be designed around real users and real work. Testers should include the roles that will actually use or supervise the AI-supported workflow, such as epidemiologists, investigators, program staff, supervisors, data quality staff, communications staff, or support staff. If only technical staff test the tool, usability and workflow problems may be missed. Test scenarios should include more than ideal cases. AI-supported workflows should be tested with incomplete data, conflicting information, duplicate records, unusual cases, sensitive data, ambiguous outputs, language access issues, accessibility needs, high-volume periods, system downtime, and outputs that should be overridden. Edge cases reveal whether the workflow is safe when conditions are imperfect. Acceptance criteria should be defined before testing begins. Criteria may include whether users can complete the workflow, understand the AI output, inspect source information, identify unsupported statements, correct errors, document decisions, override outputs, and escalate concerns. Criteria should also address workflow burden, accessibility, performance, and user confidence.</a:t>
-            </a:r>
-            <a:endParaRPr lang="en-US" sz="1420" dirty="0"/>
+              <a:t>User acceptance testing is the process of determining whether an AI-supported workflow is usable, understandable, safe, and.</a:t>
+            </a:r>
+            <a:endParaRPr lang="en-US" sz="1250" dirty="0"/>
+          </a:p>
+        </p:txBody>
+      </p:sp>
+      <p:sp>
+        <p:nvSpPr>
+          <p:cNvPr id="14" name="Shape 12"/>
+          <p:cNvSpPr/>
+          <p:nvPr/>
+        </p:nvSpPr>
+        <p:spPr>
+          <a:xfrm>
+            <a:off x="7909560" y="3520440"/>
+            <a:ext cx="3154680" cy="1737360"/>
+          </a:xfrm>
+          <a:prstGeom prst="roundRect">
+            <a:avLst>
+              <a:gd name="adj" fmla="val 6316"/>
+            </a:avLst>
+          </a:prstGeom>
+          <a:solidFill>
+            <a:srgbClr val="EAF6F8"/>
+          </a:solidFill>
+          <a:ln w="12700">
+            <a:solidFill>
+              <a:srgbClr val="B9D7E6"/>
+            </a:solidFill>
+            <a:prstDash val="solid"/>
+          </a:ln>
+        </p:spPr>
+      </p:sp>
+      <p:sp>
+        <p:nvSpPr>
+          <p:cNvPr id="15" name="Text 13"/>
+          <p:cNvSpPr/>
+          <p:nvPr/>
+        </p:nvSpPr>
+        <p:spPr>
+          <a:xfrm>
+            <a:off x="8074152" y="3666744"/>
+            <a:ext cx="2825496" cy="201168"/>
+          </a:xfrm>
+          <a:prstGeom prst="rect">
+            <a:avLst/>
+          </a:prstGeom>
+          <a:noFill/>
+          <a:ln/>
+        </p:spPr>
+        <p:txBody>
+          <a:bodyPr wrap="square" lIns="0" tIns="0" rIns="0" bIns="0" rtlCol="0" anchor="ctr"/>
+          <a:lstStyle/>
+          <a:p>
+            <a:pPr indent="0" marL="0">
+              <a:buNone/>
+            </a:pPr>
+            <a:r>
+              <a:rPr lang="en-US" sz="950" b="1" dirty="0">
+                <a:solidFill>
+                  <a:srgbClr val="0068B7"/>
+                </a:solidFill>
+                <a:latin typeface="Aptos" pitchFamily="34" charset="0"/>
+                <a:ea typeface="Aptos" pitchFamily="34" charset="-122"/>
+                <a:cs typeface="Aptos" pitchFamily="34" charset="-120"/>
+              </a:rPr>
+              <a:t>Use this for</a:t>
+            </a:r>
+            <a:endParaRPr lang="en-US" sz="950" dirty="0"/>
+          </a:p>
+        </p:txBody>
+      </p:sp>
+      <p:sp>
+        <p:nvSpPr>
+          <p:cNvPr id="16" name="Text 14"/>
+          <p:cNvSpPr/>
+          <p:nvPr/>
+        </p:nvSpPr>
+        <p:spPr>
+          <a:xfrm>
+            <a:off x="8074152" y="3959352"/>
+            <a:ext cx="2825496" cy="1170432"/>
+          </a:xfrm>
+          <a:prstGeom prst="rect">
+            <a:avLst/>
+          </a:prstGeom>
+          <a:noFill/>
+          <a:ln/>
+        </p:spPr>
+        <p:txBody>
+          <a:bodyPr wrap="square" lIns="0" tIns="0" rIns="0" bIns="0" rtlCol="0" anchor="t">
+            <a:normAutofit/>
+          </a:bodyPr>
+          <a:lstStyle/>
+          <a:p>
+            <a:pPr indent="0" marL="0">
+              <a:buNone/>
+            </a:pPr>
+            <a:r>
+              <a:rPr lang="en-US" sz="1250" dirty="0">
+                <a:solidFill>
+                  <a:srgbClr val="17364A"/>
+                </a:solidFill>
+                <a:latin typeface="Aptos" pitchFamily="34" charset="0"/>
+                <a:ea typeface="Aptos" pitchFamily="34" charset="-122"/>
+                <a:cs typeface="Aptos" pitchFamily="34" charset="-120"/>
+              </a:rPr>
+              <a:t>Connect the concept to public health decisions, safeguards, documentation, or implementation work.</a:t>
+            </a:r>
+            <a:endParaRPr lang="en-US" sz="1250" dirty="0"/>
           </a:p>
         </p:txBody>
       </p:sp>
@@ -6901,7 +12505,32 @@
       </p:sp>
       <p:sp>
         <p:nvSpPr>
-          <p:cNvPr id="3" name="Text 1"/>
+          <p:cNvPr id="3" name="Shape 1"/>
+          <p:cNvSpPr/>
+          <p:nvPr/>
+        </p:nvSpPr>
+        <p:spPr>
+          <a:xfrm>
+            <a:off x="0" y="164592"/>
+            <a:ext cx="146304" cy="6693408"/>
+          </a:xfrm>
+          <a:prstGeom prst="rect">
+            <a:avLst/>
+          </a:prstGeom>
+          <a:solidFill>
+            <a:srgbClr val="2F8A28"/>
+          </a:solidFill>
+          <a:ln w="12700">
+            <a:solidFill>
+              <a:srgbClr val="2F8A28"/>
+            </a:solidFill>
+            <a:prstDash val="solid"/>
+          </a:ln>
+        </p:spPr>
+      </p:sp>
+      <p:sp>
+        <p:nvSpPr>
+          <p:cNvPr id="4" name="Text 2"/>
           <p:cNvSpPr/>
           <p:nvPr/>
         </p:nvSpPr>
@@ -6940,7 +12569,7 @@
       </p:sp>
       <p:sp>
         <p:nvSpPr>
-          <p:cNvPr id="4" name="Text 2"/>
+          <p:cNvPr id="5" name="Text 3"/>
           <p:cNvSpPr/>
           <p:nvPr/>
         </p:nvSpPr>
@@ -6979,7 +12608,7 @@
       </p:sp>
       <p:sp>
         <p:nvSpPr>
-          <p:cNvPr id="5" name="Text 3"/>
+          <p:cNvPr id="6" name="Text 4"/>
           <p:cNvSpPr/>
           <p:nvPr/>
         </p:nvSpPr>
@@ -7018,13 +12647,77 @@
       </p:sp>
       <p:sp>
         <p:nvSpPr>
-          <p:cNvPr id="6" name="Text 4"/>
+          <p:cNvPr id="7" name="Shape 5"/>
           <p:cNvSpPr/>
           <p:nvPr/>
         </p:nvSpPr>
         <p:spPr>
           <a:xfrm>
             <a:off x="640080" y="658368"/>
+            <a:ext cx="420624" cy="420624"/>
+          </a:xfrm>
+          <a:prstGeom prst="ellipse">
+            <a:avLst/>
+          </a:prstGeom>
+          <a:solidFill>
+            <a:srgbClr val="0068B7"/>
+          </a:solidFill>
+          <a:ln w="12700">
+            <a:solidFill>
+              <a:srgbClr val="0068B7"/>
+            </a:solidFill>
+            <a:prstDash val="solid"/>
+          </a:ln>
+        </p:spPr>
+      </p:sp>
+      <p:sp>
+        <p:nvSpPr>
+          <p:cNvPr id="8" name="Text 6"/>
+          <p:cNvSpPr/>
+          <p:nvPr/>
+        </p:nvSpPr>
+        <p:spPr>
+          <a:xfrm>
+            <a:off x="640080" y="731520"/>
+            <a:ext cx="420624" cy="164592"/>
+          </a:xfrm>
+          <a:prstGeom prst="rect">
+            <a:avLst/>
+          </a:prstGeom>
+          <a:noFill/>
+          <a:ln/>
+        </p:spPr>
+        <p:txBody>
+          <a:bodyPr wrap="square" lIns="0" tIns="0" rIns="0" bIns="0" rtlCol="0" anchor="ctr"/>
+          <a:lstStyle/>
+          <a:p>
+            <a:pPr algn="ctr" indent="0" marL="0">
+              <a:buNone/>
+            </a:pPr>
+            <a:r>
+              <a:rPr lang="en-US" sz="1100" b="1" dirty="0">
+                <a:solidFill>
+                  <a:srgbClr val="FFFFFF"/>
+                </a:solidFill>
+                <a:latin typeface="Aptos" pitchFamily="34" charset="0"/>
+                <a:ea typeface="Aptos" pitchFamily="34" charset="-122"/>
+                <a:cs typeface="Aptos" pitchFamily="34" charset="-120"/>
+              </a:rPr>
+              <a:t>3</a:t>
+            </a:r>
+            <a:endParaRPr lang="en-US" sz="1100" dirty="0"/>
+          </a:p>
+        </p:txBody>
+      </p:sp>
+      <p:sp>
+        <p:nvSpPr>
+          <p:cNvPr id="9" name="Text 7"/>
+          <p:cNvSpPr/>
+          <p:nvPr/>
+        </p:nvSpPr>
+        <p:spPr>
+          <a:xfrm>
+            <a:off x="640080" y="621792"/>
             <a:ext cx="10881360" cy="566928"/>
           </a:xfrm>
           <a:prstGeom prst="rect">
@@ -7051,7 +12744,7 @@
                 <a:ea typeface="Aptos Display" pitchFamily="34" charset="-122"/>
                 <a:cs typeface="Aptos Display" pitchFamily="34" charset="-120"/>
               </a:rPr>
-              <a:t>Technical and Operational Deep Dive Continued</a:t>
+              <a:t>Public Health Example</a:t>
             </a:r>
             <a:endParaRPr lang="en-US" sz="2700" dirty="0"/>
           </a:p>
@@ -7059,32 +12752,164 @@
       </p:sp>
       <p:sp>
         <p:nvSpPr>
-          <p:cNvPr id="7" name="Text 5"/>
-          <p:cNvSpPr/>
-          <p:nvPr/>
-        </p:nvSpPr>
-        <p:spPr>
-          <a:xfrm>
-            <a:off x="822960" y="1325880"/>
-            <a:ext cx="10378440" cy="4800600"/>
-          </a:xfrm>
-          <a:prstGeom prst="rect">
-            <a:avLst/>
-          </a:prstGeom>
-          <a:noFill/>
-          <a:ln/>
-        </p:spPr>
-        <p:txBody>
-          <a:bodyPr wrap="square" lIns="1016" tIns="1016" rIns="1016" bIns="1016" rtlCol="0" anchor="t">
+          <p:cNvPr id="10" name="Text 8"/>
+          <p:cNvSpPr/>
+          <p:nvPr/>
+        </p:nvSpPr>
+        <p:spPr>
+          <a:xfrm>
+            <a:off x="868680" y="1417320"/>
+            <a:ext cx="6675120" cy="4434840"/>
+          </a:xfrm>
+          <a:prstGeom prst="rect">
+            <a:avLst/>
+          </a:prstGeom>
+          <a:noFill/>
+          <a:ln/>
+        </p:spPr>
+        <p:txBody>
+          <a:bodyPr wrap="square" lIns="635" tIns="635" rIns="635" bIns="635" rtlCol="0" anchor="t">
             <a:normAutofit/>
           </a:bodyPr>
           <a:lstStyle/>
           <a:p>
+            <a:r>
+              <a:rPr lang="en-US" sz="1700" dirty="0">
+                <a:solidFill>
+                  <a:srgbClr val="17364A"/>
+                </a:solidFill>
+                <a:latin typeface="Aptos" pitchFamily="34" charset="0"/>
+                <a:ea typeface="Aptos" pitchFamily="34" charset="-122"/>
+                <a:cs typeface="Aptos" pitchFamily="34" charset="-120"/>
+              </a:rPr>
+              <a:t>Before launching an AI tool that summarizes case investigation notes, investigators complete UAT scenarios using routine.</a:t>
+            </a:r>
+            <a:endParaRPr lang="en-US" sz="1700" dirty="0"/>
+          </a:p>
+          <a:p>
+            <a:r>
+              <a:rPr lang="en-US" sz="1700" dirty="0">
+                <a:solidFill>
+                  <a:srgbClr val="17364A"/>
+                </a:solidFill>
+                <a:latin typeface="Aptos" pitchFamily="34" charset="0"/>
+                <a:ea typeface="Aptos" pitchFamily="34" charset="-122"/>
+                <a:cs typeface="Aptos" pitchFamily="34" charset="-120"/>
+              </a:rPr>
+              <a:t>Testers verify whether the summary is understandable, source information is visible, errors can be corrected, outputs can.</a:t>
+            </a:r>
+            <a:endParaRPr lang="en-US" sz="1700" dirty="0"/>
+          </a:p>
+          <a:p>
+            <a:r>
+              <a:rPr lang="en-US" sz="1700" dirty="0">
+                <a:solidFill>
+                  <a:srgbClr val="17364A"/>
+                </a:solidFill>
+                <a:latin typeface="Aptos" pitchFamily="34" charset="0"/>
+                <a:ea typeface="Aptos" pitchFamily="34" charset="-122"/>
+                <a:cs typeface="Aptos" pitchFamily="34" charset="-120"/>
+              </a:rPr>
+              <a:t>The tool does not launch until high-priority issues are resolved.</a:t>
+            </a:r>
+            <a:endParaRPr lang="en-US" sz="1700" dirty="0"/>
+          </a:p>
+        </p:txBody>
+      </p:sp>
+      <p:sp>
+        <p:nvSpPr>
+          <p:cNvPr id="11" name="Shape 9"/>
+          <p:cNvSpPr/>
+          <p:nvPr/>
+        </p:nvSpPr>
+        <p:spPr>
+          <a:xfrm>
+            <a:off x="7909560" y="1417320"/>
+            <a:ext cx="3154680" cy="1828800"/>
+          </a:xfrm>
+          <a:prstGeom prst="roundRect">
+            <a:avLst>
+              <a:gd name="adj" fmla="val 6000"/>
+            </a:avLst>
+          </a:prstGeom>
+          <a:solidFill>
+            <a:srgbClr val="EEF8ED"/>
+          </a:solidFill>
+          <a:ln w="12700">
+            <a:solidFill>
+              <a:srgbClr val="B9D7E6"/>
+            </a:solidFill>
+            <a:prstDash val="solid"/>
+          </a:ln>
+        </p:spPr>
+      </p:sp>
+      <p:sp>
+        <p:nvSpPr>
+          <p:cNvPr id="12" name="Text 10"/>
+          <p:cNvSpPr/>
+          <p:nvPr/>
+        </p:nvSpPr>
+        <p:spPr>
+          <a:xfrm>
+            <a:off x="8074152" y="1563624"/>
+            <a:ext cx="2825496" cy="201168"/>
+          </a:xfrm>
+          <a:prstGeom prst="rect">
+            <a:avLst/>
+          </a:prstGeom>
+          <a:noFill/>
+          <a:ln/>
+        </p:spPr>
+        <p:txBody>
+          <a:bodyPr wrap="square" lIns="0" tIns="0" rIns="0" bIns="0" rtlCol="0" anchor="ctr"/>
+          <a:lstStyle/>
+          <a:p>
             <a:pPr indent="0" marL="0">
               <a:buNone/>
             </a:pPr>
             <a:r>
-              <a:rPr lang="en-US" sz="1420" dirty="0">
+              <a:rPr lang="en-US" sz="950" b="1" dirty="0">
+                <a:solidFill>
+                  <a:srgbClr val="0068B7"/>
+                </a:solidFill>
+                <a:latin typeface="Aptos" pitchFamily="34" charset="0"/>
+                <a:ea typeface="Aptos" pitchFamily="34" charset="-122"/>
+                <a:cs typeface="Aptos" pitchFamily="34" charset="-120"/>
+              </a:rPr>
+              <a:t>Key idea</a:t>
+            </a:r>
+            <a:endParaRPr lang="en-US" sz="950" dirty="0"/>
+          </a:p>
+        </p:txBody>
+      </p:sp>
+      <p:sp>
+        <p:nvSpPr>
+          <p:cNvPr id="13" name="Text 11"/>
+          <p:cNvSpPr/>
+          <p:nvPr/>
+        </p:nvSpPr>
+        <p:spPr>
+          <a:xfrm>
+            <a:off x="8074152" y="1856232"/>
+            <a:ext cx="2825496" cy="1261872"/>
+          </a:xfrm>
+          <a:prstGeom prst="rect">
+            <a:avLst/>
+          </a:prstGeom>
+          <a:noFill/>
+          <a:ln/>
+        </p:spPr>
+        <p:txBody>
+          <a:bodyPr wrap="square" lIns="0" tIns="0" rIns="0" bIns="0" rtlCol="0" anchor="t">
+            <a:normAutofit/>
+          </a:bodyPr>
+          <a:lstStyle/>
+          <a:p>
+            <a:pPr indent="0" marL="0">
+              <a:buNone/>
+            </a:pPr>
+            <a:r>
+              <a:rPr lang="en-US" sz="1250" dirty="0">
                 <a:solidFill>
                   <a:srgbClr val="17364A"/>
                 </a:solidFill>
@@ -7092,9 +12917,116 @@
                 <a:ea typeface="Aptos" pitchFamily="34" charset="-122"/>
                 <a:cs typeface="Aptos" pitchFamily="34" charset="-120"/>
               </a:rPr>
-              <a:t>UAT results should lead to a launch decision. Issues should be categorized by severity, assigned to owners, and resolved or accepted with documented rationale. A launch should not proceed simply because testing occurred. It should proceed only if acceptance criteria are met and unresolved issues do not create unacceptable risk.</a:t>
-            </a:r>
-            <a:endParaRPr lang="en-US" sz="1420" dirty="0"/>
+              <a:t>Before launching an AI tool that summarizes case investigation notes, investigators complete UAT scenarios using routine.</a:t>
+            </a:r>
+            <a:endParaRPr lang="en-US" sz="1250" dirty="0"/>
+          </a:p>
+        </p:txBody>
+      </p:sp>
+      <p:sp>
+        <p:nvSpPr>
+          <p:cNvPr id="14" name="Shape 12"/>
+          <p:cNvSpPr/>
+          <p:nvPr/>
+        </p:nvSpPr>
+        <p:spPr>
+          <a:xfrm>
+            <a:off x="7909560" y="3520440"/>
+            <a:ext cx="3154680" cy="1737360"/>
+          </a:xfrm>
+          <a:prstGeom prst="roundRect">
+            <a:avLst>
+              <a:gd name="adj" fmla="val 6316"/>
+            </a:avLst>
+          </a:prstGeom>
+          <a:solidFill>
+            <a:srgbClr val="EAF6F8"/>
+          </a:solidFill>
+          <a:ln w="12700">
+            <a:solidFill>
+              <a:srgbClr val="B9D7E6"/>
+            </a:solidFill>
+            <a:prstDash val="solid"/>
+          </a:ln>
+        </p:spPr>
+      </p:sp>
+      <p:sp>
+        <p:nvSpPr>
+          <p:cNvPr id="15" name="Text 13"/>
+          <p:cNvSpPr/>
+          <p:nvPr/>
+        </p:nvSpPr>
+        <p:spPr>
+          <a:xfrm>
+            <a:off x="8074152" y="3666744"/>
+            <a:ext cx="2825496" cy="201168"/>
+          </a:xfrm>
+          <a:prstGeom prst="rect">
+            <a:avLst/>
+          </a:prstGeom>
+          <a:noFill/>
+          <a:ln/>
+        </p:spPr>
+        <p:txBody>
+          <a:bodyPr wrap="square" lIns="0" tIns="0" rIns="0" bIns="0" rtlCol="0" anchor="ctr"/>
+          <a:lstStyle/>
+          <a:p>
+            <a:pPr indent="0" marL="0">
+              <a:buNone/>
+            </a:pPr>
+            <a:r>
+              <a:rPr lang="en-US" sz="950" b="1" dirty="0">
+                <a:solidFill>
+                  <a:srgbClr val="0068B7"/>
+                </a:solidFill>
+                <a:latin typeface="Aptos" pitchFamily="34" charset="0"/>
+                <a:ea typeface="Aptos" pitchFamily="34" charset="-122"/>
+                <a:cs typeface="Aptos" pitchFamily="34" charset="-120"/>
+              </a:rPr>
+              <a:t>Use this for</a:t>
+            </a:r>
+            <a:endParaRPr lang="en-US" sz="950" dirty="0"/>
+          </a:p>
+        </p:txBody>
+      </p:sp>
+      <p:sp>
+        <p:nvSpPr>
+          <p:cNvPr id="16" name="Text 14"/>
+          <p:cNvSpPr/>
+          <p:nvPr/>
+        </p:nvSpPr>
+        <p:spPr>
+          <a:xfrm>
+            <a:off x="8074152" y="3959352"/>
+            <a:ext cx="2825496" cy="1170432"/>
+          </a:xfrm>
+          <a:prstGeom prst="rect">
+            <a:avLst/>
+          </a:prstGeom>
+          <a:noFill/>
+          <a:ln/>
+        </p:spPr>
+        <p:txBody>
+          <a:bodyPr wrap="square" lIns="0" tIns="0" rIns="0" bIns="0" rtlCol="0" anchor="t">
+            <a:normAutofit/>
+          </a:bodyPr>
+          <a:lstStyle/>
+          <a:p>
+            <a:pPr indent="0" marL="0">
+              <a:buNone/>
+            </a:pPr>
+            <a:r>
+              <a:rPr lang="en-US" sz="1250" dirty="0">
+                <a:solidFill>
+                  <a:srgbClr val="17364A"/>
+                </a:solidFill>
+                <a:latin typeface="Aptos" pitchFamily="34" charset="0"/>
+                <a:ea typeface="Aptos" pitchFamily="34" charset="-122"/>
+                <a:cs typeface="Aptos" pitchFamily="34" charset="-120"/>
+              </a:rPr>
+              <a:t>Connect the concept to public health decisions, safeguards, documentation, or implementation work.</a:t>
+            </a:r>
+            <a:endParaRPr lang="en-US" sz="1250" dirty="0"/>
           </a:p>
         </p:txBody>
       </p:sp>
@@ -7157,7 +13089,32 @@
       </p:sp>
       <p:sp>
         <p:nvSpPr>
-          <p:cNvPr id="3" name="Text 1"/>
+          <p:cNvPr id="3" name="Shape 1"/>
+          <p:cNvSpPr/>
+          <p:nvPr/>
+        </p:nvSpPr>
+        <p:spPr>
+          <a:xfrm>
+            <a:off x="0" y="164592"/>
+            <a:ext cx="146304" cy="6693408"/>
+          </a:xfrm>
+          <a:prstGeom prst="rect">
+            <a:avLst/>
+          </a:prstGeom>
+          <a:solidFill>
+            <a:srgbClr val="2F8A28"/>
+          </a:solidFill>
+          <a:ln w="12700">
+            <a:solidFill>
+              <a:srgbClr val="2F8A28"/>
+            </a:solidFill>
+            <a:prstDash val="solid"/>
+          </a:ln>
+        </p:spPr>
+      </p:sp>
+      <p:sp>
+        <p:nvSpPr>
+          <p:cNvPr id="4" name="Text 2"/>
           <p:cNvSpPr/>
           <p:nvPr/>
         </p:nvSpPr>
@@ -7196,7 +13153,7 @@
       </p:sp>
       <p:sp>
         <p:nvSpPr>
-          <p:cNvPr id="4" name="Text 2"/>
+          <p:cNvPr id="5" name="Text 3"/>
           <p:cNvSpPr/>
           <p:nvPr/>
         </p:nvSpPr>
@@ -7235,7 +13192,7 @@
       </p:sp>
       <p:sp>
         <p:nvSpPr>
-          <p:cNvPr id="5" name="Text 3"/>
+          <p:cNvPr id="6" name="Text 4"/>
           <p:cNvSpPr/>
           <p:nvPr/>
         </p:nvSpPr>
@@ -7274,13 +13231,77 @@
       </p:sp>
       <p:sp>
         <p:nvSpPr>
-          <p:cNvPr id="6" name="Text 4"/>
+          <p:cNvPr id="7" name="Shape 5"/>
           <p:cNvSpPr/>
           <p:nvPr/>
         </p:nvSpPr>
         <p:spPr>
           <a:xfrm>
             <a:off x="640080" y="658368"/>
+            <a:ext cx="420624" cy="420624"/>
+          </a:xfrm>
+          <a:prstGeom prst="ellipse">
+            <a:avLst/>
+          </a:prstGeom>
+          <a:solidFill>
+            <a:srgbClr val="0068B7"/>
+          </a:solidFill>
+          <a:ln w="12700">
+            <a:solidFill>
+              <a:srgbClr val="0068B7"/>
+            </a:solidFill>
+            <a:prstDash val="solid"/>
+          </a:ln>
+        </p:spPr>
+      </p:sp>
+      <p:sp>
+        <p:nvSpPr>
+          <p:cNvPr id="8" name="Text 6"/>
+          <p:cNvSpPr/>
+          <p:nvPr/>
+        </p:nvSpPr>
+        <p:spPr>
+          <a:xfrm>
+            <a:off x="640080" y="731520"/>
+            <a:ext cx="420624" cy="164592"/>
+          </a:xfrm>
+          <a:prstGeom prst="rect">
+            <a:avLst/>
+          </a:prstGeom>
+          <a:noFill/>
+          <a:ln/>
+        </p:spPr>
+        <p:txBody>
+          <a:bodyPr wrap="square" lIns="0" tIns="0" rIns="0" bIns="0" rtlCol="0" anchor="ctr"/>
+          <a:lstStyle/>
+          <a:p>
+            <a:pPr algn="ctr" indent="0" marL="0">
+              <a:buNone/>
+            </a:pPr>
+            <a:r>
+              <a:rPr lang="en-US" sz="1100" b="1" dirty="0">
+                <a:solidFill>
+                  <a:srgbClr val="FFFFFF"/>
+                </a:solidFill>
+                <a:latin typeface="Aptos" pitchFamily="34" charset="0"/>
+                <a:ea typeface="Aptos" pitchFamily="34" charset="-122"/>
+                <a:cs typeface="Aptos" pitchFamily="34" charset="-120"/>
+              </a:rPr>
+              <a:t>4</a:t>
+            </a:r>
+            <a:endParaRPr lang="en-US" sz="1100" dirty="0"/>
+          </a:p>
+        </p:txBody>
+      </p:sp>
+      <p:sp>
+        <p:nvSpPr>
+          <p:cNvPr id="9" name="Text 7"/>
+          <p:cNvSpPr/>
+          <p:nvPr/>
+        </p:nvSpPr>
+        <p:spPr>
+          <a:xfrm>
+            <a:off x="640080" y="621792"/>
             <a:ext cx="10881360" cy="566928"/>
           </a:xfrm>
           <a:prstGeom prst="rect">
@@ -7307,7 +13328,7 @@
                 <a:ea typeface="Aptos Display" pitchFamily="34" charset="-122"/>
                 <a:cs typeface="Aptos Display" pitchFamily="34" charset="-120"/>
               </a:rPr>
-              <a:t>Risks, Failure Modes, and Guardrails</a:t>
+              <a:t>Technical and Operational Deep Dive</a:t>
             </a:r>
             <a:endParaRPr lang="en-US" sz="2700" dirty="0"/>
           </a:p>
@@ -7315,32 +13336,178 @@
       </p:sp>
       <p:sp>
         <p:nvSpPr>
-          <p:cNvPr id="7" name="Text 5"/>
-          <p:cNvSpPr/>
-          <p:nvPr/>
-        </p:nvSpPr>
-        <p:spPr>
-          <a:xfrm>
-            <a:off x="822960" y="1325880"/>
-            <a:ext cx="10378440" cy="4800600"/>
-          </a:xfrm>
-          <a:prstGeom prst="rect">
-            <a:avLst/>
-          </a:prstGeom>
-          <a:noFill/>
-          <a:ln/>
-        </p:spPr>
-        <p:txBody>
-          <a:bodyPr wrap="square" lIns="1016" tIns="1016" rIns="1016" bIns="1016" rtlCol="0" anchor="t">
+          <p:cNvPr id="10" name="Text 8"/>
+          <p:cNvSpPr/>
+          <p:nvPr/>
+        </p:nvSpPr>
+        <p:spPr>
+          <a:xfrm>
+            <a:off x="868680" y="1417320"/>
+            <a:ext cx="6675120" cy="4434840"/>
+          </a:xfrm>
+          <a:prstGeom prst="rect">
+            <a:avLst/>
+          </a:prstGeom>
+          <a:noFill/>
+          <a:ln/>
+        </p:spPr>
+        <p:txBody>
+          <a:bodyPr wrap="square" lIns="635" tIns="635" rIns="635" bIns="635" rtlCol="0" anchor="t">
             <a:normAutofit/>
           </a:bodyPr>
           <a:lstStyle/>
           <a:p>
+            <a:r>
+              <a:rPr lang="en-US" sz="1700" dirty="0">
+                <a:solidFill>
+                  <a:srgbClr val="17364A"/>
+                </a:solidFill>
+                <a:latin typeface="Aptos" pitchFamily="34" charset="0"/>
+                <a:ea typeface="Aptos" pitchFamily="34" charset="-122"/>
+                <a:cs typeface="Aptos" pitchFamily="34" charset="-120"/>
+              </a:rPr>
+              <a:t>UAT should be designed around real users and real work.</a:t>
+            </a:r>
+            <a:endParaRPr lang="en-US" sz="1700" dirty="0"/>
+          </a:p>
+          <a:p>
+            <a:r>
+              <a:rPr lang="en-US" sz="1700" dirty="0">
+                <a:solidFill>
+                  <a:srgbClr val="17364A"/>
+                </a:solidFill>
+                <a:latin typeface="Aptos" pitchFamily="34" charset="0"/>
+                <a:ea typeface="Aptos" pitchFamily="34" charset="-122"/>
+                <a:cs typeface="Aptos" pitchFamily="34" charset="-120"/>
+              </a:rPr>
+              <a:t>Testers should include the roles that will actually use or supervise the AI-supported workflow, such as epidemiologists,.</a:t>
+            </a:r>
+            <a:endParaRPr lang="en-US" sz="1700" dirty="0"/>
+          </a:p>
+          <a:p>
+            <a:r>
+              <a:rPr lang="en-US" sz="1700" dirty="0">
+                <a:solidFill>
+                  <a:srgbClr val="17364A"/>
+                </a:solidFill>
+                <a:latin typeface="Aptos" pitchFamily="34" charset="0"/>
+                <a:ea typeface="Aptos" pitchFamily="34" charset="-122"/>
+                <a:cs typeface="Aptos" pitchFamily="34" charset="-120"/>
+              </a:rPr>
+              <a:t>If only technical staff test the tool, usability and workflow problems may be missed.</a:t>
+            </a:r>
+            <a:endParaRPr lang="en-US" sz="1700" dirty="0"/>
+          </a:p>
+          <a:p>
+            <a:r>
+              <a:rPr lang="en-US" sz="1700" dirty="0">
+                <a:solidFill>
+                  <a:srgbClr val="17364A"/>
+                </a:solidFill>
+                <a:latin typeface="Aptos" pitchFamily="34" charset="0"/>
+                <a:ea typeface="Aptos" pitchFamily="34" charset="-122"/>
+                <a:cs typeface="Aptos" pitchFamily="34" charset="-120"/>
+              </a:rPr>
+              <a:t>Test scenarios should include more than ideal cases.</a:t>
+            </a:r>
+            <a:endParaRPr lang="en-US" sz="1700" dirty="0"/>
+          </a:p>
+        </p:txBody>
+      </p:sp>
+      <p:sp>
+        <p:nvSpPr>
+          <p:cNvPr id="11" name="Shape 9"/>
+          <p:cNvSpPr/>
+          <p:nvPr/>
+        </p:nvSpPr>
+        <p:spPr>
+          <a:xfrm>
+            <a:off x="7909560" y="1417320"/>
+            <a:ext cx="3154680" cy="1828800"/>
+          </a:xfrm>
+          <a:prstGeom prst="roundRect">
+            <a:avLst>
+              <a:gd name="adj" fmla="val 6000"/>
+            </a:avLst>
+          </a:prstGeom>
+          <a:solidFill>
+            <a:srgbClr val="EEF8ED"/>
+          </a:solidFill>
+          <a:ln w="12700">
+            <a:solidFill>
+              <a:srgbClr val="B9D7E6"/>
+            </a:solidFill>
+            <a:prstDash val="solid"/>
+          </a:ln>
+        </p:spPr>
+      </p:sp>
+      <p:sp>
+        <p:nvSpPr>
+          <p:cNvPr id="12" name="Text 10"/>
+          <p:cNvSpPr/>
+          <p:nvPr/>
+        </p:nvSpPr>
+        <p:spPr>
+          <a:xfrm>
+            <a:off x="8074152" y="1563624"/>
+            <a:ext cx="2825496" cy="201168"/>
+          </a:xfrm>
+          <a:prstGeom prst="rect">
+            <a:avLst/>
+          </a:prstGeom>
+          <a:noFill/>
+          <a:ln/>
+        </p:spPr>
+        <p:txBody>
+          <a:bodyPr wrap="square" lIns="0" tIns="0" rIns="0" bIns="0" rtlCol="0" anchor="ctr"/>
+          <a:lstStyle/>
+          <a:p>
             <a:pPr indent="0" marL="0">
               <a:buNone/>
             </a:pPr>
             <a:r>
-              <a:rPr lang="en-US" sz="1420" dirty="0">
+              <a:rPr lang="en-US" sz="950" b="1" dirty="0">
+                <a:solidFill>
+                  <a:srgbClr val="0068B7"/>
+                </a:solidFill>
+                <a:latin typeface="Aptos" pitchFamily="34" charset="0"/>
+                <a:ea typeface="Aptos" pitchFamily="34" charset="-122"/>
+                <a:cs typeface="Aptos" pitchFamily="34" charset="-120"/>
+              </a:rPr>
+              <a:t>Key idea</a:t>
+            </a:r>
+            <a:endParaRPr lang="en-US" sz="950" dirty="0"/>
+          </a:p>
+        </p:txBody>
+      </p:sp>
+      <p:sp>
+        <p:nvSpPr>
+          <p:cNvPr id="13" name="Text 11"/>
+          <p:cNvSpPr/>
+          <p:nvPr/>
+        </p:nvSpPr>
+        <p:spPr>
+          <a:xfrm>
+            <a:off x="8074152" y="1856232"/>
+            <a:ext cx="2825496" cy="1261872"/>
+          </a:xfrm>
+          <a:prstGeom prst="rect">
+            <a:avLst/>
+          </a:prstGeom>
+          <a:noFill/>
+          <a:ln/>
+        </p:spPr>
+        <p:txBody>
+          <a:bodyPr wrap="square" lIns="0" tIns="0" rIns="0" bIns="0" rtlCol="0" anchor="t">
+            <a:normAutofit/>
+          </a:bodyPr>
+          <a:lstStyle/>
+          <a:p>
+            <a:pPr indent="0" marL="0">
+              <a:buNone/>
+            </a:pPr>
+            <a:r>
+              <a:rPr lang="en-US" sz="1250" dirty="0">
                 <a:solidFill>
                   <a:srgbClr val="17364A"/>
                 </a:solidFill>
@@ -7348,9 +13515,116 @@
                 <a:ea typeface="Aptos" pitchFamily="34" charset="-122"/>
                 <a:cs typeface="Aptos" pitchFamily="34" charset="-120"/>
               </a:rPr>
-              <a:t>Risks and failure modes include the following: Testing only ideal scenarios and missing high-risk workflow failures. Excluding real end users from testing.</a:t>
-            </a:r>
-            <a:endParaRPr lang="en-US" sz="1420" dirty="0"/>
+              <a:t>UAT should be designed around real users and real work.</a:t>
+            </a:r>
+            <a:endParaRPr lang="en-US" sz="1250" dirty="0"/>
+          </a:p>
+        </p:txBody>
+      </p:sp>
+      <p:sp>
+        <p:nvSpPr>
+          <p:cNvPr id="14" name="Shape 12"/>
+          <p:cNvSpPr/>
+          <p:nvPr/>
+        </p:nvSpPr>
+        <p:spPr>
+          <a:xfrm>
+            <a:off x="7909560" y="3520440"/>
+            <a:ext cx="3154680" cy="1737360"/>
+          </a:xfrm>
+          <a:prstGeom prst="roundRect">
+            <a:avLst>
+              <a:gd name="adj" fmla="val 6316"/>
+            </a:avLst>
+          </a:prstGeom>
+          <a:solidFill>
+            <a:srgbClr val="EAF6F8"/>
+          </a:solidFill>
+          <a:ln w="12700">
+            <a:solidFill>
+              <a:srgbClr val="B9D7E6"/>
+            </a:solidFill>
+            <a:prstDash val="solid"/>
+          </a:ln>
+        </p:spPr>
+      </p:sp>
+      <p:sp>
+        <p:nvSpPr>
+          <p:cNvPr id="15" name="Text 13"/>
+          <p:cNvSpPr/>
+          <p:nvPr/>
+        </p:nvSpPr>
+        <p:spPr>
+          <a:xfrm>
+            <a:off x="8074152" y="3666744"/>
+            <a:ext cx="2825496" cy="201168"/>
+          </a:xfrm>
+          <a:prstGeom prst="rect">
+            <a:avLst/>
+          </a:prstGeom>
+          <a:noFill/>
+          <a:ln/>
+        </p:spPr>
+        <p:txBody>
+          <a:bodyPr wrap="square" lIns="0" tIns="0" rIns="0" bIns="0" rtlCol="0" anchor="ctr"/>
+          <a:lstStyle/>
+          <a:p>
+            <a:pPr indent="0" marL="0">
+              <a:buNone/>
+            </a:pPr>
+            <a:r>
+              <a:rPr lang="en-US" sz="950" b="1" dirty="0">
+                <a:solidFill>
+                  <a:srgbClr val="0068B7"/>
+                </a:solidFill>
+                <a:latin typeface="Aptos" pitchFamily="34" charset="0"/>
+                <a:ea typeface="Aptos" pitchFamily="34" charset="-122"/>
+                <a:cs typeface="Aptos" pitchFamily="34" charset="-120"/>
+              </a:rPr>
+              <a:t>Use this for</a:t>
+            </a:r>
+            <a:endParaRPr lang="en-US" sz="950" dirty="0"/>
+          </a:p>
+        </p:txBody>
+      </p:sp>
+      <p:sp>
+        <p:nvSpPr>
+          <p:cNvPr id="16" name="Text 14"/>
+          <p:cNvSpPr/>
+          <p:nvPr/>
+        </p:nvSpPr>
+        <p:spPr>
+          <a:xfrm>
+            <a:off x="8074152" y="3959352"/>
+            <a:ext cx="2825496" cy="1170432"/>
+          </a:xfrm>
+          <a:prstGeom prst="rect">
+            <a:avLst/>
+          </a:prstGeom>
+          <a:noFill/>
+          <a:ln/>
+        </p:spPr>
+        <p:txBody>
+          <a:bodyPr wrap="square" lIns="0" tIns="0" rIns="0" bIns="0" rtlCol="0" anchor="t">
+            <a:normAutofit/>
+          </a:bodyPr>
+          <a:lstStyle/>
+          <a:p>
+            <a:pPr indent="0" marL="0">
+              <a:buNone/>
+            </a:pPr>
+            <a:r>
+              <a:rPr lang="en-US" sz="1250" dirty="0">
+                <a:solidFill>
+                  <a:srgbClr val="17364A"/>
+                </a:solidFill>
+                <a:latin typeface="Aptos" pitchFamily="34" charset="0"/>
+                <a:ea typeface="Aptos" pitchFamily="34" charset="-122"/>
+                <a:cs typeface="Aptos" pitchFamily="34" charset="-120"/>
+              </a:rPr>
+              <a:t>Connect the concept to public health decisions, safeguards, documentation, or implementation work.</a:t>
+            </a:r>
+            <a:endParaRPr lang="en-US" sz="1250" dirty="0"/>
           </a:p>
         </p:txBody>
       </p:sp>
@@ -7413,7 +13687,32 @@
       </p:sp>
       <p:sp>
         <p:nvSpPr>
-          <p:cNvPr id="3" name="Text 1"/>
+          <p:cNvPr id="3" name="Shape 1"/>
+          <p:cNvSpPr/>
+          <p:nvPr/>
+        </p:nvSpPr>
+        <p:spPr>
+          <a:xfrm>
+            <a:off x="0" y="164592"/>
+            <a:ext cx="146304" cy="6693408"/>
+          </a:xfrm>
+          <a:prstGeom prst="rect">
+            <a:avLst/>
+          </a:prstGeom>
+          <a:solidFill>
+            <a:srgbClr val="2F8A28"/>
+          </a:solidFill>
+          <a:ln w="12700">
+            <a:solidFill>
+              <a:srgbClr val="2F8A28"/>
+            </a:solidFill>
+            <a:prstDash val="solid"/>
+          </a:ln>
+        </p:spPr>
+      </p:sp>
+      <p:sp>
+        <p:nvSpPr>
+          <p:cNvPr id="4" name="Text 2"/>
           <p:cNvSpPr/>
           <p:nvPr/>
         </p:nvSpPr>
@@ -7452,7 +13751,7 @@
       </p:sp>
       <p:sp>
         <p:nvSpPr>
-          <p:cNvPr id="4" name="Text 2"/>
+          <p:cNvPr id="5" name="Text 3"/>
           <p:cNvSpPr/>
           <p:nvPr/>
         </p:nvSpPr>
@@ -7491,7 +13790,7 @@
       </p:sp>
       <p:sp>
         <p:nvSpPr>
-          <p:cNvPr id="5" name="Text 3"/>
+          <p:cNvPr id="6" name="Text 4"/>
           <p:cNvSpPr/>
           <p:nvPr/>
         </p:nvSpPr>
@@ -7530,7 +13829,7 @@
       </p:sp>
       <p:sp>
         <p:nvSpPr>
-          <p:cNvPr id="6" name="Text 4"/>
+          <p:cNvPr id="7" name="Text 5"/>
           <p:cNvSpPr/>
           <p:nvPr/>
         </p:nvSpPr>
@@ -7563,7 +13862,7 @@
                 <a:ea typeface="Aptos Display" pitchFamily="34" charset="-122"/>
                 <a:cs typeface="Aptos Display" pitchFamily="34" charset="-120"/>
               </a:rPr>
-              <a:t>Risks, Failure Modes, and Guardrails Continued</a:t>
+              <a:t>Technical and Operational Deep Dive Continued</a:t>
             </a:r>
             <a:endParaRPr lang="en-US" sz="2700" dirty="0"/>
           </a:p>
@@ -7571,32 +13870,178 @@
       </p:sp>
       <p:sp>
         <p:nvSpPr>
-          <p:cNvPr id="7" name="Text 5"/>
-          <p:cNvSpPr/>
-          <p:nvPr/>
-        </p:nvSpPr>
-        <p:spPr>
-          <a:xfrm>
-            <a:off x="822960" y="1325880"/>
-            <a:ext cx="10378440" cy="4800600"/>
-          </a:xfrm>
-          <a:prstGeom prst="rect">
-            <a:avLst/>
-          </a:prstGeom>
-          <a:noFill/>
-          <a:ln/>
-        </p:spPr>
-        <p:txBody>
-          <a:bodyPr wrap="square" lIns="1016" tIns="1016" rIns="1016" bIns="1016" rtlCol="0" anchor="t">
+          <p:cNvPr id="8" name="Text 6"/>
+          <p:cNvSpPr/>
+          <p:nvPr/>
+        </p:nvSpPr>
+        <p:spPr>
+          <a:xfrm>
+            <a:off x="868680" y="1417320"/>
+            <a:ext cx="6675120" cy="4434840"/>
+          </a:xfrm>
+          <a:prstGeom prst="rect">
+            <a:avLst/>
+          </a:prstGeom>
+          <a:noFill/>
+          <a:ln/>
+        </p:spPr>
+        <p:txBody>
+          <a:bodyPr wrap="square" lIns="635" tIns="635" rIns="635" bIns="635" rtlCol="0" anchor="t">
             <a:normAutofit/>
           </a:bodyPr>
           <a:lstStyle/>
           <a:p>
+            <a:r>
+              <a:rPr lang="en-US" sz="1700" dirty="0">
+                <a:solidFill>
+                  <a:srgbClr val="17364A"/>
+                </a:solidFill>
+                <a:latin typeface="Aptos" pitchFamily="34" charset="0"/>
+                <a:ea typeface="Aptos" pitchFamily="34" charset="-122"/>
+                <a:cs typeface="Aptos" pitchFamily="34" charset="-120"/>
+              </a:rPr>
+              <a:t>UAT results should lead to a launch decision.</a:t>
+            </a:r>
+            <a:endParaRPr lang="en-US" sz="1700" dirty="0"/>
+          </a:p>
+          <a:p>
+            <a:r>
+              <a:rPr lang="en-US" sz="1700" dirty="0">
+                <a:solidFill>
+                  <a:srgbClr val="17364A"/>
+                </a:solidFill>
+                <a:latin typeface="Aptos" pitchFamily="34" charset="0"/>
+                <a:ea typeface="Aptos" pitchFamily="34" charset="-122"/>
+                <a:cs typeface="Aptos" pitchFamily="34" charset="-120"/>
+              </a:rPr>
+              <a:t>Issues should be categorized by severity, assigned to owners, and resolved or accepted with documented rationale.</a:t>
+            </a:r>
+            <a:endParaRPr lang="en-US" sz="1700" dirty="0"/>
+          </a:p>
+          <a:p>
+            <a:r>
+              <a:rPr lang="en-US" sz="1700" dirty="0">
+                <a:solidFill>
+                  <a:srgbClr val="17364A"/>
+                </a:solidFill>
+                <a:latin typeface="Aptos" pitchFamily="34" charset="0"/>
+                <a:ea typeface="Aptos" pitchFamily="34" charset="-122"/>
+                <a:cs typeface="Aptos" pitchFamily="34" charset="-120"/>
+              </a:rPr>
+              <a:t>A launch should not proceed simply because testing occurred.</a:t>
+            </a:r>
+            <a:endParaRPr lang="en-US" sz="1700" dirty="0"/>
+          </a:p>
+          <a:p>
+            <a:r>
+              <a:rPr lang="en-US" sz="1700" dirty="0">
+                <a:solidFill>
+                  <a:srgbClr val="17364A"/>
+                </a:solidFill>
+                <a:latin typeface="Aptos" pitchFamily="34" charset="0"/>
+                <a:ea typeface="Aptos" pitchFamily="34" charset="-122"/>
+                <a:cs typeface="Aptos" pitchFamily="34" charset="-120"/>
+              </a:rPr>
+              <a:t>It should proceed only if acceptance criteria are met and unresolved issues do not create unacceptable risk.</a:t>
+            </a:r>
+            <a:endParaRPr lang="en-US" sz="1700" dirty="0"/>
+          </a:p>
+        </p:txBody>
+      </p:sp>
+      <p:sp>
+        <p:nvSpPr>
+          <p:cNvPr id="9" name="Shape 7"/>
+          <p:cNvSpPr/>
+          <p:nvPr/>
+        </p:nvSpPr>
+        <p:spPr>
+          <a:xfrm>
+            <a:off x="7909560" y="1417320"/>
+            <a:ext cx="3154680" cy="1828800"/>
+          </a:xfrm>
+          <a:prstGeom prst="roundRect">
+            <a:avLst>
+              <a:gd name="adj" fmla="val 6000"/>
+            </a:avLst>
+          </a:prstGeom>
+          <a:solidFill>
+            <a:srgbClr val="EEF8ED"/>
+          </a:solidFill>
+          <a:ln w="12700">
+            <a:solidFill>
+              <a:srgbClr val="B9D7E6"/>
+            </a:solidFill>
+            <a:prstDash val="solid"/>
+          </a:ln>
+        </p:spPr>
+      </p:sp>
+      <p:sp>
+        <p:nvSpPr>
+          <p:cNvPr id="10" name="Text 8"/>
+          <p:cNvSpPr/>
+          <p:nvPr/>
+        </p:nvSpPr>
+        <p:spPr>
+          <a:xfrm>
+            <a:off x="8074152" y="1563624"/>
+            <a:ext cx="2825496" cy="201168"/>
+          </a:xfrm>
+          <a:prstGeom prst="rect">
+            <a:avLst/>
+          </a:prstGeom>
+          <a:noFill/>
+          <a:ln/>
+        </p:spPr>
+        <p:txBody>
+          <a:bodyPr wrap="square" lIns="0" tIns="0" rIns="0" bIns="0" rtlCol="0" anchor="ctr"/>
+          <a:lstStyle/>
+          <a:p>
             <a:pPr indent="0" marL="0">
               <a:buNone/>
             </a:pPr>
             <a:r>
-              <a:rPr lang="en-US" sz="1420" dirty="0">
+              <a:rPr lang="en-US" sz="950" b="1" dirty="0">
+                <a:solidFill>
+                  <a:srgbClr val="0068B7"/>
+                </a:solidFill>
+                <a:latin typeface="Aptos" pitchFamily="34" charset="0"/>
+                <a:ea typeface="Aptos" pitchFamily="34" charset="-122"/>
+                <a:cs typeface="Aptos" pitchFamily="34" charset="-120"/>
+              </a:rPr>
+              <a:t>Key idea</a:t>
+            </a:r>
+            <a:endParaRPr lang="en-US" sz="950" dirty="0"/>
+          </a:p>
+        </p:txBody>
+      </p:sp>
+      <p:sp>
+        <p:nvSpPr>
+          <p:cNvPr id="11" name="Text 9"/>
+          <p:cNvSpPr/>
+          <p:nvPr/>
+        </p:nvSpPr>
+        <p:spPr>
+          <a:xfrm>
+            <a:off x="8074152" y="1856232"/>
+            <a:ext cx="2825496" cy="1261872"/>
+          </a:xfrm>
+          <a:prstGeom prst="rect">
+            <a:avLst/>
+          </a:prstGeom>
+          <a:noFill/>
+          <a:ln/>
+        </p:spPr>
+        <p:txBody>
+          <a:bodyPr wrap="square" lIns="0" tIns="0" rIns="0" bIns="0" rtlCol="0" anchor="t">
+            <a:normAutofit/>
+          </a:bodyPr>
+          <a:lstStyle/>
+          <a:p>
+            <a:pPr indent="0" marL="0">
+              <a:buNone/>
+            </a:pPr>
+            <a:r>
+              <a:rPr lang="en-US" sz="1250" dirty="0">
                 <a:solidFill>
                   <a:srgbClr val="17364A"/>
                 </a:solidFill>
@@ -7604,9 +14049,116 @@
                 <a:ea typeface="Aptos" pitchFamily="34" charset="-122"/>
                 <a:cs typeface="Aptos" pitchFamily="34" charset="-120"/>
               </a:rPr>
-              <a:t>Launching despite unresolved issues that affect safety, equity, or documentation. Treating model validation as a substitute for workflow acceptance testing. Failing to test override, escalation, fallback, and accessibility requirements.</a:t>
-            </a:r>
-            <a:endParaRPr lang="en-US" sz="1420" dirty="0"/>
+              <a:t>UAT results should lead to a launch decision.</a:t>
+            </a:r>
+            <a:endParaRPr lang="en-US" sz="1250" dirty="0"/>
+          </a:p>
+        </p:txBody>
+      </p:sp>
+      <p:sp>
+        <p:nvSpPr>
+          <p:cNvPr id="12" name="Shape 10"/>
+          <p:cNvSpPr/>
+          <p:nvPr/>
+        </p:nvSpPr>
+        <p:spPr>
+          <a:xfrm>
+            <a:off x="7909560" y="3520440"/>
+            <a:ext cx="3154680" cy="1737360"/>
+          </a:xfrm>
+          <a:prstGeom prst="roundRect">
+            <a:avLst>
+              <a:gd name="adj" fmla="val 6316"/>
+            </a:avLst>
+          </a:prstGeom>
+          <a:solidFill>
+            <a:srgbClr val="EAF6F8"/>
+          </a:solidFill>
+          <a:ln w="12700">
+            <a:solidFill>
+              <a:srgbClr val="B9D7E6"/>
+            </a:solidFill>
+            <a:prstDash val="solid"/>
+          </a:ln>
+        </p:spPr>
+      </p:sp>
+      <p:sp>
+        <p:nvSpPr>
+          <p:cNvPr id="13" name="Text 11"/>
+          <p:cNvSpPr/>
+          <p:nvPr/>
+        </p:nvSpPr>
+        <p:spPr>
+          <a:xfrm>
+            <a:off x="8074152" y="3666744"/>
+            <a:ext cx="2825496" cy="201168"/>
+          </a:xfrm>
+          <a:prstGeom prst="rect">
+            <a:avLst/>
+          </a:prstGeom>
+          <a:noFill/>
+          <a:ln/>
+        </p:spPr>
+        <p:txBody>
+          <a:bodyPr wrap="square" lIns="0" tIns="0" rIns="0" bIns="0" rtlCol="0" anchor="ctr"/>
+          <a:lstStyle/>
+          <a:p>
+            <a:pPr indent="0" marL="0">
+              <a:buNone/>
+            </a:pPr>
+            <a:r>
+              <a:rPr lang="en-US" sz="950" b="1" dirty="0">
+                <a:solidFill>
+                  <a:srgbClr val="0068B7"/>
+                </a:solidFill>
+                <a:latin typeface="Aptos" pitchFamily="34" charset="0"/>
+                <a:ea typeface="Aptos" pitchFamily="34" charset="-122"/>
+                <a:cs typeface="Aptos" pitchFamily="34" charset="-120"/>
+              </a:rPr>
+              <a:t>Use this for</a:t>
+            </a:r>
+            <a:endParaRPr lang="en-US" sz="950" dirty="0"/>
+          </a:p>
+        </p:txBody>
+      </p:sp>
+      <p:sp>
+        <p:nvSpPr>
+          <p:cNvPr id="14" name="Text 12"/>
+          <p:cNvSpPr/>
+          <p:nvPr/>
+        </p:nvSpPr>
+        <p:spPr>
+          <a:xfrm>
+            <a:off x="8074152" y="3959352"/>
+            <a:ext cx="2825496" cy="1170432"/>
+          </a:xfrm>
+          <a:prstGeom prst="rect">
+            <a:avLst/>
+          </a:prstGeom>
+          <a:noFill/>
+          <a:ln/>
+        </p:spPr>
+        <p:txBody>
+          <a:bodyPr wrap="square" lIns="0" tIns="0" rIns="0" bIns="0" rtlCol="0" anchor="t">
+            <a:normAutofit/>
+          </a:bodyPr>
+          <a:lstStyle/>
+          <a:p>
+            <a:pPr indent="0" marL="0">
+              <a:buNone/>
+            </a:pPr>
+            <a:r>
+              <a:rPr lang="en-US" sz="1250" dirty="0">
+                <a:solidFill>
+                  <a:srgbClr val="17364A"/>
+                </a:solidFill>
+                <a:latin typeface="Aptos" pitchFamily="34" charset="0"/>
+                <a:ea typeface="Aptos" pitchFamily="34" charset="-122"/>
+                <a:cs typeface="Aptos" pitchFamily="34" charset="-120"/>
+              </a:rPr>
+              <a:t>Connect the concept to public health decisions, safeguards, documentation, or implementation work.</a:t>
+            </a:r>
+            <a:endParaRPr lang="en-US" sz="1250" dirty="0"/>
           </a:p>
         </p:txBody>
       </p:sp>

--- a/downloads/presentations/modules/lesson-57-user-acceptance-testing-for-ai-supported-workflows.pptx
+++ b/downloads/presentations/modules/lesson-57-user-acceptance-testing-for-ai-supported-workflows.pptx
@@ -2912,6 +2912,45 @@
           </a:p>
         </p:txBody>
       </p:sp>
+      <p:sp>
+        <p:nvSpPr>
+          <p:cNvPr id="8" name="Text 5"/>
+          <p:cNvSpPr/>
+          <p:nvPr/>
+        </p:nvSpPr>
+        <p:spPr>
+          <a:xfrm>
+            <a:off x="11137392" y="6510528"/>
+            <a:ext cx="411480" cy="201168"/>
+          </a:xfrm>
+          <a:prstGeom prst="rect">
+            <a:avLst/>
+          </a:prstGeom>
+          <a:noFill/>
+          <a:ln/>
+        </p:spPr>
+        <p:txBody>
+          <a:bodyPr wrap="square" lIns="0" tIns="0" rIns="0" bIns="0" rtlCol="0" anchor="ctr"/>
+          <a:lstStyle/>
+          <a:p>
+            <a:pPr algn="r" indent="0" marL="0">
+              <a:buNone/>
+            </a:pPr>
+            <a:r>
+              <a:rPr lang="en-US" sz="900" dirty="0">
+                <a:solidFill>
+                  <a:srgbClr val="5F7181"/>
+                </a:solidFill>
+                <a:latin typeface="Aptos" pitchFamily="34" charset="0"/>
+                <a:ea typeface="Aptos" pitchFamily="34" charset="-122"/>
+                <a:cs typeface="Aptos" pitchFamily="34" charset="-120"/>
+              </a:rPr>
+              <a:t>1</a:t>
+            </a:r>
+            <a:endParaRPr lang="en-US" sz="900" dirty="0"/>
+          </a:p>
+        </p:txBody>
+      </p:sp>
     </p:spTree>
   </p:cSld>
   <p:clrMapOvr>
@@ -3105,7 +3144,7 @@
                 <a:ea typeface="Aptos" pitchFamily="34" charset="-122"/>
                 <a:cs typeface="Aptos" pitchFamily="34" charset="-120"/>
               </a:rPr>
-              <a:t>© Paula Soper</a:t>
+              <a:t>Â© Paula Soper</a:t>
             </a:r>
             <a:endParaRPr lang="en-US" sz="800" dirty="0"/>
           </a:p>
@@ -3113,7 +3152,46 @@
       </p:sp>
       <p:sp>
         <p:nvSpPr>
-          <p:cNvPr id="7" name="Shape 5"/>
+          <p:cNvPr id="7" name="Text 5"/>
+          <p:cNvSpPr/>
+          <p:nvPr/>
+        </p:nvSpPr>
+        <p:spPr>
+          <a:xfrm>
+            <a:off x="11137392" y="6510528"/>
+            <a:ext cx="411480" cy="201168"/>
+          </a:xfrm>
+          <a:prstGeom prst="rect">
+            <a:avLst/>
+          </a:prstGeom>
+          <a:noFill/>
+          <a:ln/>
+        </p:spPr>
+        <p:txBody>
+          <a:bodyPr wrap="square" lIns="0" tIns="0" rIns="0" bIns="0" rtlCol="0" anchor="ctr"/>
+          <a:lstStyle/>
+          <a:p>
+            <a:pPr algn="r" indent="0" marL="0">
+              <a:buNone/>
+            </a:pPr>
+            <a:r>
+              <a:rPr lang="en-US" sz="900" dirty="0">
+                <a:solidFill>
+                  <a:srgbClr val="5F7181"/>
+                </a:solidFill>
+                <a:latin typeface="Aptos" pitchFamily="34" charset="0"/>
+                <a:ea typeface="Aptos" pitchFamily="34" charset="-122"/>
+                <a:cs typeface="Aptos" pitchFamily="34" charset="-120"/>
+              </a:rPr>
+              <a:t>10</a:t>
+            </a:r>
+            <a:endParaRPr lang="en-US" sz="900" dirty="0"/>
+          </a:p>
+        </p:txBody>
+      </p:sp>
+      <p:sp>
+        <p:nvSpPr>
+          <p:cNvPr id="8" name="Shape 6"/>
           <p:cNvSpPr/>
           <p:nvPr/>
         </p:nvSpPr>
@@ -3138,7 +3216,7 @@
       </p:sp>
       <p:sp>
         <p:nvSpPr>
-          <p:cNvPr id="8" name="Text 6"/>
+          <p:cNvPr id="9" name="Text 7"/>
           <p:cNvSpPr/>
           <p:nvPr/>
         </p:nvSpPr>
@@ -3177,14 +3255,14 @@
       </p:sp>
       <p:sp>
         <p:nvSpPr>
-          <p:cNvPr id="9" name="Text 7"/>
+          <p:cNvPr id="10" name="Text 8"/>
           <p:cNvSpPr/>
           <p:nvPr/>
         </p:nvSpPr>
         <p:spPr>
           <a:xfrm>
             <a:off x="640080" y="621792"/>
-            <a:ext cx="10881360" cy="566928"/>
+            <a:ext cx="10881360" cy="713232"/>
           </a:xfrm>
           <a:prstGeom prst="rect">
             <a:avLst/>
@@ -3202,7 +3280,7 @@
               <a:buNone/>
             </a:pPr>
             <a:r>
-              <a:rPr lang="en-US" sz="2700" b="1" dirty="0">
+              <a:rPr lang="en-US" sz="3400" b="1" dirty="0">
                 <a:solidFill>
                   <a:srgbClr val="003A63"/>
                 </a:solidFill>
@@ -3212,20 +3290,20 @@
               </a:rPr>
               <a:t>Risks, Failure Modes, and Guardrails</a:t>
             </a:r>
-            <a:endParaRPr lang="en-US" sz="2700" dirty="0"/>
-          </a:p>
-        </p:txBody>
-      </p:sp>
-      <p:sp>
-        <p:nvSpPr>
-          <p:cNvPr id="10" name="Text 8"/>
-          <p:cNvSpPr/>
-          <p:nvPr/>
-        </p:nvSpPr>
-        <p:spPr>
-          <a:xfrm>
-            <a:off x="868680" y="1417320"/>
-            <a:ext cx="6675120" cy="4434840"/>
+            <a:endParaRPr lang="en-US" sz="3400" dirty="0"/>
+          </a:p>
+        </p:txBody>
+      </p:sp>
+      <p:sp>
+        <p:nvSpPr>
+          <p:cNvPr id="11" name="Text 9"/>
+          <p:cNvSpPr/>
+          <p:nvPr/>
+        </p:nvSpPr>
+        <p:spPr>
+          <a:xfrm>
+            <a:off x="868680" y="1508760"/>
+            <a:ext cx="6537960" cy="4160520"/>
           </a:xfrm>
           <a:prstGeom prst="rect">
             <a:avLst/>
@@ -3240,7 +3318,7 @@
           <a:lstStyle/>
           <a:p>
             <a:r>
-              <a:rPr lang="en-US" sz="1700" dirty="0">
+              <a:rPr lang="en-US" sz="2100" dirty="0">
                 <a:solidFill>
                   <a:srgbClr val="17364A"/>
                 </a:solidFill>
@@ -3250,11 +3328,11 @@
               </a:rPr>
               <a:t>Risks and failure modes include the following:</a:t>
             </a:r>
-            <a:endParaRPr lang="en-US" sz="1700" dirty="0"/>
-          </a:p>
-          <a:p>
-            <a:r>
-              <a:rPr lang="en-US" sz="1700" dirty="0">
+            <a:endParaRPr lang="en-US" sz="2100" dirty="0"/>
+          </a:p>
+          <a:p>
+            <a:r>
+              <a:rPr lang="en-US" sz="2100" dirty="0">
                 <a:solidFill>
                   <a:srgbClr val="17364A"/>
                 </a:solidFill>
@@ -3264,11 +3342,11 @@
               </a:rPr>
               <a:t>Testing only ideal scenarios and missing high-risk workflow failures.</a:t>
             </a:r>
-            <a:endParaRPr lang="en-US" sz="1700" dirty="0"/>
-          </a:p>
-          <a:p>
-            <a:r>
-              <a:rPr lang="en-US" sz="1700" dirty="0">
+            <a:endParaRPr lang="en-US" sz="2100" dirty="0"/>
+          </a:p>
+          <a:p>
+            <a:r>
+              <a:rPr lang="en-US" sz="2100" dirty="0">
                 <a:solidFill>
                   <a:srgbClr val="17364A"/>
                 </a:solidFill>
@@ -3278,13 +3356,13 @@
               </a:rPr>
               <a:t>Excluding real end users from testing.</a:t>
             </a:r>
-            <a:endParaRPr lang="en-US" sz="1700" dirty="0"/>
-          </a:p>
-        </p:txBody>
-      </p:sp>
-      <p:sp>
-        <p:nvSpPr>
-          <p:cNvPr id="11" name="Shape 9"/>
+            <a:endParaRPr lang="en-US" sz="2100" dirty="0"/>
+          </a:p>
+        </p:txBody>
+      </p:sp>
+      <p:sp>
+        <p:nvSpPr>
+          <p:cNvPr id="12" name="Shape 10"/>
           <p:cNvSpPr/>
           <p:nvPr/>
         </p:nvSpPr>
@@ -3311,14 +3389,14 @@
       </p:sp>
       <p:sp>
         <p:nvSpPr>
-          <p:cNvPr id="12" name="Text 10"/>
+          <p:cNvPr id="13" name="Text 11"/>
           <p:cNvSpPr/>
           <p:nvPr/>
         </p:nvSpPr>
         <p:spPr>
           <a:xfrm>
             <a:off x="8074152" y="1563624"/>
-            <a:ext cx="2825496" cy="201168"/>
+            <a:ext cx="2825496" cy="256032"/>
           </a:xfrm>
           <a:prstGeom prst="rect">
             <a:avLst/>
@@ -3334,7 +3412,7 @@
               <a:buNone/>
             </a:pPr>
             <a:r>
-              <a:rPr lang="en-US" sz="950" b="1" dirty="0">
+              <a:rPr lang="en-US" sz="1300" b="1" dirty="0">
                 <a:solidFill>
                   <a:srgbClr val="0068B7"/>
                 </a:solidFill>
@@ -3344,20 +3422,20 @@
               </a:rPr>
               <a:t>Key idea</a:t>
             </a:r>
-            <a:endParaRPr lang="en-US" sz="950" dirty="0"/>
-          </a:p>
-        </p:txBody>
-      </p:sp>
-      <p:sp>
-        <p:nvSpPr>
-          <p:cNvPr id="13" name="Text 11"/>
-          <p:cNvSpPr/>
-          <p:nvPr/>
-        </p:nvSpPr>
-        <p:spPr>
-          <a:xfrm>
-            <a:off x="8074152" y="1856232"/>
-            <a:ext cx="2825496" cy="1261872"/>
+            <a:endParaRPr lang="en-US" sz="1300" dirty="0"/>
+          </a:p>
+        </p:txBody>
+      </p:sp>
+      <p:sp>
+        <p:nvSpPr>
+          <p:cNvPr id="14" name="Text 12"/>
+          <p:cNvSpPr/>
+          <p:nvPr/>
+        </p:nvSpPr>
+        <p:spPr>
+          <a:xfrm>
+            <a:off x="8074152" y="1920240"/>
+            <a:ext cx="2825496" cy="1188720"/>
           </a:xfrm>
           <a:prstGeom prst="rect">
             <a:avLst/>
@@ -3375,7 +3453,7 @@
               <a:buNone/>
             </a:pPr>
             <a:r>
-              <a:rPr lang="en-US" sz="1250" dirty="0">
+              <a:rPr lang="en-US" sz="1550" dirty="0">
                 <a:solidFill>
                   <a:srgbClr val="17364A"/>
                 </a:solidFill>
@@ -3385,13 +3463,13 @@
               </a:rPr>
               <a:t>Risks and failure modes include the following:</a:t>
             </a:r>
-            <a:endParaRPr lang="en-US" sz="1250" dirty="0"/>
-          </a:p>
-        </p:txBody>
-      </p:sp>
-      <p:sp>
-        <p:nvSpPr>
-          <p:cNvPr id="14" name="Shape 12"/>
+            <a:endParaRPr lang="en-US" sz="1550" dirty="0"/>
+          </a:p>
+        </p:txBody>
+      </p:sp>
+      <p:sp>
+        <p:nvSpPr>
+          <p:cNvPr id="15" name="Shape 13"/>
           <p:cNvSpPr/>
           <p:nvPr/>
         </p:nvSpPr>
@@ -3418,14 +3496,14 @@
       </p:sp>
       <p:sp>
         <p:nvSpPr>
-          <p:cNvPr id="15" name="Text 13"/>
+          <p:cNvPr id="16" name="Text 14"/>
           <p:cNvSpPr/>
           <p:nvPr/>
         </p:nvSpPr>
         <p:spPr>
           <a:xfrm>
             <a:off x="8074152" y="3666744"/>
-            <a:ext cx="2825496" cy="201168"/>
+            <a:ext cx="2825496" cy="256032"/>
           </a:xfrm>
           <a:prstGeom prst="rect">
             <a:avLst/>
@@ -3441,7 +3519,7 @@
               <a:buNone/>
             </a:pPr>
             <a:r>
-              <a:rPr lang="en-US" sz="950" b="1" dirty="0">
+              <a:rPr lang="en-US" sz="1300" b="1" dirty="0">
                 <a:solidFill>
                   <a:srgbClr val="0068B7"/>
                 </a:solidFill>
@@ -3451,20 +3529,20 @@
               </a:rPr>
               <a:t>Use this for</a:t>
             </a:r>
-            <a:endParaRPr lang="en-US" sz="950" dirty="0"/>
-          </a:p>
-        </p:txBody>
-      </p:sp>
-      <p:sp>
-        <p:nvSpPr>
-          <p:cNvPr id="16" name="Text 14"/>
-          <p:cNvSpPr/>
-          <p:nvPr/>
-        </p:nvSpPr>
-        <p:spPr>
-          <a:xfrm>
-            <a:off x="8074152" y="3959352"/>
-            <a:ext cx="2825496" cy="1170432"/>
+            <a:endParaRPr lang="en-US" sz="1300" dirty="0"/>
+          </a:p>
+        </p:txBody>
+      </p:sp>
+      <p:sp>
+        <p:nvSpPr>
+          <p:cNvPr id="17" name="Text 15"/>
+          <p:cNvSpPr/>
+          <p:nvPr/>
+        </p:nvSpPr>
+        <p:spPr>
+          <a:xfrm>
+            <a:off x="8074152" y="4023360"/>
+            <a:ext cx="2825496" cy="1097280"/>
           </a:xfrm>
           <a:prstGeom prst="rect">
             <a:avLst/>
@@ -3482,7 +3560,7 @@
               <a:buNone/>
             </a:pPr>
             <a:r>
-              <a:rPr lang="en-US" sz="1250" dirty="0">
+              <a:rPr lang="en-US" sz="1550" dirty="0">
                 <a:solidFill>
                   <a:srgbClr val="17364A"/>
                 </a:solidFill>
@@ -3492,7 +3570,7 @@
               </a:rPr>
               <a:t>Connect the concept to public health decisions, safeguards, documentation, or implementation work.</a:t>
             </a:r>
-            <a:endParaRPr lang="en-US" sz="1250" dirty="0"/>
+            <a:endParaRPr lang="en-US" sz="1550" dirty="0"/>
           </a:p>
         </p:txBody>
       </p:sp>
@@ -3689,7 +3767,7 @@
                 <a:ea typeface="Aptos" pitchFamily="34" charset="-122"/>
                 <a:cs typeface="Aptos" pitchFamily="34" charset="-120"/>
               </a:rPr>
-              <a:t>© Paula Soper</a:t>
+              <a:t>Â© Paula Soper</a:t>
             </a:r>
             <a:endParaRPr lang="en-US" sz="800" dirty="0"/>
           </a:p>
@@ -3703,8 +3781,47 @@
         </p:nvSpPr>
         <p:spPr>
           <a:xfrm>
+            <a:off x="11137392" y="6510528"/>
+            <a:ext cx="411480" cy="201168"/>
+          </a:xfrm>
+          <a:prstGeom prst="rect">
+            <a:avLst/>
+          </a:prstGeom>
+          <a:noFill/>
+          <a:ln/>
+        </p:spPr>
+        <p:txBody>
+          <a:bodyPr wrap="square" lIns="0" tIns="0" rIns="0" bIns="0" rtlCol="0" anchor="ctr"/>
+          <a:lstStyle/>
+          <a:p>
+            <a:pPr algn="r" indent="0" marL="0">
+              <a:buNone/>
+            </a:pPr>
+            <a:r>
+              <a:rPr lang="en-US" sz="900" dirty="0">
+                <a:solidFill>
+                  <a:srgbClr val="5F7181"/>
+                </a:solidFill>
+                <a:latin typeface="Aptos" pitchFamily="34" charset="0"/>
+                <a:ea typeface="Aptos" pitchFamily="34" charset="-122"/>
+                <a:cs typeface="Aptos" pitchFamily="34" charset="-120"/>
+              </a:rPr>
+              <a:t>11</a:t>
+            </a:r>
+            <a:endParaRPr lang="en-US" sz="900" dirty="0"/>
+          </a:p>
+        </p:txBody>
+      </p:sp>
+      <p:sp>
+        <p:nvSpPr>
+          <p:cNvPr id="8" name="Text 6"/>
+          <p:cNvSpPr/>
+          <p:nvPr/>
+        </p:nvSpPr>
+        <p:spPr>
+          <a:xfrm>
             <a:off x="640080" y="658368"/>
-            <a:ext cx="10881360" cy="566928"/>
+            <a:ext cx="10881360" cy="713232"/>
           </a:xfrm>
           <a:prstGeom prst="rect">
             <a:avLst/>
@@ -3722,7 +3839,7 @@
               <a:buNone/>
             </a:pPr>
             <a:r>
-              <a:rPr lang="en-US" sz="2700" b="1" dirty="0">
+              <a:rPr lang="en-US" sz="3400" b="1" dirty="0">
                 <a:solidFill>
                   <a:srgbClr val="003A63"/>
                 </a:solidFill>
@@ -3732,20 +3849,20 @@
               </a:rPr>
               <a:t>Risks, Failure Modes, and Guardrails Continued</a:t>
             </a:r>
-            <a:endParaRPr lang="en-US" sz="2700" dirty="0"/>
-          </a:p>
-        </p:txBody>
-      </p:sp>
-      <p:sp>
-        <p:nvSpPr>
-          <p:cNvPr id="8" name="Text 6"/>
-          <p:cNvSpPr/>
-          <p:nvPr/>
-        </p:nvSpPr>
-        <p:spPr>
-          <a:xfrm>
-            <a:off x="868680" y="1417320"/>
-            <a:ext cx="6675120" cy="4434840"/>
+            <a:endParaRPr lang="en-US" sz="3400" dirty="0"/>
+          </a:p>
+        </p:txBody>
+      </p:sp>
+      <p:sp>
+        <p:nvSpPr>
+          <p:cNvPr id="9" name="Text 7"/>
+          <p:cNvSpPr/>
+          <p:nvPr/>
+        </p:nvSpPr>
+        <p:spPr>
+          <a:xfrm>
+            <a:off x="868680" y="1508760"/>
+            <a:ext cx="6537960" cy="4160520"/>
           </a:xfrm>
           <a:prstGeom prst="rect">
             <a:avLst/>
@@ -3760,7 +3877,7 @@
           <a:lstStyle/>
           <a:p>
             <a:r>
-              <a:rPr lang="en-US" sz="1700" dirty="0">
+              <a:rPr lang="en-US" sz="2100" dirty="0">
                 <a:solidFill>
                   <a:srgbClr val="17364A"/>
                 </a:solidFill>
@@ -3770,11 +3887,11 @@
               </a:rPr>
               <a:t>Launching despite unresolved issues that affect safety, equity, or documentation.</a:t>
             </a:r>
-            <a:endParaRPr lang="en-US" sz="1700" dirty="0"/>
-          </a:p>
-          <a:p>
-            <a:r>
-              <a:rPr lang="en-US" sz="1700" dirty="0">
+            <a:endParaRPr lang="en-US" sz="2100" dirty="0"/>
+          </a:p>
+          <a:p>
+            <a:r>
+              <a:rPr lang="en-US" sz="2100" dirty="0">
                 <a:solidFill>
                   <a:srgbClr val="17364A"/>
                 </a:solidFill>
@@ -3784,11 +3901,11 @@
               </a:rPr>
               <a:t>Treating model validation as a substitute for workflow acceptance testing.</a:t>
             </a:r>
-            <a:endParaRPr lang="en-US" sz="1700" dirty="0"/>
-          </a:p>
-          <a:p>
-            <a:r>
-              <a:rPr lang="en-US" sz="1700" dirty="0">
+            <a:endParaRPr lang="en-US" sz="2100" dirty="0"/>
+          </a:p>
+          <a:p>
+            <a:r>
+              <a:rPr lang="en-US" sz="2100" dirty="0">
                 <a:solidFill>
                   <a:srgbClr val="17364A"/>
                 </a:solidFill>
@@ -3798,13 +3915,13 @@
               </a:rPr>
               <a:t>Failing to test override, escalation, fallback, and accessibility requirements.</a:t>
             </a:r>
-            <a:endParaRPr lang="en-US" sz="1700" dirty="0"/>
-          </a:p>
-        </p:txBody>
-      </p:sp>
-      <p:sp>
-        <p:nvSpPr>
-          <p:cNvPr id="9" name="Shape 7"/>
+            <a:endParaRPr lang="en-US" sz="2100" dirty="0"/>
+          </a:p>
+        </p:txBody>
+      </p:sp>
+      <p:sp>
+        <p:nvSpPr>
+          <p:cNvPr id="10" name="Shape 8"/>
           <p:cNvSpPr/>
           <p:nvPr/>
         </p:nvSpPr>
@@ -3831,14 +3948,14 @@
       </p:sp>
       <p:sp>
         <p:nvSpPr>
-          <p:cNvPr id="10" name="Text 8"/>
+          <p:cNvPr id="11" name="Text 9"/>
           <p:cNvSpPr/>
           <p:nvPr/>
         </p:nvSpPr>
         <p:spPr>
           <a:xfrm>
             <a:off x="8074152" y="1563624"/>
-            <a:ext cx="2825496" cy="201168"/>
+            <a:ext cx="2825496" cy="256032"/>
           </a:xfrm>
           <a:prstGeom prst="rect">
             <a:avLst/>
@@ -3854,7 +3971,7 @@
               <a:buNone/>
             </a:pPr>
             <a:r>
-              <a:rPr lang="en-US" sz="950" b="1" dirty="0">
+              <a:rPr lang="en-US" sz="1300" b="1" dirty="0">
                 <a:solidFill>
                   <a:srgbClr val="0068B7"/>
                 </a:solidFill>
@@ -3864,20 +3981,20 @@
               </a:rPr>
               <a:t>Key idea</a:t>
             </a:r>
-            <a:endParaRPr lang="en-US" sz="950" dirty="0"/>
-          </a:p>
-        </p:txBody>
-      </p:sp>
-      <p:sp>
-        <p:nvSpPr>
-          <p:cNvPr id="11" name="Text 9"/>
-          <p:cNvSpPr/>
-          <p:nvPr/>
-        </p:nvSpPr>
-        <p:spPr>
-          <a:xfrm>
-            <a:off x="8074152" y="1856232"/>
-            <a:ext cx="2825496" cy="1261872"/>
+            <a:endParaRPr lang="en-US" sz="1300" dirty="0"/>
+          </a:p>
+        </p:txBody>
+      </p:sp>
+      <p:sp>
+        <p:nvSpPr>
+          <p:cNvPr id="12" name="Text 10"/>
+          <p:cNvSpPr/>
+          <p:nvPr/>
+        </p:nvSpPr>
+        <p:spPr>
+          <a:xfrm>
+            <a:off x="8074152" y="1920240"/>
+            <a:ext cx="2825496" cy="1188720"/>
           </a:xfrm>
           <a:prstGeom prst="rect">
             <a:avLst/>
@@ -3895,7 +4012,7 @@
               <a:buNone/>
             </a:pPr>
             <a:r>
-              <a:rPr lang="en-US" sz="1250" dirty="0">
+              <a:rPr lang="en-US" sz="1550" dirty="0">
                 <a:solidFill>
                   <a:srgbClr val="17364A"/>
                 </a:solidFill>
@@ -3905,13 +4022,13 @@
               </a:rPr>
               <a:t>Launching despite unresolved issues that affect safety, equity, or documentation.</a:t>
             </a:r>
-            <a:endParaRPr lang="en-US" sz="1250" dirty="0"/>
-          </a:p>
-        </p:txBody>
-      </p:sp>
-      <p:sp>
-        <p:nvSpPr>
-          <p:cNvPr id="12" name="Shape 10"/>
+            <a:endParaRPr lang="en-US" sz="1550" dirty="0"/>
+          </a:p>
+        </p:txBody>
+      </p:sp>
+      <p:sp>
+        <p:nvSpPr>
+          <p:cNvPr id="13" name="Shape 11"/>
           <p:cNvSpPr/>
           <p:nvPr/>
         </p:nvSpPr>
@@ -3938,14 +4055,14 @@
       </p:sp>
       <p:sp>
         <p:nvSpPr>
-          <p:cNvPr id="13" name="Text 11"/>
+          <p:cNvPr id="14" name="Text 12"/>
           <p:cNvSpPr/>
           <p:nvPr/>
         </p:nvSpPr>
         <p:spPr>
           <a:xfrm>
             <a:off x="8074152" y="3666744"/>
-            <a:ext cx="2825496" cy="201168"/>
+            <a:ext cx="2825496" cy="256032"/>
           </a:xfrm>
           <a:prstGeom prst="rect">
             <a:avLst/>
@@ -3961,7 +4078,7 @@
               <a:buNone/>
             </a:pPr>
             <a:r>
-              <a:rPr lang="en-US" sz="950" b="1" dirty="0">
+              <a:rPr lang="en-US" sz="1300" b="1" dirty="0">
                 <a:solidFill>
                   <a:srgbClr val="0068B7"/>
                 </a:solidFill>
@@ -3971,20 +4088,20 @@
               </a:rPr>
               <a:t>Use this for</a:t>
             </a:r>
-            <a:endParaRPr lang="en-US" sz="950" dirty="0"/>
-          </a:p>
-        </p:txBody>
-      </p:sp>
-      <p:sp>
-        <p:nvSpPr>
-          <p:cNvPr id="14" name="Text 12"/>
-          <p:cNvSpPr/>
-          <p:nvPr/>
-        </p:nvSpPr>
-        <p:spPr>
-          <a:xfrm>
-            <a:off x="8074152" y="3959352"/>
-            <a:ext cx="2825496" cy="1170432"/>
+            <a:endParaRPr lang="en-US" sz="1300" dirty="0"/>
+          </a:p>
+        </p:txBody>
+      </p:sp>
+      <p:sp>
+        <p:nvSpPr>
+          <p:cNvPr id="15" name="Text 13"/>
+          <p:cNvSpPr/>
+          <p:nvPr/>
+        </p:nvSpPr>
+        <p:spPr>
+          <a:xfrm>
+            <a:off x="8074152" y="4023360"/>
+            <a:ext cx="2825496" cy="1097280"/>
           </a:xfrm>
           <a:prstGeom prst="rect">
             <a:avLst/>
@@ -4002,7 +4119,7 @@
               <a:buNone/>
             </a:pPr>
             <a:r>
-              <a:rPr lang="en-US" sz="1250" dirty="0">
+              <a:rPr lang="en-US" sz="1550" dirty="0">
                 <a:solidFill>
                   <a:srgbClr val="17364A"/>
                 </a:solidFill>
@@ -4012,7 +4129,7 @@
               </a:rPr>
               <a:t>Connect the concept to public health decisions, safeguards, documentation, or implementation work.</a:t>
             </a:r>
-            <a:endParaRPr lang="en-US" sz="1250" dirty="0"/>
+            <a:endParaRPr lang="en-US" sz="1550" dirty="0"/>
           </a:p>
         </p:txBody>
       </p:sp>
@@ -4209,7 +4326,7 @@
                 <a:ea typeface="Aptos" pitchFamily="34" charset="-122"/>
                 <a:cs typeface="Aptos" pitchFamily="34" charset="-120"/>
               </a:rPr>
-              <a:t>© Paula Soper</a:t>
+              <a:t>Â© Paula Soper</a:t>
             </a:r>
             <a:endParaRPr lang="en-US" sz="800" dirty="0"/>
           </a:p>
@@ -4223,8 +4340,47 @@
         </p:nvSpPr>
         <p:spPr>
           <a:xfrm>
+            <a:off x="11137392" y="6510528"/>
+            <a:ext cx="411480" cy="201168"/>
+          </a:xfrm>
+          <a:prstGeom prst="rect">
+            <a:avLst/>
+          </a:prstGeom>
+          <a:noFill/>
+          <a:ln/>
+        </p:spPr>
+        <p:txBody>
+          <a:bodyPr wrap="square" lIns="0" tIns="0" rIns="0" bIns="0" rtlCol="0" anchor="ctr"/>
+          <a:lstStyle/>
+          <a:p>
+            <a:pPr algn="r" indent="0" marL="0">
+              <a:buNone/>
+            </a:pPr>
+            <a:r>
+              <a:rPr lang="en-US" sz="900" dirty="0">
+                <a:solidFill>
+                  <a:srgbClr val="5F7181"/>
+                </a:solidFill>
+                <a:latin typeface="Aptos" pitchFamily="34" charset="0"/>
+                <a:ea typeface="Aptos" pitchFamily="34" charset="-122"/>
+                <a:cs typeface="Aptos" pitchFamily="34" charset="-120"/>
+              </a:rPr>
+              <a:t>12</a:t>
+            </a:r>
+            <a:endParaRPr lang="en-US" sz="900" dirty="0"/>
+          </a:p>
+        </p:txBody>
+      </p:sp>
+      <p:sp>
+        <p:nvSpPr>
+          <p:cNvPr id="8" name="Text 6"/>
+          <p:cNvSpPr/>
+          <p:nvPr/>
+        </p:nvSpPr>
+        <p:spPr>
+          <a:xfrm>
             <a:off x="640080" y="658368"/>
-            <a:ext cx="10881360" cy="566928"/>
+            <a:ext cx="10881360" cy="713232"/>
           </a:xfrm>
           <a:prstGeom prst="rect">
             <a:avLst/>
@@ -4242,7 +4398,7 @@
               <a:buNone/>
             </a:pPr>
             <a:r>
-              <a:rPr lang="en-US" sz="2700" b="1" dirty="0">
+              <a:rPr lang="en-US" sz="3400" b="1" dirty="0">
                 <a:solidFill>
                   <a:srgbClr val="003A63"/>
                 </a:solidFill>
@@ -4252,20 +4408,20 @@
               </a:rPr>
               <a:t>Risks, Failure Modes, and Guardrails Continued</a:t>
             </a:r>
-            <a:endParaRPr lang="en-US" sz="2700" dirty="0"/>
-          </a:p>
-        </p:txBody>
-      </p:sp>
-      <p:sp>
-        <p:nvSpPr>
-          <p:cNvPr id="8" name="Text 6"/>
-          <p:cNvSpPr/>
-          <p:nvPr/>
-        </p:nvSpPr>
-        <p:spPr>
-          <a:xfrm>
-            <a:off x="868680" y="1417320"/>
-            <a:ext cx="6675120" cy="4434840"/>
+            <a:endParaRPr lang="en-US" sz="3400" dirty="0"/>
+          </a:p>
+        </p:txBody>
+      </p:sp>
+      <p:sp>
+        <p:nvSpPr>
+          <p:cNvPr id="9" name="Text 7"/>
+          <p:cNvSpPr/>
+          <p:nvPr/>
+        </p:nvSpPr>
+        <p:spPr>
+          <a:xfrm>
+            <a:off x="868680" y="1508760"/>
+            <a:ext cx="6537960" cy="4160520"/>
           </a:xfrm>
           <a:prstGeom prst="rect">
             <a:avLst/>
@@ -4280,7 +4436,7 @@
           <a:lstStyle/>
           <a:p>
             <a:r>
-              <a:rPr lang="en-US" sz="1700" dirty="0">
+              <a:rPr lang="en-US" sz="2100" dirty="0">
                 <a:solidFill>
                   <a:srgbClr val="17364A"/>
                 </a:solidFill>
@@ -4290,11 +4446,11 @@
               </a:rPr>
               <a:t>Recommended guardrails include the following:</a:t>
             </a:r>
-            <a:endParaRPr lang="en-US" sz="1700" dirty="0"/>
-          </a:p>
-          <a:p>
-            <a:r>
-              <a:rPr lang="en-US" sz="1700" dirty="0">
+            <a:endParaRPr lang="en-US" sz="2100" dirty="0"/>
+          </a:p>
+          <a:p>
+            <a:r>
+              <a:rPr lang="en-US" sz="2100" dirty="0">
                 <a:solidFill>
                   <a:srgbClr val="17364A"/>
                 </a:solidFill>
@@ -4304,11 +4460,11 @@
               </a:rPr>
               <a:t>Develop role-based UAT scripts before launch.</a:t>
             </a:r>
-            <a:endParaRPr lang="en-US" sz="1700" dirty="0"/>
-          </a:p>
-          <a:p>
-            <a:r>
-              <a:rPr lang="en-US" sz="1700" dirty="0">
+            <a:endParaRPr lang="en-US" sz="2100" dirty="0"/>
+          </a:p>
+          <a:p>
+            <a:r>
+              <a:rPr lang="en-US" sz="2100" dirty="0">
                 <a:solidFill>
                   <a:srgbClr val="17364A"/>
                 </a:solidFill>
@@ -4318,13 +4474,13 @@
               </a:rPr>
               <a:t>Include routine, edge, failure, and equity-sensitive cases.</a:t>
             </a:r>
-            <a:endParaRPr lang="en-US" sz="1700" dirty="0"/>
-          </a:p>
-        </p:txBody>
-      </p:sp>
-      <p:sp>
-        <p:nvSpPr>
-          <p:cNvPr id="9" name="Shape 7"/>
+            <a:endParaRPr lang="en-US" sz="2100" dirty="0"/>
+          </a:p>
+        </p:txBody>
+      </p:sp>
+      <p:sp>
+        <p:nvSpPr>
+          <p:cNvPr id="10" name="Shape 8"/>
           <p:cNvSpPr/>
           <p:nvPr/>
         </p:nvSpPr>
@@ -4351,14 +4507,14 @@
       </p:sp>
       <p:sp>
         <p:nvSpPr>
-          <p:cNvPr id="10" name="Text 8"/>
+          <p:cNvPr id="11" name="Text 9"/>
           <p:cNvSpPr/>
           <p:nvPr/>
         </p:nvSpPr>
         <p:spPr>
           <a:xfrm>
             <a:off x="8074152" y="1563624"/>
-            <a:ext cx="2825496" cy="201168"/>
+            <a:ext cx="2825496" cy="256032"/>
           </a:xfrm>
           <a:prstGeom prst="rect">
             <a:avLst/>
@@ -4374,7 +4530,7 @@
               <a:buNone/>
             </a:pPr>
             <a:r>
-              <a:rPr lang="en-US" sz="950" b="1" dirty="0">
+              <a:rPr lang="en-US" sz="1300" b="1" dirty="0">
                 <a:solidFill>
                   <a:srgbClr val="0068B7"/>
                 </a:solidFill>
@@ -4384,20 +4540,20 @@
               </a:rPr>
               <a:t>Key idea</a:t>
             </a:r>
-            <a:endParaRPr lang="en-US" sz="950" dirty="0"/>
-          </a:p>
-        </p:txBody>
-      </p:sp>
-      <p:sp>
-        <p:nvSpPr>
-          <p:cNvPr id="11" name="Text 9"/>
-          <p:cNvSpPr/>
-          <p:nvPr/>
-        </p:nvSpPr>
-        <p:spPr>
-          <a:xfrm>
-            <a:off x="8074152" y="1856232"/>
-            <a:ext cx="2825496" cy="1261872"/>
+            <a:endParaRPr lang="en-US" sz="1300" dirty="0"/>
+          </a:p>
+        </p:txBody>
+      </p:sp>
+      <p:sp>
+        <p:nvSpPr>
+          <p:cNvPr id="12" name="Text 10"/>
+          <p:cNvSpPr/>
+          <p:nvPr/>
+        </p:nvSpPr>
+        <p:spPr>
+          <a:xfrm>
+            <a:off x="8074152" y="1920240"/>
+            <a:ext cx="2825496" cy="1188720"/>
           </a:xfrm>
           <a:prstGeom prst="rect">
             <a:avLst/>
@@ -4415,7 +4571,7 @@
               <a:buNone/>
             </a:pPr>
             <a:r>
-              <a:rPr lang="en-US" sz="1250" dirty="0">
+              <a:rPr lang="en-US" sz="1550" dirty="0">
                 <a:solidFill>
                   <a:srgbClr val="17364A"/>
                 </a:solidFill>
@@ -4425,13 +4581,13 @@
               </a:rPr>
               <a:t>Recommended guardrails include the following:</a:t>
             </a:r>
-            <a:endParaRPr lang="en-US" sz="1250" dirty="0"/>
-          </a:p>
-        </p:txBody>
-      </p:sp>
-      <p:sp>
-        <p:nvSpPr>
-          <p:cNvPr id="12" name="Shape 10"/>
+            <a:endParaRPr lang="en-US" sz="1550" dirty="0"/>
+          </a:p>
+        </p:txBody>
+      </p:sp>
+      <p:sp>
+        <p:nvSpPr>
+          <p:cNvPr id="13" name="Shape 11"/>
           <p:cNvSpPr/>
           <p:nvPr/>
         </p:nvSpPr>
@@ -4458,14 +4614,14 @@
       </p:sp>
       <p:sp>
         <p:nvSpPr>
-          <p:cNvPr id="13" name="Text 11"/>
+          <p:cNvPr id="14" name="Text 12"/>
           <p:cNvSpPr/>
           <p:nvPr/>
         </p:nvSpPr>
         <p:spPr>
           <a:xfrm>
             <a:off x="8074152" y="3666744"/>
-            <a:ext cx="2825496" cy="201168"/>
+            <a:ext cx="2825496" cy="256032"/>
           </a:xfrm>
           <a:prstGeom prst="rect">
             <a:avLst/>
@@ -4481,7 +4637,7 @@
               <a:buNone/>
             </a:pPr>
             <a:r>
-              <a:rPr lang="en-US" sz="950" b="1" dirty="0">
+              <a:rPr lang="en-US" sz="1300" b="1" dirty="0">
                 <a:solidFill>
                   <a:srgbClr val="0068B7"/>
                 </a:solidFill>
@@ -4491,20 +4647,20 @@
               </a:rPr>
               <a:t>Use this for</a:t>
             </a:r>
-            <a:endParaRPr lang="en-US" sz="950" dirty="0"/>
-          </a:p>
-        </p:txBody>
-      </p:sp>
-      <p:sp>
-        <p:nvSpPr>
-          <p:cNvPr id="14" name="Text 12"/>
-          <p:cNvSpPr/>
-          <p:nvPr/>
-        </p:nvSpPr>
-        <p:spPr>
-          <a:xfrm>
-            <a:off x="8074152" y="3959352"/>
-            <a:ext cx="2825496" cy="1170432"/>
+            <a:endParaRPr lang="en-US" sz="1300" dirty="0"/>
+          </a:p>
+        </p:txBody>
+      </p:sp>
+      <p:sp>
+        <p:nvSpPr>
+          <p:cNvPr id="15" name="Text 13"/>
+          <p:cNvSpPr/>
+          <p:nvPr/>
+        </p:nvSpPr>
+        <p:spPr>
+          <a:xfrm>
+            <a:off x="8074152" y="4023360"/>
+            <a:ext cx="2825496" cy="1097280"/>
           </a:xfrm>
           <a:prstGeom prst="rect">
             <a:avLst/>
@@ -4522,7 +4678,7 @@
               <a:buNone/>
             </a:pPr>
             <a:r>
-              <a:rPr lang="en-US" sz="1250" dirty="0">
+              <a:rPr lang="en-US" sz="1550" dirty="0">
                 <a:solidFill>
                   <a:srgbClr val="17364A"/>
                 </a:solidFill>
@@ -4532,7 +4688,7 @@
               </a:rPr>
               <a:t>Connect the concept to public health decisions, safeguards, documentation, or implementation work.</a:t>
             </a:r>
-            <a:endParaRPr lang="en-US" sz="1250" dirty="0"/>
+            <a:endParaRPr lang="en-US" sz="1550" dirty="0"/>
           </a:p>
         </p:txBody>
       </p:sp>
@@ -4729,7 +4885,7 @@
                 <a:ea typeface="Aptos" pitchFamily="34" charset="-122"/>
                 <a:cs typeface="Aptos" pitchFamily="34" charset="-120"/>
               </a:rPr>
-              <a:t>© Paula Soper</a:t>
+              <a:t>Â© Paula Soper</a:t>
             </a:r>
             <a:endParaRPr lang="en-US" sz="800" dirty="0"/>
           </a:p>
@@ -4743,8 +4899,47 @@
         </p:nvSpPr>
         <p:spPr>
           <a:xfrm>
+            <a:off x="11137392" y="6510528"/>
+            <a:ext cx="411480" cy="201168"/>
+          </a:xfrm>
+          <a:prstGeom prst="rect">
+            <a:avLst/>
+          </a:prstGeom>
+          <a:noFill/>
+          <a:ln/>
+        </p:spPr>
+        <p:txBody>
+          <a:bodyPr wrap="square" lIns="0" tIns="0" rIns="0" bIns="0" rtlCol="0" anchor="ctr"/>
+          <a:lstStyle/>
+          <a:p>
+            <a:pPr algn="r" indent="0" marL="0">
+              <a:buNone/>
+            </a:pPr>
+            <a:r>
+              <a:rPr lang="en-US" sz="900" dirty="0">
+                <a:solidFill>
+                  <a:srgbClr val="5F7181"/>
+                </a:solidFill>
+                <a:latin typeface="Aptos" pitchFamily="34" charset="0"/>
+                <a:ea typeface="Aptos" pitchFamily="34" charset="-122"/>
+                <a:cs typeface="Aptos" pitchFamily="34" charset="-120"/>
+              </a:rPr>
+              <a:t>13</a:t>
+            </a:r>
+            <a:endParaRPr lang="en-US" sz="900" dirty="0"/>
+          </a:p>
+        </p:txBody>
+      </p:sp>
+      <p:sp>
+        <p:nvSpPr>
+          <p:cNvPr id="8" name="Text 6"/>
+          <p:cNvSpPr/>
+          <p:nvPr/>
+        </p:nvSpPr>
+        <p:spPr>
+          <a:xfrm>
             <a:off x="640080" y="658368"/>
-            <a:ext cx="10881360" cy="566928"/>
+            <a:ext cx="10881360" cy="713232"/>
           </a:xfrm>
           <a:prstGeom prst="rect">
             <a:avLst/>
@@ -4762,7 +4957,7 @@
               <a:buNone/>
             </a:pPr>
             <a:r>
-              <a:rPr lang="en-US" sz="2700" b="1" dirty="0">
+              <a:rPr lang="en-US" sz="3400" b="1" dirty="0">
                 <a:solidFill>
                   <a:srgbClr val="003A63"/>
                 </a:solidFill>
@@ -4772,20 +4967,20 @@
               </a:rPr>
               <a:t>Risks, Failure Modes, and Guardrails Continued</a:t>
             </a:r>
-            <a:endParaRPr lang="en-US" sz="2700" dirty="0"/>
-          </a:p>
-        </p:txBody>
-      </p:sp>
-      <p:sp>
-        <p:nvSpPr>
-          <p:cNvPr id="8" name="Text 6"/>
-          <p:cNvSpPr/>
-          <p:nvPr/>
-        </p:nvSpPr>
-        <p:spPr>
-          <a:xfrm>
-            <a:off x="868680" y="1417320"/>
-            <a:ext cx="6675120" cy="4434840"/>
+            <a:endParaRPr lang="en-US" sz="3400" dirty="0"/>
+          </a:p>
+        </p:txBody>
+      </p:sp>
+      <p:sp>
+        <p:nvSpPr>
+          <p:cNvPr id="9" name="Text 7"/>
+          <p:cNvSpPr/>
+          <p:nvPr/>
+        </p:nvSpPr>
+        <p:spPr>
+          <a:xfrm>
+            <a:off x="868680" y="1508760"/>
+            <a:ext cx="6537960" cy="4160520"/>
           </a:xfrm>
           <a:prstGeom prst="rect">
             <a:avLst/>
@@ -4800,7 +4995,7 @@
           <a:lstStyle/>
           <a:p>
             <a:r>
-              <a:rPr lang="en-US" sz="1700" dirty="0">
+              <a:rPr lang="en-US" sz="2100" dirty="0">
                 <a:solidFill>
                   <a:srgbClr val="17364A"/>
                 </a:solidFill>
@@ -4810,11 +5005,11 @@
               </a:rPr>
               <a:t>Define acceptance criteria before testing.</a:t>
             </a:r>
-            <a:endParaRPr lang="en-US" sz="1700" dirty="0"/>
-          </a:p>
-          <a:p>
-            <a:r>
-              <a:rPr lang="en-US" sz="1700" dirty="0">
+            <a:endParaRPr lang="en-US" sz="2100" dirty="0"/>
+          </a:p>
+          <a:p>
+            <a:r>
+              <a:rPr lang="en-US" sz="2100" dirty="0">
                 <a:solidFill>
                   <a:srgbClr val="17364A"/>
                 </a:solidFill>
@@ -4824,11 +5019,11 @@
               </a:rPr>
               <a:t>Track issues by severity, owner, and resolution status.</a:t>
             </a:r>
-            <a:endParaRPr lang="en-US" sz="1700" dirty="0"/>
-          </a:p>
-          <a:p>
-            <a:r>
-              <a:rPr lang="en-US" sz="1700" dirty="0">
+            <a:endParaRPr lang="en-US" sz="2100" dirty="0"/>
+          </a:p>
+          <a:p>
+            <a:r>
+              <a:rPr lang="en-US" sz="2100" dirty="0">
                 <a:solidFill>
                   <a:srgbClr val="17364A"/>
                 </a:solidFill>
@@ -4838,13 +5033,13 @@
               </a:rPr>
               <a:t>Require documented sign-off or remediation before deployment.</a:t>
             </a:r>
-            <a:endParaRPr lang="en-US" sz="1700" dirty="0"/>
-          </a:p>
-        </p:txBody>
-      </p:sp>
-      <p:sp>
-        <p:nvSpPr>
-          <p:cNvPr id="9" name="Shape 7"/>
+            <a:endParaRPr lang="en-US" sz="2100" dirty="0"/>
+          </a:p>
+        </p:txBody>
+      </p:sp>
+      <p:sp>
+        <p:nvSpPr>
+          <p:cNvPr id="10" name="Shape 8"/>
           <p:cNvSpPr/>
           <p:nvPr/>
         </p:nvSpPr>
@@ -4871,14 +5066,14 @@
       </p:sp>
       <p:sp>
         <p:nvSpPr>
-          <p:cNvPr id="10" name="Text 8"/>
+          <p:cNvPr id="11" name="Text 9"/>
           <p:cNvSpPr/>
           <p:nvPr/>
         </p:nvSpPr>
         <p:spPr>
           <a:xfrm>
             <a:off x="8074152" y="1563624"/>
-            <a:ext cx="2825496" cy="201168"/>
+            <a:ext cx="2825496" cy="256032"/>
           </a:xfrm>
           <a:prstGeom prst="rect">
             <a:avLst/>
@@ -4894,7 +5089,7 @@
               <a:buNone/>
             </a:pPr>
             <a:r>
-              <a:rPr lang="en-US" sz="950" b="1" dirty="0">
+              <a:rPr lang="en-US" sz="1300" b="1" dirty="0">
                 <a:solidFill>
                   <a:srgbClr val="0068B7"/>
                 </a:solidFill>
@@ -4904,20 +5099,20 @@
               </a:rPr>
               <a:t>Key idea</a:t>
             </a:r>
-            <a:endParaRPr lang="en-US" sz="950" dirty="0"/>
-          </a:p>
-        </p:txBody>
-      </p:sp>
-      <p:sp>
-        <p:nvSpPr>
-          <p:cNvPr id="11" name="Text 9"/>
-          <p:cNvSpPr/>
-          <p:nvPr/>
-        </p:nvSpPr>
-        <p:spPr>
-          <a:xfrm>
-            <a:off x="8074152" y="1856232"/>
-            <a:ext cx="2825496" cy="1261872"/>
+            <a:endParaRPr lang="en-US" sz="1300" dirty="0"/>
+          </a:p>
+        </p:txBody>
+      </p:sp>
+      <p:sp>
+        <p:nvSpPr>
+          <p:cNvPr id="12" name="Text 10"/>
+          <p:cNvSpPr/>
+          <p:nvPr/>
+        </p:nvSpPr>
+        <p:spPr>
+          <a:xfrm>
+            <a:off x="8074152" y="1920240"/>
+            <a:ext cx="2825496" cy="1188720"/>
           </a:xfrm>
           <a:prstGeom prst="rect">
             <a:avLst/>
@@ -4935,7 +5130,7 @@
               <a:buNone/>
             </a:pPr>
             <a:r>
-              <a:rPr lang="en-US" sz="1250" dirty="0">
+              <a:rPr lang="en-US" sz="1550" dirty="0">
                 <a:solidFill>
                   <a:srgbClr val="17364A"/>
                 </a:solidFill>
@@ -4945,13 +5140,13 @@
               </a:rPr>
               <a:t>Define acceptance criteria before testing.</a:t>
             </a:r>
-            <a:endParaRPr lang="en-US" sz="1250" dirty="0"/>
-          </a:p>
-        </p:txBody>
-      </p:sp>
-      <p:sp>
-        <p:nvSpPr>
-          <p:cNvPr id="12" name="Shape 10"/>
+            <a:endParaRPr lang="en-US" sz="1550" dirty="0"/>
+          </a:p>
+        </p:txBody>
+      </p:sp>
+      <p:sp>
+        <p:nvSpPr>
+          <p:cNvPr id="13" name="Shape 11"/>
           <p:cNvSpPr/>
           <p:nvPr/>
         </p:nvSpPr>
@@ -4978,14 +5173,14 @@
       </p:sp>
       <p:sp>
         <p:nvSpPr>
-          <p:cNvPr id="13" name="Text 11"/>
+          <p:cNvPr id="14" name="Text 12"/>
           <p:cNvSpPr/>
           <p:nvPr/>
         </p:nvSpPr>
         <p:spPr>
           <a:xfrm>
             <a:off x="8074152" y="3666744"/>
-            <a:ext cx="2825496" cy="201168"/>
+            <a:ext cx="2825496" cy="256032"/>
           </a:xfrm>
           <a:prstGeom prst="rect">
             <a:avLst/>
@@ -5001,7 +5196,7 @@
               <a:buNone/>
             </a:pPr>
             <a:r>
-              <a:rPr lang="en-US" sz="950" b="1" dirty="0">
+              <a:rPr lang="en-US" sz="1300" b="1" dirty="0">
                 <a:solidFill>
                   <a:srgbClr val="0068B7"/>
                 </a:solidFill>
@@ -5011,20 +5206,20 @@
               </a:rPr>
               <a:t>Use this for</a:t>
             </a:r>
-            <a:endParaRPr lang="en-US" sz="950" dirty="0"/>
-          </a:p>
-        </p:txBody>
-      </p:sp>
-      <p:sp>
-        <p:nvSpPr>
-          <p:cNvPr id="14" name="Text 12"/>
-          <p:cNvSpPr/>
-          <p:nvPr/>
-        </p:nvSpPr>
-        <p:spPr>
-          <a:xfrm>
-            <a:off x="8074152" y="3959352"/>
-            <a:ext cx="2825496" cy="1170432"/>
+            <a:endParaRPr lang="en-US" sz="1300" dirty="0"/>
+          </a:p>
+        </p:txBody>
+      </p:sp>
+      <p:sp>
+        <p:nvSpPr>
+          <p:cNvPr id="15" name="Text 13"/>
+          <p:cNvSpPr/>
+          <p:nvPr/>
+        </p:nvSpPr>
+        <p:spPr>
+          <a:xfrm>
+            <a:off x="8074152" y="4023360"/>
+            <a:ext cx="2825496" cy="1097280"/>
           </a:xfrm>
           <a:prstGeom prst="rect">
             <a:avLst/>
@@ -5042,7 +5237,7 @@
               <a:buNone/>
             </a:pPr>
             <a:r>
-              <a:rPr lang="en-US" sz="1250" dirty="0">
+              <a:rPr lang="en-US" sz="1550" dirty="0">
                 <a:solidFill>
                   <a:srgbClr val="17364A"/>
                 </a:solidFill>
@@ -5052,7 +5247,7 @@
               </a:rPr>
               <a:t>Connect the concept to public health decisions, safeguards, documentation, or implementation work.</a:t>
             </a:r>
-            <a:endParaRPr lang="en-US" sz="1250" dirty="0"/>
+            <a:endParaRPr lang="en-US" sz="1550" dirty="0"/>
           </a:p>
         </p:txBody>
       </p:sp>
@@ -5249,7 +5444,7 @@
                 <a:ea typeface="Aptos" pitchFamily="34" charset="-122"/>
                 <a:cs typeface="Aptos" pitchFamily="34" charset="-120"/>
               </a:rPr>
-              <a:t>© Paula Soper</a:t>
+              <a:t>Â© Paula Soper</a:t>
             </a:r>
             <a:endParaRPr lang="en-US" sz="800" dirty="0"/>
           </a:p>
@@ -5257,7 +5452,46 @@
       </p:sp>
       <p:sp>
         <p:nvSpPr>
-          <p:cNvPr id="7" name="Shape 5"/>
+          <p:cNvPr id="7" name="Text 5"/>
+          <p:cNvSpPr/>
+          <p:nvPr/>
+        </p:nvSpPr>
+        <p:spPr>
+          <a:xfrm>
+            <a:off x="11137392" y="6510528"/>
+            <a:ext cx="411480" cy="201168"/>
+          </a:xfrm>
+          <a:prstGeom prst="rect">
+            <a:avLst/>
+          </a:prstGeom>
+          <a:noFill/>
+          <a:ln/>
+        </p:spPr>
+        <p:txBody>
+          <a:bodyPr wrap="square" lIns="0" tIns="0" rIns="0" bIns="0" rtlCol="0" anchor="ctr"/>
+          <a:lstStyle/>
+          <a:p>
+            <a:pPr algn="r" indent="0" marL="0">
+              <a:buNone/>
+            </a:pPr>
+            <a:r>
+              <a:rPr lang="en-US" sz="900" dirty="0">
+                <a:solidFill>
+                  <a:srgbClr val="5F7181"/>
+                </a:solidFill>
+                <a:latin typeface="Aptos" pitchFamily="34" charset="0"/>
+                <a:ea typeface="Aptos" pitchFamily="34" charset="-122"/>
+                <a:cs typeface="Aptos" pitchFamily="34" charset="-120"/>
+              </a:rPr>
+              <a:t>14</a:t>
+            </a:r>
+            <a:endParaRPr lang="en-US" sz="900" dirty="0"/>
+          </a:p>
+        </p:txBody>
+      </p:sp>
+      <p:sp>
+        <p:nvSpPr>
+          <p:cNvPr id="8" name="Shape 6"/>
           <p:cNvSpPr/>
           <p:nvPr/>
         </p:nvSpPr>
@@ -5282,7 +5516,7 @@
       </p:sp>
       <p:sp>
         <p:nvSpPr>
-          <p:cNvPr id="8" name="Text 6"/>
+          <p:cNvPr id="9" name="Text 7"/>
           <p:cNvSpPr/>
           <p:nvPr/>
         </p:nvSpPr>
@@ -5321,14 +5555,14 @@
       </p:sp>
       <p:sp>
         <p:nvSpPr>
-          <p:cNvPr id="9" name="Text 7"/>
+          <p:cNvPr id="10" name="Text 8"/>
           <p:cNvSpPr/>
           <p:nvPr/>
         </p:nvSpPr>
         <p:spPr>
           <a:xfrm>
             <a:off x="640080" y="621792"/>
-            <a:ext cx="10881360" cy="566928"/>
+            <a:ext cx="10881360" cy="713232"/>
           </a:xfrm>
           <a:prstGeom prst="rect">
             <a:avLst/>
@@ -5346,7 +5580,7 @@
               <a:buNone/>
             </a:pPr>
             <a:r>
-              <a:rPr lang="en-US" sz="2700" b="1" dirty="0">
+              <a:rPr lang="en-US" sz="3400" b="1" dirty="0">
                 <a:solidFill>
                   <a:srgbClr val="003A63"/>
                 </a:solidFill>
@@ -5356,20 +5590,20 @@
               </a:rPr>
               <a:t>Reflection Questions</a:t>
             </a:r>
-            <a:endParaRPr lang="en-US" sz="2700" dirty="0"/>
-          </a:p>
-        </p:txBody>
-      </p:sp>
-      <p:sp>
-        <p:nvSpPr>
-          <p:cNvPr id="10" name="Text 8"/>
-          <p:cNvSpPr/>
-          <p:nvPr/>
-        </p:nvSpPr>
-        <p:spPr>
-          <a:xfrm>
-            <a:off x="868680" y="1417320"/>
-            <a:ext cx="6675120" cy="4434840"/>
+            <a:endParaRPr lang="en-US" sz="3400" dirty="0"/>
+          </a:p>
+        </p:txBody>
+      </p:sp>
+      <p:sp>
+        <p:nvSpPr>
+          <p:cNvPr id="11" name="Text 9"/>
+          <p:cNvSpPr/>
+          <p:nvPr/>
+        </p:nvSpPr>
+        <p:spPr>
+          <a:xfrm>
+            <a:off x="868680" y="1508760"/>
+            <a:ext cx="6537960" cy="4160520"/>
           </a:xfrm>
           <a:prstGeom prst="rect">
             <a:avLst/>
@@ -5384,7 +5618,7 @@
           <a:lstStyle/>
           <a:p>
             <a:r>
-              <a:rPr lang="en-US" sz="1700" dirty="0">
+              <a:rPr lang="en-US" sz="2100" dirty="0">
                 <a:solidFill>
                   <a:srgbClr val="17364A"/>
                 </a:solidFill>
@@ -5394,11 +5628,11 @@
               </a:rPr>
               <a:t>Where does this topic appear in your agency, program, or workflow?</a:t>
             </a:r>
-            <a:endParaRPr lang="en-US" sz="1700" dirty="0"/>
-          </a:p>
-          <a:p>
-            <a:r>
-              <a:rPr lang="en-US" sz="1700" dirty="0">
+            <a:endParaRPr lang="en-US" sz="2100" dirty="0"/>
+          </a:p>
+          <a:p>
+            <a:r>
+              <a:rPr lang="en-US" sz="2100" dirty="0">
                 <a:solidFill>
                   <a:srgbClr val="17364A"/>
                 </a:solidFill>
@@ -5408,11 +5642,11 @@
               </a:rPr>
               <a:t>Which staff roles would need to understand or apply this concept before AI use is approved?</a:t>
             </a:r>
-            <a:endParaRPr lang="en-US" sz="1700" dirty="0"/>
-          </a:p>
-          <a:p>
-            <a:r>
-              <a:rPr lang="en-US" sz="1700" dirty="0">
+            <a:endParaRPr lang="en-US" sz="2100" dirty="0"/>
+          </a:p>
+          <a:p>
+            <a:r>
+              <a:rPr lang="en-US" sz="2100" dirty="0">
                 <a:solidFill>
                   <a:srgbClr val="17364A"/>
                 </a:solidFill>
@@ -5422,13 +5656,13 @@
               </a:rPr>
               <a:t>What could go wrong if this topic is not addressed before implementation?</a:t>
             </a:r>
-            <a:endParaRPr lang="en-US" sz="1700" dirty="0"/>
-          </a:p>
-        </p:txBody>
-      </p:sp>
-      <p:sp>
-        <p:nvSpPr>
-          <p:cNvPr id="11" name="Shape 9"/>
+            <a:endParaRPr lang="en-US" sz="2100" dirty="0"/>
+          </a:p>
+        </p:txBody>
+      </p:sp>
+      <p:sp>
+        <p:nvSpPr>
+          <p:cNvPr id="12" name="Shape 10"/>
           <p:cNvSpPr/>
           <p:nvPr/>
         </p:nvSpPr>
@@ -5455,14 +5689,14 @@
       </p:sp>
       <p:sp>
         <p:nvSpPr>
-          <p:cNvPr id="12" name="Text 10"/>
+          <p:cNvPr id="13" name="Text 11"/>
           <p:cNvSpPr/>
           <p:nvPr/>
         </p:nvSpPr>
         <p:spPr>
           <a:xfrm>
             <a:off x="8074152" y="1563624"/>
-            <a:ext cx="2825496" cy="201168"/>
+            <a:ext cx="2825496" cy="256032"/>
           </a:xfrm>
           <a:prstGeom prst="rect">
             <a:avLst/>
@@ -5478,7 +5712,7 @@
               <a:buNone/>
             </a:pPr>
             <a:r>
-              <a:rPr lang="en-US" sz="950" b="1" dirty="0">
+              <a:rPr lang="en-US" sz="1300" b="1" dirty="0">
                 <a:solidFill>
                   <a:srgbClr val="0068B7"/>
                 </a:solidFill>
@@ -5488,20 +5722,20 @@
               </a:rPr>
               <a:t>Key idea</a:t>
             </a:r>
-            <a:endParaRPr lang="en-US" sz="950" dirty="0"/>
-          </a:p>
-        </p:txBody>
-      </p:sp>
-      <p:sp>
-        <p:nvSpPr>
-          <p:cNvPr id="13" name="Text 11"/>
-          <p:cNvSpPr/>
-          <p:nvPr/>
-        </p:nvSpPr>
-        <p:spPr>
-          <a:xfrm>
-            <a:off x="8074152" y="1856232"/>
-            <a:ext cx="2825496" cy="1261872"/>
+            <a:endParaRPr lang="en-US" sz="1300" dirty="0"/>
+          </a:p>
+        </p:txBody>
+      </p:sp>
+      <p:sp>
+        <p:nvSpPr>
+          <p:cNvPr id="14" name="Text 12"/>
+          <p:cNvSpPr/>
+          <p:nvPr/>
+        </p:nvSpPr>
+        <p:spPr>
+          <a:xfrm>
+            <a:off x="8074152" y="1920240"/>
+            <a:ext cx="2825496" cy="1188720"/>
           </a:xfrm>
           <a:prstGeom prst="rect">
             <a:avLst/>
@@ -5519,7 +5753,7 @@
               <a:buNone/>
             </a:pPr>
             <a:r>
-              <a:rPr lang="en-US" sz="1250" dirty="0">
+              <a:rPr lang="en-US" sz="1550" dirty="0">
                 <a:solidFill>
                   <a:srgbClr val="17364A"/>
                 </a:solidFill>
@@ -5529,13 +5763,13 @@
               </a:rPr>
               <a:t>Where does this topic appear in your agency, program, or workflow?</a:t>
             </a:r>
-            <a:endParaRPr lang="en-US" sz="1250" dirty="0"/>
-          </a:p>
-        </p:txBody>
-      </p:sp>
-      <p:sp>
-        <p:nvSpPr>
-          <p:cNvPr id="14" name="Shape 12"/>
+            <a:endParaRPr lang="en-US" sz="1550" dirty="0"/>
+          </a:p>
+        </p:txBody>
+      </p:sp>
+      <p:sp>
+        <p:nvSpPr>
+          <p:cNvPr id="15" name="Shape 13"/>
           <p:cNvSpPr/>
           <p:nvPr/>
         </p:nvSpPr>
@@ -5562,14 +5796,14 @@
       </p:sp>
       <p:sp>
         <p:nvSpPr>
-          <p:cNvPr id="15" name="Text 13"/>
+          <p:cNvPr id="16" name="Text 14"/>
           <p:cNvSpPr/>
           <p:nvPr/>
         </p:nvSpPr>
         <p:spPr>
           <a:xfrm>
             <a:off x="8074152" y="3666744"/>
-            <a:ext cx="2825496" cy="201168"/>
+            <a:ext cx="2825496" cy="256032"/>
           </a:xfrm>
           <a:prstGeom prst="rect">
             <a:avLst/>
@@ -5585,7 +5819,7 @@
               <a:buNone/>
             </a:pPr>
             <a:r>
-              <a:rPr lang="en-US" sz="950" b="1" dirty="0">
+              <a:rPr lang="en-US" sz="1300" b="1" dirty="0">
                 <a:solidFill>
                   <a:srgbClr val="0068B7"/>
                 </a:solidFill>
@@ -5595,20 +5829,20 @@
               </a:rPr>
               <a:t>Use this for</a:t>
             </a:r>
-            <a:endParaRPr lang="en-US" sz="950" dirty="0"/>
-          </a:p>
-        </p:txBody>
-      </p:sp>
-      <p:sp>
-        <p:nvSpPr>
-          <p:cNvPr id="16" name="Text 14"/>
-          <p:cNvSpPr/>
-          <p:nvPr/>
-        </p:nvSpPr>
-        <p:spPr>
-          <a:xfrm>
-            <a:off x="8074152" y="3959352"/>
-            <a:ext cx="2825496" cy="1170432"/>
+            <a:endParaRPr lang="en-US" sz="1300" dirty="0"/>
+          </a:p>
+        </p:txBody>
+      </p:sp>
+      <p:sp>
+        <p:nvSpPr>
+          <p:cNvPr id="17" name="Text 15"/>
+          <p:cNvSpPr/>
+          <p:nvPr/>
+        </p:nvSpPr>
+        <p:spPr>
+          <a:xfrm>
+            <a:off x="8074152" y="4023360"/>
+            <a:ext cx="2825496" cy="1097280"/>
           </a:xfrm>
           <a:prstGeom prst="rect">
             <a:avLst/>
@@ -5626,7 +5860,7 @@
               <a:buNone/>
             </a:pPr>
             <a:r>
-              <a:rPr lang="en-US" sz="1250" dirty="0">
+              <a:rPr lang="en-US" sz="1550" dirty="0">
                 <a:solidFill>
                   <a:srgbClr val="17364A"/>
                 </a:solidFill>
@@ -5636,7 +5870,7 @@
               </a:rPr>
               <a:t>Connect the concept to public health decisions, safeguards, documentation, or implementation work.</a:t>
             </a:r>
-            <a:endParaRPr lang="en-US" sz="1250" dirty="0"/>
+            <a:endParaRPr lang="en-US" sz="1550" dirty="0"/>
           </a:p>
         </p:txBody>
       </p:sp>
@@ -5833,7 +6067,7 @@
                 <a:ea typeface="Aptos" pitchFamily="34" charset="-122"/>
                 <a:cs typeface="Aptos" pitchFamily="34" charset="-120"/>
               </a:rPr>
-              <a:t>© Paula Soper</a:t>
+              <a:t>Â© Paula Soper</a:t>
             </a:r>
             <a:endParaRPr lang="en-US" sz="800" dirty="0"/>
           </a:p>
@@ -5847,8 +6081,47 @@
         </p:nvSpPr>
         <p:spPr>
           <a:xfrm>
+            <a:off x="11137392" y="6510528"/>
+            <a:ext cx="411480" cy="201168"/>
+          </a:xfrm>
+          <a:prstGeom prst="rect">
+            <a:avLst/>
+          </a:prstGeom>
+          <a:noFill/>
+          <a:ln/>
+        </p:spPr>
+        <p:txBody>
+          <a:bodyPr wrap="square" lIns="0" tIns="0" rIns="0" bIns="0" rtlCol="0" anchor="ctr"/>
+          <a:lstStyle/>
+          <a:p>
+            <a:pPr algn="r" indent="0" marL="0">
+              <a:buNone/>
+            </a:pPr>
+            <a:r>
+              <a:rPr lang="en-US" sz="900" dirty="0">
+                <a:solidFill>
+                  <a:srgbClr val="5F7181"/>
+                </a:solidFill>
+                <a:latin typeface="Aptos" pitchFamily="34" charset="0"/>
+                <a:ea typeface="Aptos" pitchFamily="34" charset="-122"/>
+                <a:cs typeface="Aptos" pitchFamily="34" charset="-120"/>
+              </a:rPr>
+              <a:t>15</a:t>
+            </a:r>
+            <a:endParaRPr lang="en-US" sz="900" dirty="0"/>
+          </a:p>
+        </p:txBody>
+      </p:sp>
+      <p:sp>
+        <p:nvSpPr>
+          <p:cNvPr id="8" name="Text 6"/>
+          <p:cNvSpPr/>
+          <p:nvPr/>
+        </p:nvSpPr>
+        <p:spPr>
+          <a:xfrm>
             <a:off x="640080" y="658368"/>
-            <a:ext cx="10881360" cy="566928"/>
+            <a:ext cx="10881360" cy="713232"/>
           </a:xfrm>
           <a:prstGeom prst="rect">
             <a:avLst/>
@@ -5866,7 +6139,7 @@
               <a:buNone/>
             </a:pPr>
             <a:r>
-              <a:rPr lang="en-US" sz="2700" b="1" dirty="0">
+              <a:rPr lang="en-US" sz="3400" b="1" dirty="0">
                 <a:solidFill>
                   <a:srgbClr val="003A63"/>
                 </a:solidFill>
@@ -5876,20 +6149,20 @@
               </a:rPr>
               <a:t>Reflection Questions Continued</a:t>
             </a:r>
-            <a:endParaRPr lang="en-US" sz="2700" dirty="0"/>
-          </a:p>
-        </p:txBody>
-      </p:sp>
-      <p:sp>
-        <p:nvSpPr>
-          <p:cNvPr id="8" name="Text 6"/>
-          <p:cNvSpPr/>
-          <p:nvPr/>
-        </p:nvSpPr>
-        <p:spPr>
-          <a:xfrm>
-            <a:off x="868680" y="1417320"/>
-            <a:ext cx="6675120" cy="4434840"/>
+            <a:endParaRPr lang="en-US" sz="3400" dirty="0"/>
+          </a:p>
+        </p:txBody>
+      </p:sp>
+      <p:sp>
+        <p:nvSpPr>
+          <p:cNvPr id="9" name="Text 7"/>
+          <p:cNvSpPr/>
+          <p:nvPr/>
+        </p:nvSpPr>
+        <p:spPr>
+          <a:xfrm>
+            <a:off x="868680" y="1508760"/>
+            <a:ext cx="6537960" cy="4160520"/>
           </a:xfrm>
           <a:prstGeom prst="rect">
             <a:avLst/>
@@ -5904,7 +6177,7 @@
           <a:lstStyle/>
           <a:p>
             <a:r>
-              <a:rPr lang="en-US" sz="1700" dirty="0">
+              <a:rPr lang="en-US" sz="2100" dirty="0">
                 <a:solidFill>
                   <a:srgbClr val="17364A"/>
                 </a:solidFill>
@@ -5914,11 +6187,11 @@
               </a:rPr>
               <a:t>What evidence would governance, leadership, or operations staff need before moving forward?</a:t>
             </a:r>
-            <a:endParaRPr lang="en-US" sz="1700" dirty="0"/>
-          </a:p>
-          <a:p>
-            <a:r>
-              <a:rPr lang="en-US" sz="1700" dirty="0">
+            <a:endParaRPr lang="en-US" sz="2100" dirty="0"/>
+          </a:p>
+          <a:p>
+            <a:r>
+              <a:rPr lang="en-US" sz="2100" dirty="0">
                 <a:solidFill>
                   <a:srgbClr val="17364A"/>
                 </a:solidFill>
@@ -5928,13 +6201,13 @@
               </a:rPr>
               <a:t>Which policy, data, equity, privacy, security, or workflow questions remain unresolved?</a:t>
             </a:r>
-            <a:endParaRPr lang="en-US" sz="1700" dirty="0"/>
-          </a:p>
-        </p:txBody>
-      </p:sp>
-      <p:sp>
-        <p:nvSpPr>
-          <p:cNvPr id="9" name="Shape 7"/>
+            <a:endParaRPr lang="en-US" sz="2100" dirty="0"/>
+          </a:p>
+        </p:txBody>
+      </p:sp>
+      <p:sp>
+        <p:nvSpPr>
+          <p:cNvPr id="10" name="Shape 8"/>
           <p:cNvSpPr/>
           <p:nvPr/>
         </p:nvSpPr>
@@ -5961,14 +6234,14 @@
       </p:sp>
       <p:sp>
         <p:nvSpPr>
-          <p:cNvPr id="10" name="Text 8"/>
+          <p:cNvPr id="11" name="Text 9"/>
           <p:cNvSpPr/>
           <p:nvPr/>
         </p:nvSpPr>
         <p:spPr>
           <a:xfrm>
             <a:off x="8074152" y="1563624"/>
-            <a:ext cx="2825496" cy="201168"/>
+            <a:ext cx="2825496" cy="256032"/>
           </a:xfrm>
           <a:prstGeom prst="rect">
             <a:avLst/>
@@ -5984,7 +6257,7 @@
               <a:buNone/>
             </a:pPr>
             <a:r>
-              <a:rPr lang="en-US" sz="950" b="1" dirty="0">
+              <a:rPr lang="en-US" sz="1300" b="1" dirty="0">
                 <a:solidFill>
                   <a:srgbClr val="0068B7"/>
                 </a:solidFill>
@@ -5994,20 +6267,20 @@
               </a:rPr>
               <a:t>Key idea</a:t>
             </a:r>
-            <a:endParaRPr lang="en-US" sz="950" dirty="0"/>
-          </a:p>
-        </p:txBody>
-      </p:sp>
-      <p:sp>
-        <p:nvSpPr>
-          <p:cNvPr id="11" name="Text 9"/>
-          <p:cNvSpPr/>
-          <p:nvPr/>
-        </p:nvSpPr>
-        <p:spPr>
-          <a:xfrm>
-            <a:off x="8074152" y="1856232"/>
-            <a:ext cx="2825496" cy="1261872"/>
+            <a:endParaRPr lang="en-US" sz="1300" dirty="0"/>
+          </a:p>
+        </p:txBody>
+      </p:sp>
+      <p:sp>
+        <p:nvSpPr>
+          <p:cNvPr id="12" name="Text 10"/>
+          <p:cNvSpPr/>
+          <p:nvPr/>
+        </p:nvSpPr>
+        <p:spPr>
+          <a:xfrm>
+            <a:off x="8074152" y="1920240"/>
+            <a:ext cx="2825496" cy="1188720"/>
           </a:xfrm>
           <a:prstGeom prst="rect">
             <a:avLst/>
@@ -6025,7 +6298,7 @@
               <a:buNone/>
             </a:pPr>
             <a:r>
-              <a:rPr lang="en-US" sz="1250" dirty="0">
+              <a:rPr lang="en-US" sz="1550" dirty="0">
                 <a:solidFill>
                   <a:srgbClr val="17364A"/>
                 </a:solidFill>
@@ -6035,13 +6308,13 @@
               </a:rPr>
               <a:t>What evidence would governance, leadership, or operations staff need before moving forward?</a:t>
             </a:r>
-            <a:endParaRPr lang="en-US" sz="1250" dirty="0"/>
-          </a:p>
-        </p:txBody>
-      </p:sp>
-      <p:sp>
-        <p:nvSpPr>
-          <p:cNvPr id="12" name="Shape 10"/>
+            <a:endParaRPr lang="en-US" sz="1550" dirty="0"/>
+          </a:p>
+        </p:txBody>
+      </p:sp>
+      <p:sp>
+        <p:nvSpPr>
+          <p:cNvPr id="13" name="Shape 11"/>
           <p:cNvSpPr/>
           <p:nvPr/>
         </p:nvSpPr>
@@ -6068,14 +6341,14 @@
       </p:sp>
       <p:sp>
         <p:nvSpPr>
-          <p:cNvPr id="13" name="Text 11"/>
+          <p:cNvPr id="14" name="Text 12"/>
           <p:cNvSpPr/>
           <p:nvPr/>
         </p:nvSpPr>
         <p:spPr>
           <a:xfrm>
             <a:off x="8074152" y="3666744"/>
-            <a:ext cx="2825496" cy="201168"/>
+            <a:ext cx="2825496" cy="256032"/>
           </a:xfrm>
           <a:prstGeom prst="rect">
             <a:avLst/>
@@ -6091,7 +6364,7 @@
               <a:buNone/>
             </a:pPr>
             <a:r>
-              <a:rPr lang="en-US" sz="950" b="1" dirty="0">
+              <a:rPr lang="en-US" sz="1300" b="1" dirty="0">
                 <a:solidFill>
                   <a:srgbClr val="0068B7"/>
                 </a:solidFill>
@@ -6101,20 +6374,20 @@
               </a:rPr>
               <a:t>Use this for</a:t>
             </a:r>
-            <a:endParaRPr lang="en-US" sz="950" dirty="0"/>
-          </a:p>
-        </p:txBody>
-      </p:sp>
-      <p:sp>
-        <p:nvSpPr>
-          <p:cNvPr id="14" name="Text 12"/>
-          <p:cNvSpPr/>
-          <p:nvPr/>
-        </p:nvSpPr>
-        <p:spPr>
-          <a:xfrm>
-            <a:off x="8074152" y="3959352"/>
-            <a:ext cx="2825496" cy="1170432"/>
+            <a:endParaRPr lang="en-US" sz="1300" dirty="0"/>
+          </a:p>
+        </p:txBody>
+      </p:sp>
+      <p:sp>
+        <p:nvSpPr>
+          <p:cNvPr id="15" name="Text 13"/>
+          <p:cNvSpPr/>
+          <p:nvPr/>
+        </p:nvSpPr>
+        <p:spPr>
+          <a:xfrm>
+            <a:off x="8074152" y="4023360"/>
+            <a:ext cx="2825496" cy="1097280"/>
           </a:xfrm>
           <a:prstGeom prst="rect">
             <a:avLst/>
@@ -6132,7 +6405,7 @@
               <a:buNone/>
             </a:pPr>
             <a:r>
-              <a:rPr lang="en-US" sz="1250" dirty="0">
+              <a:rPr lang="en-US" sz="1550" dirty="0">
                 <a:solidFill>
                   <a:srgbClr val="17364A"/>
                 </a:solidFill>
@@ -6142,7 +6415,7 @@
               </a:rPr>
               <a:t>Connect the concept to public health decisions, safeguards, documentation, or implementation work.</a:t>
             </a:r>
-            <a:endParaRPr lang="en-US" sz="1250" dirty="0"/>
+            <a:endParaRPr lang="en-US" sz="1550" dirty="0"/>
           </a:p>
         </p:txBody>
       </p:sp>
@@ -6339,7 +6612,7 @@
                 <a:ea typeface="Aptos" pitchFamily="34" charset="-122"/>
                 <a:cs typeface="Aptos" pitchFamily="34" charset="-120"/>
               </a:rPr>
-              <a:t>© Paula Soper</a:t>
+              <a:t>Â© Paula Soper</a:t>
             </a:r>
             <a:endParaRPr lang="en-US" sz="800" dirty="0"/>
           </a:p>
@@ -6347,7 +6620,46 @@
       </p:sp>
       <p:sp>
         <p:nvSpPr>
-          <p:cNvPr id="7" name="Shape 5"/>
+          <p:cNvPr id="7" name="Text 5"/>
+          <p:cNvSpPr/>
+          <p:nvPr/>
+        </p:nvSpPr>
+        <p:spPr>
+          <a:xfrm>
+            <a:off x="11137392" y="6510528"/>
+            <a:ext cx="411480" cy="201168"/>
+          </a:xfrm>
+          <a:prstGeom prst="rect">
+            <a:avLst/>
+          </a:prstGeom>
+          <a:noFill/>
+          <a:ln/>
+        </p:spPr>
+        <p:txBody>
+          <a:bodyPr wrap="square" lIns="0" tIns="0" rIns="0" bIns="0" rtlCol="0" anchor="ctr"/>
+          <a:lstStyle/>
+          <a:p>
+            <a:pPr algn="r" indent="0" marL="0">
+              <a:buNone/>
+            </a:pPr>
+            <a:r>
+              <a:rPr lang="en-US" sz="900" dirty="0">
+                <a:solidFill>
+                  <a:srgbClr val="5F7181"/>
+                </a:solidFill>
+                <a:latin typeface="Aptos" pitchFamily="34" charset="0"/>
+                <a:ea typeface="Aptos" pitchFamily="34" charset="-122"/>
+                <a:cs typeface="Aptos" pitchFamily="34" charset="-120"/>
+              </a:rPr>
+              <a:t>16</a:t>
+            </a:r>
+            <a:endParaRPr lang="en-US" sz="900" dirty="0"/>
+          </a:p>
+        </p:txBody>
+      </p:sp>
+      <p:sp>
+        <p:nvSpPr>
+          <p:cNvPr id="8" name="Shape 6"/>
           <p:cNvSpPr/>
           <p:nvPr/>
         </p:nvSpPr>
@@ -6372,7 +6684,7 @@
       </p:sp>
       <p:sp>
         <p:nvSpPr>
-          <p:cNvPr id="8" name="Text 6"/>
+          <p:cNvPr id="9" name="Text 7"/>
           <p:cNvSpPr/>
           <p:nvPr/>
         </p:nvSpPr>
@@ -6411,14 +6723,14 @@
       </p:sp>
       <p:sp>
         <p:nvSpPr>
-          <p:cNvPr id="9" name="Text 7"/>
+          <p:cNvPr id="10" name="Text 8"/>
           <p:cNvSpPr/>
           <p:nvPr/>
         </p:nvSpPr>
         <p:spPr>
           <a:xfrm>
             <a:off x="640080" y="621792"/>
-            <a:ext cx="10881360" cy="566928"/>
+            <a:ext cx="10881360" cy="713232"/>
           </a:xfrm>
           <a:prstGeom prst="rect">
             <a:avLst/>
@@ -6436,7 +6748,7 @@
               <a:buNone/>
             </a:pPr>
             <a:r>
-              <a:rPr lang="en-US" sz="2700" b="1" dirty="0">
+              <a:rPr lang="en-US" sz="3400" b="1" dirty="0">
                 <a:solidFill>
                   <a:srgbClr val="003A63"/>
                 </a:solidFill>
@@ -6446,20 +6758,20 @@
               </a:rPr>
               <a:t>Practical Exercise</a:t>
             </a:r>
-            <a:endParaRPr lang="en-US" sz="2700" dirty="0"/>
-          </a:p>
-        </p:txBody>
-      </p:sp>
-      <p:sp>
-        <p:nvSpPr>
-          <p:cNvPr id="10" name="Text 8"/>
-          <p:cNvSpPr/>
-          <p:nvPr/>
-        </p:nvSpPr>
-        <p:spPr>
-          <a:xfrm>
-            <a:off x="868680" y="1417320"/>
-            <a:ext cx="6675120" cy="4434840"/>
+            <a:endParaRPr lang="en-US" sz="3400" dirty="0"/>
+          </a:p>
+        </p:txBody>
+      </p:sp>
+      <p:sp>
+        <p:nvSpPr>
+          <p:cNvPr id="11" name="Text 9"/>
+          <p:cNvSpPr/>
+          <p:nvPr/>
+        </p:nvSpPr>
+        <p:spPr>
+          <a:xfrm>
+            <a:off x="868680" y="1508760"/>
+            <a:ext cx="6537960" cy="4160520"/>
           </a:xfrm>
           <a:prstGeom prst="rect">
             <a:avLst/>
@@ -6474,7 +6786,7 @@
           <a:lstStyle/>
           <a:p>
             <a:r>
-              <a:rPr lang="en-US" sz="1700" dirty="0">
+              <a:rPr lang="en-US" sz="2100" dirty="0">
                 <a:solidFill>
                   <a:srgbClr val="17364A"/>
                 </a:solidFill>
@@ -6484,11 +6796,11 @@
               </a:rPr>
               <a:t>Create a UAT plan for one AI-supported workflow.</a:t>
             </a:r>
-            <a:endParaRPr lang="en-US" sz="1700" dirty="0"/>
-          </a:p>
-          <a:p>
-            <a:r>
-              <a:rPr lang="en-US" sz="1700" dirty="0">
+            <a:endParaRPr lang="en-US" sz="2100" dirty="0"/>
+          </a:p>
+          <a:p>
+            <a:r>
+              <a:rPr lang="en-US" sz="2100" dirty="0">
                 <a:solidFill>
                   <a:srgbClr val="17364A"/>
                 </a:solidFill>
@@ -6496,15 +6808,15 @@
                 <a:ea typeface="Aptos" pitchFamily="34" charset="-122"/>
                 <a:cs typeface="Aptos" pitchFamily="34" charset="-120"/>
               </a:rPr>
-              <a:t>Include user roles, test scenarios, edge cases, acceptance criteria, tester instructions, issue log fields, severity.</a:t>
-            </a:r>
-            <a:endParaRPr lang="en-US" sz="1700" dirty="0"/>
-          </a:p>
-        </p:txBody>
-      </p:sp>
-      <p:sp>
-        <p:nvSpPr>
-          <p:cNvPr id="11" name="Shape 9"/>
+              <a:t>Include user roles, test scenarios, edge cases, acceptance criteria, tester instructions, issue log.</a:t>
+            </a:r>
+            <a:endParaRPr lang="en-US" sz="2100" dirty="0"/>
+          </a:p>
+        </p:txBody>
+      </p:sp>
+      <p:sp>
+        <p:nvSpPr>
+          <p:cNvPr id="12" name="Shape 10"/>
           <p:cNvSpPr/>
           <p:nvPr/>
         </p:nvSpPr>
@@ -6531,14 +6843,14 @@
       </p:sp>
       <p:sp>
         <p:nvSpPr>
-          <p:cNvPr id="12" name="Text 10"/>
+          <p:cNvPr id="13" name="Text 11"/>
           <p:cNvSpPr/>
           <p:nvPr/>
         </p:nvSpPr>
         <p:spPr>
           <a:xfrm>
             <a:off x="8074152" y="1563624"/>
-            <a:ext cx="2825496" cy="201168"/>
+            <a:ext cx="2825496" cy="256032"/>
           </a:xfrm>
           <a:prstGeom prst="rect">
             <a:avLst/>
@@ -6554,7 +6866,7 @@
               <a:buNone/>
             </a:pPr>
             <a:r>
-              <a:rPr lang="en-US" sz="950" b="1" dirty="0">
+              <a:rPr lang="en-US" sz="1300" b="1" dirty="0">
                 <a:solidFill>
                   <a:srgbClr val="0068B7"/>
                 </a:solidFill>
@@ -6564,20 +6876,20 @@
               </a:rPr>
               <a:t>Key idea</a:t>
             </a:r>
-            <a:endParaRPr lang="en-US" sz="950" dirty="0"/>
-          </a:p>
-        </p:txBody>
-      </p:sp>
-      <p:sp>
-        <p:nvSpPr>
-          <p:cNvPr id="13" name="Text 11"/>
-          <p:cNvSpPr/>
-          <p:nvPr/>
-        </p:nvSpPr>
-        <p:spPr>
-          <a:xfrm>
-            <a:off x="8074152" y="1856232"/>
-            <a:ext cx="2825496" cy="1261872"/>
+            <a:endParaRPr lang="en-US" sz="1300" dirty="0"/>
+          </a:p>
+        </p:txBody>
+      </p:sp>
+      <p:sp>
+        <p:nvSpPr>
+          <p:cNvPr id="14" name="Text 12"/>
+          <p:cNvSpPr/>
+          <p:nvPr/>
+        </p:nvSpPr>
+        <p:spPr>
+          <a:xfrm>
+            <a:off x="8074152" y="1920240"/>
+            <a:ext cx="2825496" cy="1188720"/>
           </a:xfrm>
           <a:prstGeom prst="rect">
             <a:avLst/>
@@ -6595,7 +6907,7 @@
               <a:buNone/>
             </a:pPr>
             <a:r>
-              <a:rPr lang="en-US" sz="1250" dirty="0">
+              <a:rPr lang="en-US" sz="1550" dirty="0">
                 <a:solidFill>
                   <a:srgbClr val="17364A"/>
                 </a:solidFill>
@@ -6605,13 +6917,13 @@
               </a:rPr>
               <a:t>Create a UAT plan for one AI-supported workflow.</a:t>
             </a:r>
-            <a:endParaRPr lang="en-US" sz="1250" dirty="0"/>
-          </a:p>
-        </p:txBody>
-      </p:sp>
-      <p:sp>
-        <p:nvSpPr>
-          <p:cNvPr id="14" name="Shape 12"/>
+            <a:endParaRPr lang="en-US" sz="1550" dirty="0"/>
+          </a:p>
+        </p:txBody>
+      </p:sp>
+      <p:sp>
+        <p:nvSpPr>
+          <p:cNvPr id="15" name="Shape 13"/>
           <p:cNvSpPr/>
           <p:nvPr/>
         </p:nvSpPr>
@@ -6638,14 +6950,14 @@
       </p:sp>
       <p:sp>
         <p:nvSpPr>
-          <p:cNvPr id="15" name="Text 13"/>
+          <p:cNvPr id="16" name="Text 14"/>
           <p:cNvSpPr/>
           <p:nvPr/>
         </p:nvSpPr>
         <p:spPr>
           <a:xfrm>
             <a:off x="8074152" y="3666744"/>
-            <a:ext cx="2825496" cy="201168"/>
+            <a:ext cx="2825496" cy="256032"/>
           </a:xfrm>
           <a:prstGeom prst="rect">
             <a:avLst/>
@@ -6661,7 +6973,7 @@
               <a:buNone/>
             </a:pPr>
             <a:r>
-              <a:rPr lang="en-US" sz="950" b="1" dirty="0">
+              <a:rPr lang="en-US" sz="1300" b="1" dirty="0">
                 <a:solidFill>
                   <a:srgbClr val="0068B7"/>
                 </a:solidFill>
@@ -6671,20 +6983,20 @@
               </a:rPr>
               <a:t>Use this for</a:t>
             </a:r>
-            <a:endParaRPr lang="en-US" sz="950" dirty="0"/>
-          </a:p>
-        </p:txBody>
-      </p:sp>
-      <p:sp>
-        <p:nvSpPr>
-          <p:cNvPr id="16" name="Text 14"/>
-          <p:cNvSpPr/>
-          <p:nvPr/>
-        </p:nvSpPr>
-        <p:spPr>
-          <a:xfrm>
-            <a:off x="8074152" y="3959352"/>
-            <a:ext cx="2825496" cy="1170432"/>
+            <a:endParaRPr lang="en-US" sz="1300" dirty="0"/>
+          </a:p>
+        </p:txBody>
+      </p:sp>
+      <p:sp>
+        <p:nvSpPr>
+          <p:cNvPr id="17" name="Text 15"/>
+          <p:cNvSpPr/>
+          <p:nvPr/>
+        </p:nvSpPr>
+        <p:spPr>
+          <a:xfrm>
+            <a:off x="8074152" y="4023360"/>
+            <a:ext cx="2825496" cy="1097280"/>
           </a:xfrm>
           <a:prstGeom prst="rect">
             <a:avLst/>
@@ -6702,7 +7014,7 @@
               <a:buNone/>
             </a:pPr>
             <a:r>
-              <a:rPr lang="en-US" sz="1250" dirty="0">
+              <a:rPr lang="en-US" sz="1550" dirty="0">
                 <a:solidFill>
                   <a:srgbClr val="17364A"/>
                 </a:solidFill>
@@ -6712,7 +7024,7 @@
               </a:rPr>
               <a:t>Connect the concept to public health decisions, safeguards, documentation, or implementation work.</a:t>
             </a:r>
-            <a:endParaRPr lang="en-US" sz="1250" dirty="0"/>
+            <a:endParaRPr lang="en-US" sz="1550" dirty="0"/>
           </a:p>
         </p:txBody>
       </p:sp>
@@ -6909,7 +7221,7 @@
                 <a:ea typeface="Aptos" pitchFamily="34" charset="-122"/>
                 <a:cs typeface="Aptos" pitchFamily="34" charset="-120"/>
               </a:rPr>
-              <a:t>© Paula Soper</a:t>
+              <a:t>Â© Paula Soper</a:t>
             </a:r>
             <a:endParaRPr lang="en-US" sz="800" dirty="0"/>
           </a:p>
@@ -6917,7 +7229,46 @@
       </p:sp>
       <p:sp>
         <p:nvSpPr>
-          <p:cNvPr id="7" name="Shape 5"/>
+          <p:cNvPr id="7" name="Text 5"/>
+          <p:cNvSpPr/>
+          <p:nvPr/>
+        </p:nvSpPr>
+        <p:spPr>
+          <a:xfrm>
+            <a:off x="11137392" y="6510528"/>
+            <a:ext cx="411480" cy="201168"/>
+          </a:xfrm>
+          <a:prstGeom prst="rect">
+            <a:avLst/>
+          </a:prstGeom>
+          <a:noFill/>
+          <a:ln/>
+        </p:spPr>
+        <p:txBody>
+          <a:bodyPr wrap="square" lIns="0" tIns="0" rIns="0" bIns="0" rtlCol="0" anchor="ctr"/>
+          <a:lstStyle/>
+          <a:p>
+            <a:pPr algn="r" indent="0" marL="0">
+              <a:buNone/>
+            </a:pPr>
+            <a:r>
+              <a:rPr lang="en-US" sz="900" dirty="0">
+                <a:solidFill>
+                  <a:srgbClr val="5F7181"/>
+                </a:solidFill>
+                <a:latin typeface="Aptos" pitchFamily="34" charset="0"/>
+                <a:ea typeface="Aptos" pitchFamily="34" charset="-122"/>
+                <a:cs typeface="Aptos" pitchFamily="34" charset="-120"/>
+              </a:rPr>
+              <a:t>17</a:t>
+            </a:r>
+            <a:endParaRPr lang="en-US" sz="900" dirty="0"/>
+          </a:p>
+        </p:txBody>
+      </p:sp>
+      <p:sp>
+        <p:nvSpPr>
+          <p:cNvPr id="8" name="Shape 6"/>
           <p:cNvSpPr/>
           <p:nvPr/>
         </p:nvSpPr>
@@ -6942,7 +7293,7 @@
       </p:sp>
       <p:sp>
         <p:nvSpPr>
-          <p:cNvPr id="8" name="Text 6"/>
+          <p:cNvPr id="9" name="Text 7"/>
           <p:cNvSpPr/>
           <p:nvPr/>
         </p:nvSpPr>
@@ -6981,14 +7332,14 @@
       </p:sp>
       <p:sp>
         <p:nvSpPr>
-          <p:cNvPr id="9" name="Text 7"/>
+          <p:cNvPr id="10" name="Text 8"/>
           <p:cNvSpPr/>
           <p:nvPr/>
         </p:nvSpPr>
         <p:spPr>
           <a:xfrm>
             <a:off x="640080" y="621792"/>
-            <a:ext cx="10881360" cy="566928"/>
+            <a:ext cx="10881360" cy="713232"/>
           </a:xfrm>
           <a:prstGeom prst="rect">
             <a:avLst/>
@@ -7006,7 +7357,7 @@
               <a:buNone/>
             </a:pPr>
             <a:r>
-              <a:rPr lang="en-US" sz="2700" b="1" dirty="0">
+              <a:rPr lang="en-US" sz="3400" b="1" dirty="0">
                 <a:solidFill>
                   <a:srgbClr val="003A63"/>
                 </a:solidFill>
@@ -7016,20 +7367,20 @@
               </a:rPr>
               <a:t>Expected Artifact or Evidence</a:t>
             </a:r>
-            <a:endParaRPr lang="en-US" sz="2700" dirty="0"/>
-          </a:p>
-        </p:txBody>
-      </p:sp>
-      <p:sp>
-        <p:nvSpPr>
-          <p:cNvPr id="10" name="Text 8"/>
-          <p:cNvSpPr/>
-          <p:nvPr/>
-        </p:nvSpPr>
-        <p:spPr>
-          <a:xfrm>
-            <a:off x="868680" y="1417320"/>
-            <a:ext cx="6675120" cy="4434840"/>
+            <a:endParaRPr lang="en-US" sz="3400" dirty="0"/>
+          </a:p>
+        </p:txBody>
+      </p:sp>
+      <p:sp>
+        <p:nvSpPr>
+          <p:cNvPr id="11" name="Text 9"/>
+          <p:cNvSpPr/>
+          <p:nvPr/>
+        </p:nvSpPr>
+        <p:spPr>
+          <a:xfrm>
+            <a:off x="868680" y="1508760"/>
+            <a:ext cx="6537960" cy="4160520"/>
           </a:xfrm>
           <a:prstGeom prst="rect">
             <a:avLst/>
@@ -7044,7 +7395,7 @@
           <a:lstStyle/>
           <a:p>
             <a:r>
-              <a:rPr lang="en-US" sz="1700" dirty="0">
+              <a:rPr lang="en-US" sz="2100" dirty="0">
                 <a:solidFill>
                   <a:srgbClr val="17364A"/>
                 </a:solidFill>
@@ -7054,11 +7405,11 @@
               </a:rPr>
               <a:t>UAT plan</a:t>
             </a:r>
-            <a:endParaRPr lang="en-US" sz="1700" dirty="0"/>
-          </a:p>
-          <a:p>
-            <a:r>
-              <a:rPr lang="en-US" sz="1700" dirty="0">
+            <a:endParaRPr lang="en-US" sz="2100" dirty="0"/>
+          </a:p>
+          <a:p>
+            <a:r>
+              <a:rPr lang="en-US" sz="2100" dirty="0">
                 <a:solidFill>
                   <a:srgbClr val="17364A"/>
                 </a:solidFill>
@@ -7068,11 +7419,11 @@
               </a:rPr>
               <a:t>Role-based test scripts</a:t>
             </a:r>
-            <a:endParaRPr lang="en-US" sz="1700" dirty="0"/>
-          </a:p>
-          <a:p>
-            <a:r>
-              <a:rPr lang="en-US" sz="1700" dirty="0">
+            <a:endParaRPr lang="en-US" sz="2100" dirty="0"/>
+          </a:p>
+          <a:p>
+            <a:r>
+              <a:rPr lang="en-US" sz="2100" dirty="0">
                 <a:solidFill>
                   <a:srgbClr val="17364A"/>
                 </a:solidFill>
@@ -7082,13 +7433,13 @@
               </a:rPr>
               <a:t>Acceptance criteria</a:t>
             </a:r>
-            <a:endParaRPr lang="en-US" sz="1700" dirty="0"/>
-          </a:p>
-        </p:txBody>
-      </p:sp>
-      <p:sp>
-        <p:nvSpPr>
-          <p:cNvPr id="11" name="Shape 9"/>
+            <a:endParaRPr lang="en-US" sz="2100" dirty="0"/>
+          </a:p>
+        </p:txBody>
+      </p:sp>
+      <p:sp>
+        <p:nvSpPr>
+          <p:cNvPr id="12" name="Shape 10"/>
           <p:cNvSpPr/>
           <p:nvPr/>
         </p:nvSpPr>
@@ -7115,14 +7466,14 @@
       </p:sp>
       <p:sp>
         <p:nvSpPr>
-          <p:cNvPr id="12" name="Text 10"/>
+          <p:cNvPr id="13" name="Text 11"/>
           <p:cNvSpPr/>
           <p:nvPr/>
         </p:nvSpPr>
         <p:spPr>
           <a:xfrm>
             <a:off x="8074152" y="1563624"/>
-            <a:ext cx="2825496" cy="201168"/>
+            <a:ext cx="2825496" cy="256032"/>
           </a:xfrm>
           <a:prstGeom prst="rect">
             <a:avLst/>
@@ -7138,7 +7489,7 @@
               <a:buNone/>
             </a:pPr>
             <a:r>
-              <a:rPr lang="en-US" sz="950" b="1" dirty="0">
+              <a:rPr lang="en-US" sz="1300" b="1" dirty="0">
                 <a:solidFill>
                   <a:srgbClr val="0068B7"/>
                 </a:solidFill>
@@ -7148,20 +7499,20 @@
               </a:rPr>
               <a:t>Key idea</a:t>
             </a:r>
-            <a:endParaRPr lang="en-US" sz="950" dirty="0"/>
-          </a:p>
-        </p:txBody>
-      </p:sp>
-      <p:sp>
-        <p:nvSpPr>
-          <p:cNvPr id="13" name="Text 11"/>
-          <p:cNvSpPr/>
-          <p:nvPr/>
-        </p:nvSpPr>
-        <p:spPr>
-          <a:xfrm>
-            <a:off x="8074152" y="1856232"/>
-            <a:ext cx="2825496" cy="1261872"/>
+            <a:endParaRPr lang="en-US" sz="1300" dirty="0"/>
+          </a:p>
+        </p:txBody>
+      </p:sp>
+      <p:sp>
+        <p:nvSpPr>
+          <p:cNvPr id="14" name="Text 12"/>
+          <p:cNvSpPr/>
+          <p:nvPr/>
+        </p:nvSpPr>
+        <p:spPr>
+          <a:xfrm>
+            <a:off x="8074152" y="1920240"/>
+            <a:ext cx="2825496" cy="1188720"/>
           </a:xfrm>
           <a:prstGeom prst="rect">
             <a:avLst/>
@@ -7179,7 +7530,7 @@
               <a:buNone/>
             </a:pPr>
             <a:r>
-              <a:rPr lang="en-US" sz="1250" dirty="0">
+              <a:rPr lang="en-US" sz="1550" dirty="0">
                 <a:solidFill>
                   <a:srgbClr val="17364A"/>
                 </a:solidFill>
@@ -7189,13 +7540,13 @@
               </a:rPr>
               <a:t>UAT plan</a:t>
             </a:r>
-            <a:endParaRPr lang="en-US" sz="1250" dirty="0"/>
-          </a:p>
-        </p:txBody>
-      </p:sp>
-      <p:sp>
-        <p:nvSpPr>
-          <p:cNvPr id="14" name="Shape 12"/>
+            <a:endParaRPr lang="en-US" sz="1550" dirty="0"/>
+          </a:p>
+        </p:txBody>
+      </p:sp>
+      <p:sp>
+        <p:nvSpPr>
+          <p:cNvPr id="15" name="Shape 13"/>
           <p:cNvSpPr/>
           <p:nvPr/>
         </p:nvSpPr>
@@ -7222,14 +7573,14 @@
       </p:sp>
       <p:sp>
         <p:nvSpPr>
-          <p:cNvPr id="15" name="Text 13"/>
+          <p:cNvPr id="16" name="Text 14"/>
           <p:cNvSpPr/>
           <p:nvPr/>
         </p:nvSpPr>
         <p:spPr>
           <a:xfrm>
             <a:off x="8074152" y="3666744"/>
-            <a:ext cx="2825496" cy="201168"/>
+            <a:ext cx="2825496" cy="256032"/>
           </a:xfrm>
           <a:prstGeom prst="rect">
             <a:avLst/>
@@ -7245,7 +7596,7 @@
               <a:buNone/>
             </a:pPr>
             <a:r>
-              <a:rPr lang="en-US" sz="950" b="1" dirty="0">
+              <a:rPr lang="en-US" sz="1300" b="1" dirty="0">
                 <a:solidFill>
                   <a:srgbClr val="0068B7"/>
                 </a:solidFill>
@@ -7255,20 +7606,20 @@
               </a:rPr>
               <a:t>Use this for</a:t>
             </a:r>
-            <a:endParaRPr lang="en-US" sz="950" dirty="0"/>
-          </a:p>
-        </p:txBody>
-      </p:sp>
-      <p:sp>
-        <p:nvSpPr>
-          <p:cNvPr id="16" name="Text 14"/>
-          <p:cNvSpPr/>
-          <p:nvPr/>
-        </p:nvSpPr>
-        <p:spPr>
-          <a:xfrm>
-            <a:off x="8074152" y="3959352"/>
-            <a:ext cx="2825496" cy="1170432"/>
+            <a:endParaRPr lang="en-US" sz="1300" dirty="0"/>
+          </a:p>
+        </p:txBody>
+      </p:sp>
+      <p:sp>
+        <p:nvSpPr>
+          <p:cNvPr id="17" name="Text 15"/>
+          <p:cNvSpPr/>
+          <p:nvPr/>
+        </p:nvSpPr>
+        <p:spPr>
+          <a:xfrm>
+            <a:off x="8074152" y="4023360"/>
+            <a:ext cx="2825496" cy="1097280"/>
           </a:xfrm>
           <a:prstGeom prst="rect">
             <a:avLst/>
@@ -7286,7 +7637,7 @@
               <a:buNone/>
             </a:pPr>
             <a:r>
-              <a:rPr lang="en-US" sz="1250" dirty="0">
+              <a:rPr lang="en-US" sz="1550" dirty="0">
                 <a:solidFill>
                   <a:srgbClr val="17364A"/>
                 </a:solidFill>
@@ -7296,7 +7647,7 @@
               </a:rPr>
               <a:t>Connect the concept to public health decisions, safeguards, documentation, or implementation work.</a:t>
             </a:r>
-            <a:endParaRPr lang="en-US" sz="1250" dirty="0"/>
+            <a:endParaRPr lang="en-US" sz="1550" dirty="0"/>
           </a:p>
         </p:txBody>
       </p:sp>
@@ -7493,7 +7844,7 @@
                 <a:ea typeface="Aptos" pitchFamily="34" charset="-122"/>
                 <a:cs typeface="Aptos" pitchFamily="34" charset="-120"/>
               </a:rPr>
-              <a:t>© Paula Soper</a:t>
+              <a:t>Â© Paula Soper</a:t>
             </a:r>
             <a:endParaRPr lang="en-US" sz="800" dirty="0"/>
           </a:p>
@@ -7507,8 +7858,47 @@
         </p:nvSpPr>
         <p:spPr>
           <a:xfrm>
+            <a:off x="11137392" y="6510528"/>
+            <a:ext cx="411480" cy="201168"/>
+          </a:xfrm>
+          <a:prstGeom prst="rect">
+            <a:avLst/>
+          </a:prstGeom>
+          <a:noFill/>
+          <a:ln/>
+        </p:spPr>
+        <p:txBody>
+          <a:bodyPr wrap="square" lIns="0" tIns="0" rIns="0" bIns="0" rtlCol="0" anchor="ctr"/>
+          <a:lstStyle/>
+          <a:p>
+            <a:pPr algn="r" indent="0" marL="0">
+              <a:buNone/>
+            </a:pPr>
+            <a:r>
+              <a:rPr lang="en-US" sz="900" dirty="0">
+                <a:solidFill>
+                  <a:srgbClr val="5F7181"/>
+                </a:solidFill>
+                <a:latin typeface="Aptos" pitchFamily="34" charset="0"/>
+                <a:ea typeface="Aptos" pitchFamily="34" charset="-122"/>
+                <a:cs typeface="Aptos" pitchFamily="34" charset="-120"/>
+              </a:rPr>
+              <a:t>18</a:t>
+            </a:r>
+            <a:endParaRPr lang="en-US" sz="900" dirty="0"/>
+          </a:p>
+        </p:txBody>
+      </p:sp>
+      <p:sp>
+        <p:nvSpPr>
+          <p:cNvPr id="8" name="Text 6"/>
+          <p:cNvSpPr/>
+          <p:nvPr/>
+        </p:nvSpPr>
+        <p:spPr>
+          <a:xfrm>
             <a:off x="640080" y="658368"/>
-            <a:ext cx="10881360" cy="566928"/>
+            <a:ext cx="10881360" cy="713232"/>
           </a:xfrm>
           <a:prstGeom prst="rect">
             <a:avLst/>
@@ -7526,7 +7916,7 @@
               <a:buNone/>
             </a:pPr>
             <a:r>
-              <a:rPr lang="en-US" sz="2700" b="1" dirty="0">
+              <a:rPr lang="en-US" sz="3400" b="1" dirty="0">
                 <a:solidFill>
                   <a:srgbClr val="003A63"/>
                 </a:solidFill>
@@ -7536,20 +7926,20 @@
               </a:rPr>
               <a:t>Expected Artifact or Evidence Continued</a:t>
             </a:r>
-            <a:endParaRPr lang="en-US" sz="2700" dirty="0"/>
-          </a:p>
-        </p:txBody>
-      </p:sp>
-      <p:sp>
-        <p:nvSpPr>
-          <p:cNvPr id="8" name="Text 6"/>
-          <p:cNvSpPr/>
-          <p:nvPr/>
-        </p:nvSpPr>
-        <p:spPr>
-          <a:xfrm>
-            <a:off x="868680" y="1417320"/>
-            <a:ext cx="6675120" cy="4434840"/>
+            <a:endParaRPr lang="en-US" sz="3400" dirty="0"/>
+          </a:p>
+        </p:txBody>
+      </p:sp>
+      <p:sp>
+        <p:nvSpPr>
+          <p:cNvPr id="9" name="Text 7"/>
+          <p:cNvSpPr/>
+          <p:nvPr/>
+        </p:nvSpPr>
+        <p:spPr>
+          <a:xfrm>
+            <a:off x="868680" y="1508760"/>
+            <a:ext cx="6537960" cy="4160520"/>
           </a:xfrm>
           <a:prstGeom prst="rect">
             <a:avLst/>
@@ -7564,7 +7954,7 @@
           <a:lstStyle/>
           <a:p>
             <a:r>
-              <a:rPr lang="en-US" sz="1700" dirty="0">
+              <a:rPr lang="en-US" sz="2100" dirty="0">
                 <a:solidFill>
                   <a:srgbClr val="17364A"/>
                 </a:solidFill>
@@ -7574,11 +7964,11 @@
               </a:rPr>
               <a:t>Issue log template</a:t>
             </a:r>
-            <a:endParaRPr lang="en-US" sz="1700" dirty="0"/>
-          </a:p>
-          <a:p>
-            <a:r>
-              <a:rPr lang="en-US" sz="1700" dirty="0">
+            <a:endParaRPr lang="en-US" sz="2100" dirty="0"/>
+          </a:p>
+          <a:p>
+            <a:r>
+              <a:rPr lang="en-US" sz="2100" dirty="0">
                 <a:solidFill>
                   <a:srgbClr val="17364A"/>
                 </a:solidFill>
@@ -7588,13 +7978,13 @@
               </a:rPr>
               <a:t>Sign-off recommendation</a:t>
             </a:r>
-            <a:endParaRPr lang="en-US" sz="1700" dirty="0"/>
-          </a:p>
-        </p:txBody>
-      </p:sp>
-      <p:sp>
-        <p:nvSpPr>
-          <p:cNvPr id="9" name="Shape 7"/>
+            <a:endParaRPr lang="en-US" sz="2100" dirty="0"/>
+          </a:p>
+        </p:txBody>
+      </p:sp>
+      <p:sp>
+        <p:nvSpPr>
+          <p:cNvPr id="10" name="Shape 8"/>
           <p:cNvSpPr/>
           <p:nvPr/>
         </p:nvSpPr>
@@ -7621,14 +8011,14 @@
       </p:sp>
       <p:sp>
         <p:nvSpPr>
-          <p:cNvPr id="10" name="Text 8"/>
+          <p:cNvPr id="11" name="Text 9"/>
           <p:cNvSpPr/>
           <p:nvPr/>
         </p:nvSpPr>
         <p:spPr>
           <a:xfrm>
             <a:off x="8074152" y="1563624"/>
-            <a:ext cx="2825496" cy="201168"/>
+            <a:ext cx="2825496" cy="256032"/>
           </a:xfrm>
           <a:prstGeom prst="rect">
             <a:avLst/>
@@ -7644,7 +8034,7 @@
               <a:buNone/>
             </a:pPr>
             <a:r>
-              <a:rPr lang="en-US" sz="950" b="1" dirty="0">
+              <a:rPr lang="en-US" sz="1300" b="1" dirty="0">
                 <a:solidFill>
                   <a:srgbClr val="0068B7"/>
                 </a:solidFill>
@@ -7654,20 +8044,20 @@
               </a:rPr>
               <a:t>Key idea</a:t>
             </a:r>
-            <a:endParaRPr lang="en-US" sz="950" dirty="0"/>
-          </a:p>
-        </p:txBody>
-      </p:sp>
-      <p:sp>
-        <p:nvSpPr>
-          <p:cNvPr id="11" name="Text 9"/>
-          <p:cNvSpPr/>
-          <p:nvPr/>
-        </p:nvSpPr>
-        <p:spPr>
-          <a:xfrm>
-            <a:off x="8074152" y="1856232"/>
-            <a:ext cx="2825496" cy="1261872"/>
+            <a:endParaRPr lang="en-US" sz="1300" dirty="0"/>
+          </a:p>
+        </p:txBody>
+      </p:sp>
+      <p:sp>
+        <p:nvSpPr>
+          <p:cNvPr id="12" name="Text 10"/>
+          <p:cNvSpPr/>
+          <p:nvPr/>
+        </p:nvSpPr>
+        <p:spPr>
+          <a:xfrm>
+            <a:off x="8074152" y="1920240"/>
+            <a:ext cx="2825496" cy="1188720"/>
           </a:xfrm>
           <a:prstGeom prst="rect">
             <a:avLst/>
@@ -7685,7 +8075,7 @@
               <a:buNone/>
             </a:pPr>
             <a:r>
-              <a:rPr lang="en-US" sz="1250" dirty="0">
+              <a:rPr lang="en-US" sz="1550" dirty="0">
                 <a:solidFill>
                   <a:srgbClr val="17364A"/>
                 </a:solidFill>
@@ -7695,13 +8085,13 @@
               </a:rPr>
               <a:t>Issue log template</a:t>
             </a:r>
-            <a:endParaRPr lang="en-US" sz="1250" dirty="0"/>
-          </a:p>
-        </p:txBody>
-      </p:sp>
-      <p:sp>
-        <p:nvSpPr>
-          <p:cNvPr id="12" name="Shape 10"/>
+            <a:endParaRPr lang="en-US" sz="1550" dirty="0"/>
+          </a:p>
+        </p:txBody>
+      </p:sp>
+      <p:sp>
+        <p:nvSpPr>
+          <p:cNvPr id="13" name="Shape 11"/>
           <p:cNvSpPr/>
           <p:nvPr/>
         </p:nvSpPr>
@@ -7728,14 +8118,14 @@
       </p:sp>
       <p:sp>
         <p:nvSpPr>
-          <p:cNvPr id="13" name="Text 11"/>
+          <p:cNvPr id="14" name="Text 12"/>
           <p:cNvSpPr/>
           <p:nvPr/>
         </p:nvSpPr>
         <p:spPr>
           <a:xfrm>
             <a:off x="8074152" y="3666744"/>
-            <a:ext cx="2825496" cy="201168"/>
+            <a:ext cx="2825496" cy="256032"/>
           </a:xfrm>
           <a:prstGeom prst="rect">
             <a:avLst/>
@@ -7751,7 +8141,7 @@
               <a:buNone/>
             </a:pPr>
             <a:r>
-              <a:rPr lang="en-US" sz="950" b="1" dirty="0">
+              <a:rPr lang="en-US" sz="1300" b="1" dirty="0">
                 <a:solidFill>
                   <a:srgbClr val="0068B7"/>
                 </a:solidFill>
@@ -7761,20 +8151,20 @@
               </a:rPr>
               <a:t>Use this for</a:t>
             </a:r>
-            <a:endParaRPr lang="en-US" sz="950" dirty="0"/>
-          </a:p>
-        </p:txBody>
-      </p:sp>
-      <p:sp>
-        <p:nvSpPr>
-          <p:cNvPr id="14" name="Text 12"/>
-          <p:cNvSpPr/>
-          <p:nvPr/>
-        </p:nvSpPr>
-        <p:spPr>
-          <a:xfrm>
-            <a:off x="8074152" y="3959352"/>
-            <a:ext cx="2825496" cy="1170432"/>
+            <a:endParaRPr lang="en-US" sz="1300" dirty="0"/>
+          </a:p>
+        </p:txBody>
+      </p:sp>
+      <p:sp>
+        <p:nvSpPr>
+          <p:cNvPr id="15" name="Text 13"/>
+          <p:cNvSpPr/>
+          <p:nvPr/>
+        </p:nvSpPr>
+        <p:spPr>
+          <a:xfrm>
+            <a:off x="8074152" y="4023360"/>
+            <a:ext cx="2825496" cy="1097280"/>
           </a:xfrm>
           <a:prstGeom prst="rect">
             <a:avLst/>
@@ -7792,7 +8182,7 @@
               <a:buNone/>
             </a:pPr>
             <a:r>
-              <a:rPr lang="en-US" sz="1250" dirty="0">
+              <a:rPr lang="en-US" sz="1550" dirty="0">
                 <a:solidFill>
                   <a:srgbClr val="17364A"/>
                 </a:solidFill>
@@ -7802,7 +8192,7 @@
               </a:rPr>
               <a:t>Connect the concept to public health decisions, safeguards, documentation, or implementation work.</a:t>
             </a:r>
-            <a:endParaRPr lang="en-US" sz="1250" dirty="0"/>
+            <a:endParaRPr lang="en-US" sz="1550" dirty="0"/>
           </a:p>
         </p:txBody>
       </p:sp>
@@ -7999,7 +8389,7 @@
                 <a:ea typeface="Aptos" pitchFamily="34" charset="-122"/>
                 <a:cs typeface="Aptos" pitchFamily="34" charset="-120"/>
               </a:rPr>
-              <a:t>© Paula Soper</a:t>
+              <a:t>Â© Paula Soper</a:t>
             </a:r>
             <a:endParaRPr lang="en-US" sz="800" dirty="0"/>
           </a:p>
@@ -8007,7 +8397,46 @@
       </p:sp>
       <p:sp>
         <p:nvSpPr>
-          <p:cNvPr id="7" name="Shape 5"/>
+          <p:cNvPr id="7" name="Text 5"/>
+          <p:cNvSpPr/>
+          <p:nvPr/>
+        </p:nvSpPr>
+        <p:spPr>
+          <a:xfrm>
+            <a:off x="11137392" y="6510528"/>
+            <a:ext cx="411480" cy="201168"/>
+          </a:xfrm>
+          <a:prstGeom prst="rect">
+            <a:avLst/>
+          </a:prstGeom>
+          <a:noFill/>
+          <a:ln/>
+        </p:spPr>
+        <p:txBody>
+          <a:bodyPr wrap="square" lIns="0" tIns="0" rIns="0" bIns="0" rtlCol="0" anchor="ctr"/>
+          <a:lstStyle/>
+          <a:p>
+            <a:pPr algn="r" indent="0" marL="0">
+              <a:buNone/>
+            </a:pPr>
+            <a:r>
+              <a:rPr lang="en-US" sz="900" dirty="0">
+                <a:solidFill>
+                  <a:srgbClr val="5F7181"/>
+                </a:solidFill>
+                <a:latin typeface="Aptos" pitchFamily="34" charset="0"/>
+                <a:ea typeface="Aptos" pitchFamily="34" charset="-122"/>
+                <a:cs typeface="Aptos" pitchFamily="34" charset="-120"/>
+              </a:rPr>
+              <a:t>19</a:t>
+            </a:r>
+            <a:endParaRPr lang="en-US" sz="900" dirty="0"/>
+          </a:p>
+        </p:txBody>
+      </p:sp>
+      <p:sp>
+        <p:nvSpPr>
+          <p:cNvPr id="8" name="Shape 6"/>
           <p:cNvSpPr/>
           <p:nvPr/>
         </p:nvSpPr>
@@ -8032,7 +8461,7 @@
       </p:sp>
       <p:sp>
         <p:nvSpPr>
-          <p:cNvPr id="8" name="Text 6"/>
+          <p:cNvPr id="9" name="Text 7"/>
           <p:cNvSpPr/>
           <p:nvPr/>
         </p:nvSpPr>
@@ -8071,14 +8500,14 @@
       </p:sp>
       <p:sp>
         <p:nvSpPr>
-          <p:cNvPr id="9" name="Text 7"/>
+          <p:cNvPr id="10" name="Text 8"/>
           <p:cNvSpPr/>
           <p:nvPr/>
         </p:nvSpPr>
         <p:spPr>
           <a:xfrm>
             <a:off x="640080" y="621792"/>
-            <a:ext cx="10881360" cy="566928"/>
+            <a:ext cx="10881360" cy="713232"/>
           </a:xfrm>
           <a:prstGeom prst="rect">
             <a:avLst/>
@@ -8096,7 +8525,7 @@
               <a:buNone/>
             </a:pPr>
             <a:r>
-              <a:rPr lang="en-US" sz="2700" b="1" dirty="0">
+              <a:rPr lang="en-US" sz="3400" b="1" dirty="0">
                 <a:solidFill>
                   <a:srgbClr val="003A63"/>
                 </a:solidFill>
@@ -8106,20 +8535,20 @@
               </a:rPr>
               <a:t>Expected Assignment</a:t>
             </a:r>
-            <a:endParaRPr lang="en-US" sz="2700" dirty="0"/>
-          </a:p>
-        </p:txBody>
-      </p:sp>
-      <p:sp>
-        <p:nvSpPr>
-          <p:cNvPr id="10" name="Text 8"/>
-          <p:cNvSpPr/>
-          <p:nvPr/>
-        </p:nvSpPr>
-        <p:spPr>
-          <a:xfrm>
-            <a:off x="868680" y="1417320"/>
-            <a:ext cx="6675120" cy="4434840"/>
+            <a:endParaRPr lang="en-US" sz="3400" dirty="0"/>
+          </a:p>
+        </p:txBody>
+      </p:sp>
+      <p:sp>
+        <p:nvSpPr>
+          <p:cNvPr id="11" name="Text 9"/>
+          <p:cNvSpPr/>
+          <p:nvPr/>
+        </p:nvSpPr>
+        <p:spPr>
+          <a:xfrm>
+            <a:off x="868680" y="1508760"/>
+            <a:ext cx="6537960" cy="4160520"/>
           </a:xfrm>
           <a:prstGeom prst="rect">
             <a:avLst/>
@@ -8134,7 +8563,7 @@
           <a:lstStyle/>
           <a:p>
             <a:r>
-              <a:rPr lang="en-US" sz="1700" dirty="0">
+              <a:rPr lang="en-US" sz="2100" dirty="0">
                 <a:solidFill>
                   <a:srgbClr val="17364A"/>
                 </a:solidFill>
@@ -8144,11 +8573,11 @@
               </a:rPr>
               <a:t>UAT plan</a:t>
             </a:r>
-            <a:endParaRPr lang="en-US" sz="1700" dirty="0"/>
-          </a:p>
-          <a:p>
-            <a:r>
-              <a:rPr lang="en-US" sz="1700" dirty="0">
+            <a:endParaRPr lang="en-US" sz="2100" dirty="0"/>
+          </a:p>
+          <a:p>
+            <a:r>
+              <a:rPr lang="en-US" sz="2100" dirty="0">
                 <a:solidFill>
                   <a:srgbClr val="17364A"/>
                 </a:solidFill>
@@ -8158,11 +8587,11 @@
               </a:rPr>
               <a:t>Role-based test scripts</a:t>
             </a:r>
-            <a:endParaRPr lang="en-US" sz="1700" dirty="0"/>
-          </a:p>
-          <a:p>
-            <a:r>
-              <a:rPr lang="en-US" sz="1700" dirty="0">
+            <a:endParaRPr lang="en-US" sz="2100" dirty="0"/>
+          </a:p>
+          <a:p>
+            <a:r>
+              <a:rPr lang="en-US" sz="2100" dirty="0">
                 <a:solidFill>
                   <a:srgbClr val="17364A"/>
                 </a:solidFill>
@@ -8172,27 +8601,13 @@
               </a:rPr>
               <a:t>Acceptance criteria</a:t>
             </a:r>
-            <a:endParaRPr lang="en-US" sz="1700" dirty="0"/>
-          </a:p>
-          <a:p>
-            <a:r>
-              <a:rPr lang="en-US" sz="1700" dirty="0">
-                <a:solidFill>
-                  <a:srgbClr val="17364A"/>
-                </a:solidFill>
-                <a:latin typeface="Aptos" pitchFamily="34" charset="0"/>
-                <a:ea typeface="Aptos" pitchFamily="34" charset="-122"/>
-                <a:cs typeface="Aptos" pitchFamily="34" charset="-120"/>
-              </a:rPr>
-              <a:t>Issue log template</a:t>
-            </a:r>
-            <a:endParaRPr lang="en-US" sz="1700" dirty="0"/>
-          </a:p>
-        </p:txBody>
-      </p:sp>
-      <p:sp>
-        <p:nvSpPr>
-          <p:cNvPr id="11" name="Shape 9"/>
+            <a:endParaRPr lang="en-US" sz="2100" dirty="0"/>
+          </a:p>
+        </p:txBody>
+      </p:sp>
+      <p:sp>
+        <p:nvSpPr>
+          <p:cNvPr id="12" name="Shape 10"/>
           <p:cNvSpPr/>
           <p:nvPr/>
         </p:nvSpPr>
@@ -8219,14 +8634,14 @@
       </p:sp>
       <p:sp>
         <p:nvSpPr>
-          <p:cNvPr id="12" name="Text 10"/>
+          <p:cNvPr id="13" name="Text 11"/>
           <p:cNvSpPr/>
           <p:nvPr/>
         </p:nvSpPr>
         <p:spPr>
           <a:xfrm>
             <a:off x="8074152" y="1563624"/>
-            <a:ext cx="2825496" cy="201168"/>
+            <a:ext cx="2825496" cy="256032"/>
           </a:xfrm>
           <a:prstGeom prst="rect">
             <a:avLst/>
@@ -8242,7 +8657,7 @@
               <a:buNone/>
             </a:pPr>
             <a:r>
-              <a:rPr lang="en-US" sz="950" b="1" dirty="0">
+              <a:rPr lang="en-US" sz="1300" b="1" dirty="0">
                 <a:solidFill>
                   <a:srgbClr val="0068B7"/>
                 </a:solidFill>
@@ -8252,20 +8667,20 @@
               </a:rPr>
               <a:t>Key idea</a:t>
             </a:r>
-            <a:endParaRPr lang="en-US" sz="950" dirty="0"/>
-          </a:p>
-        </p:txBody>
-      </p:sp>
-      <p:sp>
-        <p:nvSpPr>
-          <p:cNvPr id="13" name="Text 11"/>
-          <p:cNvSpPr/>
-          <p:nvPr/>
-        </p:nvSpPr>
-        <p:spPr>
-          <a:xfrm>
-            <a:off x="8074152" y="1856232"/>
-            <a:ext cx="2825496" cy="1261872"/>
+            <a:endParaRPr lang="en-US" sz="1300" dirty="0"/>
+          </a:p>
+        </p:txBody>
+      </p:sp>
+      <p:sp>
+        <p:nvSpPr>
+          <p:cNvPr id="14" name="Text 12"/>
+          <p:cNvSpPr/>
+          <p:nvPr/>
+        </p:nvSpPr>
+        <p:spPr>
+          <a:xfrm>
+            <a:off x="8074152" y="1920240"/>
+            <a:ext cx="2825496" cy="1188720"/>
           </a:xfrm>
           <a:prstGeom prst="rect">
             <a:avLst/>
@@ -8283,7 +8698,7 @@
               <a:buNone/>
             </a:pPr>
             <a:r>
-              <a:rPr lang="en-US" sz="1250" dirty="0">
+              <a:rPr lang="en-US" sz="1550" dirty="0">
                 <a:solidFill>
                   <a:srgbClr val="17364A"/>
                 </a:solidFill>
@@ -8293,13 +8708,13 @@
               </a:rPr>
               <a:t>UAT plan</a:t>
             </a:r>
-            <a:endParaRPr lang="en-US" sz="1250" dirty="0"/>
-          </a:p>
-        </p:txBody>
-      </p:sp>
-      <p:sp>
-        <p:nvSpPr>
-          <p:cNvPr id="14" name="Shape 12"/>
+            <a:endParaRPr lang="en-US" sz="1550" dirty="0"/>
+          </a:p>
+        </p:txBody>
+      </p:sp>
+      <p:sp>
+        <p:nvSpPr>
+          <p:cNvPr id="15" name="Shape 13"/>
           <p:cNvSpPr/>
           <p:nvPr/>
         </p:nvSpPr>
@@ -8326,14 +8741,14 @@
       </p:sp>
       <p:sp>
         <p:nvSpPr>
-          <p:cNvPr id="15" name="Text 13"/>
+          <p:cNvPr id="16" name="Text 14"/>
           <p:cNvSpPr/>
           <p:nvPr/>
         </p:nvSpPr>
         <p:spPr>
           <a:xfrm>
             <a:off x="8074152" y="3666744"/>
-            <a:ext cx="2825496" cy="201168"/>
+            <a:ext cx="2825496" cy="256032"/>
           </a:xfrm>
           <a:prstGeom prst="rect">
             <a:avLst/>
@@ -8349,7 +8764,7 @@
               <a:buNone/>
             </a:pPr>
             <a:r>
-              <a:rPr lang="en-US" sz="950" b="1" dirty="0">
+              <a:rPr lang="en-US" sz="1300" b="1" dirty="0">
                 <a:solidFill>
                   <a:srgbClr val="0068B7"/>
                 </a:solidFill>
@@ -8359,20 +8774,20 @@
               </a:rPr>
               <a:t>Use this for</a:t>
             </a:r>
-            <a:endParaRPr lang="en-US" sz="950" dirty="0"/>
-          </a:p>
-        </p:txBody>
-      </p:sp>
-      <p:sp>
-        <p:nvSpPr>
-          <p:cNvPr id="16" name="Text 14"/>
-          <p:cNvSpPr/>
-          <p:nvPr/>
-        </p:nvSpPr>
-        <p:spPr>
-          <a:xfrm>
-            <a:off x="8074152" y="3959352"/>
-            <a:ext cx="2825496" cy="1170432"/>
+            <a:endParaRPr lang="en-US" sz="1300" dirty="0"/>
+          </a:p>
+        </p:txBody>
+      </p:sp>
+      <p:sp>
+        <p:nvSpPr>
+          <p:cNvPr id="17" name="Text 15"/>
+          <p:cNvSpPr/>
+          <p:nvPr/>
+        </p:nvSpPr>
+        <p:spPr>
+          <a:xfrm>
+            <a:off x="8074152" y="4023360"/>
+            <a:ext cx="2825496" cy="1097280"/>
           </a:xfrm>
           <a:prstGeom prst="rect">
             <a:avLst/>
@@ -8390,7 +8805,7 @@
               <a:buNone/>
             </a:pPr>
             <a:r>
-              <a:rPr lang="en-US" sz="1250" dirty="0">
+              <a:rPr lang="en-US" sz="1550" dirty="0">
                 <a:solidFill>
                   <a:srgbClr val="17364A"/>
                 </a:solidFill>
@@ -8400,7 +8815,7 @@
               </a:rPr>
               <a:t>Connect the concept to public health decisions, safeguards, documentation, or implementation work.</a:t>
             </a:r>
-            <a:endParaRPr lang="en-US" sz="1250" dirty="0"/>
+            <a:endParaRPr lang="en-US" sz="1550" dirty="0"/>
           </a:p>
         </p:txBody>
       </p:sp>
@@ -8597,7 +9012,7 @@
                 <a:ea typeface="Aptos" pitchFamily="34" charset="-122"/>
                 <a:cs typeface="Aptos" pitchFamily="34" charset="-120"/>
               </a:rPr>
-              <a:t>© Paula Soper</a:t>
+              <a:t>Â© Paula Soper</a:t>
             </a:r>
             <a:endParaRPr lang="en-US" sz="800" dirty="0"/>
           </a:p>
@@ -8611,8 +9026,47 @@
         </p:nvSpPr>
         <p:spPr>
           <a:xfrm>
+            <a:off x="11137392" y="6510528"/>
+            <a:ext cx="411480" cy="201168"/>
+          </a:xfrm>
+          <a:prstGeom prst="rect">
+            <a:avLst/>
+          </a:prstGeom>
+          <a:noFill/>
+          <a:ln/>
+        </p:spPr>
+        <p:txBody>
+          <a:bodyPr wrap="square" lIns="0" tIns="0" rIns="0" bIns="0" rtlCol="0" anchor="ctr"/>
+          <a:lstStyle/>
+          <a:p>
+            <a:pPr algn="r" indent="0" marL="0">
+              <a:buNone/>
+            </a:pPr>
+            <a:r>
+              <a:rPr lang="en-US" sz="900" dirty="0">
+                <a:solidFill>
+                  <a:srgbClr val="5F7181"/>
+                </a:solidFill>
+                <a:latin typeface="Aptos" pitchFamily="34" charset="0"/>
+                <a:ea typeface="Aptos" pitchFamily="34" charset="-122"/>
+                <a:cs typeface="Aptos" pitchFamily="34" charset="-120"/>
+              </a:rPr>
+              <a:t>2</a:t>
+            </a:r>
+            <a:endParaRPr lang="en-US" sz="900" dirty="0"/>
+          </a:p>
+        </p:txBody>
+      </p:sp>
+      <p:sp>
+        <p:nvSpPr>
+          <p:cNvPr id="8" name="Text 6"/>
+          <p:cNvSpPr/>
+          <p:nvPr/>
+        </p:nvSpPr>
+        <p:spPr>
+          <a:xfrm>
             <a:off x="640080" y="658368"/>
-            <a:ext cx="10881360" cy="566928"/>
+            <a:ext cx="10881360" cy="713232"/>
           </a:xfrm>
           <a:prstGeom prst="rect">
             <a:avLst/>
@@ -8630,7 +9084,7 @@
               <a:buNone/>
             </a:pPr>
             <a:r>
-              <a:rPr lang="en-US" sz="2700" b="1" dirty="0">
+              <a:rPr lang="en-US" sz="3400" b="1" dirty="0">
                 <a:solidFill>
                   <a:srgbClr val="003A63"/>
                 </a:solidFill>
@@ -8640,20 +9094,20 @@
               </a:rPr>
               <a:t>What this module helps you do</a:t>
             </a:r>
-            <a:endParaRPr lang="en-US" sz="2700" dirty="0"/>
-          </a:p>
-        </p:txBody>
-      </p:sp>
-      <p:sp>
-        <p:nvSpPr>
-          <p:cNvPr id="8" name="Text 6"/>
-          <p:cNvSpPr/>
-          <p:nvPr/>
-        </p:nvSpPr>
-        <p:spPr>
-          <a:xfrm>
-            <a:off x="868680" y="1417320"/>
-            <a:ext cx="6675120" cy="3291840"/>
+            <a:endParaRPr lang="en-US" sz="3400" dirty="0"/>
+          </a:p>
+        </p:txBody>
+      </p:sp>
+      <p:sp>
+        <p:nvSpPr>
+          <p:cNvPr id="9" name="Text 7"/>
+          <p:cNvSpPr/>
+          <p:nvPr/>
+        </p:nvSpPr>
+        <p:spPr>
+          <a:xfrm>
+            <a:off x="868680" y="1508760"/>
+            <a:ext cx="6446520" cy="2926080"/>
           </a:xfrm>
           <a:prstGeom prst="rect">
             <a:avLst/>
@@ -8668,7 +9122,7 @@
           <a:lstStyle/>
           <a:p>
             <a:r>
-              <a:rPr lang="en-US" sz="1700" dirty="0">
+              <a:rPr lang="en-US" sz="2100" dirty="0">
                 <a:solidFill>
                   <a:srgbClr val="17364A"/>
                 </a:solidFill>
@@ -8676,13 +9130,13 @@
                 <a:ea typeface="Aptos" pitchFamily="34" charset="-122"/>
                 <a:cs typeface="Aptos" pitchFamily="34" charset="-120"/>
               </a:rPr>
-              <a:t>User acceptance testing is the process of determining whether an AI-supported workflow is usable, understandable, safe, and ready for real users in.</a:t>
-            </a:r>
-            <a:endParaRPr lang="en-US" sz="1700" dirty="0"/>
-          </a:p>
-          <a:p>
-            <a:r>
-              <a:rPr lang="en-US" sz="1700" dirty="0">
+              <a:t>User acceptance testing is the process of determining whether an AI-supported workflow is usable, understandable,.</a:t>
+            </a:r>
+            <a:endParaRPr lang="en-US" sz="2100" dirty="0"/>
+          </a:p>
+          <a:p>
+            <a:r>
+              <a:rPr lang="en-US" sz="2100" dirty="0">
                 <a:solidFill>
                   <a:srgbClr val="17364A"/>
                 </a:solidFill>
@@ -8690,13 +9144,13 @@
                 <a:ea typeface="Aptos" pitchFamily="34" charset="-122"/>
                 <a:cs typeface="Aptos" pitchFamily="34" charset="-120"/>
               </a:rPr>
-              <a:t>Technical testing may show that a tool runs, and model validation may show acceptable performance, but neither proves that staff can use the.</a:t>
-            </a:r>
-            <a:endParaRPr lang="en-US" sz="1700" dirty="0"/>
-          </a:p>
-          <a:p>
-            <a:r>
-              <a:rPr lang="en-US" sz="1700" dirty="0">
+              <a:t>Technical testing may show that a tool runs, and model validation may show acceptable performance, but neither.</a:t>
+            </a:r>
+            <a:endParaRPr lang="en-US" sz="2100" dirty="0"/>
+          </a:p>
+          <a:p>
+            <a:r>
+              <a:rPr lang="en-US" sz="2100" dirty="0">
                 <a:solidFill>
                   <a:srgbClr val="17364A"/>
                 </a:solidFill>
@@ -8706,27 +9160,13 @@
               </a:rPr>
               <a:t>UAT fills that gap.</a:t>
             </a:r>
-            <a:endParaRPr lang="en-US" sz="1700" dirty="0"/>
-          </a:p>
-          <a:p>
-            <a:r>
-              <a:rPr lang="en-US" sz="1700" dirty="0">
-                <a:solidFill>
-                  <a:srgbClr val="17364A"/>
-                </a:solidFill>
-                <a:latin typeface="Aptos" pitchFamily="34" charset="0"/>
-                <a:ea typeface="Aptos" pitchFamily="34" charset="-122"/>
-                <a:cs typeface="Aptos" pitchFamily="34" charset="-120"/>
-              </a:rPr>
-              <a:t>This module teaches learners how to design and conduct user acceptance testing for AI-supported workflows.</a:t>
-            </a:r>
-            <a:endParaRPr lang="en-US" sz="1700" dirty="0"/>
-          </a:p>
-        </p:txBody>
-      </p:sp>
-      <p:sp>
-        <p:nvSpPr>
-          <p:cNvPr id="9" name="Shape 7"/>
+            <a:endParaRPr lang="en-US" sz="2100" dirty="0"/>
+          </a:p>
+        </p:txBody>
+      </p:sp>
+      <p:sp>
+        <p:nvSpPr>
+          <p:cNvPr id="10" name="Shape 8"/>
           <p:cNvSpPr/>
           <p:nvPr/>
         </p:nvSpPr>
@@ -8753,14 +9193,14 @@
       </p:sp>
       <p:sp>
         <p:nvSpPr>
-          <p:cNvPr id="10" name="Text 8"/>
+          <p:cNvPr id="11" name="Text 9"/>
           <p:cNvSpPr/>
           <p:nvPr/>
         </p:nvSpPr>
         <p:spPr>
           <a:xfrm>
             <a:off x="8074152" y="1563624"/>
-            <a:ext cx="2825496" cy="201168"/>
+            <a:ext cx="2825496" cy="256032"/>
           </a:xfrm>
           <a:prstGeom prst="rect">
             <a:avLst/>
@@ -8776,7 +9216,7 @@
               <a:buNone/>
             </a:pPr>
             <a:r>
-              <a:rPr lang="en-US" sz="950" b="1" dirty="0">
+              <a:rPr lang="en-US" sz="1300" b="1" dirty="0">
                 <a:solidFill>
                   <a:srgbClr val="0068B7"/>
                 </a:solidFill>
@@ -8786,20 +9226,20 @@
               </a:rPr>
               <a:t>Module details</a:t>
             </a:r>
-            <a:endParaRPr lang="en-US" sz="950" dirty="0"/>
-          </a:p>
-        </p:txBody>
-      </p:sp>
-      <p:sp>
-        <p:nvSpPr>
-          <p:cNvPr id="11" name="Text 9"/>
-          <p:cNvSpPr/>
-          <p:nvPr/>
-        </p:nvSpPr>
-        <p:spPr>
-          <a:xfrm>
-            <a:off x="8074152" y="1856232"/>
-            <a:ext cx="2825496" cy="1353312"/>
+            <a:endParaRPr lang="en-US" sz="1300" dirty="0"/>
+          </a:p>
+        </p:txBody>
+      </p:sp>
+      <p:sp>
+        <p:nvSpPr>
+          <p:cNvPr id="12" name="Text 10"/>
+          <p:cNvSpPr/>
+          <p:nvPr/>
+        </p:nvSpPr>
+        <p:spPr>
+          <a:xfrm>
+            <a:off x="8074152" y="1920240"/>
+            <a:ext cx="2825496" cy="1280160"/>
           </a:xfrm>
           <a:prstGeom prst="rect">
             <a:avLst/>
@@ -8817,7 +9257,7 @@
               <a:buNone/>
             </a:pPr>
             <a:r>
-              <a:rPr lang="en-US" sz="1250" dirty="0">
+              <a:rPr lang="en-US" sz="1550" dirty="0">
                 <a:solidFill>
                   <a:srgbClr val="17364A"/>
                 </a:solidFill>
@@ -8827,14 +9267,14 @@
               </a:rPr>
               <a:t>Level: applied/foundational</a:t>
             </a:r>
-            <a:endParaRPr lang="en-US" sz="1250" dirty="0"/>
+            <a:endParaRPr lang="en-US" sz="1550" dirty="0"/>
           </a:p>
           <a:p>
             <a:pPr indent="0" marL="0">
               <a:buNone/>
             </a:pPr>
             <a:r>
-              <a:rPr lang="en-US" sz="1250" dirty="0">
+              <a:rPr lang="en-US" sz="1550" dirty="0">
                 <a:solidFill>
                   <a:srgbClr val="17364A"/>
                 </a:solidFill>
@@ -8844,14 +9284,14 @@
               </a:rPr>
               <a:t>Primary track: Operations and Data Quality Track</a:t>
             </a:r>
-            <a:endParaRPr lang="en-US" sz="1250" dirty="0"/>
+            <a:endParaRPr lang="en-US" sz="1550" dirty="0"/>
           </a:p>
           <a:p>
             <a:pPr indent="0" marL="0">
               <a:buNone/>
             </a:pPr>
             <a:r>
-              <a:rPr lang="en-US" sz="1250" dirty="0">
+              <a:rPr lang="en-US" sz="1550" dirty="0">
                 <a:solidFill>
                   <a:srgbClr val="17364A"/>
                 </a:solidFill>
@@ -8861,32 +9301,32 @@
               </a:rPr>
               <a:t>Appears in tracks: operations-and-data-quality, program-management, technical-architecture, analytics-and-modeling</a:t>
             </a:r>
-            <a:endParaRPr lang="en-US" sz="1250" dirty="0"/>
-          </a:p>
-        </p:txBody>
-      </p:sp>
-      <p:sp>
-        <p:nvSpPr>
-          <p:cNvPr id="12" name="Shape 10"/>
-          <p:cNvSpPr/>
-          <p:nvPr/>
-        </p:nvSpPr>
-        <p:spPr>
-          <a:xfrm>
-            <a:off x="7909560" y="3611880"/>
-            <a:ext cx="3154680" cy="1783080"/>
+            <a:endParaRPr lang="en-US" sz="1550" dirty="0"/>
+          </a:p>
+        </p:txBody>
+      </p:sp>
+      <p:sp>
+        <p:nvSpPr>
+          <p:cNvPr id="13" name="Shape 11"/>
+          <p:cNvSpPr/>
+          <p:nvPr/>
+        </p:nvSpPr>
+        <p:spPr>
+          <a:xfrm>
+            <a:off x="7635240" y="3730752"/>
+            <a:ext cx="1033272" cy="749808"/>
           </a:xfrm>
           <a:prstGeom prst="roundRect">
             <a:avLst>
-              <a:gd name="adj" fmla="val 6154"/>
+              <a:gd name="adj" fmla="val 14634"/>
             </a:avLst>
           </a:prstGeom>
           <a:solidFill>
-            <a:srgbClr val="EEF8ED"/>
+            <a:srgbClr val="0068B7"/>
           </a:solidFill>
           <a:ln w="12700">
             <a:solidFill>
-              <a:srgbClr val="B9D7E6"/>
+              <a:srgbClr val="0068B7"/>
             </a:solidFill>
             <a:prstDash val="solid"/>
           </a:ln>
@@ -8894,81 +9334,256 @@
       </p:sp>
       <p:sp>
         <p:nvSpPr>
-          <p:cNvPr id="13" name="Text 11"/>
-          <p:cNvSpPr/>
-          <p:nvPr/>
-        </p:nvSpPr>
-        <p:spPr>
-          <a:xfrm>
-            <a:off x="8074152" y="3758184"/>
-            <a:ext cx="2825496" cy="201168"/>
-          </a:xfrm>
-          <a:prstGeom prst="rect">
-            <a:avLst/>
-          </a:prstGeom>
-          <a:noFill/>
-          <a:ln/>
-        </p:spPr>
-        <p:txBody>
-          <a:bodyPr wrap="square" lIns="0" tIns="0" rIns="0" bIns="0" rtlCol="0" anchor="ctr"/>
-          <a:lstStyle/>
-          <a:p>
-            <a:pPr indent="0" marL="0">
-              <a:buNone/>
-            </a:pPr>
-            <a:r>
-              <a:rPr lang="en-US" sz="950" b="1" dirty="0">
-                <a:solidFill>
-                  <a:srgbClr val="0068B7"/>
-                </a:solidFill>
-                <a:latin typeface="Aptos" pitchFamily="34" charset="0"/>
-                <a:ea typeface="Aptos" pitchFamily="34" charset="-122"/>
-                <a:cs typeface="Aptos" pitchFamily="34" charset="-120"/>
-              </a:rPr>
-              <a:t>Learning approach</a:t>
-            </a:r>
-            <a:endParaRPr lang="en-US" sz="950" dirty="0"/>
-          </a:p>
-        </p:txBody>
-      </p:sp>
-      <p:sp>
-        <p:nvSpPr>
           <p:cNvPr id="14" name="Text 12"/>
           <p:cNvSpPr/>
           <p:nvPr/>
         </p:nvSpPr>
         <p:spPr>
           <a:xfrm>
-            <a:off x="8074152" y="4050792"/>
-            <a:ext cx="2825496" cy="1216152"/>
-          </a:xfrm>
-          <a:prstGeom prst="rect">
-            <a:avLst/>
-          </a:prstGeom>
-          <a:noFill/>
-          <a:ln/>
-        </p:spPr>
-        <p:txBody>
-          <a:bodyPr wrap="square" lIns="0" tIns="0" rIns="0" bIns="0" rtlCol="0" anchor="t">
+            <a:off x="7708392" y="3922776"/>
+            <a:ext cx="886968" cy="310896"/>
+          </a:xfrm>
+          <a:prstGeom prst="rect">
+            <a:avLst/>
+          </a:prstGeom>
+          <a:noFill/>
+          <a:ln/>
+        </p:spPr>
+        <p:txBody>
+          <a:bodyPr wrap="square" lIns="0" tIns="0" rIns="0" bIns="0" rtlCol="0" anchor="ctr">
             <a:normAutofit/>
           </a:bodyPr>
           <a:lstStyle/>
           <a:p>
-            <a:pPr indent="0" marL="0">
-              <a:buNone/>
-            </a:pPr>
-            <a:r>
-              <a:rPr lang="en-US" sz="1250" dirty="0">
-                <a:solidFill>
-                  <a:srgbClr val="17364A"/>
-                </a:solidFill>
-                <a:latin typeface="Aptos" pitchFamily="34" charset="0"/>
-                <a:ea typeface="Aptos" pitchFamily="34" charset="-122"/>
-                <a:cs typeface="Aptos" pitchFamily="34" charset="-120"/>
-              </a:rPr>
-              <a:t>Review the core ideas, complete the practical exercise, check your understanding, and use the related plays and tools to apply the lesson.</a:t>
-            </a:r>
-            <a:endParaRPr lang="en-US" sz="1250" dirty="0"/>
+            <a:pPr algn="ctr" indent="0" marL="0">
+              <a:buNone/>
+            </a:pPr>
+            <a:r>
+              <a:rPr lang="en-US" sz="1500" b="1" dirty="0">
+                <a:solidFill>
+                  <a:srgbClr val="FFFFFF"/>
+                </a:solidFill>
+                <a:latin typeface="Aptos" pitchFamily="34" charset="0"/>
+                <a:ea typeface="Aptos" pitchFamily="34" charset="-122"/>
+                <a:cs typeface="Aptos" pitchFamily="34" charset="-120"/>
+              </a:rPr>
+              <a:t>Learn</a:t>
+            </a:r>
+            <a:endParaRPr lang="en-US" sz="1500" dirty="0"/>
+          </a:p>
+        </p:txBody>
+      </p:sp>
+      <p:sp>
+        <p:nvSpPr>
+          <p:cNvPr id="15" name="Text 13"/>
+          <p:cNvSpPr/>
+          <p:nvPr/>
+        </p:nvSpPr>
+        <p:spPr>
+          <a:xfrm>
+            <a:off x="8695944" y="3941064"/>
+            <a:ext cx="201168" cy="256032"/>
+          </a:xfrm>
+          <a:prstGeom prst="rect">
+            <a:avLst/>
+          </a:prstGeom>
+          <a:noFill/>
+          <a:ln/>
+        </p:spPr>
+        <p:txBody>
+          <a:bodyPr wrap="square" lIns="0" tIns="0" rIns="0" bIns="0" rtlCol="0" anchor="ctr"/>
+          <a:lstStyle/>
+          <a:p>
+            <a:pPr algn="ctr" indent="0" marL="0">
+              <a:buNone/>
+            </a:pPr>
+            <a:r>
+              <a:rPr lang="en-US" sz="1800" b="1" dirty="0">
+                <a:solidFill>
+                  <a:srgbClr val="0068B7"/>
+                </a:solidFill>
+                <a:latin typeface="Aptos" pitchFamily="34" charset="0"/>
+                <a:ea typeface="Aptos" pitchFamily="34" charset="-122"/>
+                <a:cs typeface="Aptos" pitchFamily="34" charset="-120"/>
+              </a:rPr>
+              <a:t>â†’</a:t>
+            </a:r>
+            <a:endParaRPr lang="en-US" sz="1800" dirty="0"/>
+          </a:p>
+        </p:txBody>
+      </p:sp>
+      <p:sp>
+        <p:nvSpPr>
+          <p:cNvPr id="16" name="Shape 14"/>
+          <p:cNvSpPr/>
+          <p:nvPr/>
+        </p:nvSpPr>
+        <p:spPr>
+          <a:xfrm>
+            <a:off x="8924544" y="3730752"/>
+            <a:ext cx="1033272" cy="749808"/>
+          </a:xfrm>
+          <a:prstGeom prst="roundRect">
+            <a:avLst>
+              <a:gd name="adj" fmla="val 14634"/>
+            </a:avLst>
+          </a:prstGeom>
+          <a:solidFill>
+            <a:srgbClr val="2F8A28"/>
+          </a:solidFill>
+          <a:ln w="12700">
+            <a:solidFill>
+              <a:srgbClr val="2F8A28"/>
+            </a:solidFill>
+            <a:prstDash val="solid"/>
+          </a:ln>
+        </p:spPr>
+      </p:sp>
+      <p:sp>
+        <p:nvSpPr>
+          <p:cNvPr id="17" name="Text 15"/>
+          <p:cNvSpPr/>
+          <p:nvPr/>
+        </p:nvSpPr>
+        <p:spPr>
+          <a:xfrm>
+            <a:off x="8997696" y="3922776"/>
+            <a:ext cx="886968" cy="310896"/>
+          </a:xfrm>
+          <a:prstGeom prst="rect">
+            <a:avLst/>
+          </a:prstGeom>
+          <a:noFill/>
+          <a:ln/>
+        </p:spPr>
+        <p:txBody>
+          <a:bodyPr wrap="square" lIns="0" tIns="0" rIns="0" bIns="0" rtlCol="0" anchor="ctr">
+            <a:normAutofit/>
+          </a:bodyPr>
+          <a:lstStyle/>
+          <a:p>
+            <a:pPr algn="ctr" indent="0" marL="0">
+              <a:buNone/>
+            </a:pPr>
+            <a:r>
+              <a:rPr lang="en-US" sz="1500" b="1" dirty="0">
+                <a:solidFill>
+                  <a:srgbClr val="FFFFFF"/>
+                </a:solidFill>
+                <a:latin typeface="Aptos" pitchFamily="34" charset="0"/>
+                <a:ea typeface="Aptos" pitchFamily="34" charset="-122"/>
+                <a:cs typeface="Aptos" pitchFamily="34" charset="-120"/>
+              </a:rPr>
+              <a:t>Apply</a:t>
+            </a:r>
+            <a:endParaRPr lang="en-US" sz="1500" dirty="0"/>
+          </a:p>
+        </p:txBody>
+      </p:sp>
+      <p:sp>
+        <p:nvSpPr>
+          <p:cNvPr id="18" name="Text 16"/>
+          <p:cNvSpPr/>
+          <p:nvPr/>
+        </p:nvSpPr>
+        <p:spPr>
+          <a:xfrm>
+            <a:off x="9985248" y="3941064"/>
+            <a:ext cx="201168" cy="256032"/>
+          </a:xfrm>
+          <a:prstGeom prst="rect">
+            <a:avLst/>
+          </a:prstGeom>
+          <a:noFill/>
+          <a:ln/>
+        </p:spPr>
+        <p:txBody>
+          <a:bodyPr wrap="square" lIns="0" tIns="0" rIns="0" bIns="0" rtlCol="0" anchor="ctr"/>
+          <a:lstStyle/>
+          <a:p>
+            <a:pPr algn="ctr" indent="0" marL="0">
+              <a:buNone/>
+            </a:pPr>
+            <a:r>
+              <a:rPr lang="en-US" sz="1800" b="1" dirty="0">
+                <a:solidFill>
+                  <a:srgbClr val="0068B7"/>
+                </a:solidFill>
+                <a:latin typeface="Aptos" pitchFamily="34" charset="0"/>
+                <a:ea typeface="Aptos" pitchFamily="34" charset="-122"/>
+                <a:cs typeface="Aptos" pitchFamily="34" charset="-120"/>
+              </a:rPr>
+              <a:t>â†’</a:t>
+            </a:r>
+            <a:endParaRPr lang="en-US" sz="1800" dirty="0"/>
+          </a:p>
+        </p:txBody>
+      </p:sp>
+      <p:sp>
+        <p:nvSpPr>
+          <p:cNvPr id="19" name="Shape 17"/>
+          <p:cNvSpPr/>
+          <p:nvPr/>
+        </p:nvSpPr>
+        <p:spPr>
+          <a:xfrm>
+            <a:off x="10213848" y="3730752"/>
+            <a:ext cx="1033272" cy="749808"/>
+          </a:xfrm>
+          <a:prstGeom prst="roundRect">
+            <a:avLst>
+              <a:gd name="adj" fmla="val 14634"/>
+            </a:avLst>
+          </a:prstGeom>
+          <a:solidFill>
+            <a:srgbClr val="6A4CA3"/>
+          </a:solidFill>
+          <a:ln w="12700">
+            <a:solidFill>
+              <a:srgbClr val="6A4CA3"/>
+            </a:solidFill>
+            <a:prstDash val="solid"/>
+          </a:ln>
+        </p:spPr>
+      </p:sp>
+      <p:sp>
+        <p:nvSpPr>
+          <p:cNvPr id="20" name="Text 18"/>
+          <p:cNvSpPr/>
+          <p:nvPr/>
+        </p:nvSpPr>
+        <p:spPr>
+          <a:xfrm>
+            <a:off x="10287000" y="3922776"/>
+            <a:ext cx="886968" cy="310896"/>
+          </a:xfrm>
+          <a:prstGeom prst="rect">
+            <a:avLst/>
+          </a:prstGeom>
+          <a:noFill/>
+          <a:ln/>
+        </p:spPr>
+        <p:txBody>
+          <a:bodyPr wrap="square" lIns="0" tIns="0" rIns="0" bIns="0" rtlCol="0" anchor="ctr">
+            <a:normAutofit/>
+          </a:bodyPr>
+          <a:lstStyle/>
+          <a:p>
+            <a:pPr algn="ctr" indent="0" marL="0">
+              <a:buNone/>
+            </a:pPr>
+            <a:r>
+              <a:rPr lang="en-US" sz="1500" b="1" dirty="0">
+                <a:solidFill>
+                  <a:srgbClr val="FFFFFF"/>
+                </a:solidFill>
+                <a:latin typeface="Aptos" pitchFamily="34" charset="0"/>
+                <a:ea typeface="Aptos" pitchFamily="34" charset="-122"/>
+                <a:cs typeface="Aptos" pitchFamily="34" charset="-120"/>
+              </a:rPr>
+              <a:t>Document</a:t>
+            </a:r>
+            <a:endParaRPr lang="en-US" sz="1500" dirty="0"/>
           </a:p>
         </p:txBody>
       </p:sp>
@@ -9165,7 +9780,7 @@
                 <a:ea typeface="Aptos" pitchFamily="34" charset="-122"/>
                 <a:cs typeface="Aptos" pitchFamily="34" charset="-120"/>
               </a:rPr>
-              <a:t>© Paula Soper</a:t>
+              <a:t>Â© Paula Soper</a:t>
             </a:r>
             <a:endParaRPr lang="en-US" sz="800" dirty="0"/>
           </a:p>
@@ -9173,7 +9788,46 @@
       </p:sp>
       <p:sp>
         <p:nvSpPr>
-          <p:cNvPr id="7" name="Shape 5"/>
+          <p:cNvPr id="7" name="Text 5"/>
+          <p:cNvSpPr/>
+          <p:nvPr/>
+        </p:nvSpPr>
+        <p:spPr>
+          <a:xfrm>
+            <a:off x="11137392" y="6510528"/>
+            <a:ext cx="411480" cy="201168"/>
+          </a:xfrm>
+          <a:prstGeom prst="rect">
+            <a:avLst/>
+          </a:prstGeom>
+          <a:noFill/>
+          <a:ln/>
+        </p:spPr>
+        <p:txBody>
+          <a:bodyPr wrap="square" lIns="0" tIns="0" rIns="0" bIns="0" rtlCol="0" anchor="ctr"/>
+          <a:lstStyle/>
+          <a:p>
+            <a:pPr algn="r" indent="0" marL="0">
+              <a:buNone/>
+            </a:pPr>
+            <a:r>
+              <a:rPr lang="en-US" sz="900" dirty="0">
+                <a:solidFill>
+                  <a:srgbClr val="5F7181"/>
+                </a:solidFill>
+                <a:latin typeface="Aptos" pitchFamily="34" charset="0"/>
+                <a:ea typeface="Aptos" pitchFamily="34" charset="-122"/>
+                <a:cs typeface="Aptos" pitchFamily="34" charset="-120"/>
+              </a:rPr>
+              <a:t>20</a:t>
+            </a:r>
+            <a:endParaRPr lang="en-US" sz="900" dirty="0"/>
+          </a:p>
+        </p:txBody>
+      </p:sp>
+      <p:sp>
+        <p:nvSpPr>
+          <p:cNvPr id="8" name="Shape 6"/>
           <p:cNvSpPr/>
           <p:nvPr/>
         </p:nvSpPr>
@@ -9198,7 +9852,7 @@
       </p:sp>
       <p:sp>
         <p:nvSpPr>
-          <p:cNvPr id="8" name="Text 6"/>
+          <p:cNvPr id="9" name="Text 7"/>
           <p:cNvSpPr/>
           <p:nvPr/>
         </p:nvSpPr>
@@ -9237,14 +9891,14 @@
       </p:sp>
       <p:sp>
         <p:nvSpPr>
-          <p:cNvPr id="9" name="Text 7"/>
+          <p:cNvPr id="10" name="Text 8"/>
           <p:cNvSpPr/>
           <p:nvPr/>
         </p:nvSpPr>
         <p:spPr>
           <a:xfrm>
             <a:off x="640080" y="621792"/>
-            <a:ext cx="10881360" cy="566928"/>
+            <a:ext cx="10881360" cy="713232"/>
           </a:xfrm>
           <a:prstGeom prst="rect">
             <a:avLst/>
@@ -9262,7 +9916,7 @@
               <a:buNone/>
             </a:pPr>
             <a:r>
-              <a:rPr lang="en-US" sz="2700" b="1" dirty="0">
+              <a:rPr lang="en-US" sz="3400" b="1" dirty="0">
                 <a:solidFill>
                   <a:srgbClr val="003A63"/>
                 </a:solidFill>
@@ -9272,20 +9926,20 @@
               </a:rPr>
               <a:t>Knowledge Check</a:t>
             </a:r>
-            <a:endParaRPr lang="en-US" sz="2700" dirty="0"/>
-          </a:p>
-        </p:txBody>
-      </p:sp>
-      <p:sp>
-        <p:nvSpPr>
-          <p:cNvPr id="10" name="Text 8"/>
-          <p:cNvSpPr/>
-          <p:nvPr/>
-        </p:nvSpPr>
-        <p:spPr>
-          <a:xfrm>
-            <a:off x="868680" y="1417320"/>
-            <a:ext cx="6675120" cy="4434840"/>
+            <a:endParaRPr lang="en-US" sz="3400" dirty="0"/>
+          </a:p>
+        </p:txBody>
+      </p:sp>
+      <p:sp>
+        <p:nvSpPr>
+          <p:cNvPr id="11" name="Text 9"/>
+          <p:cNvSpPr/>
+          <p:nvPr/>
+        </p:nvSpPr>
+        <p:spPr>
+          <a:xfrm>
+            <a:off x="868680" y="1508760"/>
+            <a:ext cx="6537960" cy="4160520"/>
           </a:xfrm>
           <a:prstGeom prst="rect">
             <a:avLst/>
@@ -9300,7 +9954,7 @@
           <a:lstStyle/>
           <a:p>
             <a:r>
-              <a:rPr lang="en-US" sz="1700" dirty="0">
+              <a:rPr lang="en-US" sz="2100" dirty="0">
                 <a:solidFill>
                   <a:srgbClr val="17364A"/>
                 </a:solidFill>
@@ -9310,11 +9964,11 @@
               </a:rPr>
               <a:t>1. What is the purpose of UAT for AI-supported workflows?</a:t>
             </a:r>
-            <a:endParaRPr lang="en-US" sz="1700" dirty="0"/>
-          </a:p>
-          <a:p>
-            <a:r>
-              <a:rPr lang="en-US" sz="1700" dirty="0">
+            <a:endParaRPr lang="en-US" sz="2100" dirty="0"/>
+          </a:p>
+          <a:p>
+            <a:r>
+              <a:rPr lang="en-US" sz="2100" dirty="0">
                 <a:solidFill>
                   <a:srgbClr val="17364A"/>
                 </a:solidFill>
@@ -9324,11 +9978,11 @@
               </a:rPr>
               <a:t>2. Who should participate in UAT?</a:t>
             </a:r>
-            <a:endParaRPr lang="en-US" sz="1700" dirty="0"/>
-          </a:p>
-          <a:p>
-            <a:r>
-              <a:rPr lang="en-US" sz="1700" dirty="0">
+            <a:endParaRPr lang="en-US" sz="2100" dirty="0"/>
+          </a:p>
+          <a:p>
+            <a:r>
+              <a:rPr lang="en-US" sz="2100" dirty="0">
                 <a:solidFill>
                   <a:srgbClr val="17364A"/>
                 </a:solidFill>
@@ -9338,27 +9992,13 @@
               </a:rPr>
               <a:t>3. Which scenario should be included in AI UAT?</a:t>
             </a:r>
-            <a:endParaRPr lang="en-US" sz="1700" dirty="0"/>
-          </a:p>
-          <a:p>
-            <a:r>
-              <a:rPr lang="en-US" sz="1700" dirty="0">
-                <a:solidFill>
-                  <a:srgbClr val="17364A"/>
-                </a:solidFill>
-                <a:latin typeface="Aptos" pitchFamily="34" charset="0"/>
-                <a:ea typeface="Aptos" pitchFamily="34" charset="-122"/>
-                <a:cs typeface="Aptos" pitchFamily="34" charset="-120"/>
-              </a:rPr>
-              <a:t>4. What should happen to UAT issues?</a:t>
-            </a:r>
-            <a:endParaRPr lang="en-US" sz="1700" dirty="0"/>
-          </a:p>
-        </p:txBody>
-      </p:sp>
-      <p:sp>
-        <p:nvSpPr>
-          <p:cNvPr id="11" name="Shape 9"/>
+            <a:endParaRPr lang="en-US" sz="2100" dirty="0"/>
+          </a:p>
+        </p:txBody>
+      </p:sp>
+      <p:sp>
+        <p:nvSpPr>
+          <p:cNvPr id="12" name="Shape 10"/>
           <p:cNvSpPr/>
           <p:nvPr/>
         </p:nvSpPr>
@@ -9385,14 +10025,14 @@
       </p:sp>
       <p:sp>
         <p:nvSpPr>
-          <p:cNvPr id="12" name="Text 10"/>
+          <p:cNvPr id="13" name="Text 11"/>
           <p:cNvSpPr/>
           <p:nvPr/>
         </p:nvSpPr>
         <p:spPr>
           <a:xfrm>
             <a:off x="8074152" y="1563624"/>
-            <a:ext cx="2825496" cy="201168"/>
+            <a:ext cx="2825496" cy="256032"/>
           </a:xfrm>
           <a:prstGeom prst="rect">
             <a:avLst/>
@@ -9408,7 +10048,7 @@
               <a:buNone/>
             </a:pPr>
             <a:r>
-              <a:rPr lang="en-US" sz="950" b="1" dirty="0">
+              <a:rPr lang="en-US" sz="1300" b="1" dirty="0">
                 <a:solidFill>
                   <a:srgbClr val="0068B7"/>
                 </a:solidFill>
@@ -9418,20 +10058,20 @@
               </a:rPr>
               <a:t>Key idea</a:t>
             </a:r>
-            <a:endParaRPr lang="en-US" sz="950" dirty="0"/>
-          </a:p>
-        </p:txBody>
-      </p:sp>
-      <p:sp>
-        <p:nvSpPr>
-          <p:cNvPr id="13" name="Text 11"/>
-          <p:cNvSpPr/>
-          <p:nvPr/>
-        </p:nvSpPr>
-        <p:spPr>
-          <a:xfrm>
-            <a:off x="8074152" y="1856232"/>
-            <a:ext cx="2825496" cy="1261872"/>
+            <a:endParaRPr lang="en-US" sz="1300" dirty="0"/>
+          </a:p>
+        </p:txBody>
+      </p:sp>
+      <p:sp>
+        <p:nvSpPr>
+          <p:cNvPr id="14" name="Text 12"/>
+          <p:cNvSpPr/>
+          <p:nvPr/>
+        </p:nvSpPr>
+        <p:spPr>
+          <a:xfrm>
+            <a:off x="8074152" y="1920240"/>
+            <a:ext cx="2825496" cy="1188720"/>
           </a:xfrm>
           <a:prstGeom prst="rect">
             <a:avLst/>
@@ -9449,7 +10089,7 @@
               <a:buNone/>
             </a:pPr>
             <a:r>
-              <a:rPr lang="en-US" sz="1250" dirty="0">
+              <a:rPr lang="en-US" sz="1550" dirty="0">
                 <a:solidFill>
                   <a:srgbClr val="17364A"/>
                 </a:solidFill>
@@ -9459,13 +10099,13 @@
               </a:rPr>
               <a:t>1. What is the purpose of UAT for AI-supported workflows?</a:t>
             </a:r>
-            <a:endParaRPr lang="en-US" sz="1250" dirty="0"/>
-          </a:p>
-        </p:txBody>
-      </p:sp>
-      <p:sp>
-        <p:nvSpPr>
-          <p:cNvPr id="14" name="Shape 12"/>
+            <a:endParaRPr lang="en-US" sz="1550" dirty="0"/>
+          </a:p>
+        </p:txBody>
+      </p:sp>
+      <p:sp>
+        <p:nvSpPr>
+          <p:cNvPr id="15" name="Shape 13"/>
           <p:cNvSpPr/>
           <p:nvPr/>
         </p:nvSpPr>
@@ -9492,14 +10132,14 @@
       </p:sp>
       <p:sp>
         <p:nvSpPr>
-          <p:cNvPr id="15" name="Text 13"/>
+          <p:cNvPr id="16" name="Text 14"/>
           <p:cNvSpPr/>
           <p:nvPr/>
         </p:nvSpPr>
         <p:spPr>
           <a:xfrm>
             <a:off x="8074152" y="3666744"/>
-            <a:ext cx="2825496" cy="201168"/>
+            <a:ext cx="2825496" cy="256032"/>
           </a:xfrm>
           <a:prstGeom prst="rect">
             <a:avLst/>
@@ -9515,7 +10155,7 @@
               <a:buNone/>
             </a:pPr>
             <a:r>
-              <a:rPr lang="en-US" sz="950" b="1" dirty="0">
+              <a:rPr lang="en-US" sz="1300" b="1" dirty="0">
                 <a:solidFill>
                   <a:srgbClr val="0068B7"/>
                 </a:solidFill>
@@ -9525,20 +10165,20 @@
               </a:rPr>
               <a:t>Use this for</a:t>
             </a:r>
-            <a:endParaRPr lang="en-US" sz="950" dirty="0"/>
-          </a:p>
-        </p:txBody>
-      </p:sp>
-      <p:sp>
-        <p:nvSpPr>
-          <p:cNvPr id="16" name="Text 14"/>
-          <p:cNvSpPr/>
-          <p:nvPr/>
-        </p:nvSpPr>
-        <p:spPr>
-          <a:xfrm>
-            <a:off x="8074152" y="3959352"/>
-            <a:ext cx="2825496" cy="1170432"/>
+            <a:endParaRPr lang="en-US" sz="1300" dirty="0"/>
+          </a:p>
+        </p:txBody>
+      </p:sp>
+      <p:sp>
+        <p:nvSpPr>
+          <p:cNvPr id="17" name="Text 15"/>
+          <p:cNvSpPr/>
+          <p:nvPr/>
+        </p:nvSpPr>
+        <p:spPr>
+          <a:xfrm>
+            <a:off x="8074152" y="4023360"/>
+            <a:ext cx="2825496" cy="1097280"/>
           </a:xfrm>
           <a:prstGeom prst="rect">
             <a:avLst/>
@@ -9556,7 +10196,7 @@
               <a:buNone/>
             </a:pPr>
             <a:r>
-              <a:rPr lang="en-US" sz="1250" dirty="0">
+              <a:rPr lang="en-US" sz="1550" dirty="0">
                 <a:solidFill>
                   <a:srgbClr val="17364A"/>
                 </a:solidFill>
@@ -9566,7 +10206,7 @@
               </a:rPr>
               <a:t>Connect the concept to public health decisions, safeguards, documentation, or implementation work.</a:t>
             </a:r>
-            <a:endParaRPr lang="en-US" sz="1250" dirty="0"/>
+            <a:endParaRPr lang="en-US" sz="1550" dirty="0"/>
           </a:p>
         </p:txBody>
       </p:sp>
@@ -9763,7 +10403,7 @@
                 <a:ea typeface="Aptos" pitchFamily="34" charset="-122"/>
                 <a:cs typeface="Aptos" pitchFamily="34" charset="-120"/>
               </a:rPr>
-              <a:t>© Paula Soper</a:t>
+              <a:t>Â© Paula Soper</a:t>
             </a:r>
             <a:endParaRPr lang="en-US" sz="800" dirty="0"/>
           </a:p>
@@ -9771,7 +10411,46 @@
       </p:sp>
       <p:sp>
         <p:nvSpPr>
-          <p:cNvPr id="7" name="Shape 5"/>
+          <p:cNvPr id="7" name="Text 5"/>
+          <p:cNvSpPr/>
+          <p:nvPr/>
+        </p:nvSpPr>
+        <p:spPr>
+          <a:xfrm>
+            <a:off x="11137392" y="6510528"/>
+            <a:ext cx="411480" cy="201168"/>
+          </a:xfrm>
+          <a:prstGeom prst="rect">
+            <a:avLst/>
+          </a:prstGeom>
+          <a:noFill/>
+          <a:ln/>
+        </p:spPr>
+        <p:txBody>
+          <a:bodyPr wrap="square" lIns="0" tIns="0" rIns="0" bIns="0" rtlCol="0" anchor="ctr"/>
+          <a:lstStyle/>
+          <a:p>
+            <a:pPr algn="r" indent="0" marL="0">
+              <a:buNone/>
+            </a:pPr>
+            <a:r>
+              <a:rPr lang="en-US" sz="900" dirty="0">
+                <a:solidFill>
+                  <a:srgbClr val="5F7181"/>
+                </a:solidFill>
+                <a:latin typeface="Aptos" pitchFamily="34" charset="0"/>
+                <a:ea typeface="Aptos" pitchFamily="34" charset="-122"/>
+                <a:cs typeface="Aptos" pitchFamily="34" charset="-120"/>
+              </a:rPr>
+              <a:t>21</a:t>
+            </a:r>
+            <a:endParaRPr lang="en-US" sz="900" dirty="0"/>
+          </a:p>
+        </p:txBody>
+      </p:sp>
+      <p:sp>
+        <p:nvSpPr>
+          <p:cNvPr id="8" name="Shape 6"/>
           <p:cNvSpPr/>
           <p:nvPr/>
         </p:nvSpPr>
@@ -9796,7 +10475,7 @@
       </p:sp>
       <p:sp>
         <p:nvSpPr>
-          <p:cNvPr id="8" name="Text 6"/>
+          <p:cNvPr id="9" name="Text 7"/>
           <p:cNvSpPr/>
           <p:nvPr/>
         </p:nvSpPr>
@@ -9835,14 +10514,14 @@
       </p:sp>
       <p:sp>
         <p:nvSpPr>
-          <p:cNvPr id="9" name="Text 7"/>
+          <p:cNvPr id="10" name="Text 8"/>
           <p:cNvSpPr/>
           <p:nvPr/>
         </p:nvSpPr>
         <p:spPr>
           <a:xfrm>
             <a:off x="640080" y="621792"/>
-            <a:ext cx="10881360" cy="566928"/>
+            <a:ext cx="10881360" cy="713232"/>
           </a:xfrm>
           <a:prstGeom prst="rect">
             <a:avLst/>
@@ -9860,7 +10539,7 @@
               <a:buNone/>
             </a:pPr>
             <a:r>
-              <a:rPr lang="en-US" sz="2700" b="1" dirty="0">
+              <a:rPr lang="en-US" sz="3400" b="1" dirty="0">
                 <a:solidFill>
                   <a:srgbClr val="003A63"/>
                 </a:solidFill>
@@ -9870,20 +10549,20 @@
               </a:rPr>
               <a:t>References and Resources</a:t>
             </a:r>
-            <a:endParaRPr lang="en-US" sz="2700" dirty="0"/>
-          </a:p>
-        </p:txBody>
-      </p:sp>
-      <p:sp>
-        <p:nvSpPr>
-          <p:cNvPr id="10" name="Text 8"/>
-          <p:cNvSpPr/>
-          <p:nvPr/>
-        </p:nvSpPr>
-        <p:spPr>
-          <a:xfrm>
-            <a:off x="868680" y="1417320"/>
-            <a:ext cx="6675120" cy="4434840"/>
+            <a:endParaRPr lang="en-US" sz="3400" dirty="0"/>
+          </a:p>
+        </p:txBody>
+      </p:sp>
+      <p:sp>
+        <p:nvSpPr>
+          <p:cNvPr id="11" name="Text 9"/>
+          <p:cNvSpPr/>
+          <p:nvPr/>
+        </p:nvSpPr>
+        <p:spPr>
+          <a:xfrm>
+            <a:off x="868680" y="1508760"/>
+            <a:ext cx="6537960" cy="4160520"/>
           </a:xfrm>
           <a:prstGeom prst="rect">
             <a:avLst/>
@@ -9898,7 +10577,7 @@
           <a:lstStyle/>
           <a:p>
             <a:r>
-              <a:rPr lang="en-US" sz="1700" dirty="0">
+              <a:rPr lang="en-US" sz="2100" dirty="0">
                 <a:solidFill>
                   <a:srgbClr val="17364A"/>
                 </a:solidFill>
@@ -9908,11 +10587,11 @@
               </a:rPr>
               <a:t>CDC Evaluation Framework: https://www.cdc.gov/evaluation/</a:t>
             </a:r>
-            <a:endParaRPr lang="en-US" sz="1700" dirty="0"/>
-          </a:p>
-          <a:p>
-            <a:r>
-              <a:rPr lang="en-US" sz="1700" dirty="0">
+            <a:endParaRPr lang="en-US" sz="2100" dirty="0"/>
+          </a:p>
+          <a:p>
+            <a:r>
+              <a:rPr lang="en-US" sz="2100" dirty="0">
                 <a:solidFill>
                   <a:srgbClr val="17364A"/>
                 </a:solidFill>
@@ -9920,13 +10599,13 @@
                 <a:ea typeface="Aptos" pitchFamily="34" charset="-122"/>
                 <a:cs typeface="Aptos" pitchFamily="34" charset="-120"/>
               </a:rPr>
-              <a:t>NIST Artificial Intelligence Risk Management Framework: https://www.nist.gov/itl/ai-risk-management-framework</a:t>
-            </a:r>
-            <a:endParaRPr lang="en-US" sz="1700" dirty="0"/>
-          </a:p>
-          <a:p>
-            <a:r>
-              <a:rPr lang="en-US" sz="1700" dirty="0">
+              <a:t>NIST Artificial Intelligence Risk Management Framework:.</a:t>
+            </a:r>
+            <a:endParaRPr lang="en-US" sz="2100" dirty="0"/>
+          </a:p>
+          <a:p>
+            <a:r>
+              <a:rPr lang="en-US" sz="2100" dirty="0">
                 <a:solidFill>
                   <a:srgbClr val="17364A"/>
                 </a:solidFill>
@@ -9936,27 +10615,13 @@
               </a:rPr>
               <a:t>NIST AI RMF Generative AI Profile:.</a:t>
             </a:r>
-            <a:endParaRPr lang="en-US" sz="1700" dirty="0"/>
-          </a:p>
-          <a:p>
-            <a:r>
-              <a:rPr lang="en-US" sz="1700" dirty="0">
-                <a:solidFill>
-                  <a:srgbClr val="17364A"/>
-                </a:solidFill>
-                <a:latin typeface="Aptos" pitchFamily="34" charset="0"/>
-                <a:ea typeface="Aptos" pitchFamily="34" charset="-122"/>
-                <a:cs typeface="Aptos" pitchFamily="34" charset="-120"/>
-              </a:rPr>
-              <a:t>CDC Public Health Data Strategy: https://www.cdc.gov/public-health-data-strategy/php/about/index.html</a:t>
-            </a:r>
-            <a:endParaRPr lang="en-US" sz="1700" dirty="0"/>
-          </a:p>
-        </p:txBody>
-      </p:sp>
-      <p:sp>
-        <p:nvSpPr>
-          <p:cNvPr id="11" name="Shape 9"/>
+            <a:endParaRPr lang="en-US" sz="2100" dirty="0"/>
+          </a:p>
+        </p:txBody>
+      </p:sp>
+      <p:sp>
+        <p:nvSpPr>
+          <p:cNvPr id="12" name="Shape 10"/>
           <p:cNvSpPr/>
           <p:nvPr/>
         </p:nvSpPr>
@@ -9983,14 +10648,14 @@
       </p:sp>
       <p:sp>
         <p:nvSpPr>
-          <p:cNvPr id="12" name="Text 10"/>
+          <p:cNvPr id="13" name="Text 11"/>
           <p:cNvSpPr/>
           <p:nvPr/>
         </p:nvSpPr>
         <p:spPr>
           <a:xfrm>
             <a:off x="8074152" y="1563624"/>
-            <a:ext cx="2825496" cy="201168"/>
+            <a:ext cx="2825496" cy="256032"/>
           </a:xfrm>
           <a:prstGeom prst="rect">
             <a:avLst/>
@@ -10006,7 +10671,7 @@
               <a:buNone/>
             </a:pPr>
             <a:r>
-              <a:rPr lang="en-US" sz="950" b="1" dirty="0">
+              <a:rPr lang="en-US" sz="1300" b="1" dirty="0">
                 <a:solidFill>
                   <a:srgbClr val="0068B7"/>
                 </a:solidFill>
@@ -10016,20 +10681,20 @@
               </a:rPr>
               <a:t>Key idea</a:t>
             </a:r>
-            <a:endParaRPr lang="en-US" sz="950" dirty="0"/>
-          </a:p>
-        </p:txBody>
-      </p:sp>
-      <p:sp>
-        <p:nvSpPr>
-          <p:cNvPr id="13" name="Text 11"/>
-          <p:cNvSpPr/>
-          <p:nvPr/>
-        </p:nvSpPr>
-        <p:spPr>
-          <a:xfrm>
-            <a:off x="8074152" y="1856232"/>
-            <a:ext cx="2825496" cy="1261872"/>
+            <a:endParaRPr lang="en-US" sz="1300" dirty="0"/>
+          </a:p>
+        </p:txBody>
+      </p:sp>
+      <p:sp>
+        <p:nvSpPr>
+          <p:cNvPr id="14" name="Text 12"/>
+          <p:cNvSpPr/>
+          <p:nvPr/>
+        </p:nvSpPr>
+        <p:spPr>
+          <a:xfrm>
+            <a:off x="8074152" y="1920240"/>
+            <a:ext cx="2825496" cy="1188720"/>
           </a:xfrm>
           <a:prstGeom prst="rect">
             <a:avLst/>
@@ -10047,7 +10712,7 @@
               <a:buNone/>
             </a:pPr>
             <a:r>
-              <a:rPr lang="en-US" sz="1250" dirty="0">
+              <a:rPr lang="en-US" sz="1550" dirty="0">
                 <a:solidFill>
                   <a:srgbClr val="17364A"/>
                 </a:solidFill>
@@ -10057,13 +10722,13 @@
               </a:rPr>
               <a:t>CDC Evaluation Framework: https://www.cdc.gov/evaluation/</a:t>
             </a:r>
-            <a:endParaRPr lang="en-US" sz="1250" dirty="0"/>
-          </a:p>
-        </p:txBody>
-      </p:sp>
-      <p:sp>
-        <p:nvSpPr>
-          <p:cNvPr id="14" name="Shape 12"/>
+            <a:endParaRPr lang="en-US" sz="1550" dirty="0"/>
+          </a:p>
+        </p:txBody>
+      </p:sp>
+      <p:sp>
+        <p:nvSpPr>
+          <p:cNvPr id="15" name="Shape 13"/>
           <p:cNvSpPr/>
           <p:nvPr/>
         </p:nvSpPr>
@@ -10090,14 +10755,14 @@
       </p:sp>
       <p:sp>
         <p:nvSpPr>
-          <p:cNvPr id="15" name="Text 13"/>
+          <p:cNvPr id="16" name="Text 14"/>
           <p:cNvSpPr/>
           <p:nvPr/>
         </p:nvSpPr>
         <p:spPr>
           <a:xfrm>
             <a:off x="8074152" y="3666744"/>
-            <a:ext cx="2825496" cy="201168"/>
+            <a:ext cx="2825496" cy="256032"/>
           </a:xfrm>
           <a:prstGeom prst="rect">
             <a:avLst/>
@@ -10113,7 +10778,7 @@
               <a:buNone/>
             </a:pPr>
             <a:r>
-              <a:rPr lang="en-US" sz="950" b="1" dirty="0">
+              <a:rPr lang="en-US" sz="1300" b="1" dirty="0">
                 <a:solidFill>
                   <a:srgbClr val="0068B7"/>
                 </a:solidFill>
@@ -10123,20 +10788,20 @@
               </a:rPr>
               <a:t>Use this for</a:t>
             </a:r>
-            <a:endParaRPr lang="en-US" sz="950" dirty="0"/>
-          </a:p>
-        </p:txBody>
-      </p:sp>
-      <p:sp>
-        <p:nvSpPr>
-          <p:cNvPr id="16" name="Text 14"/>
-          <p:cNvSpPr/>
-          <p:nvPr/>
-        </p:nvSpPr>
-        <p:spPr>
-          <a:xfrm>
-            <a:off x="8074152" y="3959352"/>
-            <a:ext cx="2825496" cy="1170432"/>
+            <a:endParaRPr lang="en-US" sz="1300" dirty="0"/>
+          </a:p>
+        </p:txBody>
+      </p:sp>
+      <p:sp>
+        <p:nvSpPr>
+          <p:cNvPr id="17" name="Text 15"/>
+          <p:cNvSpPr/>
+          <p:nvPr/>
+        </p:nvSpPr>
+        <p:spPr>
+          <a:xfrm>
+            <a:off x="8074152" y="4023360"/>
+            <a:ext cx="2825496" cy="1097280"/>
           </a:xfrm>
           <a:prstGeom prst="rect">
             <a:avLst/>
@@ -10154,7 +10819,7 @@
               <a:buNone/>
             </a:pPr>
             <a:r>
-              <a:rPr lang="en-US" sz="1250" dirty="0">
+              <a:rPr lang="en-US" sz="1550" dirty="0">
                 <a:solidFill>
                   <a:srgbClr val="17364A"/>
                 </a:solidFill>
@@ -10164,7 +10829,7 @@
               </a:rPr>
               <a:t>Connect the concept to public health decisions, safeguards, documentation, or implementation work.</a:t>
             </a:r>
-            <a:endParaRPr lang="en-US" sz="1250" dirty="0"/>
+            <a:endParaRPr lang="en-US" sz="1550" dirty="0"/>
           </a:p>
         </p:txBody>
       </p:sp>
@@ -10361,7 +11026,7 @@
                 <a:ea typeface="Aptos" pitchFamily="34" charset="-122"/>
                 <a:cs typeface="Aptos" pitchFamily="34" charset="-120"/>
               </a:rPr>
-              <a:t>© Paula Soper</a:t>
+              <a:t>Â© Paula Soper</a:t>
             </a:r>
             <a:endParaRPr lang="en-US" sz="800" dirty="0"/>
           </a:p>
@@ -10375,8 +11040,47 @@
         </p:nvSpPr>
         <p:spPr>
           <a:xfrm>
+            <a:off x="11137392" y="6510528"/>
+            <a:ext cx="411480" cy="201168"/>
+          </a:xfrm>
+          <a:prstGeom prst="rect">
+            <a:avLst/>
+          </a:prstGeom>
+          <a:noFill/>
+          <a:ln/>
+        </p:spPr>
+        <p:txBody>
+          <a:bodyPr wrap="square" lIns="0" tIns="0" rIns="0" bIns="0" rtlCol="0" anchor="ctr"/>
+          <a:lstStyle/>
+          <a:p>
+            <a:pPr algn="r" indent="0" marL="0">
+              <a:buNone/>
+            </a:pPr>
+            <a:r>
+              <a:rPr lang="en-US" sz="900" dirty="0">
+                <a:solidFill>
+                  <a:srgbClr val="5F7181"/>
+                </a:solidFill>
+                <a:latin typeface="Aptos" pitchFamily="34" charset="0"/>
+                <a:ea typeface="Aptos" pitchFamily="34" charset="-122"/>
+                <a:cs typeface="Aptos" pitchFamily="34" charset="-120"/>
+              </a:rPr>
+              <a:t>3</a:t>
+            </a:r>
+            <a:endParaRPr lang="en-US" sz="900" dirty="0"/>
+          </a:p>
+        </p:txBody>
+      </p:sp>
+      <p:sp>
+        <p:nvSpPr>
+          <p:cNvPr id="8" name="Text 6"/>
+          <p:cNvSpPr/>
+          <p:nvPr/>
+        </p:nvSpPr>
+        <p:spPr>
+          <a:xfrm>
             <a:off x="640080" y="658368"/>
-            <a:ext cx="10881360" cy="566928"/>
+            <a:ext cx="10881360" cy="713232"/>
           </a:xfrm>
           <a:prstGeom prst="rect">
             <a:avLst/>
@@ -10394,7 +11098,7 @@
               <a:buNone/>
             </a:pPr>
             <a:r>
-              <a:rPr lang="en-US" sz="2700" b="1" dirty="0">
+              <a:rPr lang="en-US" sz="3400" b="1" dirty="0">
                 <a:solidFill>
                   <a:srgbClr val="003A63"/>
                 </a:solidFill>
@@ -10404,20 +11108,20 @@
               </a:rPr>
               <a:t>How this module connects to the playbook</a:t>
             </a:r>
-            <a:endParaRPr lang="en-US" sz="2700" dirty="0"/>
-          </a:p>
-        </p:txBody>
-      </p:sp>
-      <p:sp>
-        <p:nvSpPr>
-          <p:cNvPr id="8" name="Text 6"/>
-          <p:cNvSpPr/>
-          <p:nvPr/>
-        </p:nvSpPr>
-        <p:spPr>
-          <a:xfrm>
-            <a:off x="868680" y="1417320"/>
-            <a:ext cx="6903720" cy="4480560"/>
+            <a:endParaRPr lang="en-US" sz="3400" dirty="0"/>
+          </a:p>
+        </p:txBody>
+      </p:sp>
+      <p:sp>
+        <p:nvSpPr>
+          <p:cNvPr id="9" name="Text 7"/>
+          <p:cNvSpPr/>
+          <p:nvPr/>
+        </p:nvSpPr>
+        <p:spPr>
+          <a:xfrm>
+            <a:off x="868680" y="1508760"/>
+            <a:ext cx="6812280" cy="3977640"/>
           </a:xfrm>
           <a:prstGeom prst="rect">
             <a:avLst/>
@@ -10432,7 +11136,7 @@
           <a:lstStyle/>
           <a:p>
             <a:r>
-              <a:rPr lang="en-US" sz="1540" dirty="0">
+              <a:rPr lang="en-US" sz="1900" dirty="0">
                 <a:solidFill>
                   <a:srgbClr val="17364A"/>
                 </a:solidFill>
@@ -10440,13 +11144,13 @@
                 <a:ea typeface="Aptos" pitchFamily="34" charset="-122"/>
                 <a:cs typeface="Aptos" pitchFamily="34" charset="-120"/>
               </a:rPr>
-              <a:t>Play 11: Build and Deploy AI Solutions - This lesson informs Play 11 by helping learners connect the lesson topic to build and deploy.</a:t>
-            </a:r>
-            <a:endParaRPr lang="en-US" sz="1540" dirty="0"/>
-          </a:p>
-          <a:p>
-            <a:r>
-              <a:rPr lang="en-US" sz="1540" dirty="0">
+              <a:t>Play 11: Build and Deploy AI Solutions - This lesson informs Play 11 by helping learners connect the lesson.</a:t>
+            </a:r>
+            <a:endParaRPr lang="en-US" sz="1900" dirty="0"/>
+          </a:p>
+          <a:p>
+            <a:r>
+              <a:rPr lang="en-US" sz="1900" dirty="0">
                 <a:solidFill>
                   <a:srgbClr val="17364A"/>
                 </a:solidFill>
@@ -10454,13 +11158,13 @@
                 <a:ea typeface="Aptos" pitchFamily="34" charset="-122"/>
                 <a:cs typeface="Aptos" pitchFamily="34" charset="-120"/>
               </a:rPr>
-              <a:t>Play 2: Readiness Assessment - This lesson informs Play 2 by helping learners connect the lesson topic to readiness assessment work.</a:t>
-            </a:r>
-            <a:endParaRPr lang="en-US" sz="1540" dirty="0"/>
-          </a:p>
-          <a:p>
-            <a:r>
-              <a:rPr lang="en-US" sz="1540" dirty="0">
+              <a:t>Play 2: Readiness Assessment - This lesson informs Play 2 by helping learners connect the lesson topic to.</a:t>
+            </a:r>
+            <a:endParaRPr lang="en-US" sz="1900" dirty="0"/>
+          </a:p>
+          <a:p>
+            <a:r>
+              <a:rPr lang="en-US" sz="1900" dirty="0">
                 <a:solidFill>
                   <a:srgbClr val="17364A"/>
                 </a:solidFill>
@@ -10468,13 +11172,13 @@
                 <a:ea typeface="Aptos" pitchFamily="34" charset="-122"/>
                 <a:cs typeface="Aptos" pitchFamily="34" charset="-120"/>
               </a:rPr>
-              <a:t>Play 1: Vision &amp; Guardrails - This lesson informs Play 1 by helping learners connect the lesson topic to vision &amp; guardrails work in.</a:t>
-            </a:r>
-            <a:endParaRPr lang="en-US" sz="1540" dirty="0"/>
-          </a:p>
-          <a:p>
-            <a:r>
-              <a:rPr lang="en-US" sz="1540" dirty="0">
+              <a:t>Play 1: Vision &amp; Guardrails - This lesson informs Play 1 by helping learners connect the lesson topic to.</a:t>
+            </a:r>
+            <a:endParaRPr lang="en-US" sz="1900" dirty="0"/>
+          </a:p>
+          <a:p>
+            <a:r>
+              <a:rPr lang="en-US" sz="1900" dirty="0">
                 <a:solidFill>
                   <a:srgbClr val="17364A"/>
                 </a:solidFill>
@@ -10482,15 +11186,15 @@
                 <a:ea typeface="Aptos" pitchFamily="34" charset="-122"/>
                 <a:cs typeface="Aptos" pitchFamily="34" charset="-120"/>
               </a:rPr>
-              <a:t>Play 7: Prioritize Use Cases - This lesson informs Play 7 by helping learners connect the lesson topic to prioritize use cases work.</a:t>
-            </a:r>
-            <a:endParaRPr lang="en-US" sz="1540" dirty="0"/>
-          </a:p>
-        </p:txBody>
-      </p:sp>
-      <p:sp>
-        <p:nvSpPr>
-          <p:cNvPr id="9" name="Shape 7"/>
+              <a:t>Play 7: Prioritize Use Cases - This lesson informs Play 7 by helping learners connect the lesson topic to.</a:t>
+            </a:r>
+            <a:endParaRPr lang="en-US" sz="1900" dirty="0"/>
+          </a:p>
+        </p:txBody>
+      </p:sp>
+      <p:sp>
+        <p:nvSpPr>
+          <p:cNvPr id="10" name="Shape 8"/>
           <p:cNvSpPr/>
           <p:nvPr/>
         </p:nvSpPr>
@@ -10517,14 +11221,14 @@
       </p:sp>
       <p:sp>
         <p:nvSpPr>
-          <p:cNvPr id="10" name="Text 8"/>
+          <p:cNvPr id="11" name="Text 9"/>
           <p:cNvSpPr/>
           <p:nvPr/>
         </p:nvSpPr>
         <p:spPr>
           <a:xfrm>
             <a:off x="8211312" y="1563624"/>
-            <a:ext cx="2734056" cy="201168"/>
+            <a:ext cx="2734056" cy="256032"/>
           </a:xfrm>
           <a:prstGeom prst="rect">
             <a:avLst/>
@@ -10540,7 +11244,7 @@
               <a:buNone/>
             </a:pPr>
             <a:r>
-              <a:rPr lang="en-US" sz="950" b="1" dirty="0">
+              <a:rPr lang="en-US" sz="1300" b="1" dirty="0">
                 <a:solidFill>
                   <a:srgbClr val="0068B7"/>
                 </a:solidFill>
@@ -10550,20 +11254,20 @@
               </a:rPr>
               <a:t>Apply the lesson</a:t>
             </a:r>
-            <a:endParaRPr lang="en-US" sz="950" dirty="0"/>
-          </a:p>
-        </p:txBody>
-      </p:sp>
-      <p:sp>
-        <p:nvSpPr>
-          <p:cNvPr id="11" name="Text 9"/>
-          <p:cNvSpPr/>
-          <p:nvPr/>
-        </p:nvSpPr>
-        <p:spPr>
-          <a:xfrm>
-            <a:off x="8211312" y="1856232"/>
-            <a:ext cx="2734056" cy="1536192"/>
+            <a:endParaRPr lang="en-US" sz="1300" dirty="0"/>
+          </a:p>
+        </p:txBody>
+      </p:sp>
+      <p:sp>
+        <p:nvSpPr>
+          <p:cNvPr id="12" name="Text 10"/>
+          <p:cNvSpPr/>
+          <p:nvPr/>
+        </p:nvSpPr>
+        <p:spPr>
+          <a:xfrm>
+            <a:off x="8211312" y="1920240"/>
+            <a:ext cx="2734056" cy="1463040"/>
           </a:xfrm>
           <a:prstGeom prst="rect">
             <a:avLst/>
@@ -10581,7 +11285,7 @@
               <a:buNone/>
             </a:pPr>
             <a:r>
-              <a:rPr lang="en-US" sz="1250" dirty="0">
+              <a:rPr lang="en-US" sz="1550" dirty="0">
                 <a:solidFill>
                   <a:srgbClr val="17364A"/>
                 </a:solidFill>
@@ -10591,32 +11295,32 @@
               </a:rPr>
               <a:t>Use the related plays to identify decisions, participants, timing, approvals, and documentation needed for responsible implementation.</a:t>
             </a:r>
-            <a:endParaRPr lang="en-US" sz="1250" dirty="0"/>
-          </a:p>
-        </p:txBody>
-      </p:sp>
-      <p:sp>
-        <p:nvSpPr>
-          <p:cNvPr id="12" name="Shape 10"/>
-          <p:cNvSpPr/>
-          <p:nvPr/>
-        </p:nvSpPr>
-        <p:spPr>
-          <a:xfrm>
-            <a:off x="8046720" y="3794760"/>
-            <a:ext cx="3063240" cy="1508760"/>
+            <a:endParaRPr lang="en-US" sz="1550" dirty="0"/>
+          </a:p>
+        </p:txBody>
+      </p:sp>
+      <p:sp>
+        <p:nvSpPr>
+          <p:cNvPr id="13" name="Shape 11"/>
+          <p:cNvSpPr/>
+          <p:nvPr/>
+        </p:nvSpPr>
+        <p:spPr>
+          <a:xfrm>
+            <a:off x="7818120" y="3977640"/>
+            <a:ext cx="972312" cy="749808"/>
           </a:xfrm>
           <a:prstGeom prst="roundRect">
             <a:avLst>
-              <a:gd name="adj" fmla="val 7273"/>
+              <a:gd name="adj" fmla="val 14634"/>
             </a:avLst>
           </a:prstGeom>
           <a:solidFill>
-            <a:srgbClr val="FFF4D9"/>
+            <a:srgbClr val="0068B7"/>
           </a:solidFill>
           <a:ln w="12700">
             <a:solidFill>
-              <a:srgbClr val="B9D7E6"/>
+              <a:srgbClr val="0068B7"/>
             </a:solidFill>
             <a:prstDash val="solid"/>
           </a:ln>
@@ -10624,81 +11328,256 @@
       </p:sp>
       <p:sp>
         <p:nvSpPr>
-          <p:cNvPr id="13" name="Text 11"/>
-          <p:cNvSpPr/>
-          <p:nvPr/>
-        </p:nvSpPr>
-        <p:spPr>
-          <a:xfrm>
-            <a:off x="8211312" y="3941064"/>
-            <a:ext cx="2734056" cy="201168"/>
-          </a:xfrm>
-          <a:prstGeom prst="rect">
-            <a:avLst/>
-          </a:prstGeom>
-          <a:noFill/>
-          <a:ln/>
-        </p:spPr>
-        <p:txBody>
-          <a:bodyPr wrap="square" lIns="0" tIns="0" rIns="0" bIns="0" rtlCol="0" anchor="ctr"/>
-          <a:lstStyle/>
-          <a:p>
-            <a:pPr indent="0" marL="0">
-              <a:buNone/>
-            </a:pPr>
-            <a:r>
-              <a:rPr lang="en-US" sz="950" b="1" dirty="0">
-                <a:solidFill>
-                  <a:srgbClr val="0068B7"/>
-                </a:solidFill>
-                <a:latin typeface="Aptos" pitchFamily="34" charset="0"/>
-                <a:ea typeface="Aptos" pitchFamily="34" charset="-122"/>
-                <a:cs typeface="Aptos" pitchFamily="34" charset="-120"/>
-              </a:rPr>
-              <a:t>Keep in mind</a:t>
-            </a:r>
-            <a:endParaRPr lang="en-US" sz="950" dirty="0"/>
-          </a:p>
-        </p:txBody>
-      </p:sp>
-      <p:sp>
-        <p:nvSpPr>
           <p:cNvPr id="14" name="Text 12"/>
           <p:cNvSpPr/>
           <p:nvPr/>
         </p:nvSpPr>
         <p:spPr>
           <a:xfrm>
-            <a:off x="8211312" y="4233672"/>
-            <a:ext cx="2734056" cy="941832"/>
-          </a:xfrm>
-          <a:prstGeom prst="rect">
-            <a:avLst/>
-          </a:prstGeom>
-          <a:noFill/>
-          <a:ln/>
-        </p:spPr>
-        <p:txBody>
-          <a:bodyPr wrap="square" lIns="0" tIns="0" rIns="0" bIns="0" rtlCol="0" anchor="t">
+            <a:off x="7891272" y="4169664"/>
+            <a:ext cx="826008" cy="310896"/>
+          </a:xfrm>
+          <a:prstGeom prst="rect">
+            <a:avLst/>
+          </a:prstGeom>
+          <a:noFill/>
+          <a:ln/>
+        </p:spPr>
+        <p:txBody>
+          <a:bodyPr wrap="square" lIns="0" tIns="0" rIns="0" bIns="0" rtlCol="0" anchor="ctr">
             <a:normAutofit/>
           </a:bodyPr>
           <a:lstStyle/>
           <a:p>
-            <a:pPr indent="0" marL="0">
-              <a:buNone/>
-            </a:pPr>
-            <a:r>
-              <a:rPr lang="en-US" sz="1250" dirty="0">
-                <a:solidFill>
-                  <a:srgbClr val="17364A"/>
-                </a:solidFill>
-                <a:latin typeface="Aptos" pitchFamily="34" charset="0"/>
-                <a:ea typeface="Aptos" pitchFamily="34" charset="-122"/>
-                <a:cs typeface="Aptos" pitchFamily="34" charset="-120"/>
-              </a:rPr>
-              <a:t>The playbook connection helps turn training into agency work, not just individual knowledge.</a:t>
-            </a:r>
-            <a:endParaRPr lang="en-US" sz="1250" dirty="0"/>
+            <a:pPr algn="ctr" indent="0" marL="0">
+              <a:buNone/>
+            </a:pPr>
+            <a:r>
+              <a:rPr lang="en-US" sz="1500" b="1" dirty="0">
+                <a:solidFill>
+                  <a:srgbClr val="FFFFFF"/>
+                </a:solidFill>
+                <a:latin typeface="Aptos" pitchFamily="34" charset="0"/>
+                <a:ea typeface="Aptos" pitchFamily="34" charset="-122"/>
+                <a:cs typeface="Aptos" pitchFamily="34" charset="-120"/>
+              </a:rPr>
+              <a:t>Lesson</a:t>
+            </a:r>
+            <a:endParaRPr lang="en-US" sz="1500" dirty="0"/>
+          </a:p>
+        </p:txBody>
+      </p:sp>
+      <p:sp>
+        <p:nvSpPr>
+          <p:cNvPr id="15" name="Text 13"/>
+          <p:cNvSpPr/>
+          <p:nvPr/>
+        </p:nvSpPr>
+        <p:spPr>
+          <a:xfrm>
+            <a:off x="8817864" y="4187952"/>
+            <a:ext cx="201168" cy="256032"/>
+          </a:xfrm>
+          <a:prstGeom prst="rect">
+            <a:avLst/>
+          </a:prstGeom>
+          <a:noFill/>
+          <a:ln/>
+        </p:spPr>
+        <p:txBody>
+          <a:bodyPr wrap="square" lIns="0" tIns="0" rIns="0" bIns="0" rtlCol="0" anchor="ctr"/>
+          <a:lstStyle/>
+          <a:p>
+            <a:pPr algn="ctr" indent="0" marL="0">
+              <a:buNone/>
+            </a:pPr>
+            <a:r>
+              <a:rPr lang="en-US" sz="1800" b="1" dirty="0">
+                <a:solidFill>
+                  <a:srgbClr val="0068B7"/>
+                </a:solidFill>
+                <a:latin typeface="Aptos" pitchFamily="34" charset="0"/>
+                <a:ea typeface="Aptos" pitchFamily="34" charset="-122"/>
+                <a:cs typeface="Aptos" pitchFamily="34" charset="-120"/>
+              </a:rPr>
+              <a:t>â†’</a:t>
+            </a:r>
+            <a:endParaRPr lang="en-US" sz="1800" dirty="0"/>
+          </a:p>
+        </p:txBody>
+      </p:sp>
+      <p:sp>
+        <p:nvSpPr>
+          <p:cNvPr id="16" name="Shape 14"/>
+          <p:cNvSpPr/>
+          <p:nvPr/>
+        </p:nvSpPr>
+        <p:spPr>
+          <a:xfrm>
+            <a:off x="9046464" y="3977640"/>
+            <a:ext cx="972312" cy="749808"/>
+          </a:xfrm>
+          <a:prstGeom prst="roundRect">
+            <a:avLst>
+              <a:gd name="adj" fmla="val 14634"/>
+            </a:avLst>
+          </a:prstGeom>
+          <a:solidFill>
+            <a:srgbClr val="2F8A28"/>
+          </a:solidFill>
+          <a:ln w="12700">
+            <a:solidFill>
+              <a:srgbClr val="2F8A28"/>
+            </a:solidFill>
+            <a:prstDash val="solid"/>
+          </a:ln>
+        </p:spPr>
+      </p:sp>
+      <p:sp>
+        <p:nvSpPr>
+          <p:cNvPr id="17" name="Text 15"/>
+          <p:cNvSpPr/>
+          <p:nvPr/>
+        </p:nvSpPr>
+        <p:spPr>
+          <a:xfrm>
+            <a:off x="9119616" y="4169664"/>
+            <a:ext cx="826008" cy="310896"/>
+          </a:xfrm>
+          <a:prstGeom prst="rect">
+            <a:avLst/>
+          </a:prstGeom>
+          <a:noFill/>
+          <a:ln/>
+        </p:spPr>
+        <p:txBody>
+          <a:bodyPr wrap="square" lIns="0" tIns="0" rIns="0" bIns="0" rtlCol="0" anchor="ctr">
+            <a:normAutofit/>
+          </a:bodyPr>
+          <a:lstStyle/>
+          <a:p>
+            <a:pPr algn="ctr" indent="0" marL="0">
+              <a:buNone/>
+            </a:pPr>
+            <a:r>
+              <a:rPr lang="en-US" sz="1500" b="1" dirty="0">
+                <a:solidFill>
+                  <a:srgbClr val="FFFFFF"/>
+                </a:solidFill>
+                <a:latin typeface="Aptos" pitchFamily="34" charset="0"/>
+                <a:ea typeface="Aptos" pitchFamily="34" charset="-122"/>
+                <a:cs typeface="Aptos" pitchFamily="34" charset="-120"/>
+              </a:rPr>
+              <a:t>Plays</a:t>
+            </a:r>
+            <a:endParaRPr lang="en-US" sz="1500" dirty="0"/>
+          </a:p>
+        </p:txBody>
+      </p:sp>
+      <p:sp>
+        <p:nvSpPr>
+          <p:cNvPr id="18" name="Text 16"/>
+          <p:cNvSpPr/>
+          <p:nvPr/>
+        </p:nvSpPr>
+        <p:spPr>
+          <a:xfrm>
+            <a:off x="10046208" y="4187952"/>
+            <a:ext cx="201168" cy="256032"/>
+          </a:xfrm>
+          <a:prstGeom prst="rect">
+            <a:avLst/>
+          </a:prstGeom>
+          <a:noFill/>
+          <a:ln/>
+        </p:spPr>
+        <p:txBody>
+          <a:bodyPr wrap="square" lIns="0" tIns="0" rIns="0" bIns="0" rtlCol="0" anchor="ctr"/>
+          <a:lstStyle/>
+          <a:p>
+            <a:pPr algn="ctr" indent="0" marL="0">
+              <a:buNone/>
+            </a:pPr>
+            <a:r>
+              <a:rPr lang="en-US" sz="1800" b="1" dirty="0">
+                <a:solidFill>
+                  <a:srgbClr val="0068B7"/>
+                </a:solidFill>
+                <a:latin typeface="Aptos" pitchFamily="34" charset="0"/>
+                <a:ea typeface="Aptos" pitchFamily="34" charset="-122"/>
+                <a:cs typeface="Aptos" pitchFamily="34" charset="-120"/>
+              </a:rPr>
+              <a:t>â†’</a:t>
+            </a:r>
+            <a:endParaRPr lang="en-US" sz="1800" dirty="0"/>
+          </a:p>
+        </p:txBody>
+      </p:sp>
+      <p:sp>
+        <p:nvSpPr>
+          <p:cNvPr id="19" name="Shape 17"/>
+          <p:cNvSpPr/>
+          <p:nvPr/>
+        </p:nvSpPr>
+        <p:spPr>
+          <a:xfrm>
+            <a:off x="10274808" y="3977640"/>
+            <a:ext cx="972312" cy="749808"/>
+          </a:xfrm>
+          <a:prstGeom prst="roundRect">
+            <a:avLst>
+              <a:gd name="adj" fmla="val 14634"/>
+            </a:avLst>
+          </a:prstGeom>
+          <a:solidFill>
+            <a:srgbClr val="6A4CA3"/>
+          </a:solidFill>
+          <a:ln w="12700">
+            <a:solidFill>
+              <a:srgbClr val="6A4CA3"/>
+            </a:solidFill>
+            <a:prstDash val="solid"/>
+          </a:ln>
+        </p:spPr>
+      </p:sp>
+      <p:sp>
+        <p:nvSpPr>
+          <p:cNvPr id="20" name="Text 18"/>
+          <p:cNvSpPr/>
+          <p:nvPr/>
+        </p:nvSpPr>
+        <p:spPr>
+          <a:xfrm>
+            <a:off x="10347960" y="4169664"/>
+            <a:ext cx="826008" cy="310896"/>
+          </a:xfrm>
+          <a:prstGeom prst="rect">
+            <a:avLst/>
+          </a:prstGeom>
+          <a:noFill/>
+          <a:ln/>
+        </p:spPr>
+        <p:txBody>
+          <a:bodyPr wrap="square" lIns="0" tIns="0" rIns="0" bIns="0" rtlCol="0" anchor="ctr">
+            <a:normAutofit/>
+          </a:bodyPr>
+          <a:lstStyle/>
+          <a:p>
+            <a:pPr algn="ctr" indent="0" marL="0">
+              <a:buNone/>
+            </a:pPr>
+            <a:r>
+              <a:rPr lang="en-US" sz="1500" b="1" dirty="0">
+                <a:solidFill>
+                  <a:srgbClr val="FFFFFF"/>
+                </a:solidFill>
+                <a:latin typeface="Aptos" pitchFamily="34" charset="0"/>
+                <a:ea typeface="Aptos" pitchFamily="34" charset="-122"/>
+                <a:cs typeface="Aptos" pitchFamily="34" charset="-120"/>
+              </a:rPr>
+              <a:t>Action</a:t>
+            </a:r>
+            <a:endParaRPr lang="en-US" sz="1500" dirty="0"/>
           </a:p>
         </p:txBody>
       </p:sp>
@@ -10895,7 +11774,7 @@
                 <a:ea typeface="Aptos" pitchFamily="34" charset="-122"/>
                 <a:cs typeface="Aptos" pitchFamily="34" charset="-120"/>
               </a:rPr>
-              <a:t>© Paula Soper</a:t>
+              <a:t>Â© Paula Soper</a:t>
             </a:r>
             <a:endParaRPr lang="en-US" sz="800" dirty="0"/>
           </a:p>
@@ -10909,8 +11788,47 @@
         </p:nvSpPr>
         <p:spPr>
           <a:xfrm>
+            <a:off x="11137392" y="6510528"/>
+            <a:ext cx="411480" cy="201168"/>
+          </a:xfrm>
+          <a:prstGeom prst="rect">
+            <a:avLst/>
+          </a:prstGeom>
+          <a:noFill/>
+          <a:ln/>
+        </p:spPr>
+        <p:txBody>
+          <a:bodyPr wrap="square" lIns="0" tIns="0" rIns="0" bIns="0" rtlCol="0" anchor="ctr"/>
+          <a:lstStyle/>
+          <a:p>
+            <a:pPr algn="r" indent="0" marL="0">
+              <a:buNone/>
+            </a:pPr>
+            <a:r>
+              <a:rPr lang="en-US" sz="900" dirty="0">
+                <a:solidFill>
+                  <a:srgbClr val="5F7181"/>
+                </a:solidFill>
+                <a:latin typeface="Aptos" pitchFamily="34" charset="0"/>
+                <a:ea typeface="Aptos" pitchFamily="34" charset="-122"/>
+                <a:cs typeface="Aptos" pitchFamily="34" charset="-120"/>
+              </a:rPr>
+              <a:t>4</a:t>
+            </a:r>
+            <a:endParaRPr lang="en-US" sz="900" dirty="0"/>
+          </a:p>
+        </p:txBody>
+      </p:sp>
+      <p:sp>
+        <p:nvSpPr>
+          <p:cNvPr id="8" name="Text 6"/>
+          <p:cNvSpPr/>
+          <p:nvPr/>
+        </p:nvSpPr>
+        <p:spPr>
+          <a:xfrm>
             <a:off x="640080" y="658368"/>
-            <a:ext cx="10881360" cy="566928"/>
+            <a:ext cx="10881360" cy="713232"/>
           </a:xfrm>
           <a:prstGeom prst="rect">
             <a:avLst/>
@@ -10928,7 +11846,7 @@
               <a:buNone/>
             </a:pPr>
             <a:r>
-              <a:rPr lang="en-US" sz="2700" b="1" dirty="0">
+              <a:rPr lang="en-US" sz="3400" b="1" dirty="0">
                 <a:solidFill>
                   <a:srgbClr val="003A63"/>
                 </a:solidFill>
@@ -10938,20 +11856,20 @@
               </a:rPr>
               <a:t>Related toolkit resources</a:t>
             </a:r>
-            <a:endParaRPr lang="en-US" sz="2700" dirty="0"/>
-          </a:p>
-        </p:txBody>
-      </p:sp>
-      <p:sp>
-        <p:nvSpPr>
-          <p:cNvPr id="8" name="Text 6"/>
-          <p:cNvSpPr/>
-          <p:nvPr/>
-        </p:nvSpPr>
-        <p:spPr>
-          <a:xfrm>
-            <a:off x="868680" y="1417320"/>
-            <a:ext cx="6903720" cy="4480560"/>
+            <a:endParaRPr lang="en-US" sz="3400" dirty="0"/>
+          </a:p>
+        </p:txBody>
+      </p:sp>
+      <p:sp>
+        <p:nvSpPr>
+          <p:cNvPr id="9" name="Text 7"/>
+          <p:cNvSpPr/>
+          <p:nvPr/>
+        </p:nvSpPr>
+        <p:spPr>
+          <a:xfrm>
+            <a:off x="868680" y="1508760"/>
+            <a:ext cx="6812280" cy="3977640"/>
           </a:xfrm>
           <a:prstGeom prst="rect">
             <a:avLst/>
@@ -10966,7 +11884,7 @@
           <a:lstStyle/>
           <a:p>
             <a:r>
-              <a:rPr lang="en-US" sz="1460" dirty="0">
+              <a:rPr lang="en-US" sz="1850" dirty="0">
                 <a:solidFill>
                   <a:srgbClr val="17364A"/>
                 </a:solidFill>
@@ -10974,13 +11892,13 @@
                 <a:ea typeface="Aptos" pitchFamily="34" charset="-122"/>
                 <a:cs typeface="Aptos" pitchFamily="34" charset="-120"/>
               </a:rPr>
-              <a:t>Tool 4: AI Policy Landscape Scan (Worksheet) - Use AI Policy Landscape Scan to translate this lesson into a documented public health.</a:t>
-            </a:r>
-            <a:endParaRPr lang="en-US" sz="1460" dirty="0"/>
-          </a:p>
-          <a:p>
-            <a:r>
-              <a:rPr lang="en-US" sz="1460" dirty="0">
+              <a:t>Tool 4: AI Policy Landscape Scan (Worksheet) - Use AI Policy Landscape Scan to translate this lesson into a.</a:t>
+            </a:r>
+            <a:endParaRPr lang="en-US" sz="1850" dirty="0"/>
+          </a:p>
+          <a:p>
+            <a:r>
+              <a:rPr lang="en-US" sz="1850" dirty="0">
                 <a:solidFill>
                   <a:srgbClr val="17364A"/>
                 </a:solidFill>
@@ -10988,13 +11906,13 @@
                 <a:ea typeface="Aptos" pitchFamily="34" charset="-122"/>
                 <a:cs typeface="Aptos" pitchFamily="34" charset="-120"/>
               </a:rPr>
-              <a:t>Tool 5: AI Environmental and Resource Impact Review (Checklist) - Use AI Environmental and Resource Impact Review to translate this.</a:t>
-            </a:r>
-            <a:endParaRPr lang="en-US" sz="1460" dirty="0"/>
-          </a:p>
-          <a:p>
-            <a:r>
-              <a:rPr lang="en-US" sz="1460" dirty="0">
+              <a:t>Tool 5: AI Environmental and Resource Impact Review (Checklist) - Use AI Environmental and Resource Impact.</a:t>
+            </a:r>
+            <a:endParaRPr lang="en-US" sz="1850" dirty="0"/>
+          </a:p>
+          <a:p>
+            <a:r>
+              <a:rPr lang="en-US" sz="1850" dirty="0">
                 <a:solidFill>
                   <a:srgbClr val="17364A"/>
                 </a:solidFill>
@@ -11002,13 +11920,13 @@
                 <a:ea typeface="Aptos" pitchFamily="34" charset="-122"/>
                 <a:cs typeface="Aptos" pitchFamily="34" charset="-120"/>
               </a:rPr>
-              <a:t>Tool 6: Human-Centered AI Decision Rule Checklist (Checklist) - Use Human-Centered AI Decision Rule Checklist to translate this.</a:t>
-            </a:r>
-            <a:endParaRPr lang="en-US" sz="1460" dirty="0"/>
-          </a:p>
-          <a:p>
-            <a:r>
-              <a:rPr lang="en-US" sz="1460" dirty="0">
+              <a:t>Tool 6: Human-Centered AI Decision Rule Checklist (Checklist) - Use Human-Centered AI Decision Rule.</a:t>
+            </a:r>
+            <a:endParaRPr lang="en-US" sz="1850" dirty="0"/>
+          </a:p>
+          <a:p>
+            <a:r>
+              <a:rPr lang="en-US" sz="1850" dirty="0">
                 <a:solidFill>
                   <a:srgbClr val="17364A"/>
                 </a:solidFill>
@@ -11016,29 +11934,15 @@
                 <a:ea typeface="Aptos" pitchFamily="34" charset="-122"/>
                 <a:cs typeface="Aptos" pitchFamily="34" charset="-120"/>
               </a:rPr>
-              <a:t>Tool 8: AI Project Charter (Planning) - Use AI Project Charter to translate this lesson into a documented public health AI planning,.</a:t>
-            </a:r>
-            <a:endParaRPr lang="en-US" sz="1460" dirty="0"/>
-          </a:p>
-          <a:p>
-            <a:r>
-              <a:rPr lang="en-US" sz="1460" dirty="0">
-                <a:solidFill>
-                  <a:srgbClr val="17364A"/>
-                </a:solidFill>
-                <a:latin typeface="Aptos" pitchFamily="34" charset="0"/>
-                <a:ea typeface="Aptos" pitchFamily="34" charset="-122"/>
-                <a:cs typeface="Aptos" pitchFamily="34" charset="-120"/>
-              </a:rPr>
-              <a:t>Tool 9: Data Quality Assessment Checklist (Checklist) - Use this tool to complete or strengthen the practical exercise for the module.</a:t>
-            </a:r>
-            <a:endParaRPr lang="en-US" sz="1460" dirty="0"/>
-          </a:p>
-        </p:txBody>
-      </p:sp>
-      <p:sp>
-        <p:nvSpPr>
-          <p:cNvPr id="9" name="Shape 7"/>
+              <a:t>Tool 8: AI Project Charter (Planning) - Use AI Project Charter to translate this lesson into a documented.</a:t>
+            </a:r>
+            <a:endParaRPr lang="en-US" sz="1850" dirty="0"/>
+          </a:p>
+        </p:txBody>
+      </p:sp>
+      <p:sp>
+        <p:nvSpPr>
+          <p:cNvPr id="10" name="Shape 8"/>
           <p:cNvSpPr/>
           <p:nvPr/>
         </p:nvSpPr>
@@ -11065,14 +11969,14 @@
       </p:sp>
       <p:sp>
         <p:nvSpPr>
-          <p:cNvPr id="10" name="Text 8"/>
+          <p:cNvPr id="11" name="Text 9"/>
           <p:cNvSpPr/>
           <p:nvPr/>
         </p:nvSpPr>
         <p:spPr>
           <a:xfrm>
             <a:off x="8211312" y="1563624"/>
-            <a:ext cx="2734056" cy="201168"/>
+            <a:ext cx="2734056" cy="256032"/>
           </a:xfrm>
           <a:prstGeom prst="rect">
             <a:avLst/>
@@ -11088,7 +11992,7 @@
               <a:buNone/>
             </a:pPr>
             <a:r>
-              <a:rPr lang="en-US" sz="950" b="1" dirty="0">
+              <a:rPr lang="en-US" sz="1300" b="1" dirty="0">
                 <a:solidFill>
                   <a:srgbClr val="0068B7"/>
                 </a:solidFill>
@@ -11098,20 +12002,20 @@
               </a:rPr>
               <a:t>Use the tools</a:t>
             </a:r>
-            <a:endParaRPr lang="en-US" sz="950" dirty="0"/>
-          </a:p>
-        </p:txBody>
-      </p:sp>
-      <p:sp>
-        <p:nvSpPr>
-          <p:cNvPr id="11" name="Text 9"/>
-          <p:cNvSpPr/>
-          <p:nvPr/>
-        </p:nvSpPr>
-        <p:spPr>
-          <a:xfrm>
-            <a:off x="8211312" y="1856232"/>
-            <a:ext cx="2734056" cy="1536192"/>
+            <a:endParaRPr lang="en-US" sz="1300" dirty="0"/>
+          </a:p>
+        </p:txBody>
+      </p:sp>
+      <p:sp>
+        <p:nvSpPr>
+          <p:cNvPr id="12" name="Text 10"/>
+          <p:cNvSpPr/>
+          <p:nvPr/>
+        </p:nvSpPr>
+        <p:spPr>
+          <a:xfrm>
+            <a:off x="8211312" y="1920240"/>
+            <a:ext cx="2734056" cy="1463040"/>
           </a:xfrm>
           <a:prstGeom prst="rect">
             <a:avLst/>
@@ -11129,7 +12033,7 @@
               <a:buNone/>
             </a:pPr>
             <a:r>
-              <a:rPr lang="en-US" sz="1250" dirty="0">
+              <a:rPr lang="en-US" sz="1550" dirty="0">
                 <a:solidFill>
                   <a:srgbClr val="17364A"/>
                 </a:solidFill>
@@ -11139,32 +12043,32 @@
               </a:rPr>
               <a:t>Use linked tools when your department needs a structured worksheet, template, checklist, review process, or documentation artifact.</a:t>
             </a:r>
-            <a:endParaRPr lang="en-US" sz="1250" dirty="0"/>
-          </a:p>
-        </p:txBody>
-      </p:sp>
-      <p:sp>
-        <p:nvSpPr>
-          <p:cNvPr id="12" name="Shape 10"/>
-          <p:cNvSpPr/>
-          <p:nvPr/>
-        </p:nvSpPr>
-        <p:spPr>
-          <a:xfrm>
-            <a:off x="8046720" y="3794760"/>
-            <a:ext cx="3063240" cy="1508760"/>
+            <a:endParaRPr lang="en-US" sz="1550" dirty="0"/>
+          </a:p>
+        </p:txBody>
+      </p:sp>
+      <p:sp>
+        <p:nvSpPr>
+          <p:cNvPr id="13" name="Shape 11"/>
+          <p:cNvSpPr/>
+          <p:nvPr/>
+        </p:nvSpPr>
+        <p:spPr>
+          <a:xfrm>
+            <a:off x="7818120" y="3977640"/>
+            <a:ext cx="972312" cy="749808"/>
           </a:xfrm>
           <a:prstGeom prst="roundRect">
             <a:avLst>
-              <a:gd name="adj" fmla="val 7273"/>
+              <a:gd name="adj" fmla="val 14634"/>
             </a:avLst>
           </a:prstGeom>
           <a:solidFill>
-            <a:srgbClr val="EEF8ED"/>
+            <a:srgbClr val="0068B7"/>
           </a:solidFill>
           <a:ln w="12700">
             <a:solidFill>
-              <a:srgbClr val="B9D7E6"/>
+              <a:srgbClr val="0068B7"/>
             </a:solidFill>
             <a:prstDash val="solid"/>
           </a:ln>
@@ -11172,81 +12076,256 @@
       </p:sp>
       <p:sp>
         <p:nvSpPr>
-          <p:cNvPr id="13" name="Text 11"/>
-          <p:cNvSpPr/>
-          <p:nvPr/>
-        </p:nvSpPr>
-        <p:spPr>
-          <a:xfrm>
-            <a:off x="8211312" y="3941064"/>
-            <a:ext cx="2734056" cy="201168"/>
-          </a:xfrm>
-          <a:prstGeom prst="rect">
-            <a:avLst/>
-          </a:prstGeom>
-          <a:noFill/>
-          <a:ln/>
-        </p:spPr>
-        <p:txBody>
-          <a:bodyPr wrap="square" lIns="0" tIns="0" rIns="0" bIns="0" rtlCol="0" anchor="ctr"/>
-          <a:lstStyle/>
-          <a:p>
-            <a:pPr indent="0" marL="0">
-              <a:buNone/>
-            </a:pPr>
-            <a:r>
-              <a:rPr lang="en-US" sz="950" b="1" dirty="0">
-                <a:solidFill>
-                  <a:srgbClr val="0068B7"/>
-                </a:solidFill>
-                <a:latin typeface="Aptos" pitchFamily="34" charset="0"/>
-                <a:ea typeface="Aptos" pitchFamily="34" charset="-122"/>
-                <a:cs typeface="Aptos" pitchFamily="34" charset="-120"/>
-              </a:rPr>
-              <a:t>Avoid duplication</a:t>
-            </a:r>
-            <a:endParaRPr lang="en-US" sz="950" dirty="0"/>
-          </a:p>
-        </p:txBody>
-      </p:sp>
-      <p:sp>
-        <p:nvSpPr>
           <p:cNvPr id="14" name="Text 12"/>
           <p:cNvSpPr/>
           <p:nvPr/>
         </p:nvSpPr>
         <p:spPr>
           <a:xfrm>
-            <a:off x="8211312" y="4233672"/>
-            <a:ext cx="2734056" cy="941832"/>
-          </a:xfrm>
-          <a:prstGeom prst="rect">
-            <a:avLst/>
-          </a:prstGeom>
-          <a:noFill/>
-          <a:ln/>
-        </p:spPr>
-        <p:txBody>
-          <a:bodyPr wrap="square" lIns="0" tIns="0" rIns="0" bIns="0" rtlCol="0" anchor="t">
+            <a:off x="7891272" y="4169664"/>
+            <a:ext cx="826008" cy="310896"/>
+          </a:xfrm>
+          <a:prstGeom prst="rect">
+            <a:avLst/>
+          </a:prstGeom>
+          <a:noFill/>
+          <a:ln/>
+        </p:spPr>
+        <p:txBody>
+          <a:bodyPr wrap="square" lIns="0" tIns="0" rIns="0" bIns="0" rtlCol="0" anchor="ctr">
             <a:normAutofit/>
           </a:bodyPr>
           <a:lstStyle/>
           <a:p>
-            <a:pPr indent="0" marL="0">
-              <a:buNone/>
-            </a:pPr>
-            <a:r>
-              <a:rPr lang="en-US" sz="1250" dirty="0">
-                <a:solidFill>
-                  <a:srgbClr val="17364A"/>
-                </a:solidFill>
-                <a:latin typeface="Aptos" pitchFamily="34" charset="0"/>
-                <a:ea typeface="Aptos" pitchFamily="34" charset="-122"/>
-                <a:cs typeface="Aptos" pitchFamily="34" charset="-120"/>
-              </a:rPr>
-              <a:t>If your department already has a strong equivalent tool, adapt or use the existing process instead of recreating it.</a:t>
-            </a:r>
-            <a:endParaRPr lang="en-US" sz="1250" dirty="0"/>
+            <a:pPr algn="ctr" indent="0" marL="0">
+              <a:buNone/>
+            </a:pPr>
+            <a:r>
+              <a:rPr lang="en-US" sz="1500" b="1" dirty="0">
+                <a:solidFill>
+                  <a:srgbClr val="FFFFFF"/>
+                </a:solidFill>
+                <a:latin typeface="Aptos" pitchFamily="34" charset="0"/>
+                <a:ea typeface="Aptos" pitchFamily="34" charset="-122"/>
+                <a:cs typeface="Aptos" pitchFamily="34" charset="-120"/>
+              </a:rPr>
+              <a:t>Concept</a:t>
+            </a:r>
+            <a:endParaRPr lang="en-US" sz="1500" dirty="0"/>
+          </a:p>
+        </p:txBody>
+      </p:sp>
+      <p:sp>
+        <p:nvSpPr>
+          <p:cNvPr id="15" name="Text 13"/>
+          <p:cNvSpPr/>
+          <p:nvPr/>
+        </p:nvSpPr>
+        <p:spPr>
+          <a:xfrm>
+            <a:off x="8817864" y="4187952"/>
+            <a:ext cx="201168" cy="256032"/>
+          </a:xfrm>
+          <a:prstGeom prst="rect">
+            <a:avLst/>
+          </a:prstGeom>
+          <a:noFill/>
+          <a:ln/>
+        </p:spPr>
+        <p:txBody>
+          <a:bodyPr wrap="square" lIns="0" tIns="0" rIns="0" bIns="0" rtlCol="0" anchor="ctr"/>
+          <a:lstStyle/>
+          <a:p>
+            <a:pPr algn="ctr" indent="0" marL="0">
+              <a:buNone/>
+            </a:pPr>
+            <a:r>
+              <a:rPr lang="en-US" sz="1800" b="1" dirty="0">
+                <a:solidFill>
+                  <a:srgbClr val="0068B7"/>
+                </a:solidFill>
+                <a:latin typeface="Aptos" pitchFamily="34" charset="0"/>
+                <a:ea typeface="Aptos" pitchFamily="34" charset="-122"/>
+                <a:cs typeface="Aptos" pitchFamily="34" charset="-120"/>
+              </a:rPr>
+              <a:t>â†’</a:t>
+            </a:r>
+            <a:endParaRPr lang="en-US" sz="1800" dirty="0"/>
+          </a:p>
+        </p:txBody>
+      </p:sp>
+      <p:sp>
+        <p:nvSpPr>
+          <p:cNvPr id="16" name="Shape 14"/>
+          <p:cNvSpPr/>
+          <p:nvPr/>
+        </p:nvSpPr>
+        <p:spPr>
+          <a:xfrm>
+            <a:off x="9046464" y="3977640"/>
+            <a:ext cx="972312" cy="749808"/>
+          </a:xfrm>
+          <a:prstGeom prst="roundRect">
+            <a:avLst>
+              <a:gd name="adj" fmla="val 14634"/>
+            </a:avLst>
+          </a:prstGeom>
+          <a:solidFill>
+            <a:srgbClr val="2F8A28"/>
+          </a:solidFill>
+          <a:ln w="12700">
+            <a:solidFill>
+              <a:srgbClr val="2F8A28"/>
+            </a:solidFill>
+            <a:prstDash val="solid"/>
+          </a:ln>
+        </p:spPr>
+      </p:sp>
+      <p:sp>
+        <p:nvSpPr>
+          <p:cNvPr id="17" name="Text 15"/>
+          <p:cNvSpPr/>
+          <p:nvPr/>
+        </p:nvSpPr>
+        <p:spPr>
+          <a:xfrm>
+            <a:off x="9119616" y="4169664"/>
+            <a:ext cx="826008" cy="310896"/>
+          </a:xfrm>
+          <a:prstGeom prst="rect">
+            <a:avLst/>
+          </a:prstGeom>
+          <a:noFill/>
+          <a:ln/>
+        </p:spPr>
+        <p:txBody>
+          <a:bodyPr wrap="square" lIns="0" tIns="0" rIns="0" bIns="0" rtlCol="0" anchor="ctr">
+            <a:normAutofit/>
+          </a:bodyPr>
+          <a:lstStyle/>
+          <a:p>
+            <a:pPr algn="ctr" indent="0" marL="0">
+              <a:buNone/>
+            </a:pPr>
+            <a:r>
+              <a:rPr lang="en-US" sz="1500" b="1" dirty="0">
+                <a:solidFill>
+                  <a:srgbClr val="FFFFFF"/>
+                </a:solidFill>
+                <a:latin typeface="Aptos" pitchFamily="34" charset="0"/>
+                <a:ea typeface="Aptos" pitchFamily="34" charset="-122"/>
+                <a:cs typeface="Aptos" pitchFamily="34" charset="-120"/>
+              </a:rPr>
+              <a:t>Tool</a:t>
+            </a:r>
+            <a:endParaRPr lang="en-US" sz="1500" dirty="0"/>
+          </a:p>
+        </p:txBody>
+      </p:sp>
+      <p:sp>
+        <p:nvSpPr>
+          <p:cNvPr id="18" name="Text 16"/>
+          <p:cNvSpPr/>
+          <p:nvPr/>
+        </p:nvSpPr>
+        <p:spPr>
+          <a:xfrm>
+            <a:off x="10046208" y="4187952"/>
+            <a:ext cx="201168" cy="256032"/>
+          </a:xfrm>
+          <a:prstGeom prst="rect">
+            <a:avLst/>
+          </a:prstGeom>
+          <a:noFill/>
+          <a:ln/>
+        </p:spPr>
+        <p:txBody>
+          <a:bodyPr wrap="square" lIns="0" tIns="0" rIns="0" bIns="0" rtlCol="0" anchor="ctr"/>
+          <a:lstStyle/>
+          <a:p>
+            <a:pPr algn="ctr" indent="0" marL="0">
+              <a:buNone/>
+            </a:pPr>
+            <a:r>
+              <a:rPr lang="en-US" sz="1800" b="1" dirty="0">
+                <a:solidFill>
+                  <a:srgbClr val="0068B7"/>
+                </a:solidFill>
+                <a:latin typeface="Aptos" pitchFamily="34" charset="0"/>
+                <a:ea typeface="Aptos" pitchFamily="34" charset="-122"/>
+                <a:cs typeface="Aptos" pitchFamily="34" charset="-120"/>
+              </a:rPr>
+              <a:t>â†’</a:t>
+            </a:r>
+            <a:endParaRPr lang="en-US" sz="1800" dirty="0"/>
+          </a:p>
+        </p:txBody>
+      </p:sp>
+      <p:sp>
+        <p:nvSpPr>
+          <p:cNvPr id="19" name="Shape 17"/>
+          <p:cNvSpPr/>
+          <p:nvPr/>
+        </p:nvSpPr>
+        <p:spPr>
+          <a:xfrm>
+            <a:off x="10274808" y="3977640"/>
+            <a:ext cx="972312" cy="749808"/>
+          </a:xfrm>
+          <a:prstGeom prst="roundRect">
+            <a:avLst>
+              <a:gd name="adj" fmla="val 14634"/>
+            </a:avLst>
+          </a:prstGeom>
+          <a:solidFill>
+            <a:srgbClr val="D69A2D"/>
+          </a:solidFill>
+          <a:ln w="12700">
+            <a:solidFill>
+              <a:srgbClr val="D69A2D"/>
+            </a:solidFill>
+            <a:prstDash val="solid"/>
+          </a:ln>
+        </p:spPr>
+      </p:sp>
+      <p:sp>
+        <p:nvSpPr>
+          <p:cNvPr id="20" name="Text 18"/>
+          <p:cNvSpPr/>
+          <p:nvPr/>
+        </p:nvSpPr>
+        <p:spPr>
+          <a:xfrm>
+            <a:off x="10347960" y="4169664"/>
+            <a:ext cx="826008" cy="310896"/>
+          </a:xfrm>
+          <a:prstGeom prst="rect">
+            <a:avLst/>
+          </a:prstGeom>
+          <a:noFill/>
+          <a:ln/>
+        </p:spPr>
+        <p:txBody>
+          <a:bodyPr wrap="square" lIns="0" tIns="0" rIns="0" bIns="0" rtlCol="0" anchor="ctr">
+            <a:normAutofit/>
+          </a:bodyPr>
+          <a:lstStyle/>
+          <a:p>
+            <a:pPr algn="ctr" indent="0" marL="0">
+              <a:buNone/>
+            </a:pPr>
+            <a:r>
+              <a:rPr lang="en-US" sz="1500" b="1" dirty="0">
+                <a:solidFill>
+                  <a:srgbClr val="FFFFFF"/>
+                </a:solidFill>
+                <a:latin typeface="Aptos" pitchFamily="34" charset="0"/>
+                <a:ea typeface="Aptos" pitchFamily="34" charset="-122"/>
+                <a:cs typeface="Aptos" pitchFamily="34" charset="-120"/>
+              </a:rPr>
+              <a:t>Artifact</a:t>
+            </a:r>
+            <a:endParaRPr lang="en-US" sz="1500" dirty="0"/>
           </a:p>
         </p:txBody>
       </p:sp>
@@ -11443,7 +12522,7 @@
                 <a:ea typeface="Aptos" pitchFamily="34" charset="-122"/>
                 <a:cs typeface="Aptos" pitchFamily="34" charset="-120"/>
               </a:rPr>
-              <a:t>© Paula Soper</a:t>
+              <a:t>Â© Paula Soper</a:t>
             </a:r>
             <a:endParaRPr lang="en-US" sz="800" dirty="0"/>
           </a:p>
@@ -11451,7 +12530,46 @@
       </p:sp>
       <p:sp>
         <p:nvSpPr>
-          <p:cNvPr id="7" name="Shape 5"/>
+          <p:cNvPr id="7" name="Text 5"/>
+          <p:cNvSpPr/>
+          <p:nvPr/>
+        </p:nvSpPr>
+        <p:spPr>
+          <a:xfrm>
+            <a:off x="11137392" y="6510528"/>
+            <a:ext cx="411480" cy="201168"/>
+          </a:xfrm>
+          <a:prstGeom prst="rect">
+            <a:avLst/>
+          </a:prstGeom>
+          <a:noFill/>
+          <a:ln/>
+        </p:spPr>
+        <p:txBody>
+          <a:bodyPr wrap="square" lIns="0" tIns="0" rIns="0" bIns="0" rtlCol="0" anchor="ctr"/>
+          <a:lstStyle/>
+          <a:p>
+            <a:pPr algn="r" indent="0" marL="0">
+              <a:buNone/>
+            </a:pPr>
+            <a:r>
+              <a:rPr lang="en-US" sz="900" dirty="0">
+                <a:solidFill>
+                  <a:srgbClr val="5F7181"/>
+                </a:solidFill>
+                <a:latin typeface="Aptos" pitchFamily="34" charset="0"/>
+                <a:ea typeface="Aptos" pitchFamily="34" charset="-122"/>
+                <a:cs typeface="Aptos" pitchFamily="34" charset="-120"/>
+              </a:rPr>
+              <a:t>5</a:t>
+            </a:r>
+            <a:endParaRPr lang="en-US" sz="900" dirty="0"/>
+          </a:p>
+        </p:txBody>
+      </p:sp>
+      <p:sp>
+        <p:nvSpPr>
+          <p:cNvPr id="8" name="Shape 6"/>
           <p:cNvSpPr/>
           <p:nvPr/>
         </p:nvSpPr>
@@ -11476,7 +12594,7 @@
       </p:sp>
       <p:sp>
         <p:nvSpPr>
-          <p:cNvPr id="8" name="Text 6"/>
+          <p:cNvPr id="9" name="Text 7"/>
           <p:cNvSpPr/>
           <p:nvPr/>
         </p:nvSpPr>
@@ -11515,14 +12633,14 @@
       </p:sp>
       <p:sp>
         <p:nvSpPr>
-          <p:cNvPr id="9" name="Text 7"/>
+          <p:cNvPr id="10" name="Text 8"/>
           <p:cNvSpPr/>
           <p:nvPr/>
         </p:nvSpPr>
         <p:spPr>
           <a:xfrm>
             <a:off x="640080" y="621792"/>
-            <a:ext cx="10881360" cy="566928"/>
+            <a:ext cx="10881360" cy="713232"/>
           </a:xfrm>
           <a:prstGeom prst="rect">
             <a:avLst/>
@@ -11540,7 +12658,7 @@
               <a:buNone/>
             </a:pPr>
             <a:r>
-              <a:rPr lang="en-US" sz="2700" b="1" dirty="0">
+              <a:rPr lang="en-US" sz="3400" b="1" dirty="0">
                 <a:solidFill>
                   <a:srgbClr val="003A63"/>
                 </a:solidFill>
@@ -11550,20 +12668,20 @@
               </a:rPr>
               <a:t>Learning Objectives</a:t>
             </a:r>
-            <a:endParaRPr lang="en-US" sz="2700" dirty="0"/>
-          </a:p>
-        </p:txBody>
-      </p:sp>
-      <p:sp>
-        <p:nvSpPr>
-          <p:cNvPr id="10" name="Text 8"/>
-          <p:cNvSpPr/>
-          <p:nvPr/>
-        </p:nvSpPr>
-        <p:spPr>
-          <a:xfrm>
-            <a:off x="868680" y="1417320"/>
-            <a:ext cx="6675120" cy="4434840"/>
+            <a:endParaRPr lang="en-US" sz="3400" dirty="0"/>
+          </a:p>
+        </p:txBody>
+      </p:sp>
+      <p:sp>
+        <p:nvSpPr>
+          <p:cNvPr id="11" name="Text 9"/>
+          <p:cNvSpPr/>
+          <p:nvPr/>
+        </p:nvSpPr>
+        <p:spPr>
+          <a:xfrm>
+            <a:off x="868680" y="1508760"/>
+            <a:ext cx="6537960" cy="4160520"/>
           </a:xfrm>
           <a:prstGeom prst="rect">
             <a:avLst/>
@@ -11578,7 +12696,7 @@
           <a:lstStyle/>
           <a:p>
             <a:r>
-              <a:rPr lang="en-US" sz="1700" dirty="0">
+              <a:rPr lang="en-US" sz="2100" dirty="0">
                 <a:solidFill>
                   <a:srgbClr val="17364A"/>
                 </a:solidFill>
@@ -11588,11 +12706,11 @@
               </a:rPr>
               <a:t>Explain the purpose of UAT for AI-supported workflows.</a:t>
             </a:r>
-            <a:endParaRPr lang="en-US" sz="1700" dirty="0"/>
-          </a:p>
-          <a:p>
-            <a:r>
-              <a:rPr lang="en-US" sz="1700" dirty="0">
+            <a:endParaRPr lang="en-US" sz="2100" dirty="0"/>
+          </a:p>
+          <a:p>
+            <a:r>
+              <a:rPr lang="en-US" sz="2100" dirty="0">
                 <a:solidFill>
                   <a:srgbClr val="17364A"/>
                 </a:solidFill>
@@ -11602,11 +12720,11 @@
               </a:rPr>
               <a:t>Develop role-based UAT scenarios and test scripts.</a:t>
             </a:r>
-            <a:endParaRPr lang="en-US" sz="1700" dirty="0"/>
-          </a:p>
-          <a:p>
-            <a:r>
-              <a:rPr lang="en-US" sz="1700" dirty="0">
+            <a:endParaRPr lang="en-US" sz="2100" dirty="0"/>
+          </a:p>
+          <a:p>
+            <a:r>
+              <a:rPr lang="en-US" sz="2100" dirty="0">
                 <a:solidFill>
                   <a:srgbClr val="17364A"/>
                 </a:solidFill>
@@ -11616,27 +12734,13 @@
               </a:rPr>
               <a:t>Include routine cases, edge cases, failure cases, and equity-sensitive scenarios in UAT.</a:t>
             </a:r>
-            <a:endParaRPr lang="en-US" sz="1700" dirty="0"/>
-          </a:p>
-          <a:p>
-            <a:r>
-              <a:rPr lang="en-US" sz="1700" dirty="0">
-                <a:solidFill>
-                  <a:srgbClr val="17364A"/>
-                </a:solidFill>
-                <a:latin typeface="Aptos" pitchFamily="34" charset="0"/>
-                <a:ea typeface="Aptos" pitchFamily="34" charset="-122"/>
-                <a:cs typeface="Aptos" pitchFamily="34" charset="-120"/>
-              </a:rPr>
-              <a:t>Define acceptance criteria for usability, safety, documentation, human review, and workflow fit.</a:t>
-            </a:r>
-            <a:endParaRPr lang="en-US" sz="1700" dirty="0"/>
-          </a:p>
-        </p:txBody>
-      </p:sp>
-      <p:sp>
-        <p:nvSpPr>
-          <p:cNvPr id="11" name="Shape 9"/>
+            <a:endParaRPr lang="en-US" sz="2100" dirty="0"/>
+          </a:p>
+        </p:txBody>
+      </p:sp>
+      <p:sp>
+        <p:nvSpPr>
+          <p:cNvPr id="12" name="Shape 10"/>
           <p:cNvSpPr/>
           <p:nvPr/>
         </p:nvSpPr>
@@ -11663,14 +12767,14 @@
       </p:sp>
       <p:sp>
         <p:nvSpPr>
-          <p:cNvPr id="12" name="Text 10"/>
+          <p:cNvPr id="13" name="Text 11"/>
           <p:cNvSpPr/>
           <p:nvPr/>
         </p:nvSpPr>
         <p:spPr>
           <a:xfrm>
             <a:off x="8074152" y="1563624"/>
-            <a:ext cx="2825496" cy="201168"/>
+            <a:ext cx="2825496" cy="256032"/>
           </a:xfrm>
           <a:prstGeom prst="rect">
             <a:avLst/>
@@ -11686,7 +12790,7 @@
               <a:buNone/>
             </a:pPr>
             <a:r>
-              <a:rPr lang="en-US" sz="950" b="1" dirty="0">
+              <a:rPr lang="en-US" sz="1300" b="1" dirty="0">
                 <a:solidFill>
                   <a:srgbClr val="0068B7"/>
                 </a:solidFill>
@@ -11696,20 +12800,20 @@
               </a:rPr>
               <a:t>Key idea</a:t>
             </a:r>
-            <a:endParaRPr lang="en-US" sz="950" dirty="0"/>
-          </a:p>
-        </p:txBody>
-      </p:sp>
-      <p:sp>
-        <p:nvSpPr>
-          <p:cNvPr id="13" name="Text 11"/>
-          <p:cNvSpPr/>
-          <p:nvPr/>
-        </p:nvSpPr>
-        <p:spPr>
-          <a:xfrm>
-            <a:off x="8074152" y="1856232"/>
-            <a:ext cx="2825496" cy="1261872"/>
+            <a:endParaRPr lang="en-US" sz="1300" dirty="0"/>
+          </a:p>
+        </p:txBody>
+      </p:sp>
+      <p:sp>
+        <p:nvSpPr>
+          <p:cNvPr id="14" name="Text 12"/>
+          <p:cNvSpPr/>
+          <p:nvPr/>
+        </p:nvSpPr>
+        <p:spPr>
+          <a:xfrm>
+            <a:off x="8074152" y="1920240"/>
+            <a:ext cx="2825496" cy="1188720"/>
           </a:xfrm>
           <a:prstGeom prst="rect">
             <a:avLst/>
@@ -11727,7 +12831,7 @@
               <a:buNone/>
             </a:pPr>
             <a:r>
-              <a:rPr lang="en-US" sz="1250" dirty="0">
+              <a:rPr lang="en-US" sz="1550" dirty="0">
                 <a:solidFill>
                   <a:srgbClr val="17364A"/>
                 </a:solidFill>
@@ -11737,13 +12841,13 @@
               </a:rPr>
               <a:t>Explain the purpose of UAT for AI-supported workflows.</a:t>
             </a:r>
-            <a:endParaRPr lang="en-US" sz="1250" dirty="0"/>
-          </a:p>
-        </p:txBody>
-      </p:sp>
-      <p:sp>
-        <p:nvSpPr>
-          <p:cNvPr id="14" name="Shape 12"/>
+            <a:endParaRPr lang="en-US" sz="1550" dirty="0"/>
+          </a:p>
+        </p:txBody>
+      </p:sp>
+      <p:sp>
+        <p:nvSpPr>
+          <p:cNvPr id="15" name="Shape 13"/>
           <p:cNvSpPr/>
           <p:nvPr/>
         </p:nvSpPr>
@@ -11770,14 +12874,14 @@
       </p:sp>
       <p:sp>
         <p:nvSpPr>
-          <p:cNvPr id="15" name="Text 13"/>
+          <p:cNvPr id="16" name="Text 14"/>
           <p:cNvSpPr/>
           <p:nvPr/>
         </p:nvSpPr>
         <p:spPr>
           <a:xfrm>
             <a:off x="8074152" y="3666744"/>
-            <a:ext cx="2825496" cy="201168"/>
+            <a:ext cx="2825496" cy="256032"/>
           </a:xfrm>
           <a:prstGeom prst="rect">
             <a:avLst/>
@@ -11793,7 +12897,7 @@
               <a:buNone/>
             </a:pPr>
             <a:r>
-              <a:rPr lang="en-US" sz="950" b="1" dirty="0">
+              <a:rPr lang="en-US" sz="1300" b="1" dirty="0">
                 <a:solidFill>
                   <a:srgbClr val="0068B7"/>
                 </a:solidFill>
@@ -11803,20 +12907,20 @@
               </a:rPr>
               <a:t>Use this for</a:t>
             </a:r>
-            <a:endParaRPr lang="en-US" sz="950" dirty="0"/>
-          </a:p>
-        </p:txBody>
-      </p:sp>
-      <p:sp>
-        <p:nvSpPr>
-          <p:cNvPr id="16" name="Text 14"/>
-          <p:cNvSpPr/>
-          <p:nvPr/>
-        </p:nvSpPr>
-        <p:spPr>
-          <a:xfrm>
-            <a:off x="8074152" y="3959352"/>
-            <a:ext cx="2825496" cy="1170432"/>
+            <a:endParaRPr lang="en-US" sz="1300" dirty="0"/>
+          </a:p>
+        </p:txBody>
+      </p:sp>
+      <p:sp>
+        <p:nvSpPr>
+          <p:cNvPr id="17" name="Text 15"/>
+          <p:cNvSpPr/>
+          <p:nvPr/>
+        </p:nvSpPr>
+        <p:spPr>
+          <a:xfrm>
+            <a:off x="8074152" y="4023360"/>
+            <a:ext cx="2825496" cy="1097280"/>
           </a:xfrm>
           <a:prstGeom prst="rect">
             <a:avLst/>
@@ -11834,7 +12938,7 @@
               <a:buNone/>
             </a:pPr>
             <a:r>
-              <a:rPr lang="en-US" sz="1250" dirty="0">
+              <a:rPr lang="en-US" sz="1550" dirty="0">
                 <a:solidFill>
                   <a:srgbClr val="17364A"/>
                 </a:solidFill>
@@ -11844,7 +12948,7 @@
               </a:rPr>
               <a:t>Connect the concept to public health decisions, safeguards, documentation, or implementation work.</a:t>
             </a:r>
-            <a:endParaRPr lang="en-US" sz="1250" dirty="0"/>
+            <a:endParaRPr lang="en-US" sz="1550" dirty="0"/>
           </a:p>
         </p:txBody>
       </p:sp>
@@ -12041,7 +13145,7 @@
                 <a:ea typeface="Aptos" pitchFamily="34" charset="-122"/>
                 <a:cs typeface="Aptos" pitchFamily="34" charset="-120"/>
               </a:rPr>
-              <a:t>© Paula Soper</a:t>
+              <a:t>Â© Paula Soper</a:t>
             </a:r>
             <a:endParaRPr lang="en-US" sz="800" dirty="0"/>
           </a:p>
@@ -12049,7 +13153,46 @@
       </p:sp>
       <p:sp>
         <p:nvSpPr>
-          <p:cNvPr id="7" name="Shape 5"/>
+          <p:cNvPr id="7" name="Text 5"/>
+          <p:cNvSpPr/>
+          <p:nvPr/>
+        </p:nvSpPr>
+        <p:spPr>
+          <a:xfrm>
+            <a:off x="11137392" y="6510528"/>
+            <a:ext cx="411480" cy="201168"/>
+          </a:xfrm>
+          <a:prstGeom prst="rect">
+            <a:avLst/>
+          </a:prstGeom>
+          <a:noFill/>
+          <a:ln/>
+        </p:spPr>
+        <p:txBody>
+          <a:bodyPr wrap="square" lIns="0" tIns="0" rIns="0" bIns="0" rtlCol="0" anchor="ctr"/>
+          <a:lstStyle/>
+          <a:p>
+            <a:pPr algn="r" indent="0" marL="0">
+              <a:buNone/>
+            </a:pPr>
+            <a:r>
+              <a:rPr lang="en-US" sz="900" dirty="0">
+                <a:solidFill>
+                  <a:srgbClr val="5F7181"/>
+                </a:solidFill>
+                <a:latin typeface="Aptos" pitchFamily="34" charset="0"/>
+                <a:ea typeface="Aptos" pitchFamily="34" charset="-122"/>
+                <a:cs typeface="Aptos" pitchFamily="34" charset="-120"/>
+              </a:rPr>
+              <a:t>6</a:t>
+            </a:r>
+            <a:endParaRPr lang="en-US" sz="900" dirty="0"/>
+          </a:p>
+        </p:txBody>
+      </p:sp>
+      <p:sp>
+        <p:nvSpPr>
+          <p:cNvPr id="8" name="Shape 6"/>
           <p:cNvSpPr/>
           <p:nvPr/>
         </p:nvSpPr>
@@ -12074,7 +13217,7 @@
       </p:sp>
       <p:sp>
         <p:nvSpPr>
-          <p:cNvPr id="8" name="Text 6"/>
+          <p:cNvPr id="9" name="Text 7"/>
           <p:cNvSpPr/>
           <p:nvPr/>
         </p:nvSpPr>
@@ -12113,14 +13256,14 @@
       </p:sp>
       <p:sp>
         <p:nvSpPr>
-          <p:cNvPr id="9" name="Text 7"/>
+          <p:cNvPr id="10" name="Text 8"/>
           <p:cNvSpPr/>
           <p:nvPr/>
         </p:nvSpPr>
         <p:spPr>
           <a:xfrm>
             <a:off x="640080" y="621792"/>
-            <a:ext cx="10881360" cy="566928"/>
+            <a:ext cx="10881360" cy="713232"/>
           </a:xfrm>
           <a:prstGeom prst="rect">
             <a:avLst/>
@@ -12138,7 +13281,7 @@
               <a:buNone/>
             </a:pPr>
             <a:r>
-              <a:rPr lang="en-US" sz="2700" b="1" dirty="0">
+              <a:rPr lang="en-US" sz="3400" b="1" dirty="0">
                 <a:solidFill>
                   <a:srgbClr val="003A63"/>
                 </a:solidFill>
@@ -12148,20 +13291,20 @@
               </a:rPr>
               <a:t>Module Overview</a:t>
             </a:r>
-            <a:endParaRPr lang="en-US" sz="2700" dirty="0"/>
-          </a:p>
-        </p:txBody>
-      </p:sp>
-      <p:sp>
-        <p:nvSpPr>
-          <p:cNvPr id="10" name="Text 8"/>
-          <p:cNvSpPr/>
-          <p:nvPr/>
-        </p:nvSpPr>
-        <p:spPr>
-          <a:xfrm>
-            <a:off x="868680" y="1417320"/>
-            <a:ext cx="6675120" cy="4434840"/>
+            <a:endParaRPr lang="en-US" sz="3400" dirty="0"/>
+          </a:p>
+        </p:txBody>
+      </p:sp>
+      <p:sp>
+        <p:nvSpPr>
+          <p:cNvPr id="11" name="Text 9"/>
+          <p:cNvSpPr/>
+          <p:nvPr/>
+        </p:nvSpPr>
+        <p:spPr>
+          <a:xfrm>
+            <a:off x="868680" y="1508760"/>
+            <a:ext cx="6537960" cy="4160520"/>
           </a:xfrm>
           <a:prstGeom prst="rect">
             <a:avLst/>
@@ -12176,7 +13319,7 @@
           <a:lstStyle/>
           <a:p>
             <a:r>
-              <a:rPr lang="en-US" sz="1700" dirty="0">
+              <a:rPr lang="en-US" sz="2100" dirty="0">
                 <a:solidFill>
                   <a:srgbClr val="17364A"/>
                 </a:solidFill>
@@ -12184,13 +13327,13 @@
                 <a:ea typeface="Aptos" pitchFamily="34" charset="-122"/>
                 <a:cs typeface="Aptos" pitchFamily="34" charset="-120"/>
               </a:rPr>
-              <a:t>User acceptance testing is the process of determining whether an AI-supported workflow is usable, understandable, safe, and.</a:t>
-            </a:r>
-            <a:endParaRPr lang="en-US" sz="1700" dirty="0"/>
-          </a:p>
-          <a:p>
-            <a:r>
-              <a:rPr lang="en-US" sz="1700" dirty="0">
+              <a:t>User acceptance testing is the process of determining whether an AI-supported workflow is usable,.</a:t>
+            </a:r>
+            <a:endParaRPr lang="en-US" sz="2100" dirty="0"/>
+          </a:p>
+          <a:p>
+            <a:r>
+              <a:rPr lang="en-US" sz="2100" dirty="0">
                 <a:solidFill>
                   <a:srgbClr val="17364A"/>
                 </a:solidFill>
@@ -12198,13 +13341,13 @@
                 <a:ea typeface="Aptos" pitchFamily="34" charset="-122"/>
                 <a:cs typeface="Aptos" pitchFamily="34" charset="-120"/>
               </a:rPr>
-              <a:t>Technical testing may show that a tool runs, and model validation may show acceptable performance, but neither proves that.</a:t>
-            </a:r>
-            <a:endParaRPr lang="en-US" sz="1700" dirty="0"/>
-          </a:p>
-          <a:p>
-            <a:r>
-              <a:rPr lang="en-US" sz="1700" dirty="0">
+              <a:t>Technical testing may show that a tool runs, and model validation may show acceptable performance, but.</a:t>
+            </a:r>
+            <a:endParaRPr lang="en-US" sz="2100" dirty="0"/>
+          </a:p>
+          <a:p>
+            <a:r>
+              <a:rPr lang="en-US" sz="2100" dirty="0">
                 <a:solidFill>
                   <a:srgbClr val="17364A"/>
                 </a:solidFill>
@@ -12214,27 +13357,13 @@
               </a:rPr>
               <a:t>UAT fills that gap.</a:t>
             </a:r>
-            <a:endParaRPr lang="en-US" sz="1700" dirty="0"/>
-          </a:p>
-          <a:p>
-            <a:r>
-              <a:rPr lang="en-US" sz="1700" dirty="0">
-                <a:solidFill>
-                  <a:srgbClr val="17364A"/>
-                </a:solidFill>
-                <a:latin typeface="Aptos" pitchFamily="34" charset="0"/>
-                <a:ea typeface="Aptos" pitchFamily="34" charset="-122"/>
-                <a:cs typeface="Aptos" pitchFamily="34" charset="-120"/>
-              </a:rPr>
-              <a:t>This module teaches learners how to design and conduct user acceptance testing for AI-supported workflows.</a:t>
-            </a:r>
-            <a:endParaRPr lang="en-US" sz="1700" dirty="0"/>
-          </a:p>
-        </p:txBody>
-      </p:sp>
-      <p:sp>
-        <p:nvSpPr>
-          <p:cNvPr id="11" name="Shape 9"/>
+            <a:endParaRPr lang="en-US" sz="2100" dirty="0"/>
+          </a:p>
+        </p:txBody>
+      </p:sp>
+      <p:sp>
+        <p:nvSpPr>
+          <p:cNvPr id="12" name="Shape 10"/>
           <p:cNvSpPr/>
           <p:nvPr/>
         </p:nvSpPr>
@@ -12261,14 +13390,14 @@
       </p:sp>
       <p:sp>
         <p:nvSpPr>
-          <p:cNvPr id="12" name="Text 10"/>
+          <p:cNvPr id="13" name="Text 11"/>
           <p:cNvSpPr/>
           <p:nvPr/>
         </p:nvSpPr>
         <p:spPr>
           <a:xfrm>
             <a:off x="8074152" y="1563624"/>
-            <a:ext cx="2825496" cy="201168"/>
+            <a:ext cx="2825496" cy="256032"/>
           </a:xfrm>
           <a:prstGeom prst="rect">
             <a:avLst/>
@@ -12284,7 +13413,7 @@
               <a:buNone/>
             </a:pPr>
             <a:r>
-              <a:rPr lang="en-US" sz="950" b="1" dirty="0">
+              <a:rPr lang="en-US" sz="1300" b="1" dirty="0">
                 <a:solidFill>
                   <a:srgbClr val="0068B7"/>
                 </a:solidFill>
@@ -12294,20 +13423,20 @@
               </a:rPr>
               <a:t>Key idea</a:t>
             </a:r>
-            <a:endParaRPr lang="en-US" sz="950" dirty="0"/>
-          </a:p>
-        </p:txBody>
-      </p:sp>
-      <p:sp>
-        <p:nvSpPr>
-          <p:cNvPr id="13" name="Text 11"/>
-          <p:cNvSpPr/>
-          <p:nvPr/>
-        </p:nvSpPr>
-        <p:spPr>
-          <a:xfrm>
-            <a:off x="8074152" y="1856232"/>
-            <a:ext cx="2825496" cy="1261872"/>
+            <a:endParaRPr lang="en-US" sz="1300" dirty="0"/>
+          </a:p>
+        </p:txBody>
+      </p:sp>
+      <p:sp>
+        <p:nvSpPr>
+          <p:cNvPr id="14" name="Text 12"/>
+          <p:cNvSpPr/>
+          <p:nvPr/>
+        </p:nvSpPr>
+        <p:spPr>
+          <a:xfrm>
+            <a:off x="8074152" y="1920240"/>
+            <a:ext cx="2825496" cy="1188720"/>
           </a:xfrm>
           <a:prstGeom prst="rect">
             <a:avLst/>
@@ -12325,7 +13454,7 @@
               <a:buNone/>
             </a:pPr>
             <a:r>
-              <a:rPr lang="en-US" sz="1250" dirty="0">
+              <a:rPr lang="en-US" sz="1550" dirty="0">
                 <a:solidFill>
                   <a:srgbClr val="17364A"/>
                 </a:solidFill>
@@ -12333,15 +13462,15 @@
                 <a:ea typeface="Aptos" pitchFamily="34" charset="-122"/>
                 <a:cs typeface="Aptos" pitchFamily="34" charset="-120"/>
               </a:rPr>
-              <a:t>User acceptance testing is the process of determining whether an AI-supported workflow is usable, understandable, safe, and.</a:t>
-            </a:r>
-            <a:endParaRPr lang="en-US" sz="1250" dirty="0"/>
-          </a:p>
-        </p:txBody>
-      </p:sp>
-      <p:sp>
-        <p:nvSpPr>
-          <p:cNvPr id="14" name="Shape 12"/>
+              <a:t>User acceptance testing is the process of determining whether an AI-supported workflow is usable,.</a:t>
+            </a:r>
+            <a:endParaRPr lang="en-US" sz="1550" dirty="0"/>
+          </a:p>
+        </p:txBody>
+      </p:sp>
+      <p:sp>
+        <p:nvSpPr>
+          <p:cNvPr id="15" name="Shape 13"/>
           <p:cNvSpPr/>
           <p:nvPr/>
         </p:nvSpPr>
@@ -12368,14 +13497,14 @@
       </p:sp>
       <p:sp>
         <p:nvSpPr>
-          <p:cNvPr id="15" name="Text 13"/>
+          <p:cNvPr id="16" name="Text 14"/>
           <p:cNvSpPr/>
           <p:nvPr/>
         </p:nvSpPr>
         <p:spPr>
           <a:xfrm>
             <a:off x="8074152" y="3666744"/>
-            <a:ext cx="2825496" cy="201168"/>
+            <a:ext cx="2825496" cy="256032"/>
           </a:xfrm>
           <a:prstGeom prst="rect">
             <a:avLst/>
@@ -12391,7 +13520,7 @@
               <a:buNone/>
             </a:pPr>
             <a:r>
-              <a:rPr lang="en-US" sz="950" b="1" dirty="0">
+              <a:rPr lang="en-US" sz="1300" b="1" dirty="0">
                 <a:solidFill>
                   <a:srgbClr val="0068B7"/>
                 </a:solidFill>
@@ -12401,20 +13530,20 @@
               </a:rPr>
               <a:t>Use this for</a:t>
             </a:r>
-            <a:endParaRPr lang="en-US" sz="950" dirty="0"/>
-          </a:p>
-        </p:txBody>
-      </p:sp>
-      <p:sp>
-        <p:nvSpPr>
-          <p:cNvPr id="16" name="Text 14"/>
-          <p:cNvSpPr/>
-          <p:nvPr/>
-        </p:nvSpPr>
-        <p:spPr>
-          <a:xfrm>
-            <a:off x="8074152" y="3959352"/>
-            <a:ext cx="2825496" cy="1170432"/>
+            <a:endParaRPr lang="en-US" sz="1300" dirty="0"/>
+          </a:p>
+        </p:txBody>
+      </p:sp>
+      <p:sp>
+        <p:nvSpPr>
+          <p:cNvPr id="17" name="Text 15"/>
+          <p:cNvSpPr/>
+          <p:nvPr/>
+        </p:nvSpPr>
+        <p:spPr>
+          <a:xfrm>
+            <a:off x="8074152" y="4023360"/>
+            <a:ext cx="2825496" cy="1097280"/>
           </a:xfrm>
           <a:prstGeom prst="rect">
             <a:avLst/>
@@ -12432,7 +13561,7 @@
               <a:buNone/>
             </a:pPr>
             <a:r>
-              <a:rPr lang="en-US" sz="1250" dirty="0">
+              <a:rPr lang="en-US" sz="1550" dirty="0">
                 <a:solidFill>
                   <a:srgbClr val="17364A"/>
                 </a:solidFill>
@@ -12442,7 +13571,7 @@
               </a:rPr>
               <a:t>Connect the concept to public health decisions, safeguards, documentation, or implementation work.</a:t>
             </a:r>
-            <a:endParaRPr lang="en-US" sz="1250" dirty="0"/>
+            <a:endParaRPr lang="en-US" sz="1550" dirty="0"/>
           </a:p>
         </p:txBody>
       </p:sp>
@@ -12639,7 +13768,7 @@
                 <a:ea typeface="Aptos" pitchFamily="34" charset="-122"/>
                 <a:cs typeface="Aptos" pitchFamily="34" charset="-120"/>
               </a:rPr>
-              <a:t>© Paula Soper</a:t>
+              <a:t>Â© Paula Soper</a:t>
             </a:r>
             <a:endParaRPr lang="en-US" sz="800" dirty="0"/>
           </a:p>
@@ -12647,7 +13776,46 @@
       </p:sp>
       <p:sp>
         <p:nvSpPr>
-          <p:cNvPr id="7" name="Shape 5"/>
+          <p:cNvPr id="7" name="Text 5"/>
+          <p:cNvSpPr/>
+          <p:nvPr/>
+        </p:nvSpPr>
+        <p:spPr>
+          <a:xfrm>
+            <a:off x="11137392" y="6510528"/>
+            <a:ext cx="411480" cy="201168"/>
+          </a:xfrm>
+          <a:prstGeom prst="rect">
+            <a:avLst/>
+          </a:prstGeom>
+          <a:noFill/>
+          <a:ln/>
+        </p:spPr>
+        <p:txBody>
+          <a:bodyPr wrap="square" lIns="0" tIns="0" rIns="0" bIns="0" rtlCol="0" anchor="ctr"/>
+          <a:lstStyle/>
+          <a:p>
+            <a:pPr algn="r" indent="0" marL="0">
+              <a:buNone/>
+            </a:pPr>
+            <a:r>
+              <a:rPr lang="en-US" sz="900" dirty="0">
+                <a:solidFill>
+                  <a:srgbClr val="5F7181"/>
+                </a:solidFill>
+                <a:latin typeface="Aptos" pitchFamily="34" charset="0"/>
+                <a:ea typeface="Aptos" pitchFamily="34" charset="-122"/>
+                <a:cs typeface="Aptos" pitchFamily="34" charset="-120"/>
+              </a:rPr>
+              <a:t>7</a:t>
+            </a:r>
+            <a:endParaRPr lang="en-US" sz="900" dirty="0"/>
+          </a:p>
+        </p:txBody>
+      </p:sp>
+      <p:sp>
+        <p:nvSpPr>
+          <p:cNvPr id="8" name="Shape 6"/>
           <p:cNvSpPr/>
           <p:nvPr/>
         </p:nvSpPr>
@@ -12672,7 +13840,7 @@
       </p:sp>
       <p:sp>
         <p:nvSpPr>
-          <p:cNvPr id="8" name="Text 6"/>
+          <p:cNvPr id="9" name="Text 7"/>
           <p:cNvSpPr/>
           <p:nvPr/>
         </p:nvSpPr>
@@ -12711,14 +13879,14 @@
       </p:sp>
       <p:sp>
         <p:nvSpPr>
-          <p:cNvPr id="9" name="Text 7"/>
+          <p:cNvPr id="10" name="Text 8"/>
           <p:cNvSpPr/>
           <p:nvPr/>
         </p:nvSpPr>
         <p:spPr>
           <a:xfrm>
             <a:off x="640080" y="621792"/>
-            <a:ext cx="10881360" cy="566928"/>
+            <a:ext cx="10881360" cy="713232"/>
           </a:xfrm>
           <a:prstGeom prst="rect">
             <a:avLst/>
@@ -12736,7 +13904,7 @@
               <a:buNone/>
             </a:pPr>
             <a:r>
-              <a:rPr lang="en-US" sz="2700" b="1" dirty="0">
+              <a:rPr lang="en-US" sz="3400" b="1" dirty="0">
                 <a:solidFill>
                   <a:srgbClr val="003A63"/>
                 </a:solidFill>
@@ -12746,20 +13914,20 @@
               </a:rPr>
               <a:t>Public Health Example</a:t>
             </a:r>
-            <a:endParaRPr lang="en-US" sz="2700" dirty="0"/>
-          </a:p>
-        </p:txBody>
-      </p:sp>
-      <p:sp>
-        <p:nvSpPr>
-          <p:cNvPr id="10" name="Text 8"/>
-          <p:cNvSpPr/>
-          <p:nvPr/>
-        </p:nvSpPr>
-        <p:spPr>
-          <a:xfrm>
-            <a:off x="868680" y="1417320"/>
-            <a:ext cx="6675120" cy="4434840"/>
+            <a:endParaRPr lang="en-US" sz="3400" dirty="0"/>
+          </a:p>
+        </p:txBody>
+      </p:sp>
+      <p:sp>
+        <p:nvSpPr>
+          <p:cNvPr id="11" name="Text 9"/>
+          <p:cNvSpPr/>
+          <p:nvPr/>
+        </p:nvSpPr>
+        <p:spPr>
+          <a:xfrm>
+            <a:off x="868680" y="1508760"/>
+            <a:ext cx="6537960" cy="4160520"/>
           </a:xfrm>
           <a:prstGeom prst="rect">
             <a:avLst/>
@@ -12774,7 +13942,7 @@
           <a:lstStyle/>
           <a:p>
             <a:r>
-              <a:rPr lang="en-US" sz="1700" dirty="0">
+              <a:rPr lang="en-US" sz="2100" dirty="0">
                 <a:solidFill>
                   <a:srgbClr val="17364A"/>
                 </a:solidFill>
@@ -12782,13 +13950,13 @@
                 <a:ea typeface="Aptos" pitchFamily="34" charset="-122"/>
                 <a:cs typeface="Aptos" pitchFamily="34" charset="-120"/>
               </a:rPr>
-              <a:t>Before launching an AI tool that summarizes case investigation notes, investigators complete UAT scenarios using routine.</a:t>
-            </a:r>
-            <a:endParaRPr lang="en-US" sz="1700" dirty="0"/>
-          </a:p>
-          <a:p>
-            <a:r>
-              <a:rPr lang="en-US" sz="1700" dirty="0">
+              <a:t>Before launching an AI tool that summarizes case investigation notes, investigators complete UAT.</a:t>
+            </a:r>
+            <a:endParaRPr lang="en-US" sz="2100" dirty="0"/>
+          </a:p>
+          <a:p>
+            <a:r>
+              <a:rPr lang="en-US" sz="2100" dirty="0">
                 <a:solidFill>
                   <a:srgbClr val="17364A"/>
                 </a:solidFill>
@@ -12796,13 +13964,13 @@
                 <a:ea typeface="Aptos" pitchFamily="34" charset="-122"/>
                 <a:cs typeface="Aptos" pitchFamily="34" charset="-120"/>
               </a:rPr>
-              <a:t>Testers verify whether the summary is understandable, source information is visible, errors can be corrected, outputs can.</a:t>
-            </a:r>
-            <a:endParaRPr lang="en-US" sz="1700" dirty="0"/>
-          </a:p>
-          <a:p>
-            <a:r>
-              <a:rPr lang="en-US" sz="1700" dirty="0">
+              <a:t>Testers verify whether the summary is understandable, source information is visible, errors can be.</a:t>
+            </a:r>
+            <a:endParaRPr lang="en-US" sz="2100" dirty="0"/>
+          </a:p>
+          <a:p>
+            <a:r>
+              <a:rPr lang="en-US" sz="2100" dirty="0">
                 <a:solidFill>
                   <a:srgbClr val="17364A"/>
                 </a:solidFill>
@@ -12812,13 +13980,13 @@
               </a:rPr>
               <a:t>The tool does not launch until high-priority issues are resolved.</a:t>
             </a:r>
-            <a:endParaRPr lang="en-US" sz="1700" dirty="0"/>
-          </a:p>
-        </p:txBody>
-      </p:sp>
-      <p:sp>
-        <p:nvSpPr>
-          <p:cNvPr id="11" name="Shape 9"/>
+            <a:endParaRPr lang="en-US" sz="2100" dirty="0"/>
+          </a:p>
+        </p:txBody>
+      </p:sp>
+      <p:sp>
+        <p:nvSpPr>
+          <p:cNvPr id="12" name="Shape 10"/>
           <p:cNvSpPr/>
           <p:nvPr/>
         </p:nvSpPr>
@@ -12845,14 +14013,14 @@
       </p:sp>
       <p:sp>
         <p:nvSpPr>
-          <p:cNvPr id="12" name="Text 10"/>
+          <p:cNvPr id="13" name="Text 11"/>
           <p:cNvSpPr/>
           <p:nvPr/>
         </p:nvSpPr>
         <p:spPr>
           <a:xfrm>
             <a:off x="8074152" y="1563624"/>
-            <a:ext cx="2825496" cy="201168"/>
+            <a:ext cx="2825496" cy="256032"/>
           </a:xfrm>
           <a:prstGeom prst="rect">
             <a:avLst/>
@@ -12868,7 +14036,7 @@
               <a:buNone/>
             </a:pPr>
             <a:r>
-              <a:rPr lang="en-US" sz="950" b="1" dirty="0">
+              <a:rPr lang="en-US" sz="1300" b="1" dirty="0">
                 <a:solidFill>
                   <a:srgbClr val="0068B7"/>
                 </a:solidFill>
@@ -12878,20 +14046,20 @@
               </a:rPr>
               <a:t>Key idea</a:t>
             </a:r>
-            <a:endParaRPr lang="en-US" sz="950" dirty="0"/>
-          </a:p>
-        </p:txBody>
-      </p:sp>
-      <p:sp>
-        <p:nvSpPr>
-          <p:cNvPr id="13" name="Text 11"/>
-          <p:cNvSpPr/>
-          <p:nvPr/>
-        </p:nvSpPr>
-        <p:spPr>
-          <a:xfrm>
-            <a:off x="8074152" y="1856232"/>
-            <a:ext cx="2825496" cy="1261872"/>
+            <a:endParaRPr lang="en-US" sz="1300" dirty="0"/>
+          </a:p>
+        </p:txBody>
+      </p:sp>
+      <p:sp>
+        <p:nvSpPr>
+          <p:cNvPr id="14" name="Text 12"/>
+          <p:cNvSpPr/>
+          <p:nvPr/>
+        </p:nvSpPr>
+        <p:spPr>
+          <a:xfrm>
+            <a:off x="8074152" y="1920240"/>
+            <a:ext cx="2825496" cy="1188720"/>
           </a:xfrm>
           <a:prstGeom prst="rect">
             <a:avLst/>
@@ -12909,7 +14077,7 @@
               <a:buNone/>
             </a:pPr>
             <a:r>
-              <a:rPr lang="en-US" sz="1250" dirty="0">
+              <a:rPr lang="en-US" sz="1550" dirty="0">
                 <a:solidFill>
                   <a:srgbClr val="17364A"/>
                 </a:solidFill>
@@ -12917,15 +14085,15 @@
                 <a:ea typeface="Aptos" pitchFamily="34" charset="-122"/>
                 <a:cs typeface="Aptos" pitchFamily="34" charset="-120"/>
               </a:rPr>
-              <a:t>Before launching an AI tool that summarizes case investigation notes, investigators complete UAT scenarios using routine.</a:t>
-            </a:r>
-            <a:endParaRPr lang="en-US" sz="1250" dirty="0"/>
-          </a:p>
-        </p:txBody>
-      </p:sp>
-      <p:sp>
-        <p:nvSpPr>
-          <p:cNvPr id="14" name="Shape 12"/>
+              <a:t>Before launching an AI tool that summarizes case investigation notes, investigators complete UAT.</a:t>
+            </a:r>
+            <a:endParaRPr lang="en-US" sz="1550" dirty="0"/>
+          </a:p>
+        </p:txBody>
+      </p:sp>
+      <p:sp>
+        <p:nvSpPr>
+          <p:cNvPr id="15" name="Shape 13"/>
           <p:cNvSpPr/>
           <p:nvPr/>
         </p:nvSpPr>
@@ -12952,14 +14120,14 @@
       </p:sp>
       <p:sp>
         <p:nvSpPr>
-          <p:cNvPr id="15" name="Text 13"/>
+          <p:cNvPr id="16" name="Text 14"/>
           <p:cNvSpPr/>
           <p:nvPr/>
         </p:nvSpPr>
         <p:spPr>
           <a:xfrm>
             <a:off x="8074152" y="3666744"/>
-            <a:ext cx="2825496" cy="201168"/>
+            <a:ext cx="2825496" cy="256032"/>
           </a:xfrm>
           <a:prstGeom prst="rect">
             <a:avLst/>
@@ -12975,7 +14143,7 @@
               <a:buNone/>
             </a:pPr>
             <a:r>
-              <a:rPr lang="en-US" sz="950" b="1" dirty="0">
+              <a:rPr lang="en-US" sz="1300" b="1" dirty="0">
                 <a:solidFill>
                   <a:srgbClr val="0068B7"/>
                 </a:solidFill>
@@ -12985,20 +14153,20 @@
               </a:rPr>
               <a:t>Use this for</a:t>
             </a:r>
-            <a:endParaRPr lang="en-US" sz="950" dirty="0"/>
-          </a:p>
-        </p:txBody>
-      </p:sp>
-      <p:sp>
-        <p:nvSpPr>
-          <p:cNvPr id="16" name="Text 14"/>
-          <p:cNvSpPr/>
-          <p:nvPr/>
-        </p:nvSpPr>
-        <p:spPr>
-          <a:xfrm>
-            <a:off x="8074152" y="3959352"/>
-            <a:ext cx="2825496" cy="1170432"/>
+            <a:endParaRPr lang="en-US" sz="1300" dirty="0"/>
+          </a:p>
+        </p:txBody>
+      </p:sp>
+      <p:sp>
+        <p:nvSpPr>
+          <p:cNvPr id="17" name="Text 15"/>
+          <p:cNvSpPr/>
+          <p:nvPr/>
+        </p:nvSpPr>
+        <p:spPr>
+          <a:xfrm>
+            <a:off x="8074152" y="4023360"/>
+            <a:ext cx="2825496" cy="1097280"/>
           </a:xfrm>
           <a:prstGeom prst="rect">
             <a:avLst/>
@@ -13016,7 +14184,7 @@
               <a:buNone/>
             </a:pPr>
             <a:r>
-              <a:rPr lang="en-US" sz="1250" dirty="0">
+              <a:rPr lang="en-US" sz="1550" dirty="0">
                 <a:solidFill>
                   <a:srgbClr val="17364A"/>
                 </a:solidFill>
@@ -13026,7 +14194,7 @@
               </a:rPr>
               <a:t>Connect the concept to public health decisions, safeguards, documentation, or implementation work.</a:t>
             </a:r>
-            <a:endParaRPr lang="en-US" sz="1250" dirty="0"/>
+            <a:endParaRPr lang="en-US" sz="1550" dirty="0"/>
           </a:p>
         </p:txBody>
       </p:sp>
@@ -13223,7 +14391,7 @@
                 <a:ea typeface="Aptos" pitchFamily="34" charset="-122"/>
                 <a:cs typeface="Aptos" pitchFamily="34" charset="-120"/>
               </a:rPr>
-              <a:t>© Paula Soper</a:t>
+              <a:t>Â© Paula Soper</a:t>
             </a:r>
             <a:endParaRPr lang="en-US" sz="800" dirty="0"/>
           </a:p>
@@ -13231,7 +14399,46 @@
       </p:sp>
       <p:sp>
         <p:nvSpPr>
-          <p:cNvPr id="7" name="Shape 5"/>
+          <p:cNvPr id="7" name="Text 5"/>
+          <p:cNvSpPr/>
+          <p:nvPr/>
+        </p:nvSpPr>
+        <p:spPr>
+          <a:xfrm>
+            <a:off x="11137392" y="6510528"/>
+            <a:ext cx="411480" cy="201168"/>
+          </a:xfrm>
+          <a:prstGeom prst="rect">
+            <a:avLst/>
+          </a:prstGeom>
+          <a:noFill/>
+          <a:ln/>
+        </p:spPr>
+        <p:txBody>
+          <a:bodyPr wrap="square" lIns="0" tIns="0" rIns="0" bIns="0" rtlCol="0" anchor="ctr"/>
+          <a:lstStyle/>
+          <a:p>
+            <a:pPr algn="r" indent="0" marL="0">
+              <a:buNone/>
+            </a:pPr>
+            <a:r>
+              <a:rPr lang="en-US" sz="900" dirty="0">
+                <a:solidFill>
+                  <a:srgbClr val="5F7181"/>
+                </a:solidFill>
+                <a:latin typeface="Aptos" pitchFamily="34" charset="0"/>
+                <a:ea typeface="Aptos" pitchFamily="34" charset="-122"/>
+                <a:cs typeface="Aptos" pitchFamily="34" charset="-120"/>
+              </a:rPr>
+              <a:t>8</a:t>
+            </a:r>
+            <a:endParaRPr lang="en-US" sz="900" dirty="0"/>
+          </a:p>
+        </p:txBody>
+      </p:sp>
+      <p:sp>
+        <p:nvSpPr>
+          <p:cNvPr id="8" name="Shape 6"/>
           <p:cNvSpPr/>
           <p:nvPr/>
         </p:nvSpPr>
@@ -13256,7 +14463,7 @@
       </p:sp>
       <p:sp>
         <p:nvSpPr>
-          <p:cNvPr id="8" name="Text 6"/>
+          <p:cNvPr id="9" name="Text 7"/>
           <p:cNvSpPr/>
           <p:nvPr/>
         </p:nvSpPr>
@@ -13295,14 +14502,14 @@
       </p:sp>
       <p:sp>
         <p:nvSpPr>
-          <p:cNvPr id="9" name="Text 7"/>
+          <p:cNvPr id="10" name="Text 8"/>
           <p:cNvSpPr/>
           <p:nvPr/>
         </p:nvSpPr>
         <p:spPr>
           <a:xfrm>
             <a:off x="640080" y="621792"/>
-            <a:ext cx="10881360" cy="566928"/>
+            <a:ext cx="10881360" cy="713232"/>
           </a:xfrm>
           <a:prstGeom prst="rect">
             <a:avLst/>
@@ -13320,7 +14527,7 @@
               <a:buNone/>
             </a:pPr>
             <a:r>
-              <a:rPr lang="en-US" sz="2700" b="1" dirty="0">
+              <a:rPr lang="en-US" sz="3400" b="1" dirty="0">
                 <a:solidFill>
                   <a:srgbClr val="003A63"/>
                 </a:solidFill>
@@ -13330,20 +14537,20 @@
               </a:rPr>
               <a:t>Technical and Operational Deep Dive</a:t>
             </a:r>
-            <a:endParaRPr lang="en-US" sz="2700" dirty="0"/>
-          </a:p>
-        </p:txBody>
-      </p:sp>
-      <p:sp>
-        <p:nvSpPr>
-          <p:cNvPr id="10" name="Text 8"/>
-          <p:cNvSpPr/>
-          <p:nvPr/>
-        </p:nvSpPr>
-        <p:spPr>
-          <a:xfrm>
-            <a:off x="868680" y="1417320"/>
-            <a:ext cx="6675120" cy="4434840"/>
+            <a:endParaRPr lang="en-US" sz="3400" dirty="0"/>
+          </a:p>
+        </p:txBody>
+      </p:sp>
+      <p:sp>
+        <p:nvSpPr>
+          <p:cNvPr id="11" name="Text 9"/>
+          <p:cNvSpPr/>
+          <p:nvPr/>
+        </p:nvSpPr>
+        <p:spPr>
+          <a:xfrm>
+            <a:off x="868680" y="1508760"/>
+            <a:ext cx="6537960" cy="4160520"/>
           </a:xfrm>
           <a:prstGeom prst="rect">
             <a:avLst/>
@@ -13358,7 +14565,7 @@
           <a:lstStyle/>
           <a:p>
             <a:r>
-              <a:rPr lang="en-US" sz="1700" dirty="0">
+              <a:rPr lang="en-US" sz="2100" dirty="0">
                 <a:solidFill>
                   <a:srgbClr val="17364A"/>
                 </a:solidFill>
@@ -13368,11 +14575,11 @@
               </a:rPr>
               <a:t>UAT should be designed around real users and real work.</a:t>
             </a:r>
-            <a:endParaRPr lang="en-US" sz="1700" dirty="0"/>
-          </a:p>
-          <a:p>
-            <a:r>
-              <a:rPr lang="en-US" sz="1700" dirty="0">
+            <a:endParaRPr lang="en-US" sz="2100" dirty="0"/>
+          </a:p>
+          <a:p>
+            <a:r>
+              <a:rPr lang="en-US" sz="2100" dirty="0">
                 <a:solidFill>
                   <a:srgbClr val="17364A"/>
                 </a:solidFill>
@@ -13380,13 +14587,13 @@
                 <a:ea typeface="Aptos" pitchFamily="34" charset="-122"/>
                 <a:cs typeface="Aptos" pitchFamily="34" charset="-120"/>
               </a:rPr>
-              <a:t>Testers should include the roles that will actually use or supervise the AI-supported workflow, such as epidemiologists,.</a:t>
-            </a:r>
-            <a:endParaRPr lang="en-US" sz="1700" dirty="0"/>
-          </a:p>
-          <a:p>
-            <a:r>
-              <a:rPr lang="en-US" sz="1700" dirty="0">
+              <a:t>Testers should include the roles that will actually use or supervise the AI-supported workflow, such as.</a:t>
+            </a:r>
+            <a:endParaRPr lang="en-US" sz="2100" dirty="0"/>
+          </a:p>
+          <a:p>
+            <a:r>
+              <a:rPr lang="en-US" sz="2100" dirty="0">
                 <a:solidFill>
                   <a:srgbClr val="17364A"/>
                 </a:solidFill>
@@ -13396,27 +14603,13 @@
               </a:rPr>
               <a:t>If only technical staff test the tool, usability and workflow problems may be missed.</a:t>
             </a:r>
-            <a:endParaRPr lang="en-US" sz="1700" dirty="0"/>
-          </a:p>
-          <a:p>
-            <a:r>
-              <a:rPr lang="en-US" sz="1700" dirty="0">
-                <a:solidFill>
-                  <a:srgbClr val="17364A"/>
-                </a:solidFill>
-                <a:latin typeface="Aptos" pitchFamily="34" charset="0"/>
-                <a:ea typeface="Aptos" pitchFamily="34" charset="-122"/>
-                <a:cs typeface="Aptos" pitchFamily="34" charset="-120"/>
-              </a:rPr>
-              <a:t>Test scenarios should include more than ideal cases.</a:t>
-            </a:r>
-            <a:endParaRPr lang="en-US" sz="1700" dirty="0"/>
-          </a:p>
-        </p:txBody>
-      </p:sp>
-      <p:sp>
-        <p:nvSpPr>
-          <p:cNvPr id="11" name="Shape 9"/>
+            <a:endParaRPr lang="en-US" sz="2100" dirty="0"/>
+          </a:p>
+        </p:txBody>
+      </p:sp>
+      <p:sp>
+        <p:nvSpPr>
+          <p:cNvPr id="12" name="Shape 10"/>
           <p:cNvSpPr/>
           <p:nvPr/>
         </p:nvSpPr>
@@ -13443,14 +14636,14 @@
       </p:sp>
       <p:sp>
         <p:nvSpPr>
-          <p:cNvPr id="12" name="Text 10"/>
+          <p:cNvPr id="13" name="Text 11"/>
           <p:cNvSpPr/>
           <p:nvPr/>
         </p:nvSpPr>
         <p:spPr>
           <a:xfrm>
             <a:off x="8074152" y="1563624"/>
-            <a:ext cx="2825496" cy="201168"/>
+            <a:ext cx="2825496" cy="256032"/>
           </a:xfrm>
           <a:prstGeom prst="rect">
             <a:avLst/>
@@ -13466,7 +14659,7 @@
               <a:buNone/>
             </a:pPr>
             <a:r>
-              <a:rPr lang="en-US" sz="950" b="1" dirty="0">
+              <a:rPr lang="en-US" sz="1300" b="1" dirty="0">
                 <a:solidFill>
                   <a:srgbClr val="0068B7"/>
                 </a:solidFill>
@@ -13476,20 +14669,20 @@
               </a:rPr>
               <a:t>Key idea</a:t>
             </a:r>
-            <a:endParaRPr lang="en-US" sz="950" dirty="0"/>
-          </a:p>
-        </p:txBody>
-      </p:sp>
-      <p:sp>
-        <p:nvSpPr>
-          <p:cNvPr id="13" name="Text 11"/>
-          <p:cNvSpPr/>
-          <p:nvPr/>
-        </p:nvSpPr>
-        <p:spPr>
-          <a:xfrm>
-            <a:off x="8074152" y="1856232"/>
-            <a:ext cx="2825496" cy="1261872"/>
+            <a:endParaRPr lang="en-US" sz="1300" dirty="0"/>
+          </a:p>
+        </p:txBody>
+      </p:sp>
+      <p:sp>
+        <p:nvSpPr>
+          <p:cNvPr id="14" name="Text 12"/>
+          <p:cNvSpPr/>
+          <p:nvPr/>
+        </p:nvSpPr>
+        <p:spPr>
+          <a:xfrm>
+            <a:off x="8074152" y="1920240"/>
+            <a:ext cx="2825496" cy="1188720"/>
           </a:xfrm>
           <a:prstGeom prst="rect">
             <a:avLst/>
@@ -13507,7 +14700,7 @@
               <a:buNone/>
             </a:pPr>
             <a:r>
-              <a:rPr lang="en-US" sz="1250" dirty="0">
+              <a:rPr lang="en-US" sz="1550" dirty="0">
                 <a:solidFill>
                   <a:srgbClr val="17364A"/>
                 </a:solidFill>
@@ -13517,13 +14710,13 @@
               </a:rPr>
               <a:t>UAT should be designed around real users and real work.</a:t>
             </a:r>
-            <a:endParaRPr lang="en-US" sz="1250" dirty="0"/>
-          </a:p>
-        </p:txBody>
-      </p:sp>
-      <p:sp>
-        <p:nvSpPr>
-          <p:cNvPr id="14" name="Shape 12"/>
+            <a:endParaRPr lang="en-US" sz="1550" dirty="0"/>
+          </a:p>
+        </p:txBody>
+      </p:sp>
+      <p:sp>
+        <p:nvSpPr>
+          <p:cNvPr id="15" name="Shape 13"/>
           <p:cNvSpPr/>
           <p:nvPr/>
         </p:nvSpPr>
@@ -13550,14 +14743,14 @@
       </p:sp>
       <p:sp>
         <p:nvSpPr>
-          <p:cNvPr id="15" name="Text 13"/>
+          <p:cNvPr id="16" name="Text 14"/>
           <p:cNvSpPr/>
           <p:nvPr/>
         </p:nvSpPr>
         <p:spPr>
           <a:xfrm>
             <a:off x="8074152" y="3666744"/>
-            <a:ext cx="2825496" cy="201168"/>
+            <a:ext cx="2825496" cy="256032"/>
           </a:xfrm>
           <a:prstGeom prst="rect">
             <a:avLst/>
@@ -13573,7 +14766,7 @@
               <a:buNone/>
             </a:pPr>
             <a:r>
-              <a:rPr lang="en-US" sz="950" b="1" dirty="0">
+              <a:rPr lang="en-US" sz="1300" b="1" dirty="0">
                 <a:solidFill>
                   <a:srgbClr val="0068B7"/>
                 </a:solidFill>
@@ -13583,20 +14776,20 @@
               </a:rPr>
               <a:t>Use this for</a:t>
             </a:r>
-            <a:endParaRPr lang="en-US" sz="950" dirty="0"/>
-          </a:p>
-        </p:txBody>
-      </p:sp>
-      <p:sp>
-        <p:nvSpPr>
-          <p:cNvPr id="16" name="Text 14"/>
-          <p:cNvSpPr/>
-          <p:nvPr/>
-        </p:nvSpPr>
-        <p:spPr>
-          <a:xfrm>
-            <a:off x="8074152" y="3959352"/>
-            <a:ext cx="2825496" cy="1170432"/>
+            <a:endParaRPr lang="en-US" sz="1300" dirty="0"/>
+          </a:p>
+        </p:txBody>
+      </p:sp>
+      <p:sp>
+        <p:nvSpPr>
+          <p:cNvPr id="17" name="Text 15"/>
+          <p:cNvSpPr/>
+          <p:nvPr/>
+        </p:nvSpPr>
+        <p:spPr>
+          <a:xfrm>
+            <a:off x="8074152" y="4023360"/>
+            <a:ext cx="2825496" cy="1097280"/>
           </a:xfrm>
           <a:prstGeom prst="rect">
             <a:avLst/>
@@ -13614,7 +14807,7 @@
               <a:buNone/>
             </a:pPr>
             <a:r>
-              <a:rPr lang="en-US" sz="1250" dirty="0">
+              <a:rPr lang="en-US" sz="1550" dirty="0">
                 <a:solidFill>
                   <a:srgbClr val="17364A"/>
                 </a:solidFill>
@@ -13624,7 +14817,7 @@
               </a:rPr>
               <a:t>Connect the concept to public health decisions, safeguards, documentation, or implementation work.</a:t>
             </a:r>
-            <a:endParaRPr lang="en-US" sz="1250" dirty="0"/>
+            <a:endParaRPr lang="en-US" sz="1550" dirty="0"/>
           </a:p>
         </p:txBody>
       </p:sp>
@@ -13821,7 +15014,7 @@
                 <a:ea typeface="Aptos" pitchFamily="34" charset="-122"/>
                 <a:cs typeface="Aptos" pitchFamily="34" charset="-120"/>
               </a:rPr>
-              <a:t>© Paula Soper</a:t>
+              <a:t>Â© Paula Soper</a:t>
             </a:r>
             <a:endParaRPr lang="en-US" sz="800" dirty="0"/>
           </a:p>
@@ -13835,8 +15028,47 @@
         </p:nvSpPr>
         <p:spPr>
           <a:xfrm>
+            <a:off x="11137392" y="6510528"/>
+            <a:ext cx="411480" cy="201168"/>
+          </a:xfrm>
+          <a:prstGeom prst="rect">
+            <a:avLst/>
+          </a:prstGeom>
+          <a:noFill/>
+          <a:ln/>
+        </p:spPr>
+        <p:txBody>
+          <a:bodyPr wrap="square" lIns="0" tIns="0" rIns="0" bIns="0" rtlCol="0" anchor="ctr"/>
+          <a:lstStyle/>
+          <a:p>
+            <a:pPr algn="r" indent="0" marL="0">
+              <a:buNone/>
+            </a:pPr>
+            <a:r>
+              <a:rPr lang="en-US" sz="900" dirty="0">
+                <a:solidFill>
+                  <a:srgbClr val="5F7181"/>
+                </a:solidFill>
+                <a:latin typeface="Aptos" pitchFamily="34" charset="0"/>
+                <a:ea typeface="Aptos" pitchFamily="34" charset="-122"/>
+                <a:cs typeface="Aptos" pitchFamily="34" charset="-120"/>
+              </a:rPr>
+              <a:t>9</a:t>
+            </a:r>
+            <a:endParaRPr lang="en-US" sz="900" dirty="0"/>
+          </a:p>
+        </p:txBody>
+      </p:sp>
+      <p:sp>
+        <p:nvSpPr>
+          <p:cNvPr id="8" name="Text 6"/>
+          <p:cNvSpPr/>
+          <p:nvPr/>
+        </p:nvSpPr>
+        <p:spPr>
+          <a:xfrm>
             <a:off x="640080" y="658368"/>
-            <a:ext cx="10881360" cy="566928"/>
+            <a:ext cx="10881360" cy="713232"/>
           </a:xfrm>
           <a:prstGeom prst="rect">
             <a:avLst/>
@@ -13854,7 +15086,7 @@
               <a:buNone/>
             </a:pPr>
             <a:r>
-              <a:rPr lang="en-US" sz="2700" b="1" dirty="0">
+              <a:rPr lang="en-US" sz="3400" b="1" dirty="0">
                 <a:solidFill>
                   <a:srgbClr val="003A63"/>
                 </a:solidFill>
@@ -13864,20 +15096,20 @@
               </a:rPr>
               <a:t>Technical and Operational Deep Dive Continued</a:t>
             </a:r>
-            <a:endParaRPr lang="en-US" sz="2700" dirty="0"/>
-          </a:p>
-        </p:txBody>
-      </p:sp>
-      <p:sp>
-        <p:nvSpPr>
-          <p:cNvPr id="8" name="Text 6"/>
-          <p:cNvSpPr/>
-          <p:nvPr/>
-        </p:nvSpPr>
-        <p:spPr>
-          <a:xfrm>
-            <a:off x="868680" y="1417320"/>
-            <a:ext cx="6675120" cy="4434840"/>
+            <a:endParaRPr lang="en-US" sz="3400" dirty="0"/>
+          </a:p>
+        </p:txBody>
+      </p:sp>
+      <p:sp>
+        <p:nvSpPr>
+          <p:cNvPr id="9" name="Text 7"/>
+          <p:cNvSpPr/>
+          <p:nvPr/>
+        </p:nvSpPr>
+        <p:spPr>
+          <a:xfrm>
+            <a:off x="868680" y="1508760"/>
+            <a:ext cx="6537960" cy="4160520"/>
           </a:xfrm>
           <a:prstGeom prst="rect">
             <a:avLst/>
@@ -13892,7 +15124,7 @@
           <a:lstStyle/>
           <a:p>
             <a:r>
-              <a:rPr lang="en-US" sz="1700" dirty="0">
+              <a:rPr lang="en-US" sz="2100" dirty="0">
                 <a:solidFill>
                   <a:srgbClr val="17364A"/>
                 </a:solidFill>
@@ -13902,11 +15134,11 @@
               </a:rPr>
               <a:t>UAT results should lead to a launch decision.</a:t>
             </a:r>
-            <a:endParaRPr lang="en-US" sz="1700" dirty="0"/>
-          </a:p>
-          <a:p>
-            <a:r>
-              <a:rPr lang="en-US" sz="1700" dirty="0">
+            <a:endParaRPr lang="en-US" sz="2100" dirty="0"/>
+          </a:p>
+          <a:p>
+            <a:r>
+              <a:rPr lang="en-US" sz="2100" dirty="0">
                 <a:solidFill>
                   <a:srgbClr val="17364A"/>
                 </a:solidFill>
@@ -13914,13 +15146,13 @@
                 <a:ea typeface="Aptos" pitchFamily="34" charset="-122"/>
                 <a:cs typeface="Aptos" pitchFamily="34" charset="-120"/>
               </a:rPr>
-              <a:t>Issues should be categorized by severity, assigned to owners, and resolved or accepted with documented rationale.</a:t>
-            </a:r>
-            <a:endParaRPr lang="en-US" sz="1700" dirty="0"/>
-          </a:p>
-          <a:p>
-            <a:r>
-              <a:rPr lang="en-US" sz="1700" dirty="0">
+              <a:t>Issues should be categorized by severity, assigned to owners, and resolved or accepted with documented.</a:t>
+            </a:r>
+            <a:endParaRPr lang="en-US" sz="2100" dirty="0"/>
+          </a:p>
+          <a:p>
+            <a:r>
+              <a:rPr lang="en-US" sz="2100" dirty="0">
                 <a:solidFill>
                   <a:srgbClr val="17364A"/>
                 </a:solidFill>
@@ -13930,27 +15162,13 @@
               </a:rPr>
               <a:t>A launch should not proceed simply because testing occurred.</a:t>
             </a:r>
-            <a:endParaRPr lang="en-US" sz="1700" dirty="0"/>
-          </a:p>
-          <a:p>
-            <a:r>
-              <a:rPr lang="en-US" sz="1700" dirty="0">
-                <a:solidFill>
-                  <a:srgbClr val="17364A"/>
-                </a:solidFill>
-                <a:latin typeface="Aptos" pitchFamily="34" charset="0"/>
-                <a:ea typeface="Aptos" pitchFamily="34" charset="-122"/>
-                <a:cs typeface="Aptos" pitchFamily="34" charset="-120"/>
-              </a:rPr>
-              <a:t>It should proceed only if acceptance criteria are met and unresolved issues do not create unacceptable risk.</a:t>
-            </a:r>
-            <a:endParaRPr lang="en-US" sz="1700" dirty="0"/>
-          </a:p>
-        </p:txBody>
-      </p:sp>
-      <p:sp>
-        <p:nvSpPr>
-          <p:cNvPr id="9" name="Shape 7"/>
+            <a:endParaRPr lang="en-US" sz="2100" dirty="0"/>
+          </a:p>
+        </p:txBody>
+      </p:sp>
+      <p:sp>
+        <p:nvSpPr>
+          <p:cNvPr id="10" name="Shape 8"/>
           <p:cNvSpPr/>
           <p:nvPr/>
         </p:nvSpPr>
@@ -13977,14 +15195,14 @@
       </p:sp>
       <p:sp>
         <p:nvSpPr>
-          <p:cNvPr id="10" name="Text 8"/>
+          <p:cNvPr id="11" name="Text 9"/>
           <p:cNvSpPr/>
           <p:nvPr/>
         </p:nvSpPr>
         <p:spPr>
           <a:xfrm>
             <a:off x="8074152" y="1563624"/>
-            <a:ext cx="2825496" cy="201168"/>
+            <a:ext cx="2825496" cy="256032"/>
           </a:xfrm>
           <a:prstGeom prst="rect">
             <a:avLst/>
@@ -14000,7 +15218,7 @@
               <a:buNone/>
             </a:pPr>
             <a:r>
-              <a:rPr lang="en-US" sz="950" b="1" dirty="0">
+              <a:rPr lang="en-US" sz="1300" b="1" dirty="0">
                 <a:solidFill>
                   <a:srgbClr val="0068B7"/>
                 </a:solidFill>
@@ -14010,20 +15228,20 @@
               </a:rPr>
               <a:t>Key idea</a:t>
             </a:r>
-            <a:endParaRPr lang="en-US" sz="950" dirty="0"/>
-          </a:p>
-        </p:txBody>
-      </p:sp>
-      <p:sp>
-        <p:nvSpPr>
-          <p:cNvPr id="11" name="Text 9"/>
-          <p:cNvSpPr/>
-          <p:nvPr/>
-        </p:nvSpPr>
-        <p:spPr>
-          <a:xfrm>
-            <a:off x="8074152" y="1856232"/>
-            <a:ext cx="2825496" cy="1261872"/>
+            <a:endParaRPr lang="en-US" sz="1300" dirty="0"/>
+          </a:p>
+        </p:txBody>
+      </p:sp>
+      <p:sp>
+        <p:nvSpPr>
+          <p:cNvPr id="12" name="Text 10"/>
+          <p:cNvSpPr/>
+          <p:nvPr/>
+        </p:nvSpPr>
+        <p:spPr>
+          <a:xfrm>
+            <a:off x="8074152" y="1920240"/>
+            <a:ext cx="2825496" cy="1188720"/>
           </a:xfrm>
           <a:prstGeom prst="rect">
             <a:avLst/>
@@ -14041,7 +15259,7 @@
               <a:buNone/>
             </a:pPr>
             <a:r>
-              <a:rPr lang="en-US" sz="1250" dirty="0">
+              <a:rPr lang="en-US" sz="1550" dirty="0">
                 <a:solidFill>
                   <a:srgbClr val="17364A"/>
                 </a:solidFill>
@@ -14051,13 +15269,13 @@
               </a:rPr>
               <a:t>UAT results should lead to a launch decision.</a:t>
             </a:r>
-            <a:endParaRPr lang="en-US" sz="1250" dirty="0"/>
-          </a:p>
-        </p:txBody>
-      </p:sp>
-      <p:sp>
-        <p:nvSpPr>
-          <p:cNvPr id="12" name="Shape 10"/>
+            <a:endParaRPr lang="en-US" sz="1550" dirty="0"/>
+          </a:p>
+        </p:txBody>
+      </p:sp>
+      <p:sp>
+        <p:nvSpPr>
+          <p:cNvPr id="13" name="Shape 11"/>
           <p:cNvSpPr/>
           <p:nvPr/>
         </p:nvSpPr>
@@ -14084,14 +15302,14 @@
       </p:sp>
       <p:sp>
         <p:nvSpPr>
-          <p:cNvPr id="13" name="Text 11"/>
+          <p:cNvPr id="14" name="Text 12"/>
           <p:cNvSpPr/>
           <p:nvPr/>
         </p:nvSpPr>
         <p:spPr>
           <a:xfrm>
             <a:off x="8074152" y="3666744"/>
-            <a:ext cx="2825496" cy="201168"/>
+            <a:ext cx="2825496" cy="256032"/>
           </a:xfrm>
           <a:prstGeom prst="rect">
             <a:avLst/>
@@ -14107,7 +15325,7 @@
               <a:buNone/>
             </a:pPr>
             <a:r>
-              <a:rPr lang="en-US" sz="950" b="1" dirty="0">
+              <a:rPr lang="en-US" sz="1300" b="1" dirty="0">
                 <a:solidFill>
                   <a:srgbClr val="0068B7"/>
                 </a:solidFill>
@@ -14117,20 +15335,20 @@
               </a:rPr>
               <a:t>Use this for</a:t>
             </a:r>
-            <a:endParaRPr lang="en-US" sz="950" dirty="0"/>
-          </a:p>
-        </p:txBody>
-      </p:sp>
-      <p:sp>
-        <p:nvSpPr>
-          <p:cNvPr id="14" name="Text 12"/>
-          <p:cNvSpPr/>
-          <p:nvPr/>
-        </p:nvSpPr>
-        <p:spPr>
-          <a:xfrm>
-            <a:off x="8074152" y="3959352"/>
-            <a:ext cx="2825496" cy="1170432"/>
+            <a:endParaRPr lang="en-US" sz="1300" dirty="0"/>
+          </a:p>
+        </p:txBody>
+      </p:sp>
+      <p:sp>
+        <p:nvSpPr>
+          <p:cNvPr id="15" name="Text 13"/>
+          <p:cNvSpPr/>
+          <p:nvPr/>
+        </p:nvSpPr>
+        <p:spPr>
+          <a:xfrm>
+            <a:off x="8074152" y="4023360"/>
+            <a:ext cx="2825496" cy="1097280"/>
           </a:xfrm>
           <a:prstGeom prst="rect">
             <a:avLst/>
@@ -14148,7 +15366,7 @@
               <a:buNone/>
             </a:pPr>
             <a:r>
-              <a:rPr lang="en-US" sz="1250" dirty="0">
+              <a:rPr lang="en-US" sz="1550" dirty="0">
                 <a:solidFill>
                   <a:srgbClr val="17364A"/>
                 </a:solidFill>
@@ -14158,7 +15376,7 @@
               </a:rPr>
               <a:t>Connect the concept to public health decisions, safeguards, documentation, or implementation work.</a:t>
             </a:r>
-            <a:endParaRPr lang="en-US" sz="1250" dirty="0"/>
+            <a:endParaRPr lang="en-US" sz="1550" dirty="0"/>
           </a:p>
         </p:txBody>
       </p:sp>
